--- a/templates/anbudsmall-v2.pptx
+++ b/templates/anbudsmall-v2.pptx
@@ -2201,7 +2201,7 @@
         </p:spPr>
         <p:txBody>
           <a:bodyPr wrap="square" lIns="25400" tIns="25400" rIns="25400" bIns="25400" rtlCol="0" anchor="t">
-            <a:normAutofit/>
+            <a:normAutofit fontScale="92500" lnSpcReduction="20000"/>
           </a:bodyPr>
           <a:lstStyle/>
           <a:p>
@@ -2245,7 +2245,7 @@
         </p:spPr>
         <p:txBody>
           <a:bodyPr wrap="square" lIns="25400" tIns="25400" rIns="25400" bIns="25400" rtlCol="0" anchor="t">
-            <a:normAutofit/>
+            <a:normAutofit fontScale="92500" lnSpcReduction="20000"/>
           </a:bodyPr>
           <a:lstStyle/>
           <a:p>
@@ -2595,7 +2595,7 @@
         </p:spPr>
         <p:txBody>
           <a:bodyPr wrap="square" lIns="25400" tIns="25400" rIns="25400" bIns="25400" rtlCol="0" anchor="t">
-            <a:normAutofit/>
+            <a:normAutofit lnSpcReduction="10000"/>
           </a:bodyPr>
           <a:lstStyle/>
           <a:p>
@@ -2663,7 +2663,7 @@
         </p:spPr>
         <p:txBody>
           <a:bodyPr wrap="square" lIns="25400" tIns="25400" rIns="25400" bIns="25400" rtlCol="0" anchor="t">
-            <a:normAutofit/>
+            <a:normAutofit fontScale="92500" lnSpcReduction="20000"/>
           </a:bodyPr>
           <a:lstStyle/>
           <a:p>
@@ -2748,7 +2748,7 @@
         </p:spPr>
         <p:txBody>
           <a:bodyPr wrap="square" lIns="25400" tIns="25400" rIns="25400" bIns="25400" rtlCol="0" anchor="t">
-            <a:normAutofit/>
+            <a:normAutofit fontScale="92500" lnSpcReduction="20000"/>
           </a:bodyPr>
           <a:lstStyle/>
           <a:p>
@@ -2912,7 +2912,7 @@
         </p:spPr>
         <p:txBody>
           <a:bodyPr wrap="square" lIns="25400" tIns="25400" rIns="25400" bIns="25400" rtlCol="0" anchor="t">
-            <a:normAutofit/>
+            <a:normAutofit fontScale="92500" lnSpcReduction="10000"/>
           </a:bodyPr>
           <a:lstStyle/>
           <a:p>
@@ -2956,7 +2956,7 @@
         </p:spPr>
         <p:txBody>
           <a:bodyPr wrap="square" lIns="25400" tIns="25400" rIns="25400" bIns="25400" rtlCol="0" anchor="t">
-            <a:normAutofit/>
+            <a:normAutofit fontScale="92500" lnSpcReduction="10000"/>
           </a:bodyPr>
           <a:lstStyle/>
           <a:p>
@@ -3000,7 +3000,7 @@
         </p:spPr>
         <p:txBody>
           <a:bodyPr wrap="square" lIns="25400" tIns="25400" rIns="25400" bIns="25400" rtlCol="0" anchor="t">
-            <a:normAutofit/>
+            <a:normAutofit fontScale="92500" lnSpcReduction="10000"/>
           </a:bodyPr>
           <a:lstStyle/>
           <a:p>
@@ -3044,7 +3044,7 @@
         </p:spPr>
         <p:txBody>
           <a:bodyPr wrap="square" lIns="25400" tIns="25400" rIns="25400" bIns="25400" rtlCol="0" anchor="t">
-            <a:normAutofit/>
+            <a:normAutofit fontScale="92500" lnSpcReduction="10000"/>
           </a:bodyPr>
           <a:lstStyle/>
           <a:p>
@@ -3167,7 +3167,7 @@
         </p:spPr>
         <p:txBody>
           <a:bodyPr wrap="square" lIns="25400" tIns="25400" rIns="25400" bIns="25400" rtlCol="0" anchor="t">
-            <a:normAutofit/>
+            <a:normAutofit fontScale="92500" lnSpcReduction="10000"/>
           </a:bodyPr>
           <a:lstStyle/>
           <a:p>
@@ -3211,7 +3211,7 @@
         </p:spPr>
         <p:txBody>
           <a:bodyPr wrap="square" lIns="25400" tIns="25400" rIns="25400" bIns="25400" rtlCol="0" anchor="t">
-            <a:normAutofit/>
+            <a:normAutofit fontScale="92500" lnSpcReduction="10000"/>
           </a:bodyPr>
           <a:lstStyle/>
           <a:p>
@@ -3255,7 +3255,7 @@
         </p:spPr>
         <p:txBody>
           <a:bodyPr wrap="square" lIns="25400" tIns="25400" rIns="25400" bIns="25400" rtlCol="0" anchor="t">
-            <a:normAutofit/>
+            <a:normAutofit fontScale="92500" lnSpcReduction="10000"/>
           </a:bodyPr>
           <a:lstStyle/>
           <a:p>
@@ -3405,7 +3405,7 @@
         </p:spPr>
         <p:txBody>
           <a:bodyPr wrap="square" lIns="25400" tIns="25400" rIns="25400" bIns="25400" rtlCol="0" anchor="t">
-            <a:normAutofit/>
+            <a:normAutofit fontScale="92500" lnSpcReduction="10000"/>
           </a:bodyPr>
           <a:lstStyle/>
           <a:p>
@@ -3449,7 +3449,7 @@
         </p:spPr>
         <p:txBody>
           <a:bodyPr wrap="square" lIns="25400" tIns="25400" rIns="25400" bIns="25400" rtlCol="0" anchor="t">
-            <a:normAutofit/>
+            <a:normAutofit fontScale="92500" lnSpcReduction="10000"/>
           </a:bodyPr>
           <a:lstStyle/>
           <a:p>
@@ -3493,7 +3493,7 @@
         </p:spPr>
         <p:txBody>
           <a:bodyPr wrap="square" lIns="25400" tIns="25400" rIns="25400" bIns="25400" rtlCol="0" anchor="t">
-            <a:normAutofit/>
+            <a:normAutofit fontScale="92500" lnSpcReduction="10000"/>
           </a:bodyPr>
           <a:lstStyle/>
           <a:p>
@@ -3564,7 +3564,7 @@
         </p:spPr>
         <p:txBody>
           <a:bodyPr wrap="square" lIns="25400" tIns="25400" rIns="25400" bIns="25400" rtlCol="0" anchor="t">
-            <a:normAutofit/>
+            <a:normAutofit lnSpcReduction="10000"/>
           </a:bodyPr>
           <a:lstStyle/>
           <a:p>
@@ -3686,7 +3686,7 @@
         </p:spPr>
         <p:txBody>
           <a:bodyPr wrap="square" lIns="25400" tIns="25400" rIns="25400" bIns="25400" rtlCol="0" anchor="t">
-            <a:normAutofit/>
+            <a:normAutofit lnSpcReduction="10000"/>
           </a:bodyPr>
           <a:lstStyle/>
           <a:p>
@@ -3754,7 +3754,7 @@
         </p:spPr>
         <p:txBody>
           <a:bodyPr wrap="square" lIns="25400" tIns="25400" rIns="25400" bIns="25400" rtlCol="0" anchor="t">
-            <a:normAutofit/>
+            <a:normAutofit lnSpcReduction="10000"/>
           </a:bodyPr>
           <a:lstStyle/>
           <a:p>
@@ -3822,7 +3822,7 @@
         </p:spPr>
         <p:txBody>
           <a:bodyPr wrap="square" lIns="25400" tIns="25400" rIns="25400" bIns="25400" rtlCol="0" anchor="t">
-            <a:normAutofit/>
+            <a:normAutofit lnSpcReduction="10000"/>
           </a:bodyPr>
           <a:lstStyle/>
           <a:p>
@@ -3890,7 +3890,7 @@
         </p:spPr>
         <p:txBody>
           <a:bodyPr wrap="square" lIns="25400" tIns="25400" rIns="25400" bIns="25400" rtlCol="0" anchor="t">
-            <a:normAutofit/>
+            <a:normAutofit lnSpcReduction="10000"/>
           </a:bodyPr>
           <a:lstStyle/>
           <a:p>
@@ -3958,7 +3958,7 @@
         </p:spPr>
         <p:txBody>
           <a:bodyPr wrap="square" lIns="25400" tIns="25400" rIns="25400" bIns="25400" rtlCol="0" anchor="t">
-            <a:normAutofit/>
+            <a:normAutofit lnSpcReduction="10000"/>
           </a:bodyPr>
           <a:lstStyle/>
           <a:p>
@@ -4026,7 +4026,7 @@
         </p:spPr>
         <p:txBody>
           <a:bodyPr wrap="square" lIns="25400" tIns="25400" rIns="25400" bIns="25400" rtlCol="0" anchor="t">
-            <a:normAutofit/>
+            <a:normAutofit lnSpcReduction="10000"/>
           </a:bodyPr>
           <a:lstStyle/>
           <a:p>
@@ -4094,7 +4094,7 @@
         </p:spPr>
         <p:txBody>
           <a:bodyPr wrap="square" lIns="25400" tIns="25400" rIns="25400" bIns="25400" rtlCol="0" anchor="t">
-            <a:normAutofit/>
+            <a:normAutofit lnSpcReduction="10000"/>
           </a:bodyPr>
           <a:lstStyle/>
           <a:p>
@@ -4162,7 +4162,7 @@
         </p:spPr>
         <p:txBody>
           <a:bodyPr wrap="square" lIns="25400" tIns="25400" rIns="25400" bIns="25400" rtlCol="0" anchor="t">
-            <a:normAutofit/>
+            <a:normAutofit lnSpcReduction="10000"/>
           </a:bodyPr>
           <a:lstStyle/>
           <a:p>
@@ -4230,7 +4230,7 @@
         </p:spPr>
         <p:txBody>
           <a:bodyPr wrap="square" lIns="25400" tIns="25400" rIns="25400" bIns="25400" rtlCol="0" anchor="t">
-            <a:normAutofit/>
+            <a:normAutofit lnSpcReduction="10000"/>
           </a:bodyPr>
           <a:lstStyle/>
           <a:p>
@@ -4298,7 +4298,7 @@
         </p:spPr>
         <p:txBody>
           <a:bodyPr wrap="square" lIns="25400" tIns="25400" rIns="25400" bIns="25400" rtlCol="0" anchor="t">
-            <a:normAutofit/>
+            <a:normAutofit lnSpcReduction="10000"/>
           </a:bodyPr>
           <a:lstStyle/>
           <a:p>
@@ -4366,7 +4366,7 @@
         </p:spPr>
         <p:txBody>
           <a:bodyPr wrap="square" lIns="25400" tIns="25400" rIns="25400" bIns="25400" rtlCol="0" anchor="t">
-            <a:normAutofit/>
+            <a:normAutofit lnSpcReduction="10000"/>
           </a:bodyPr>
           <a:lstStyle/>
           <a:p>
@@ -4434,7 +4434,7 @@
         </p:spPr>
         <p:txBody>
           <a:bodyPr wrap="square" lIns="25400" tIns="25400" rIns="25400" bIns="25400" rtlCol="0" anchor="t">
-            <a:normAutofit/>
+            <a:normAutofit lnSpcReduction="10000"/>
           </a:bodyPr>
           <a:lstStyle/>
           <a:p>
@@ -4639,7 +4639,7 @@
         </p:spPr>
         <p:txBody>
           <a:bodyPr wrap="square" lIns="25400" tIns="25400" rIns="25400" bIns="25400" rtlCol="0" anchor="t">
-            <a:normAutofit/>
+            <a:normAutofit lnSpcReduction="10000"/>
           </a:bodyPr>
           <a:lstStyle/>
           <a:p>
@@ -4680,7 +4680,7 @@
         </p:spPr>
         <p:txBody>
           <a:bodyPr wrap="square" lIns="25400" tIns="25400" rIns="25400" bIns="25400" rtlCol="0" anchor="t">
-            <a:normAutofit/>
+            <a:normAutofit fontScale="92500" lnSpcReduction="20000"/>
           </a:bodyPr>
           <a:lstStyle/>
           <a:p>
@@ -4793,7 +4793,7 @@
         <p:spPr>
           <a:xfrm>
             <a:off x="1143000" y="3162300"/>
-            <a:ext cx="5180076" cy="700980"/>
+            <a:ext cx="5180076" cy="4600000"/>
           </a:xfrm>
           <a:prstGeom prst="rect">
             <a:avLst/>
@@ -4822,7 +4822,7 @@
                 <a:ea typeface="-apple-system" pitchFamily="34" charset="-122"/>
                 <a:cs typeface="-apple-system" pitchFamily="34" charset="-120"/>
               </a:rPr>
-              <a:t>{QA-process — övergripande beskrivning av vårt kvalitetsarbete: metodik, standarder och verktyg.}</a:t>
+              <a:t>{QA-process}</a:t>
             </a:r>
             <a:endParaRPr lang="en-US" sz="1800" dirty="0"/>
           </a:p>
@@ -4830,24 +4830,103 @@
       </p:sp>
       <p:sp>
         <p:nvSpPr>
-          <p:cNvPr id="7" name="Text 5"/>
-          <p:cNvSpPr/>
-          <p:nvPr/>
-        </p:nvSpPr>
-        <p:spPr>
-          <a:xfrm>
-            <a:off x="1143000" y="4442520"/>
-            <a:ext cx="5180076" cy="700980"/>
-          </a:xfrm>
-          <a:prstGeom prst="rect">
-            <a:avLst/>
-          </a:prstGeom>
-          <a:noFill/>
-          <a:ln/>
-        </p:spPr>
-        <p:txBody>
-          <a:bodyPr wrap="square" lIns="25400" tIns="25400" rIns="25400" bIns="25400" rtlCol="0" anchor="t">
-            <a:normAutofit fontScale="92500" lnSpcReduction="20000"/>
+          <p:cNvPr id="8" name="Shape 6"/>
+          <p:cNvSpPr/>
+          <p:nvPr/>
+        </p:nvSpPr>
+        <p:spPr>
+          <a:xfrm>
+            <a:off x="6629400" y="2438400"/>
+            <a:ext cx="5029200" cy="9525"/>
+          </a:xfrm>
+          <a:prstGeom prst="rect">
+            <a:avLst/>
+          </a:prstGeom>
+          <a:solidFill>
+            <a:srgbClr val="1A1A1A"/>
+          </a:solidFill>
+          <a:ln/>
+        </p:spPr>
+        <p:txBody>
+          <a:bodyPr/>
+          <a:lstStyle/>
+          <a:p>
+            <a:endParaRPr lang="sv-SE"/>
+          </a:p>
+        </p:txBody>
+      </p:sp>
+      <p:sp>
+        <p:nvSpPr>
+          <p:cNvPr id="9" name="Text 7"/>
+          <p:cNvSpPr/>
+          <p:nvPr/>
+        </p:nvSpPr>
+        <p:spPr>
+          <a:xfrm>
+            <a:off x="6629400" y="2619375"/>
+            <a:ext cx="5180076" cy="257175"/>
+          </a:xfrm>
+          <a:prstGeom prst="rect">
+            <a:avLst/>
+          </a:prstGeom>
+          <a:noFill/>
+          <a:ln/>
+        </p:spPr>
+        <p:txBody>
+          <a:bodyPr wrap="square" lIns="25400" tIns="25400" rIns="25400" bIns="25400" rtlCol="0" anchor="t">
+            <a:normAutofit/>
+          </a:bodyPr>
+          <a:lstStyle/>
+          <a:p>
+            <a:pPr marL="0" indent="0" algn="l">
+              <a:buNone/>
+            </a:pPr>
+            <a:r>
+              <a:rPr lang="en-US" sz="1350" kern="0" spc="135" dirty="0">
+                <a:solidFill>
+                  <a:srgbClr val="2B5F5F"/>
+                </a:solidFill>
+                <a:latin typeface="IBM Plex Mono" pitchFamily="34" charset="0"/>
+                <a:ea typeface="IBM Plex Mono" pitchFamily="34" charset="-122"/>
+                <a:cs typeface="IBM Plex Mono" pitchFamily="34" charset="-120"/>
+              </a:rPr>
+              <a:t>B </a:t>
+            </a:r>
+            <a:r>
+              <a:rPr lang="en-US" sz="1350" kern="0" spc="135" dirty="0">
+                <a:solidFill>
+                  <a:srgbClr val="4A4A4A"/>
+                </a:solidFill>
+                <a:latin typeface="IBM Plex Mono" pitchFamily="34" charset="0"/>
+                <a:ea typeface="IBM Plex Mono" pitchFamily="34" charset="-122"/>
+                <a:cs typeface="IBM Plex Mono" pitchFamily="34" charset="-120"/>
+              </a:rPr>
+              <a:t>ANSVARIG KVALITETSLEDARE</a:t>
+            </a:r>
+            <a:endParaRPr lang="en-US" sz="1350" dirty="0"/>
+          </a:p>
+        </p:txBody>
+      </p:sp>
+      <p:sp>
+        <p:nvSpPr>
+          <p:cNvPr id="10" name="Text 8"/>
+          <p:cNvSpPr/>
+          <p:nvPr/>
+        </p:nvSpPr>
+        <p:spPr>
+          <a:xfrm>
+            <a:off x="6629400" y="3162300"/>
+            <a:ext cx="5180076" cy="4600000"/>
+          </a:xfrm>
+          <a:prstGeom prst="rect">
+            <a:avLst/>
+          </a:prstGeom>
+          <a:noFill/>
+          <a:ln/>
+        </p:spPr>
+        <p:txBody>
+          <a:bodyPr wrap="square" lIns="25400" tIns="25400" rIns="25400" bIns="25400" rtlCol="0" anchor="t">
+            <a:normAutofit/>
           </a:bodyPr>
           <a:lstStyle/>
           <a:p>
@@ -4866,10 +4945,122 @@
                 <a:ea typeface="-apple-system" pitchFamily="34" charset="-122"/>
                 <a:cs typeface="-apple-system" pitchFamily="34" charset="-120"/>
               </a:rPr>
-              <a:t>{QA-process — granskningsrutiner, peer review och </a:t>
-            </a:r>
-            <a:r>
-              <a:rPr lang="en-US" sz="1800" dirty="0" err="1">
+              <a:t>{Kvalitetsledare}</a:t>
+            </a:r>
+            <a:endParaRPr lang="en-US" sz="1800" dirty="0"/>
+          </a:p>
+        </p:txBody>
+      </p:sp>
+      <p:sp>
+        <p:nvSpPr>
+          <p:cNvPr id="13" name="Shape 11"/>
+          <p:cNvSpPr/>
+          <p:nvPr/>
+        </p:nvSpPr>
+        <p:spPr>
+          <a:xfrm>
+            <a:off x="12115800" y="2438400"/>
+            <a:ext cx="5029200" cy="9525"/>
+          </a:xfrm>
+          <a:prstGeom prst="rect">
+            <a:avLst/>
+          </a:prstGeom>
+          <a:solidFill>
+            <a:srgbClr val="1A1A1A"/>
+          </a:solidFill>
+          <a:ln/>
+        </p:spPr>
+        <p:txBody>
+          <a:bodyPr/>
+          <a:lstStyle/>
+          <a:p>
+            <a:endParaRPr lang="sv-SE"/>
+          </a:p>
+        </p:txBody>
+      </p:sp>
+      <p:sp>
+        <p:nvSpPr>
+          <p:cNvPr id="14" name="Text 12"/>
+          <p:cNvSpPr/>
+          <p:nvPr/>
+        </p:nvSpPr>
+        <p:spPr>
+          <a:xfrm>
+            <a:off x="12115800" y="2619375"/>
+            <a:ext cx="5180076" cy="257175"/>
+          </a:xfrm>
+          <a:prstGeom prst="rect">
+            <a:avLst/>
+          </a:prstGeom>
+          <a:noFill/>
+          <a:ln/>
+        </p:spPr>
+        <p:txBody>
+          <a:bodyPr wrap="square" lIns="25400" tIns="25400" rIns="25400" bIns="25400" rtlCol="0" anchor="t">
+            <a:normAutofit/>
+          </a:bodyPr>
+          <a:lstStyle/>
+          <a:p>
+            <a:pPr marL="0" indent="0" algn="l">
+              <a:buNone/>
+            </a:pPr>
+            <a:r>
+              <a:rPr lang="en-US" sz="1350" kern="0" spc="135" dirty="0">
+                <a:solidFill>
+                  <a:srgbClr val="2B5F5F"/>
+                </a:solidFill>
+                <a:latin typeface="IBM Plex Mono" pitchFamily="34" charset="0"/>
+                <a:ea typeface="IBM Plex Mono" pitchFamily="34" charset="-122"/>
+                <a:cs typeface="IBM Plex Mono" pitchFamily="34" charset="-120"/>
+              </a:rPr>
+              <a:t>C </a:t>
+            </a:r>
+            <a:r>
+              <a:rPr lang="en-US" sz="1350" kern="0" spc="135" dirty="0">
+                <a:solidFill>
+                  <a:srgbClr val="4A4A4A"/>
+                </a:solidFill>
+                <a:latin typeface="IBM Plex Mono" pitchFamily="34" charset="0"/>
+                <a:ea typeface="IBM Plex Mono" pitchFamily="34" charset="-122"/>
+                <a:cs typeface="IBM Plex Mono" pitchFamily="34" charset="-120"/>
+              </a:rPr>
+              <a:t>ESKALERING OCH RAPPORTERING</a:t>
+            </a:r>
+            <a:endParaRPr lang="en-US" sz="1350" dirty="0"/>
+          </a:p>
+        </p:txBody>
+      </p:sp>
+      <p:sp>
+        <p:nvSpPr>
+          <p:cNvPr id="15" name="Text 13"/>
+          <p:cNvSpPr/>
+          <p:nvPr/>
+        </p:nvSpPr>
+        <p:spPr>
+          <a:xfrm>
+            <a:off x="12115800" y="3162300"/>
+            <a:ext cx="5180076" cy="4600000"/>
+          </a:xfrm>
+          <a:prstGeom prst="rect">
+            <a:avLst/>
+          </a:prstGeom>
+          <a:noFill/>
+          <a:ln/>
+        </p:spPr>
+        <p:txBody>
+          <a:bodyPr wrap="square" lIns="25400" tIns="25400" rIns="25400" bIns="25400" rtlCol="0" anchor="t">
+            <a:normAutofit/>
+          </a:bodyPr>
+          <a:lstStyle/>
+          <a:p>
+            <a:pPr marL="0" indent="0" algn="l">
+              <a:lnSpc>
+                <a:spcPct val="145000"/>
+              </a:lnSpc>
+              <a:buNone/>
+            </a:pPr>
+            <a:r>
+              <a:rPr lang="en-US" sz="1800" dirty="0">
                 <a:solidFill>
                   <a:srgbClr val="4A4A4A"/>
                 </a:solidFill>
@@ -4877,396 +5068,7 @@
                 <a:ea typeface="-apple-system" pitchFamily="34" charset="-122"/>
                 <a:cs typeface="-apple-system" pitchFamily="34" charset="-120"/>
               </a:rPr>
-              <a:t>dokumentationskrav</a:t>
-            </a:r>
-            <a:r>
-              <a:rPr lang="en-US" sz="1800" dirty="0">
-                <a:solidFill>
-                  <a:srgbClr val="4A4A4A"/>
-                </a:solidFill>
-                <a:latin typeface="-apple-system" pitchFamily="34" charset="0"/>
-                <a:ea typeface="-apple-system" pitchFamily="34" charset="-122"/>
-                <a:cs typeface="-apple-system" pitchFamily="34" charset="-120"/>
-              </a:rPr>
-              <a:t>.}</a:t>
-            </a:r>
-            <a:endParaRPr lang="en-US" sz="1800" dirty="0"/>
-          </a:p>
-        </p:txBody>
-      </p:sp>
-      <p:sp>
-        <p:nvSpPr>
-          <p:cNvPr id="8" name="Shape 6"/>
-          <p:cNvSpPr/>
-          <p:nvPr/>
-        </p:nvSpPr>
-        <p:spPr>
-          <a:xfrm>
-            <a:off x="6629400" y="2438400"/>
-            <a:ext cx="5029200" cy="9525"/>
-          </a:xfrm>
-          <a:prstGeom prst="rect">
-            <a:avLst/>
-          </a:prstGeom>
-          <a:solidFill>
-            <a:srgbClr val="1A1A1A"/>
-          </a:solidFill>
-          <a:ln/>
-        </p:spPr>
-        <p:txBody>
-          <a:bodyPr/>
-          <a:lstStyle/>
-          <a:p>
-            <a:endParaRPr lang="sv-SE"/>
-          </a:p>
-        </p:txBody>
-      </p:sp>
-      <p:sp>
-        <p:nvSpPr>
-          <p:cNvPr id="9" name="Text 7"/>
-          <p:cNvSpPr/>
-          <p:nvPr/>
-        </p:nvSpPr>
-        <p:spPr>
-          <a:xfrm>
-            <a:off x="6629400" y="2619375"/>
-            <a:ext cx="5180076" cy="257175"/>
-          </a:xfrm>
-          <a:prstGeom prst="rect">
-            <a:avLst/>
-          </a:prstGeom>
-          <a:noFill/>
-          <a:ln/>
-        </p:spPr>
-        <p:txBody>
-          <a:bodyPr wrap="square" lIns="25400" tIns="25400" rIns="25400" bIns="25400" rtlCol="0" anchor="t">
-            <a:normAutofit/>
-          </a:bodyPr>
-          <a:lstStyle/>
-          <a:p>
-            <a:pPr marL="0" indent="0" algn="l">
-              <a:buNone/>
-            </a:pPr>
-            <a:r>
-              <a:rPr lang="en-US" sz="1350" kern="0" spc="135" dirty="0">
-                <a:solidFill>
-                  <a:srgbClr val="2B5F5F"/>
-                </a:solidFill>
-                <a:latin typeface="IBM Plex Mono" pitchFamily="34" charset="0"/>
-                <a:ea typeface="IBM Plex Mono" pitchFamily="34" charset="-122"/>
-                <a:cs typeface="IBM Plex Mono" pitchFamily="34" charset="-120"/>
-              </a:rPr>
-              <a:t>B </a:t>
-            </a:r>
-            <a:r>
-              <a:rPr lang="en-US" sz="1350" kern="0" spc="135" dirty="0">
-                <a:solidFill>
-                  <a:srgbClr val="4A4A4A"/>
-                </a:solidFill>
-                <a:latin typeface="IBM Plex Mono" pitchFamily="34" charset="0"/>
-                <a:ea typeface="IBM Plex Mono" pitchFamily="34" charset="-122"/>
-                <a:cs typeface="IBM Plex Mono" pitchFamily="34" charset="-120"/>
-              </a:rPr>
-              <a:t>ANSVARIG KVALITETSLEDARE</a:t>
-            </a:r>
-            <a:endParaRPr lang="en-US" sz="1350" dirty="0"/>
-          </a:p>
-        </p:txBody>
-      </p:sp>
-      <p:sp>
-        <p:nvSpPr>
-          <p:cNvPr id="10" name="Text 8"/>
-          <p:cNvSpPr/>
-          <p:nvPr/>
-        </p:nvSpPr>
-        <p:spPr>
-          <a:xfrm>
-            <a:off x="6629400" y="3162300"/>
-            <a:ext cx="5180076" cy="369540"/>
-          </a:xfrm>
-          <a:prstGeom prst="rect">
-            <a:avLst/>
-          </a:prstGeom>
-          <a:noFill/>
-          <a:ln/>
-        </p:spPr>
-        <p:txBody>
-          <a:bodyPr wrap="square" lIns="25400" tIns="25400" rIns="25400" bIns="25400" rtlCol="0" anchor="t">
-            <a:normAutofit/>
-          </a:bodyPr>
-          <a:lstStyle/>
-          <a:p>
-            <a:pPr marL="0" indent="0" algn="l">
-              <a:lnSpc>
-                <a:spcPct val="145000"/>
-              </a:lnSpc>
-              <a:buNone/>
-            </a:pPr>
-            <a:r>
-              <a:rPr lang="en-US" sz="1800" b="1" dirty="0">
-                <a:solidFill>
-                  <a:srgbClr val="4A4A4A"/>
-                </a:solidFill>
-                <a:latin typeface="-apple-system" pitchFamily="34" charset="0"/>
-                <a:ea typeface="-apple-system" pitchFamily="34" charset="-122"/>
-                <a:cs typeface="-apple-system" pitchFamily="34" charset="-120"/>
-              </a:rPr>
-              <a:t>{Namn, kvalitetsledare}</a:t>
-            </a:r>
-            <a:endParaRPr lang="en-US" sz="1800" dirty="0"/>
-          </a:p>
-        </p:txBody>
-      </p:sp>
-      <p:sp>
-        <p:nvSpPr>
-          <p:cNvPr id="11" name="Text 9"/>
-          <p:cNvSpPr/>
-          <p:nvPr/>
-        </p:nvSpPr>
-        <p:spPr>
-          <a:xfrm>
-            <a:off x="6629400" y="3627090"/>
-            <a:ext cx="5180076" cy="369540"/>
-          </a:xfrm>
-          <a:prstGeom prst="rect">
-            <a:avLst/>
-          </a:prstGeom>
-          <a:noFill/>
-          <a:ln/>
-        </p:spPr>
-        <p:txBody>
-          <a:bodyPr wrap="square" lIns="25400" tIns="25400" rIns="25400" bIns="25400" rtlCol="0" anchor="t">
-            <a:normAutofit/>
-          </a:bodyPr>
-          <a:lstStyle/>
-          <a:p>
-            <a:pPr marL="0" indent="0" algn="l">
-              <a:lnSpc>
-                <a:spcPct val="145000"/>
-              </a:lnSpc>
-              <a:buNone/>
-            </a:pPr>
-            <a:r>
-              <a:rPr lang="en-US" sz="1800" dirty="0">
-                <a:solidFill>
-                  <a:srgbClr val="4A4A4A"/>
-                </a:solidFill>
-                <a:latin typeface="-apple-system" pitchFamily="34" charset="0"/>
-                <a:ea typeface="-apple-system" pitchFamily="34" charset="-122"/>
-                <a:cs typeface="-apple-system" pitchFamily="34" charset="-120"/>
-              </a:rPr>
-              <a:t>{Roll, erfarenhet och mandat}</a:t>
-            </a:r>
-            <a:endParaRPr lang="en-US" sz="1800" dirty="0"/>
-          </a:p>
-        </p:txBody>
-      </p:sp>
-      <p:sp>
-        <p:nvSpPr>
-          <p:cNvPr id="12" name="Text 10"/>
-          <p:cNvSpPr/>
-          <p:nvPr/>
-        </p:nvSpPr>
-        <p:spPr>
-          <a:xfrm>
-            <a:off x="6629400" y="4091880"/>
-            <a:ext cx="5180076" cy="369540"/>
-          </a:xfrm>
-          <a:prstGeom prst="rect">
-            <a:avLst/>
-          </a:prstGeom>
-          <a:noFill/>
-          <a:ln/>
-        </p:spPr>
-        <p:txBody>
-          <a:bodyPr wrap="square" lIns="25400" tIns="25400" rIns="25400" bIns="25400" rtlCol="0" anchor="t">
-            <a:normAutofit/>
-          </a:bodyPr>
-          <a:lstStyle/>
-          <a:p>
-            <a:pPr marL="0" indent="0" algn="l">
-              <a:lnSpc>
-                <a:spcPct val="145000"/>
-              </a:lnSpc>
-              <a:buNone/>
-            </a:pPr>
-            <a:r>
-              <a:rPr lang="en-US" sz="1800" dirty="0">
-                <a:solidFill>
-                  <a:srgbClr val="4A4A4A"/>
-                </a:solidFill>
-                <a:latin typeface="-apple-system" pitchFamily="34" charset="0"/>
-                <a:ea typeface="-apple-system" pitchFamily="34" charset="-122"/>
-                <a:cs typeface="-apple-system" pitchFamily="34" charset="-120"/>
-              </a:rPr>
-              <a:t>{Kontakt — e-post och telefon}</a:t>
-            </a:r>
-            <a:endParaRPr lang="en-US" sz="1800" dirty="0"/>
-          </a:p>
-        </p:txBody>
-      </p:sp>
-      <p:sp>
-        <p:nvSpPr>
-          <p:cNvPr id="13" name="Shape 11"/>
-          <p:cNvSpPr/>
-          <p:nvPr/>
-        </p:nvSpPr>
-        <p:spPr>
-          <a:xfrm>
-            <a:off x="12115800" y="2438400"/>
-            <a:ext cx="5029200" cy="9525"/>
-          </a:xfrm>
-          <a:prstGeom prst="rect">
-            <a:avLst/>
-          </a:prstGeom>
-          <a:solidFill>
-            <a:srgbClr val="1A1A1A"/>
-          </a:solidFill>
-          <a:ln/>
-        </p:spPr>
-        <p:txBody>
-          <a:bodyPr/>
-          <a:lstStyle/>
-          <a:p>
-            <a:endParaRPr lang="sv-SE"/>
-          </a:p>
-        </p:txBody>
-      </p:sp>
-      <p:sp>
-        <p:nvSpPr>
-          <p:cNvPr id="14" name="Text 12"/>
-          <p:cNvSpPr/>
-          <p:nvPr/>
-        </p:nvSpPr>
-        <p:spPr>
-          <a:xfrm>
-            <a:off x="12115800" y="2619375"/>
-            <a:ext cx="5180076" cy="257175"/>
-          </a:xfrm>
-          <a:prstGeom prst="rect">
-            <a:avLst/>
-          </a:prstGeom>
-          <a:noFill/>
-          <a:ln/>
-        </p:spPr>
-        <p:txBody>
-          <a:bodyPr wrap="square" lIns="25400" tIns="25400" rIns="25400" bIns="25400" rtlCol="0" anchor="t">
-            <a:normAutofit/>
-          </a:bodyPr>
-          <a:lstStyle/>
-          <a:p>
-            <a:pPr marL="0" indent="0" algn="l">
-              <a:buNone/>
-            </a:pPr>
-            <a:r>
-              <a:rPr lang="en-US" sz="1350" kern="0" spc="135" dirty="0">
-                <a:solidFill>
-                  <a:srgbClr val="2B5F5F"/>
-                </a:solidFill>
-                <a:latin typeface="IBM Plex Mono" pitchFamily="34" charset="0"/>
-                <a:ea typeface="IBM Plex Mono" pitchFamily="34" charset="-122"/>
-                <a:cs typeface="IBM Plex Mono" pitchFamily="34" charset="-120"/>
-              </a:rPr>
-              <a:t>C </a:t>
-            </a:r>
-            <a:r>
-              <a:rPr lang="en-US" sz="1350" kern="0" spc="135" dirty="0">
-                <a:solidFill>
-                  <a:srgbClr val="4A4A4A"/>
-                </a:solidFill>
-                <a:latin typeface="IBM Plex Mono" pitchFamily="34" charset="0"/>
-                <a:ea typeface="IBM Plex Mono" pitchFamily="34" charset="-122"/>
-                <a:cs typeface="IBM Plex Mono" pitchFamily="34" charset="-120"/>
-              </a:rPr>
-              <a:t>ESKALERING OCH RAPPORTERING</a:t>
-            </a:r>
-            <a:endParaRPr lang="en-US" sz="1350" dirty="0"/>
-          </a:p>
-        </p:txBody>
-      </p:sp>
-      <p:sp>
-        <p:nvSpPr>
-          <p:cNvPr id="15" name="Text 13"/>
-          <p:cNvSpPr/>
-          <p:nvPr/>
-        </p:nvSpPr>
-        <p:spPr>
-          <a:xfrm>
-            <a:off x="12115800" y="3162300"/>
-            <a:ext cx="5180076" cy="700980"/>
-          </a:xfrm>
-          <a:prstGeom prst="rect">
-            <a:avLst/>
-          </a:prstGeom>
-          <a:noFill/>
-          <a:ln/>
-        </p:spPr>
-        <p:txBody>
-          <a:bodyPr wrap="square" lIns="25400" tIns="25400" rIns="25400" bIns="25400" rtlCol="0" anchor="t">
-            <a:normAutofit/>
-          </a:bodyPr>
-          <a:lstStyle/>
-          <a:p>
-            <a:pPr marL="0" indent="0" algn="l">
-              <a:lnSpc>
-                <a:spcPct val="145000"/>
-              </a:lnSpc>
-              <a:buNone/>
-            </a:pPr>
-            <a:r>
-              <a:rPr lang="en-US" sz="1800" dirty="0">
-                <a:solidFill>
-                  <a:srgbClr val="4A4A4A"/>
-                </a:solidFill>
-                <a:latin typeface="-apple-system" pitchFamily="34" charset="0"/>
-                <a:ea typeface="-apple-system" pitchFamily="34" charset="-122"/>
-                <a:cs typeface="-apple-system" pitchFamily="34" charset="-120"/>
-              </a:rPr>
-              <a:t>{Hur avvikelser hanteras och eskaleras till beställare}</a:t>
-            </a:r>
-            <a:endParaRPr lang="en-US" sz="1800" dirty="0"/>
-          </a:p>
-        </p:txBody>
-      </p:sp>
-      <p:sp>
-        <p:nvSpPr>
-          <p:cNvPr id="16" name="Text 14"/>
-          <p:cNvSpPr/>
-          <p:nvPr/>
-        </p:nvSpPr>
-        <p:spPr>
-          <a:xfrm>
-            <a:off x="12115800" y="3958530"/>
-            <a:ext cx="5180076" cy="700980"/>
-          </a:xfrm>
-          <a:prstGeom prst="rect">
-            <a:avLst/>
-          </a:prstGeom>
-          <a:noFill/>
-          <a:ln/>
-        </p:spPr>
-        <p:txBody>
-          <a:bodyPr wrap="square" lIns="25400" tIns="25400" rIns="25400" bIns="25400" rtlCol="0" anchor="t">
-            <a:normAutofit/>
-          </a:bodyPr>
-          <a:lstStyle/>
-          <a:p>
-            <a:pPr marL="0" indent="0" algn="l">
-              <a:lnSpc>
-                <a:spcPct val="145000"/>
-              </a:lnSpc>
-              <a:buNone/>
-            </a:pPr>
-            <a:r>
-              <a:rPr lang="en-US" sz="1800" dirty="0">
-                <a:solidFill>
-                  <a:srgbClr val="4A4A4A"/>
-                </a:solidFill>
-                <a:latin typeface="-apple-system" pitchFamily="34" charset="0"/>
-                <a:ea typeface="-apple-system" pitchFamily="34" charset="-122"/>
-                <a:cs typeface="-apple-system" pitchFamily="34" charset="-120"/>
-              </a:rPr>
-              <a:t>{Rapporteringsfrekvens och format — månads­rapport, avvikelse­rapport}</a:t>
+              <a:t>{Eskalering}</a:t>
             </a:r>
             <a:endParaRPr lang="en-US" sz="1800" dirty="0"/>
           </a:p>
@@ -5388,7 +5190,7 @@
         </p:spPr>
         <p:txBody>
           <a:bodyPr wrap="square" lIns="25400" tIns="25400" rIns="25400" bIns="25400" rtlCol="0" anchor="t">
-            <a:normAutofit/>
+            <a:normAutofit fontScale="92500" lnSpcReduction="20000"/>
           </a:bodyPr>
           <a:lstStyle/>
           <a:p>
@@ -5432,7 +5234,7 @@
         </p:spPr>
         <p:txBody>
           <a:bodyPr wrap="square" lIns="25400" tIns="25400" rIns="25400" bIns="25400" rtlCol="0" anchor="t">
-            <a:normAutofit/>
+            <a:normAutofit fontScale="70000" lnSpcReduction="20000"/>
           </a:bodyPr>
           <a:lstStyle/>
           <a:p>
@@ -5505,7 +5307,7 @@
         </p:spPr>
         <p:txBody>
           <a:bodyPr wrap="square" lIns="25400" tIns="25400" rIns="25400" bIns="25400" rtlCol="0" anchor="t">
-            <a:normAutofit/>
+            <a:normAutofit fontScale="92500" lnSpcReduction="20000"/>
           </a:bodyPr>
           <a:lstStyle/>
           <a:p>
@@ -5549,7 +5351,7 @@
         </p:spPr>
         <p:txBody>
           <a:bodyPr wrap="square" lIns="25400" tIns="25400" rIns="25400" bIns="25400" rtlCol="0" anchor="t">
-            <a:normAutofit/>
+            <a:normAutofit fontScale="70000" lnSpcReduction="20000"/>
           </a:bodyPr>
           <a:lstStyle/>
           <a:p>
@@ -5622,7 +5424,7 @@
         </p:spPr>
         <p:txBody>
           <a:bodyPr wrap="square" lIns="25400" tIns="25400" rIns="25400" bIns="25400" rtlCol="0" anchor="t">
-            <a:normAutofit/>
+            <a:normAutofit fontScale="92500" lnSpcReduction="20000"/>
           </a:bodyPr>
           <a:lstStyle/>
           <a:p>
@@ -5666,7 +5468,7 @@
         </p:spPr>
         <p:txBody>
           <a:bodyPr wrap="square" lIns="25400" tIns="25400" rIns="25400" bIns="25400" rtlCol="0" anchor="t">
-            <a:normAutofit/>
+            <a:normAutofit fontScale="70000" lnSpcReduction="20000"/>
           </a:bodyPr>
           <a:lstStyle/>
           <a:p>
@@ -5739,7 +5541,7 @@
         </p:spPr>
         <p:txBody>
           <a:bodyPr wrap="square" lIns="25400" tIns="25400" rIns="25400" bIns="25400" rtlCol="0" anchor="t">
-            <a:normAutofit/>
+            <a:normAutofit fontScale="92500" lnSpcReduction="20000"/>
           </a:bodyPr>
           <a:lstStyle/>
           <a:p>
@@ -5783,7 +5585,7 @@
         </p:spPr>
         <p:txBody>
           <a:bodyPr wrap="square" lIns="25400" tIns="25400" rIns="25400" bIns="25400" rtlCol="0" anchor="t">
-            <a:normAutofit/>
+            <a:normAutofit fontScale="70000" lnSpcReduction="20000"/>
           </a:bodyPr>
           <a:lstStyle/>
           <a:p>
@@ -5991,7 +5793,7 @@
         </p:spPr>
         <p:txBody>
           <a:bodyPr wrap="square" lIns="25400" tIns="25400" rIns="25400" bIns="25400" rtlCol="0" anchor="t">
-            <a:normAutofit/>
+            <a:normAutofit lnSpcReduction="10000"/>
           </a:bodyPr>
           <a:lstStyle/>
           <a:p>
@@ -6032,7 +5834,7 @@
         </p:spPr>
         <p:txBody>
           <a:bodyPr wrap="square" lIns="25400" tIns="25400" rIns="25400" bIns="25400" rtlCol="0" anchor="t">
-            <a:normAutofit/>
+            <a:normAutofit fontScale="92500" lnSpcReduction="20000"/>
           </a:bodyPr>
           <a:lstStyle/>
           <a:p>
@@ -6157,7 +5959,7 @@
         </p:spPr>
         <p:txBody>
           <a:bodyPr wrap="square" lIns="25400" tIns="25400" rIns="25400" bIns="25400" rtlCol="0" anchor="t">
-            <a:normAutofit/>
+            <a:normAutofit fontScale="92500" lnSpcReduction="20000"/>
           </a:bodyPr>
           <a:lstStyle/>
           <a:p>
@@ -6282,7 +6084,7 @@
         </p:spPr>
         <p:txBody>
           <a:bodyPr wrap="square" lIns="25400" tIns="25400" rIns="25400" bIns="25400" rtlCol="0" anchor="t">
-            <a:normAutofit/>
+            <a:normAutofit fontScale="92500" lnSpcReduction="20000"/>
           </a:bodyPr>
           <a:lstStyle/>
           <a:p>
@@ -6407,7 +6209,7 @@
         </p:spPr>
         <p:txBody>
           <a:bodyPr wrap="square" lIns="25400" tIns="25400" rIns="25400" bIns="25400" rtlCol="0" anchor="t">
-            <a:normAutofit/>
+            <a:normAutofit fontScale="92500" lnSpcReduction="20000"/>
           </a:bodyPr>
           <a:lstStyle/>
           <a:p>
@@ -6532,7 +6334,7 @@
         </p:spPr>
         <p:txBody>
           <a:bodyPr wrap="square" lIns="25400" tIns="25400" rIns="25400" bIns="25400" rtlCol="0" anchor="t">
-            <a:normAutofit/>
+            <a:normAutofit fontScale="92500" lnSpcReduction="20000"/>
           </a:bodyPr>
           <a:lstStyle/>
           <a:p>
@@ -6657,7 +6459,7 @@
         </p:spPr>
         <p:txBody>
           <a:bodyPr wrap="square" lIns="25400" tIns="25400" rIns="25400" bIns="25400" rtlCol="0" anchor="t">
-            <a:normAutofit/>
+            <a:normAutofit fontScale="92500" lnSpcReduction="20000"/>
           </a:bodyPr>
           <a:lstStyle/>
           <a:p>
@@ -6782,7 +6584,7 @@
         </p:spPr>
         <p:txBody>
           <a:bodyPr wrap="square" lIns="25400" tIns="25400" rIns="25400" bIns="25400" rtlCol="0" anchor="t">
-            <a:normAutofit/>
+            <a:normAutofit fontScale="92500" lnSpcReduction="20000"/>
           </a:bodyPr>
           <a:lstStyle/>
           <a:p>
@@ -6853,7 +6655,7 @@
         </p:spPr>
         <p:txBody>
           <a:bodyPr wrap="square" lIns="25400" tIns="25400" rIns="25400" bIns="25400" rtlCol="0" anchor="t">
-            <a:normAutofit/>
+            <a:normAutofit fontScale="92500" lnSpcReduction="10000"/>
           </a:bodyPr>
           <a:lstStyle/>
           <a:p>
@@ -6897,7 +6699,7 @@
         </p:spPr>
         <p:txBody>
           <a:bodyPr wrap="square" lIns="25400" tIns="25400" rIns="25400" bIns="25400" rtlCol="0" anchor="t">
-            <a:normAutofit/>
+            <a:normAutofit fontScale="92500" lnSpcReduction="10000"/>
           </a:bodyPr>
           <a:lstStyle/>
           <a:p>
@@ -6941,7 +6743,7 @@
         </p:spPr>
         <p:txBody>
           <a:bodyPr wrap="square" lIns="25400" tIns="25400" rIns="25400" bIns="25400" rtlCol="0" anchor="t">
-            <a:normAutofit/>
+            <a:normAutofit fontScale="92500"/>
           </a:bodyPr>
           <a:lstStyle/>
           <a:p>
@@ -6985,7 +6787,7 @@
         </p:spPr>
         <p:txBody>
           <a:bodyPr wrap="square" lIns="25400" tIns="25400" rIns="25400" bIns="25400" rtlCol="0" anchor="t">
-            <a:normAutofit/>
+            <a:normAutofit fontScale="92500"/>
           </a:bodyPr>
           <a:lstStyle/>
           <a:p>
@@ -7029,7 +6831,7 @@
         </p:spPr>
         <p:txBody>
           <a:bodyPr wrap="square" lIns="25400" tIns="25400" rIns="25400" bIns="25400" rtlCol="0" anchor="t">
-            <a:normAutofit/>
+            <a:normAutofit fontScale="92500"/>
           </a:bodyPr>
           <a:lstStyle/>
           <a:p>
@@ -7073,7 +6875,7 @@
         </p:spPr>
         <p:txBody>
           <a:bodyPr wrap="square" lIns="25400" tIns="25400" rIns="25400" bIns="25400" rtlCol="0" anchor="t">
-            <a:normAutofit/>
+            <a:normAutofit fontScale="92500"/>
           </a:bodyPr>
           <a:lstStyle/>
           <a:p>
@@ -7144,7 +6946,7 @@
         </p:spPr>
         <p:txBody>
           <a:bodyPr wrap="square" lIns="25400" tIns="25400" rIns="25400" bIns="25400" rtlCol="0" anchor="t">
-            <a:normAutofit/>
+            <a:normAutofit fontScale="92500" lnSpcReduction="10000"/>
           </a:bodyPr>
           <a:lstStyle/>
           <a:p>
@@ -7188,7 +6990,7 @@
         </p:spPr>
         <p:txBody>
           <a:bodyPr wrap="square" lIns="25400" tIns="25400" rIns="25400" bIns="25400" rtlCol="0" anchor="t">
-            <a:normAutofit/>
+            <a:normAutofit fontScale="92500" lnSpcReduction="10000"/>
           </a:bodyPr>
           <a:lstStyle/>
           <a:p>
@@ -7232,7 +7034,7 @@
         </p:spPr>
         <p:txBody>
           <a:bodyPr wrap="square" lIns="25400" tIns="25400" rIns="25400" bIns="25400" rtlCol="0" anchor="t">
-            <a:normAutofit/>
+            <a:normAutofit fontScale="92500"/>
           </a:bodyPr>
           <a:lstStyle/>
           <a:p>
@@ -7276,7 +7078,7 @@
         </p:spPr>
         <p:txBody>
           <a:bodyPr wrap="square" lIns="25400" tIns="25400" rIns="25400" bIns="25400" rtlCol="0" anchor="t">
-            <a:normAutofit/>
+            <a:normAutofit fontScale="92500"/>
           </a:bodyPr>
           <a:lstStyle/>
           <a:p>
@@ -7320,7 +7122,7 @@
         </p:spPr>
         <p:txBody>
           <a:bodyPr wrap="square" lIns="25400" tIns="25400" rIns="25400" bIns="25400" rtlCol="0" anchor="t">
-            <a:normAutofit/>
+            <a:normAutofit fontScale="92500"/>
           </a:bodyPr>
           <a:lstStyle/>
           <a:p>
@@ -7364,7 +7166,7 @@
         </p:spPr>
         <p:txBody>
           <a:bodyPr wrap="square" lIns="25400" tIns="25400" rIns="25400" bIns="25400" rtlCol="0" anchor="t">
-            <a:normAutofit/>
+            <a:normAutofit fontScale="92500"/>
           </a:bodyPr>
           <a:lstStyle/>
           <a:p>
@@ -7435,7 +7237,7 @@
         </p:spPr>
         <p:txBody>
           <a:bodyPr wrap="square" lIns="25400" tIns="25400" rIns="25400" bIns="25400" rtlCol="0" anchor="t">
-            <a:normAutofit/>
+            <a:normAutofit fontScale="92500"/>
           </a:bodyPr>
           <a:lstStyle/>
           <a:p>
@@ -7479,7 +7281,7 @@
         </p:spPr>
         <p:txBody>
           <a:bodyPr wrap="square" lIns="25400" tIns="25400" rIns="25400" bIns="25400" rtlCol="0" anchor="t">
-            <a:normAutofit/>
+            <a:normAutofit fontScale="92500" lnSpcReduction="10000"/>
           </a:bodyPr>
           <a:lstStyle/>
           <a:p>
@@ -7523,7 +7325,7 @@
         </p:spPr>
         <p:txBody>
           <a:bodyPr wrap="square" lIns="25400" tIns="25400" rIns="25400" bIns="25400" rtlCol="0" anchor="t">
-            <a:normAutofit/>
+            <a:normAutofit fontScale="92500"/>
           </a:bodyPr>
           <a:lstStyle/>
           <a:p>
@@ -7567,7 +7369,7 @@
         </p:spPr>
         <p:txBody>
           <a:bodyPr wrap="square" lIns="25400" tIns="25400" rIns="25400" bIns="25400" rtlCol="0" anchor="t">
-            <a:normAutofit/>
+            <a:normAutofit fontScale="92500"/>
           </a:bodyPr>
           <a:lstStyle/>
           <a:p>
@@ -7611,7 +7413,7 @@
         </p:spPr>
         <p:txBody>
           <a:bodyPr wrap="square" lIns="25400" tIns="25400" rIns="25400" bIns="25400" rtlCol="0" anchor="t">
-            <a:normAutofit/>
+            <a:normAutofit fontScale="92500"/>
           </a:bodyPr>
           <a:lstStyle/>
           <a:p>
@@ -7655,7 +7457,7 @@
         </p:spPr>
         <p:txBody>
           <a:bodyPr wrap="square" lIns="25400" tIns="25400" rIns="25400" bIns="25400" rtlCol="0" anchor="t">
-            <a:normAutofit/>
+            <a:normAutofit fontScale="92500"/>
           </a:bodyPr>
           <a:lstStyle/>
           <a:p>
@@ -7726,7 +7528,7 @@
         </p:spPr>
         <p:txBody>
           <a:bodyPr wrap="square" lIns="25400" tIns="25400" rIns="25400" bIns="25400" rtlCol="0" anchor="t">
-            <a:normAutofit/>
+            <a:normAutofit fontScale="92500" lnSpcReduction="10000"/>
           </a:bodyPr>
           <a:lstStyle/>
           <a:p>
@@ -7770,7 +7572,7 @@
         </p:spPr>
         <p:txBody>
           <a:bodyPr wrap="square" lIns="25400" tIns="25400" rIns="25400" bIns="25400" rtlCol="0" anchor="t">
-            <a:normAutofit/>
+            <a:normAutofit fontScale="92500" lnSpcReduction="10000"/>
           </a:bodyPr>
           <a:lstStyle/>
           <a:p>
@@ -7814,7 +7616,7 @@
         </p:spPr>
         <p:txBody>
           <a:bodyPr wrap="square" lIns="25400" tIns="25400" rIns="25400" bIns="25400" rtlCol="0" anchor="t">
-            <a:normAutofit/>
+            <a:normAutofit fontScale="92500"/>
           </a:bodyPr>
           <a:lstStyle/>
           <a:p>
@@ -7858,7 +7660,7 @@
         </p:spPr>
         <p:txBody>
           <a:bodyPr wrap="square" lIns="25400" tIns="25400" rIns="25400" bIns="25400" rtlCol="0" anchor="t">
-            <a:normAutofit/>
+            <a:normAutofit fontScale="92500"/>
           </a:bodyPr>
           <a:lstStyle/>
           <a:p>
@@ -7902,7 +7704,7 @@
         </p:spPr>
         <p:txBody>
           <a:bodyPr wrap="square" lIns="25400" tIns="25400" rIns="25400" bIns="25400" rtlCol="0" anchor="t">
-            <a:normAutofit/>
+            <a:normAutofit fontScale="92500"/>
           </a:bodyPr>
           <a:lstStyle/>
           <a:p>
@@ -7946,7 +7748,7 @@
         </p:spPr>
         <p:txBody>
           <a:bodyPr wrap="square" lIns="25400" tIns="25400" rIns="25400" bIns="25400" rtlCol="0" anchor="t">
-            <a:normAutofit/>
+            <a:normAutofit fontScale="92500"/>
           </a:bodyPr>
           <a:lstStyle/>
           <a:p>
@@ -8017,7 +7819,7 @@
         </p:spPr>
         <p:txBody>
           <a:bodyPr wrap="square" lIns="25400" tIns="25400" rIns="25400" bIns="25400" rtlCol="0" anchor="t">
-            <a:normAutofit/>
+            <a:normAutofit fontScale="92500" lnSpcReduction="10000"/>
           </a:bodyPr>
           <a:lstStyle/>
           <a:p>
@@ -8061,7 +7863,7 @@
         </p:spPr>
         <p:txBody>
           <a:bodyPr wrap="square" lIns="25400" tIns="25400" rIns="25400" bIns="25400" rtlCol="0" anchor="t">
-            <a:normAutofit/>
+            <a:normAutofit fontScale="92500"/>
           </a:bodyPr>
           <a:lstStyle/>
           <a:p>
@@ -8105,7 +7907,7 @@
         </p:spPr>
         <p:txBody>
           <a:bodyPr wrap="square" lIns="25400" tIns="25400" rIns="25400" bIns="25400" rtlCol="0" anchor="t">
-            <a:normAutofit/>
+            <a:normAutofit fontScale="92500"/>
           </a:bodyPr>
           <a:lstStyle/>
           <a:p>
@@ -8149,7 +7951,7 @@
         </p:spPr>
         <p:txBody>
           <a:bodyPr wrap="square" lIns="25400" tIns="25400" rIns="25400" bIns="25400" rtlCol="0" anchor="t">
-            <a:normAutofit/>
+            <a:normAutofit fontScale="92500"/>
           </a:bodyPr>
           <a:lstStyle/>
           <a:p>
@@ -8193,7 +7995,7 @@
         </p:spPr>
         <p:txBody>
           <a:bodyPr wrap="square" lIns="25400" tIns="25400" rIns="25400" bIns="25400" rtlCol="0" anchor="t">
-            <a:normAutofit/>
+            <a:normAutofit fontScale="92500"/>
           </a:bodyPr>
           <a:lstStyle/>
           <a:p>
@@ -8237,7 +8039,7 @@
         </p:spPr>
         <p:txBody>
           <a:bodyPr wrap="square" lIns="25400" tIns="25400" rIns="25400" bIns="25400" rtlCol="0" anchor="t">
-            <a:normAutofit/>
+            <a:normAutofit fontScale="92500"/>
           </a:bodyPr>
           <a:lstStyle/>
           <a:p>
@@ -8335,7 +8137,7 @@
         </p:spPr>
         <p:txBody>
           <a:bodyPr wrap="square" lIns="25400" tIns="25400" rIns="25400" bIns="25400" rtlCol="0" anchor="t">
-            <a:normAutofit/>
+            <a:normAutofit fontScale="92500" lnSpcReduction="10000"/>
           </a:bodyPr>
           <a:lstStyle/>
           <a:p>
@@ -8406,7 +8208,7 @@
         </p:spPr>
         <p:txBody>
           <a:bodyPr wrap="square" lIns="25400" tIns="25400" rIns="25400" bIns="25400" rtlCol="0" anchor="t">
-            <a:normAutofit/>
+            <a:normAutofit fontScale="92500" lnSpcReduction="10000"/>
           </a:bodyPr>
           <a:lstStyle/>
           <a:p>
@@ -8477,7 +8279,7 @@
         </p:spPr>
         <p:txBody>
           <a:bodyPr wrap="square" lIns="25400" tIns="25400" rIns="25400" bIns="25400" rtlCol="0" anchor="t">
-            <a:normAutofit/>
+            <a:normAutofit fontScale="92500" lnSpcReduction="10000"/>
           </a:bodyPr>
           <a:lstStyle/>
           <a:p>
@@ -8726,7 +8528,7 @@
         </p:spPr>
         <p:txBody>
           <a:bodyPr wrap="square" lIns="25400" tIns="25400" rIns="25400" bIns="25400" rtlCol="0" anchor="t">
-            <a:normAutofit/>
+            <a:normAutofit lnSpcReduction="10000"/>
           </a:bodyPr>
           <a:lstStyle/>
           <a:p>
@@ -8767,7 +8569,7 @@
         </p:spPr>
         <p:txBody>
           <a:bodyPr wrap="square" lIns="25400" tIns="25400" rIns="25400" bIns="25400" rtlCol="0" anchor="t">
-            <a:normAutofit/>
+            <a:normAutofit fontScale="92500" lnSpcReduction="20000"/>
           </a:bodyPr>
           <a:lstStyle/>
           <a:p>
@@ -9392,7 +9194,7 @@
         </p:spPr>
         <p:txBody>
           <a:bodyPr wrap="square" lIns="25400" tIns="25400" rIns="25400" bIns="25400" rtlCol="0" anchor="t">
-            <a:normAutofit/>
+            <a:normAutofit fontScale="92500"/>
           </a:bodyPr>
           <a:lstStyle/>
           <a:p>
@@ -9580,7 +9382,7 @@
         </p:spPr>
         <p:txBody>
           <a:bodyPr wrap="square" lIns="25400" tIns="25400" rIns="25400" bIns="25400" rtlCol="0" anchor="t">
-            <a:normAutofit/>
+            <a:normAutofit fontScale="92500" lnSpcReduction="10000"/>
           </a:bodyPr>
           <a:lstStyle/>
           <a:p>
@@ -9739,7 +9541,7 @@
         </p:spPr>
         <p:txBody>
           <a:bodyPr wrap="square" lIns="25400" tIns="25400" rIns="25400" bIns="25400" rtlCol="0" anchor="t">
-            <a:normAutofit/>
+            <a:normAutofit fontScale="92500"/>
           </a:bodyPr>
           <a:lstStyle/>
           <a:p>
@@ -9783,7 +9585,7 @@
         </p:spPr>
         <p:txBody>
           <a:bodyPr wrap="square" lIns="25400" tIns="25400" rIns="25400" bIns="25400" rtlCol="0" anchor="t">
-            <a:normAutofit/>
+            <a:normAutofit fontScale="92500"/>
           </a:bodyPr>
           <a:lstStyle/>
           <a:p>
@@ -9856,7 +9658,7 @@
         </p:spPr>
         <p:txBody>
           <a:bodyPr wrap="square" lIns="25400" tIns="25400" rIns="25400" bIns="25400" rtlCol="0" anchor="t">
-            <a:normAutofit/>
+            <a:normAutofit fontScale="92500" lnSpcReduction="10000"/>
           </a:bodyPr>
           <a:lstStyle/>
           <a:p>
@@ -9900,7 +9702,7 @@
         </p:spPr>
         <p:txBody>
           <a:bodyPr wrap="square" lIns="25400" tIns="25400" rIns="25400" bIns="25400" rtlCol="0" anchor="t">
-            <a:normAutofit/>
+            <a:normAutofit fontScale="92500"/>
           </a:bodyPr>
           <a:lstStyle/>
           <a:p>
@@ -9944,7 +9746,7 @@
         </p:spPr>
         <p:txBody>
           <a:bodyPr wrap="square" lIns="25400" tIns="25400" rIns="25400" bIns="25400" rtlCol="0" anchor="t">
-            <a:normAutofit/>
+            <a:normAutofit fontScale="92500"/>
           </a:bodyPr>
           <a:lstStyle/>
           <a:p>
@@ -10015,7 +9817,7 @@
         </p:spPr>
         <p:txBody>
           <a:bodyPr wrap="square" lIns="25400" tIns="25400" rIns="25400" bIns="25400" rtlCol="0" anchor="t">
-            <a:normAutofit/>
+            <a:normAutofit fontScale="92500"/>
           </a:bodyPr>
           <a:lstStyle/>
           <a:p>
@@ -10059,7 +9861,7 @@
         </p:spPr>
         <p:txBody>
           <a:bodyPr wrap="square" lIns="25400" tIns="25400" rIns="25400" bIns="25400" rtlCol="0" anchor="t">
-            <a:normAutofit/>
+            <a:normAutofit fontScale="92500"/>
           </a:bodyPr>
           <a:lstStyle/>
           <a:p>
@@ -10132,7 +9934,7 @@
         </p:spPr>
         <p:txBody>
           <a:bodyPr wrap="square" lIns="25400" tIns="25400" rIns="25400" bIns="25400" rtlCol="0" anchor="t">
-            <a:normAutofit/>
+            <a:normAutofit fontScale="92500" lnSpcReduction="10000"/>
           </a:bodyPr>
           <a:lstStyle/>
           <a:p>
@@ -10176,7 +9978,7 @@
         </p:spPr>
         <p:txBody>
           <a:bodyPr wrap="square" lIns="25400" tIns="25400" rIns="25400" bIns="25400" rtlCol="0" anchor="t">
-            <a:normAutofit/>
+            <a:normAutofit fontScale="92500"/>
           </a:bodyPr>
           <a:lstStyle/>
           <a:p>
@@ -10220,7 +10022,7 @@
         </p:spPr>
         <p:txBody>
           <a:bodyPr wrap="square" lIns="25400" tIns="25400" rIns="25400" bIns="25400" rtlCol="0" anchor="t">
-            <a:normAutofit/>
+            <a:normAutofit fontScale="92500"/>
           </a:bodyPr>
           <a:lstStyle/>
           <a:p>
@@ -10291,7 +10093,7 @@
         </p:spPr>
         <p:txBody>
           <a:bodyPr wrap="square" lIns="25400" tIns="25400" rIns="25400" bIns="25400" rtlCol="0" anchor="t">
-            <a:normAutofit/>
+            <a:normAutofit fontScale="92500"/>
           </a:bodyPr>
           <a:lstStyle/>
           <a:p>
@@ -10335,7 +10137,7 @@
         </p:spPr>
         <p:txBody>
           <a:bodyPr wrap="square" lIns="25400" tIns="25400" rIns="25400" bIns="25400" rtlCol="0" anchor="t">
-            <a:normAutofit/>
+            <a:normAutofit fontScale="92500"/>
           </a:bodyPr>
           <a:lstStyle/>
           <a:p>
@@ -10408,7 +10210,7 @@
         </p:spPr>
         <p:txBody>
           <a:bodyPr wrap="square" lIns="25400" tIns="25400" rIns="25400" bIns="25400" rtlCol="0" anchor="t">
-            <a:normAutofit/>
+            <a:normAutofit fontScale="92500" lnSpcReduction="10000"/>
           </a:bodyPr>
           <a:lstStyle/>
           <a:p>
@@ -10452,7 +10254,7 @@
         </p:spPr>
         <p:txBody>
           <a:bodyPr wrap="square" lIns="25400" tIns="25400" rIns="25400" bIns="25400" rtlCol="0" anchor="t">
-            <a:normAutofit/>
+            <a:normAutofit fontScale="92500"/>
           </a:bodyPr>
           <a:lstStyle/>
           <a:p>
@@ -10496,7 +10298,7 @@
         </p:spPr>
         <p:txBody>
           <a:bodyPr wrap="square" lIns="25400" tIns="25400" rIns="25400" bIns="25400" rtlCol="0" anchor="t">
-            <a:normAutofit/>
+            <a:normAutofit fontScale="92500"/>
           </a:bodyPr>
           <a:lstStyle/>
           <a:p>
@@ -10567,7 +10369,7 @@
         </p:spPr>
         <p:txBody>
           <a:bodyPr wrap="square" lIns="25400" tIns="25400" rIns="25400" bIns="25400" rtlCol="0" anchor="t">
-            <a:normAutofit/>
+            <a:normAutofit fontScale="92500"/>
           </a:bodyPr>
           <a:lstStyle/>
           <a:p>
@@ -10611,7 +10413,7 @@
         </p:spPr>
         <p:txBody>
           <a:bodyPr wrap="square" lIns="25400" tIns="25400" rIns="25400" bIns="25400" rtlCol="0" anchor="t">
-            <a:normAutofit/>
+            <a:normAutofit fontScale="92500"/>
           </a:bodyPr>
           <a:lstStyle/>
           <a:p>
@@ -10684,7 +10486,7 @@
         </p:spPr>
         <p:txBody>
           <a:bodyPr wrap="square" lIns="25400" tIns="25400" rIns="25400" bIns="25400" rtlCol="0" anchor="t">
-            <a:normAutofit/>
+            <a:normAutofit fontScale="92500" lnSpcReduction="10000"/>
           </a:bodyPr>
           <a:lstStyle/>
           <a:p>
@@ -10728,7 +10530,7 @@
         </p:spPr>
         <p:txBody>
           <a:bodyPr wrap="square" lIns="25400" tIns="25400" rIns="25400" bIns="25400" rtlCol="0" anchor="t">
-            <a:normAutofit/>
+            <a:normAutofit fontScale="92500"/>
           </a:bodyPr>
           <a:lstStyle/>
           <a:p>
@@ -10772,7 +10574,7 @@
         </p:spPr>
         <p:txBody>
           <a:bodyPr wrap="square" lIns="25400" tIns="25400" rIns="25400" bIns="25400" rtlCol="0" anchor="t">
-            <a:normAutofit/>
+            <a:normAutofit fontScale="92500"/>
           </a:bodyPr>
           <a:lstStyle/>
           <a:p>
@@ -10843,7 +10645,7 @@
         </p:spPr>
         <p:txBody>
           <a:bodyPr wrap="square" lIns="25400" tIns="25400" rIns="25400" bIns="25400" rtlCol="0" anchor="t">
-            <a:normAutofit/>
+            <a:normAutofit fontScale="92500"/>
           </a:bodyPr>
           <a:lstStyle/>
           <a:p>
@@ -10887,7 +10689,7 @@
         </p:spPr>
         <p:txBody>
           <a:bodyPr wrap="square" lIns="25400" tIns="25400" rIns="25400" bIns="25400" rtlCol="0" anchor="t">
-            <a:normAutofit/>
+            <a:normAutofit fontScale="92500"/>
           </a:bodyPr>
           <a:lstStyle/>
           <a:p>
@@ -10960,7 +10762,7 @@
         </p:spPr>
         <p:txBody>
           <a:bodyPr wrap="square" lIns="25400" tIns="25400" rIns="25400" bIns="25400" rtlCol="0" anchor="t">
-            <a:normAutofit/>
+            <a:normAutofit fontScale="92500" lnSpcReduction="10000"/>
           </a:bodyPr>
           <a:lstStyle/>
           <a:p>
@@ -11004,7 +10806,7 @@
         </p:spPr>
         <p:txBody>
           <a:bodyPr wrap="square" lIns="25400" tIns="25400" rIns="25400" bIns="25400" rtlCol="0" anchor="t">
-            <a:normAutofit/>
+            <a:normAutofit fontScale="92500"/>
           </a:bodyPr>
           <a:lstStyle/>
           <a:p>
@@ -11048,7 +10850,7 @@
         </p:spPr>
         <p:txBody>
           <a:bodyPr wrap="square" lIns="25400" tIns="25400" rIns="25400" bIns="25400" rtlCol="0" anchor="t">
-            <a:normAutofit/>
+            <a:normAutofit fontScale="92500"/>
           </a:bodyPr>
           <a:lstStyle/>
           <a:p>
@@ -11256,7 +11058,7 @@
         </p:spPr>
         <p:txBody>
           <a:bodyPr wrap="square" lIns="25400" tIns="25400" rIns="25400" bIns="25400" rtlCol="0" anchor="t">
-            <a:normAutofit/>
+            <a:normAutofit lnSpcReduction="10000"/>
           </a:bodyPr>
           <a:lstStyle/>
           <a:p>
@@ -11297,7 +11099,7 @@
         </p:spPr>
         <p:txBody>
           <a:bodyPr wrap="square" lIns="25400" tIns="25400" rIns="25400" bIns="25400" rtlCol="0" anchor="t">
-            <a:normAutofit/>
+            <a:normAutofit fontScale="92500" lnSpcReduction="20000"/>
           </a:bodyPr>
           <a:lstStyle/>
           <a:p>
@@ -11341,7 +11143,7 @@
         </p:spPr>
         <p:txBody>
           <a:bodyPr wrap="square" lIns="25400" tIns="25400" rIns="25400" bIns="25400" rtlCol="0" anchor="t">
-            <a:normAutofit/>
+            <a:normAutofit fontScale="92500" lnSpcReduction="20000"/>
           </a:bodyPr>
           <a:lstStyle/>
           <a:p>
@@ -11395,55 +11197,14 @@
       </p:sp>
       <p:sp>
         <p:nvSpPr>
-          <p:cNvPr id="6" name="Text 4"/>
+          <p:cNvPr id="6" name="Text Vänster"/>
           <p:cNvSpPr/>
           <p:nvPr/>
         </p:nvSpPr>
         <p:spPr>
           <a:xfrm>
             <a:off x="1143000" y="3305175"/>
-            <a:ext cx="3531870" cy="228600"/>
-          </a:xfrm>
-          <a:prstGeom prst="rect">
-            <a:avLst/>
-          </a:prstGeom>
-          <a:noFill/>
-          <a:ln/>
-        </p:spPr>
-        <p:txBody>
-          <a:bodyPr wrap="square" lIns="25400" tIns="25400" rIns="25400" bIns="25400" rtlCol="0" anchor="t">
-            <a:normAutofit/>
-          </a:bodyPr>
-          <a:lstStyle/>
-          <a:p>
-            <a:pPr marL="0" indent="0" algn="l">
-              <a:buNone/>
-            </a:pPr>
-            <a:r>
-              <a:rPr lang="en-US" sz="1200" kern="0" spc="120" dirty="0">
-                <a:solidFill>
-                  <a:srgbClr val="4A4A4A"/>
-                </a:solidFill>
-                <a:latin typeface="IBM Plex Mono" pitchFamily="34" charset="0"/>
-                <a:ea typeface="IBM Plex Mono" pitchFamily="34" charset="-122"/>
-                <a:cs typeface="IBM Plex Mono" pitchFamily="34" charset="-120"/>
-              </a:rPr>
-              <a:t>KUND</a:t>
-            </a:r>
-            <a:endParaRPr lang="en-US" sz="1200" dirty="0"/>
-          </a:p>
-        </p:txBody>
-      </p:sp>
-      <p:sp>
-        <p:nvSpPr>
-          <p:cNvPr id="7" name="Text 5"/>
-          <p:cNvSpPr/>
-          <p:nvPr/>
-        </p:nvSpPr>
-        <p:spPr>
-          <a:xfrm>
-            <a:off x="1143000" y="3552825"/>
-            <a:ext cx="3531870" cy="346621"/>
+            <a:ext cx="3531870" cy="6000000"/>
           </a:xfrm>
           <a:prstGeom prst="rect">
             <a:avLst/>
@@ -11464,7 +11225,7 @@
               <a:buNone/>
             </a:pPr>
             <a:r>
-              <a:rPr lang="en-US" sz="1800" dirty="0">
+              <a:rPr lang="en-US" sz="1500" kern="0" dirty="0">
                 <a:solidFill>
                   <a:srgbClr val="1A1A1A"/>
                 </a:solidFill>
@@ -11472,63 +11233,22 @@
                 <a:ea typeface="-apple-system" pitchFamily="34" charset="-122"/>
                 <a:cs typeface="-apple-system" pitchFamily="34" charset="-120"/>
               </a:rPr>
-              <a:t>{Kund — organisation}</a:t>
-            </a:r>
-            <a:endParaRPr lang="en-US" sz="1800" dirty="0"/>
-          </a:p>
-        </p:txBody>
-      </p:sp>
-      <p:sp>
-        <p:nvSpPr>
-          <p:cNvPr id="8" name="Text 6"/>
-          <p:cNvSpPr/>
-          <p:nvPr/>
-        </p:nvSpPr>
-        <p:spPr>
-          <a:xfrm>
-            <a:off x="1143000" y="4089946"/>
-            <a:ext cx="3531870" cy="228600"/>
-          </a:xfrm>
-          <a:prstGeom prst="rect">
-            <a:avLst/>
-          </a:prstGeom>
-          <a:noFill/>
-          <a:ln/>
-        </p:spPr>
-        <p:txBody>
-          <a:bodyPr wrap="square" lIns="25400" tIns="25400" rIns="25400" bIns="25400" rtlCol="0" anchor="t">
-            <a:normAutofit/>
-          </a:bodyPr>
-          <a:lstStyle/>
-          <a:p>
-            <a:pPr marL="0" indent="0" algn="l">
-              <a:buNone/>
-            </a:pPr>
-            <a:r>
-              <a:rPr lang="en-US" sz="1200" kern="0" spc="120" dirty="0">
-                <a:solidFill>
-                  <a:srgbClr val="4A4A4A"/>
-                </a:solidFill>
-                <a:latin typeface="IBM Plex Mono" pitchFamily="34" charset="0"/>
-                <a:ea typeface="IBM Plex Mono" pitchFamily="34" charset="-122"/>
-                <a:cs typeface="IBM Plex Mono" pitchFamily="34" charset="-120"/>
-              </a:rPr>
-              <a:t>PERIOD</a:t>
-            </a:r>
-            <a:endParaRPr lang="en-US" sz="1200" dirty="0"/>
-          </a:p>
-        </p:txBody>
-      </p:sp>
-      <p:sp>
-        <p:nvSpPr>
-          <p:cNvPr id="9" name="Text 7"/>
-          <p:cNvSpPr/>
-          <p:nvPr/>
-        </p:nvSpPr>
-        <p:spPr>
-          <a:xfrm>
-            <a:off x="1143000" y="4337596"/>
-            <a:ext cx="3531870" cy="655141"/>
+              <a:t>{Vänster}</a:t>
+            </a:r>
+            <a:endParaRPr lang="en-US" sz="1500" dirty="0"/>
+          </a:p>
+        </p:txBody>
+      </p:sp>
+      <p:sp>
+        <p:nvSpPr>
+          <p:cNvPr id="14" name="Text Höger"/>
+          <p:cNvSpPr/>
+          <p:nvPr/>
+        </p:nvSpPr>
+        <p:spPr>
+          <a:xfrm>
+            <a:off x="5143500" y="3305175"/>
+            <a:ext cx="12361545" cy="6000000"/>
           </a:xfrm>
           <a:prstGeom prst="rect">
             <a:avLst/>
@@ -11549,92 +11269,7 @@
               <a:buNone/>
             </a:pPr>
             <a:r>
-              <a:rPr lang="en-US" sz="1800" dirty="0">
-                <a:solidFill>
-                  <a:srgbClr val="1A1A1A"/>
-                </a:solidFill>
-                <a:latin typeface="IBM Plex Mono" pitchFamily="34" charset="0"/>
-                <a:ea typeface="IBM Plex Mono" pitchFamily="34" charset="-122"/>
-                <a:cs typeface="IBM Plex Mono" pitchFamily="34" charset="-120"/>
-              </a:rPr>
-              <a:t>{Start MM/ÅÅÅÅ} — {Slut MM/ÅÅÅÅ}</a:t>
-            </a:r>
-            <a:endParaRPr lang="en-US" sz="1800" dirty="0"/>
-          </a:p>
-        </p:txBody>
-      </p:sp>
-      <p:sp>
-        <p:nvSpPr>
-          <p:cNvPr id="10" name="Text 8"/>
-          <p:cNvSpPr/>
-          <p:nvPr/>
-        </p:nvSpPr>
-        <p:spPr>
-          <a:xfrm>
-            <a:off x="1143000" y="5183237"/>
-            <a:ext cx="3531870" cy="228600"/>
-          </a:xfrm>
-          <a:prstGeom prst="rect">
-            <a:avLst/>
-          </a:prstGeom>
-          <a:noFill/>
-          <a:ln/>
-        </p:spPr>
-        <p:txBody>
-          <a:bodyPr wrap="square" lIns="25400" tIns="25400" rIns="25400" bIns="25400" rtlCol="0" anchor="t">
-            <a:normAutofit/>
-          </a:bodyPr>
-          <a:lstStyle/>
-          <a:p>
-            <a:pPr marL="0" indent="0" algn="l">
-              <a:buNone/>
-            </a:pPr>
-            <a:r>
-              <a:rPr lang="en-US" sz="1200" kern="0" spc="120" dirty="0">
-                <a:solidFill>
-                  <a:srgbClr val="4A4A4A"/>
-                </a:solidFill>
-                <a:latin typeface="IBM Plex Mono" pitchFamily="34" charset="0"/>
-                <a:ea typeface="IBM Plex Mono" pitchFamily="34" charset="-122"/>
-                <a:cs typeface="IBM Plex Mono" pitchFamily="34" charset="-120"/>
-              </a:rPr>
-              <a:t>OMFATTNING</a:t>
-            </a:r>
-            <a:endParaRPr lang="en-US" sz="1200" dirty="0"/>
-          </a:p>
-        </p:txBody>
-      </p:sp>
-      <p:sp>
-        <p:nvSpPr>
-          <p:cNvPr id="11" name="Text 9"/>
-          <p:cNvSpPr/>
-          <p:nvPr/>
-        </p:nvSpPr>
-        <p:spPr>
-          <a:xfrm>
-            <a:off x="1143000" y="5430887"/>
-            <a:ext cx="3531870" cy="655141"/>
-          </a:xfrm>
-          <a:prstGeom prst="rect">
-            <a:avLst/>
-          </a:prstGeom>
-          <a:noFill/>
-          <a:ln/>
-        </p:spPr>
-        <p:txBody>
-          <a:bodyPr wrap="square" lIns="25400" tIns="25400" rIns="25400" bIns="25400" rtlCol="0" anchor="t">
-            <a:normAutofit/>
-          </a:bodyPr>
-          <a:lstStyle/>
-          <a:p>
-            <a:pPr marL="0" indent="0" algn="l">
-              <a:lnSpc>
-                <a:spcPct val="135000"/>
-              </a:lnSpc>
-              <a:buNone/>
-            </a:pPr>
-            <a:r>
-              <a:rPr lang="en-US" sz="1800" dirty="0">
+              <a:rPr lang="en-US" sz="1500" kern="0" dirty="0">
                 <a:solidFill>
                   <a:srgbClr val="1A1A1A"/>
                 </a:solidFill>
@@ -11642,275 +11277,9 @@
                 <a:ea typeface="-apple-system" pitchFamily="34" charset="-122"/>
                 <a:cs typeface="-apple-system" pitchFamily="34" charset="-120"/>
               </a:rPr>
-              <a:t>{Omfattning — antal timmar, konsulter och total volym}</a:t>
-            </a:r>
-            <a:endParaRPr lang="en-US" sz="1800" dirty="0"/>
-          </a:p>
-        </p:txBody>
-      </p:sp>
-      <p:sp>
-        <p:nvSpPr>
-          <p:cNvPr id="12" name="Text 10"/>
-          <p:cNvSpPr/>
-          <p:nvPr/>
-        </p:nvSpPr>
-        <p:spPr>
-          <a:xfrm>
-            <a:off x="1143000" y="6276529"/>
-            <a:ext cx="3531870" cy="228600"/>
-          </a:xfrm>
-          <a:prstGeom prst="rect">
-            <a:avLst/>
-          </a:prstGeom>
-          <a:noFill/>
-          <a:ln/>
-        </p:spPr>
-        <p:txBody>
-          <a:bodyPr wrap="square" lIns="25400" tIns="25400" rIns="25400" bIns="25400" rtlCol="0" anchor="t">
-            <a:normAutofit/>
-          </a:bodyPr>
-          <a:lstStyle/>
-          <a:p>
-            <a:pPr marL="0" indent="0" algn="l">
-              <a:buNone/>
-            </a:pPr>
-            <a:r>
-              <a:rPr lang="en-US" sz="1200" kern="0" spc="120" dirty="0">
-                <a:solidFill>
-                  <a:srgbClr val="4A4A4A"/>
-                </a:solidFill>
-                <a:latin typeface="IBM Plex Mono" pitchFamily="34" charset="0"/>
-                <a:ea typeface="IBM Plex Mono" pitchFamily="34" charset="-122"/>
-                <a:cs typeface="IBM Plex Mono" pitchFamily="34" charset="-120"/>
-              </a:rPr>
-              <a:t>KONTAKTPERSON</a:t>
-            </a:r>
-            <a:endParaRPr lang="en-US" sz="1200" dirty="0"/>
-          </a:p>
-        </p:txBody>
-      </p:sp>
-      <p:sp>
-        <p:nvSpPr>
-          <p:cNvPr id="13" name="Text 11"/>
-          <p:cNvSpPr/>
-          <p:nvPr/>
-        </p:nvSpPr>
-        <p:spPr>
-          <a:xfrm>
-            <a:off x="1143000" y="6524179"/>
-            <a:ext cx="3531870" cy="655141"/>
-          </a:xfrm>
-          <a:prstGeom prst="rect">
-            <a:avLst/>
-          </a:prstGeom>
-          <a:noFill/>
-          <a:ln/>
-        </p:spPr>
-        <p:txBody>
-          <a:bodyPr wrap="square" lIns="25400" tIns="25400" rIns="25400" bIns="25400" rtlCol="0" anchor="t">
-            <a:normAutofit/>
-          </a:bodyPr>
-          <a:lstStyle/>
-          <a:p>
-            <a:pPr marL="0" indent="0" algn="l">
-              <a:lnSpc>
-                <a:spcPct val="135000"/>
-              </a:lnSpc>
-              <a:buNone/>
-            </a:pPr>
-            <a:r>
-              <a:rPr lang="en-US" sz="1800" dirty="0">
-                <a:solidFill>
-                  <a:srgbClr val="1A1A1A"/>
-                </a:solidFill>
-                <a:latin typeface="-apple-system" pitchFamily="34" charset="0"/>
-                <a:ea typeface="-apple-system" pitchFamily="34" charset="-122"/>
-                <a:cs typeface="-apple-system" pitchFamily="34" charset="-120"/>
-              </a:rPr>
-              <a:t>{Namn} </a:t>
-            </a:r>
-            <a:r>
-              <a:rPr lang="en-US" sz="1350" dirty="0">
-                <a:solidFill>
-                  <a:srgbClr val="4A4A4A"/>
-                </a:solidFill>
-                <a:latin typeface="IBM Plex Mono" pitchFamily="34" charset="0"/>
-                <a:ea typeface="IBM Plex Mono" pitchFamily="34" charset="-122"/>
-                <a:cs typeface="IBM Plex Mono" pitchFamily="34" charset="-120"/>
-              </a:rPr>
-              <a:t>{Titel} · {Telefon} · {E-post}</a:t>
-            </a:r>
-            <a:endParaRPr lang="en-US" sz="1800" dirty="0"/>
-          </a:p>
-        </p:txBody>
-      </p:sp>
-      <p:sp>
-        <p:nvSpPr>
-          <p:cNvPr id="14" name="Text 12"/>
-          <p:cNvSpPr/>
-          <p:nvPr/>
-        </p:nvSpPr>
-        <p:spPr>
-          <a:xfrm>
-            <a:off x="5143500" y="3305175"/>
-            <a:ext cx="12361545" cy="228600"/>
-          </a:xfrm>
-          <a:prstGeom prst="rect">
-            <a:avLst/>
-          </a:prstGeom>
-          <a:noFill/>
-          <a:ln/>
-        </p:spPr>
-        <p:txBody>
-          <a:bodyPr wrap="square" lIns="25400" tIns="25400" rIns="25400" bIns="25400" rtlCol="0" anchor="t">
-            <a:normAutofit/>
-          </a:bodyPr>
-          <a:lstStyle/>
-          <a:p>
-            <a:pPr marL="0" indent="0" algn="l">
-              <a:buNone/>
-            </a:pPr>
-            <a:r>
-              <a:rPr lang="en-US" sz="1200" kern="0" spc="120" dirty="0">
-                <a:solidFill>
-                  <a:srgbClr val="4A4A4A"/>
-                </a:solidFill>
-                <a:latin typeface="IBM Plex Mono" pitchFamily="34" charset="0"/>
-                <a:ea typeface="IBM Plex Mono" pitchFamily="34" charset="-122"/>
-                <a:cs typeface="IBM Plex Mono" pitchFamily="34" charset="-120"/>
-              </a:rPr>
-              <a:t>ROLL OCH LEVERANS</a:t>
-            </a:r>
-            <a:endParaRPr lang="en-US" sz="1200" dirty="0"/>
-          </a:p>
-        </p:txBody>
-      </p:sp>
-      <p:sp>
-        <p:nvSpPr>
-          <p:cNvPr id="15" name="Text 13"/>
-          <p:cNvSpPr/>
-          <p:nvPr/>
-        </p:nvSpPr>
-        <p:spPr>
-          <a:xfrm>
-            <a:off x="5143500" y="3590925"/>
-            <a:ext cx="12361545" cy="397073"/>
-          </a:xfrm>
-          <a:prstGeom prst="rect">
-            <a:avLst/>
-          </a:prstGeom>
-          <a:noFill/>
-          <a:ln/>
-        </p:spPr>
-        <p:txBody>
-          <a:bodyPr wrap="square" lIns="25400" tIns="25400" rIns="25400" bIns="25400" rtlCol="0" anchor="t">
-            <a:normAutofit/>
-          </a:bodyPr>
-          <a:lstStyle/>
-          <a:p>
-            <a:pPr marL="0" indent="0" algn="l">
-              <a:lnSpc>
-                <a:spcPct val="145000"/>
-              </a:lnSpc>
-              <a:buNone/>
-            </a:pPr>
-            <a:r>
-              <a:rPr lang="en-US" sz="1950" dirty="0">
-                <a:solidFill>
-                  <a:srgbClr val="1A1A1A"/>
-                </a:solidFill>
-                <a:latin typeface="-apple-system" pitchFamily="34" charset="0"/>
-                <a:ea typeface="-apple-system" pitchFamily="34" charset="-122"/>
-                <a:cs typeface="-apple-system" pitchFamily="34" charset="-120"/>
-              </a:rPr>
-              <a:t>{Roll/leverans — vilken roll vi hade och vad vi levererade, konkret och verifierbart}</a:t>
-            </a:r>
-            <a:endParaRPr lang="en-US" sz="1950" dirty="0"/>
-          </a:p>
-        </p:txBody>
-      </p:sp>
-      <p:sp>
-        <p:nvSpPr>
-          <p:cNvPr id="16" name="Text 14"/>
-          <p:cNvSpPr/>
-          <p:nvPr/>
-        </p:nvSpPr>
-        <p:spPr>
-          <a:xfrm>
-            <a:off x="5143500" y="4254698"/>
-            <a:ext cx="12361545" cy="228600"/>
-          </a:xfrm>
-          <a:prstGeom prst="rect">
-            <a:avLst/>
-          </a:prstGeom>
-          <a:noFill/>
-          <a:ln/>
-        </p:spPr>
-        <p:txBody>
-          <a:bodyPr wrap="square" lIns="25400" tIns="25400" rIns="25400" bIns="25400" rtlCol="0" anchor="t">
-            <a:normAutofit/>
-          </a:bodyPr>
-          <a:lstStyle/>
-          <a:p>
-            <a:pPr marL="0" indent="0" algn="l">
-              <a:buNone/>
-            </a:pPr>
-            <a:r>
-              <a:rPr lang="en-US" sz="1200" kern="0" spc="120" dirty="0">
-                <a:solidFill>
-                  <a:srgbClr val="4A4A4A"/>
-                </a:solidFill>
-                <a:latin typeface="IBM Plex Mono" pitchFamily="34" charset="0"/>
-                <a:ea typeface="IBM Plex Mono" pitchFamily="34" charset="-122"/>
-                <a:cs typeface="IBM Plex Mono" pitchFamily="34" charset="-120"/>
-              </a:rPr>
-              <a:t>RESULTAT</a:t>
-            </a:r>
-            <a:endParaRPr lang="en-US" sz="1200" dirty="0"/>
-          </a:p>
-        </p:txBody>
-      </p:sp>
-      <p:sp>
-        <p:nvSpPr>
-          <p:cNvPr id="17" name="Text 15"/>
-          <p:cNvSpPr/>
-          <p:nvPr/>
-        </p:nvSpPr>
-        <p:spPr>
-          <a:xfrm>
-            <a:off x="5143500" y="4540448"/>
-            <a:ext cx="12361545" cy="397073"/>
-          </a:xfrm>
-          <a:prstGeom prst="rect">
-            <a:avLst/>
-          </a:prstGeom>
-          <a:noFill/>
-          <a:ln/>
-        </p:spPr>
-        <p:txBody>
-          <a:bodyPr wrap="square" lIns="25400" tIns="25400" rIns="25400" bIns="25400" rtlCol="0" anchor="t">
-            <a:normAutofit/>
-          </a:bodyPr>
-          <a:lstStyle/>
-          <a:p>
-            <a:pPr marL="0" indent="0" algn="l">
-              <a:lnSpc>
-                <a:spcPct val="145000"/>
-              </a:lnSpc>
-              <a:buNone/>
-            </a:pPr>
-            <a:r>
-              <a:rPr lang="en-US" sz="1950" dirty="0">
-                <a:solidFill>
-                  <a:srgbClr val="1A1A1A"/>
-                </a:solidFill>
-                <a:latin typeface="-apple-system" pitchFamily="34" charset="0"/>
-                <a:ea typeface="-apple-system" pitchFamily="34" charset="-122"/>
-                <a:cs typeface="-apple-system" pitchFamily="34" charset="-120"/>
-              </a:rPr>
-              <a:t>{Resultat — mätbart utfall av uppdraget, gärna med siffror och tidsbesparing}</a:t>
-            </a:r>
-            <a:endParaRPr lang="en-US" sz="1950" dirty="0"/>
+              <a:t>{Höger}</a:t>
+            </a:r>
+            <a:endParaRPr lang="en-US" sz="1500" dirty="0"/>
           </a:p>
         </p:txBody>
       </p:sp>
@@ -12097,7 +11466,7 @@
         </p:spPr>
         <p:txBody>
           <a:bodyPr wrap="square" lIns="25400" tIns="25400" rIns="25400" bIns="25400" rtlCol="0" anchor="t">
-            <a:normAutofit/>
+            <a:normAutofit lnSpcReduction="10000"/>
           </a:bodyPr>
           <a:lstStyle/>
           <a:p>
@@ -12138,7 +11507,7 @@
         </p:spPr>
         <p:txBody>
           <a:bodyPr wrap="square" lIns="25400" tIns="25400" rIns="25400" bIns="25400" rtlCol="0" anchor="t">
-            <a:normAutofit/>
+            <a:normAutofit fontScale="92500" lnSpcReduction="20000"/>
           </a:bodyPr>
           <a:lstStyle/>
           <a:p>
@@ -12182,7 +11551,7 @@
         </p:spPr>
         <p:txBody>
           <a:bodyPr wrap="square" lIns="25400" tIns="25400" rIns="25400" bIns="25400" rtlCol="0" anchor="t">
-            <a:normAutofit/>
+            <a:normAutofit fontScale="92500" lnSpcReduction="20000"/>
           </a:bodyPr>
           <a:lstStyle/>
           <a:p>
@@ -12253,7 +11622,7 @@
         </p:spPr>
         <p:txBody>
           <a:bodyPr wrap="square" lIns="25400" tIns="25400" rIns="25400" bIns="25400" rtlCol="0" anchor="t">
-            <a:normAutofit/>
+            <a:normAutofit lnSpcReduction="10000"/>
           </a:bodyPr>
           <a:lstStyle/>
           <a:p>
@@ -12294,7 +11663,7 @@
         </p:spPr>
         <p:txBody>
           <a:bodyPr wrap="square" lIns="25400" tIns="25400" rIns="25400" bIns="25400" rtlCol="0" anchor="t">
-            <a:normAutofit/>
+            <a:normAutofit fontScale="92500" lnSpcReduction="20000"/>
           </a:bodyPr>
           <a:lstStyle/>
           <a:p>
@@ -12338,7 +11707,7 @@
         </p:spPr>
         <p:txBody>
           <a:bodyPr wrap="square" lIns="25400" tIns="25400" rIns="25400" bIns="25400" rtlCol="0" anchor="t">
-            <a:normAutofit/>
+            <a:normAutofit lnSpcReduction="10000"/>
           </a:bodyPr>
           <a:lstStyle/>
           <a:p>
@@ -12379,7 +11748,7 @@
         </p:spPr>
         <p:txBody>
           <a:bodyPr wrap="square" lIns="25400" tIns="25400" rIns="25400" bIns="25400" rtlCol="0" anchor="t">
-            <a:normAutofit/>
+            <a:normAutofit fontScale="92500" lnSpcReduction="20000"/>
           </a:bodyPr>
           <a:lstStyle/>
           <a:p>
@@ -12423,7 +11792,7 @@
         </p:spPr>
         <p:txBody>
           <a:bodyPr wrap="square" lIns="25400" tIns="25400" rIns="25400" bIns="25400" rtlCol="0" anchor="t">
-            <a:normAutofit/>
+            <a:normAutofit lnSpcReduction="10000"/>
           </a:bodyPr>
           <a:lstStyle/>
           <a:p>
@@ -12464,7 +11833,7 @@
         </p:spPr>
         <p:txBody>
           <a:bodyPr wrap="square" lIns="25400" tIns="25400" rIns="25400" bIns="25400" rtlCol="0" anchor="t">
-            <a:normAutofit/>
+            <a:normAutofit fontScale="92500" lnSpcReduction="20000"/>
           </a:bodyPr>
           <a:lstStyle/>
           <a:p>
@@ -12508,7 +11877,7 @@
         </p:spPr>
         <p:txBody>
           <a:bodyPr wrap="square" lIns="25400" tIns="25400" rIns="25400" bIns="25400" rtlCol="0" anchor="t">
-            <a:normAutofit/>
+            <a:normAutofit lnSpcReduction="10000"/>
           </a:bodyPr>
           <a:lstStyle/>
           <a:p>
@@ -12549,7 +11918,7 @@
         </p:spPr>
         <p:txBody>
           <a:bodyPr wrap="square" lIns="25400" tIns="25400" rIns="25400" bIns="25400" rtlCol="0" anchor="t">
-            <a:normAutofit/>
+            <a:normAutofit lnSpcReduction="10000"/>
           </a:bodyPr>
           <a:lstStyle/>
           <a:p>
@@ -12604,7 +11973,7 @@
         </p:spPr>
         <p:txBody>
           <a:bodyPr wrap="square" lIns="25400" tIns="25400" rIns="25400" bIns="25400" rtlCol="0" anchor="t">
-            <a:normAutofit/>
+            <a:normAutofit lnSpcReduction="10000"/>
           </a:bodyPr>
           <a:lstStyle/>
           <a:p>
@@ -12645,7 +12014,7 @@
         </p:spPr>
         <p:txBody>
           <a:bodyPr wrap="square" lIns="25400" tIns="25400" rIns="25400" bIns="25400" rtlCol="0" anchor="t">
-            <a:normAutofit/>
+            <a:normAutofit fontScale="92500" lnSpcReduction="10000"/>
           </a:bodyPr>
           <a:lstStyle/>
           <a:p>
@@ -12689,7 +12058,7 @@
         </p:spPr>
         <p:txBody>
           <a:bodyPr wrap="square" lIns="25400" tIns="25400" rIns="25400" bIns="25400" rtlCol="0" anchor="t">
-            <a:normAutofit/>
+            <a:normAutofit lnSpcReduction="10000"/>
           </a:bodyPr>
           <a:lstStyle/>
           <a:p>
@@ -12730,7 +12099,7 @@
         </p:spPr>
         <p:txBody>
           <a:bodyPr wrap="square" lIns="25400" tIns="25400" rIns="25400" bIns="25400" rtlCol="0" anchor="t">
-            <a:normAutofit/>
+            <a:normAutofit fontScale="92500" lnSpcReduction="10000"/>
           </a:bodyPr>
           <a:lstStyle/>
           <a:p>
@@ -12938,7 +12307,7 @@
         </p:spPr>
         <p:txBody>
           <a:bodyPr wrap="square" lIns="25400" tIns="25400" rIns="25400" bIns="25400" rtlCol="0" anchor="t">
-            <a:normAutofit/>
+            <a:normAutofit lnSpcReduction="10000"/>
           </a:bodyPr>
           <a:lstStyle/>
           <a:p>
@@ -12979,7 +12348,7 @@
         </p:spPr>
         <p:txBody>
           <a:bodyPr wrap="square" lIns="25400" tIns="25400" rIns="25400" bIns="25400" rtlCol="0" anchor="t">
-            <a:normAutofit/>
+            <a:normAutofit fontScale="92500" lnSpcReduction="20000"/>
           </a:bodyPr>
           <a:lstStyle/>
           <a:p>
@@ -13023,7 +12392,7 @@
         </p:spPr>
         <p:txBody>
           <a:bodyPr wrap="square" lIns="25400" tIns="25400" rIns="25400" bIns="25400" rtlCol="0" anchor="t">
-            <a:normAutofit/>
+            <a:normAutofit fontScale="92500" lnSpcReduction="20000"/>
           </a:bodyPr>
           <a:lstStyle/>
           <a:p>
@@ -13067,7 +12436,7 @@
         </p:spPr>
         <p:txBody>
           <a:bodyPr wrap="square" lIns="25400" tIns="25400" rIns="25400" bIns="25400" rtlCol="0" anchor="t">
-            <a:normAutofit/>
+            <a:normAutofit fontScale="92500" lnSpcReduction="20000"/>
           </a:bodyPr>
           <a:lstStyle/>
           <a:p>
@@ -13198,7 +12567,7 @@
         </p:spPr>
         <p:txBody>
           <a:bodyPr wrap="square" lIns="25400" tIns="25400" rIns="25400" bIns="25400" rtlCol="0" anchor="t">
-            <a:normAutofit/>
+            <a:normAutofit fontScale="92500" lnSpcReduction="10000"/>
           </a:bodyPr>
           <a:lstStyle/>
           <a:p>
@@ -13242,7 +12611,7 @@
         </p:spPr>
         <p:txBody>
           <a:bodyPr wrap="square" lIns="25400" tIns="25400" rIns="25400" bIns="25400" rtlCol="0" anchor="t">
-            <a:normAutofit/>
+            <a:normAutofit fontScale="92500" lnSpcReduction="10000"/>
           </a:bodyPr>
           <a:lstStyle/>
           <a:p>
@@ -13286,7 +12655,7 @@
         </p:spPr>
         <p:txBody>
           <a:bodyPr wrap="square" lIns="25400" tIns="25400" rIns="25400" bIns="25400" rtlCol="0" anchor="t">
-            <a:normAutofit/>
+            <a:normAutofit fontScale="92500" lnSpcReduction="10000"/>
           </a:bodyPr>
           <a:lstStyle/>
           <a:p>
@@ -13357,7 +12726,7 @@
         </p:spPr>
         <p:txBody>
           <a:bodyPr wrap="square" lIns="25400" tIns="25400" rIns="25400" bIns="25400" rtlCol="0" anchor="t">
-            <a:normAutofit/>
+            <a:normAutofit fontScale="92500" lnSpcReduction="20000"/>
           </a:bodyPr>
           <a:lstStyle/>
           <a:p>
@@ -13516,7 +12885,7 @@
         </p:spPr>
         <p:txBody>
           <a:bodyPr wrap="square" lIns="25400" tIns="25400" rIns="25400" bIns="25400" rtlCol="0" anchor="t">
-            <a:normAutofit/>
+            <a:normAutofit fontScale="92500" lnSpcReduction="20000"/>
           </a:bodyPr>
           <a:lstStyle/>
           <a:p>
@@ -13675,7 +13044,7 @@
         </p:spPr>
         <p:txBody>
           <a:bodyPr wrap="square" lIns="25400" tIns="25400" rIns="25400" bIns="25400" rtlCol="0" anchor="t">
-            <a:normAutofit/>
+            <a:normAutofit fontScale="92500" lnSpcReduction="20000"/>
           </a:bodyPr>
           <a:lstStyle/>
           <a:p>
@@ -13834,7 +13203,7 @@
         </p:spPr>
         <p:txBody>
           <a:bodyPr wrap="square" lIns="25400" tIns="25400" rIns="25400" bIns="25400" rtlCol="0" anchor="t">
-            <a:normAutofit/>
+            <a:normAutofit fontScale="92500" lnSpcReduction="20000"/>
           </a:bodyPr>
           <a:lstStyle/>
           <a:p>
@@ -14130,7 +13499,7 @@
         </p:spPr>
         <p:txBody>
           <a:bodyPr wrap="square" lIns="25400" tIns="25400" rIns="25400" bIns="25400" rtlCol="0" anchor="t">
-            <a:normAutofit/>
+            <a:normAutofit lnSpcReduction="10000"/>
           </a:bodyPr>
           <a:lstStyle/>
           <a:p>
@@ -14171,7 +13540,7 @@
         </p:spPr>
         <p:txBody>
           <a:bodyPr wrap="square" lIns="25400" tIns="25400" rIns="25400" bIns="25400" rtlCol="0" anchor="t">
-            <a:normAutofit/>
+            <a:normAutofit fontScale="92500" lnSpcReduction="20000"/>
           </a:bodyPr>
           <a:lstStyle/>
           <a:p>
@@ -14242,7 +13611,7 @@
         </p:spPr>
         <p:txBody>
           <a:bodyPr wrap="square" lIns="25400" tIns="25400" rIns="25400" bIns="25400" rtlCol="0" anchor="t">
-            <a:normAutofit/>
+            <a:normAutofit lnSpcReduction="10000"/>
           </a:bodyPr>
           <a:lstStyle/>
           <a:p>
@@ -14283,7 +13652,7 @@
         </p:spPr>
         <p:txBody>
           <a:bodyPr wrap="square" lIns="25400" tIns="25400" rIns="25400" bIns="25400" rtlCol="0" anchor="t">
-            <a:normAutofit/>
+            <a:normAutofit fontScale="92500" lnSpcReduction="20000"/>
           </a:bodyPr>
           <a:lstStyle/>
           <a:p>
@@ -14327,7 +13696,7 @@
         </p:spPr>
         <p:txBody>
           <a:bodyPr wrap="square" lIns="25400" tIns="25400" rIns="25400" bIns="25400" rtlCol="0" anchor="t">
-            <a:normAutofit/>
+            <a:normAutofit lnSpcReduction="10000"/>
           </a:bodyPr>
           <a:lstStyle/>
           <a:p>
@@ -14368,7 +13737,7 @@
         </p:spPr>
         <p:txBody>
           <a:bodyPr wrap="square" lIns="25400" tIns="25400" rIns="25400" bIns="25400" rtlCol="0" anchor="t">
-            <a:normAutofit/>
+            <a:normAutofit lnSpcReduction="10000"/>
           </a:bodyPr>
           <a:lstStyle/>
           <a:p>
@@ -14409,7 +13778,7 @@
         </p:spPr>
         <p:txBody>
           <a:bodyPr wrap="square" lIns="25400" tIns="25400" rIns="25400" bIns="25400" rtlCol="0" anchor="t">
-            <a:normAutofit/>
+            <a:normAutofit lnSpcReduction="10000"/>
           </a:bodyPr>
           <a:lstStyle/>
           <a:p>
@@ -14450,7 +13819,7 @@
         </p:spPr>
         <p:txBody>
           <a:bodyPr wrap="square" lIns="25400" tIns="25400" rIns="25400" bIns="25400" rtlCol="0" anchor="t">
-            <a:normAutofit/>
+            <a:normAutofit lnSpcReduction="10000"/>
           </a:bodyPr>
           <a:lstStyle/>
           <a:p>
@@ -14518,7 +13887,7 @@
         </p:spPr>
         <p:txBody>
           <a:bodyPr wrap="square" lIns="25400" tIns="25400" rIns="25400" bIns="25400" rtlCol="0" anchor="t">
-            <a:normAutofit/>
+            <a:normAutofit lnSpcReduction="10000"/>
           </a:bodyPr>
           <a:lstStyle/>
           <a:p>
@@ -14559,7 +13928,7 @@
         </p:spPr>
         <p:txBody>
           <a:bodyPr wrap="square" lIns="25400" tIns="25400" rIns="25400" bIns="25400" rtlCol="0" anchor="t">
-            <a:normAutofit/>
+            <a:normAutofit fontScale="92500" lnSpcReduction="20000"/>
           </a:bodyPr>
           <a:lstStyle/>
           <a:p>
@@ -14603,7 +13972,7 @@
         </p:spPr>
         <p:txBody>
           <a:bodyPr wrap="square" lIns="25400" tIns="25400" rIns="25400" bIns="25400" rtlCol="0" anchor="t">
-            <a:normAutofit/>
+            <a:normAutofit lnSpcReduction="10000"/>
           </a:bodyPr>
           <a:lstStyle/>
           <a:p>
@@ -14644,7 +14013,7 @@
         </p:spPr>
         <p:txBody>
           <a:bodyPr wrap="square" lIns="25400" tIns="25400" rIns="25400" bIns="25400" rtlCol="0" anchor="t">
-            <a:normAutofit/>
+            <a:normAutofit lnSpcReduction="10000"/>
           </a:bodyPr>
           <a:lstStyle/>
           <a:p>
@@ -14685,7 +14054,7 @@
         </p:spPr>
         <p:txBody>
           <a:bodyPr wrap="square" lIns="25400" tIns="25400" rIns="25400" bIns="25400" rtlCol="0" anchor="t">
-            <a:normAutofit/>
+            <a:normAutofit lnSpcReduction="10000"/>
           </a:bodyPr>
           <a:lstStyle/>
           <a:p>
@@ -14726,7 +14095,7 @@
         </p:spPr>
         <p:txBody>
           <a:bodyPr wrap="square" lIns="25400" tIns="25400" rIns="25400" bIns="25400" rtlCol="0" anchor="t">
-            <a:normAutofit/>
+            <a:normAutofit lnSpcReduction="10000"/>
           </a:bodyPr>
           <a:lstStyle/>
           <a:p>
@@ -14794,7 +14163,7 @@
         </p:spPr>
         <p:txBody>
           <a:bodyPr wrap="square" lIns="25400" tIns="25400" rIns="25400" bIns="25400" rtlCol="0" anchor="t">
-            <a:normAutofit/>
+            <a:normAutofit lnSpcReduction="10000"/>
           </a:bodyPr>
           <a:lstStyle/>
           <a:p>
@@ -14835,7 +14204,7 @@
         </p:spPr>
         <p:txBody>
           <a:bodyPr wrap="square" lIns="25400" tIns="25400" rIns="25400" bIns="25400" rtlCol="0" anchor="t">
-            <a:normAutofit/>
+            <a:normAutofit fontScale="92500" lnSpcReduction="10000"/>
           </a:bodyPr>
           <a:lstStyle/>
           <a:p>
@@ -14879,7 +14248,7 @@
         </p:spPr>
         <p:txBody>
           <a:bodyPr wrap="square" lIns="25400" tIns="25400" rIns="25400" bIns="25400" rtlCol="0" anchor="t">
-            <a:normAutofit/>
+            <a:normAutofit lnSpcReduction="10000"/>
           </a:bodyPr>
           <a:lstStyle/>
           <a:p>
@@ -14920,7 +14289,7 @@
         </p:spPr>
         <p:txBody>
           <a:bodyPr wrap="square" lIns="25400" tIns="25400" rIns="25400" bIns="25400" rtlCol="0" anchor="t">
-            <a:normAutofit/>
+            <a:normAutofit lnSpcReduction="10000"/>
           </a:bodyPr>
           <a:lstStyle/>
           <a:p>
@@ -14961,7 +14330,7 @@
         </p:spPr>
         <p:txBody>
           <a:bodyPr wrap="square" lIns="25400" tIns="25400" rIns="25400" bIns="25400" rtlCol="0" anchor="t">
-            <a:normAutofit/>
+            <a:normAutofit lnSpcReduction="10000"/>
           </a:bodyPr>
           <a:lstStyle/>
           <a:p>
@@ -15002,7 +14371,7 @@
         </p:spPr>
         <p:txBody>
           <a:bodyPr wrap="square" lIns="25400" tIns="25400" rIns="25400" bIns="25400" rtlCol="0" anchor="t">
-            <a:normAutofit/>
+            <a:normAutofit lnSpcReduction="10000"/>
           </a:bodyPr>
           <a:lstStyle/>
           <a:p>
@@ -15070,7 +14439,7 @@
         </p:spPr>
         <p:txBody>
           <a:bodyPr wrap="square" lIns="25400" tIns="25400" rIns="25400" bIns="25400" rtlCol="0" anchor="t">
-            <a:normAutofit/>
+            <a:normAutofit lnSpcReduction="10000"/>
           </a:bodyPr>
           <a:lstStyle/>
           <a:p>
@@ -15111,7 +14480,7 @@
         </p:spPr>
         <p:txBody>
           <a:bodyPr wrap="square" lIns="25400" tIns="25400" rIns="25400" bIns="25400" rtlCol="0" anchor="t">
-            <a:normAutofit/>
+            <a:normAutofit fontScale="92500" lnSpcReduction="10000"/>
           </a:bodyPr>
           <a:lstStyle/>
           <a:p>
@@ -15155,7 +14524,7 @@
         </p:spPr>
         <p:txBody>
           <a:bodyPr wrap="square" lIns="25400" tIns="25400" rIns="25400" bIns="25400" rtlCol="0" anchor="t">
-            <a:normAutofit/>
+            <a:normAutofit lnSpcReduction="10000"/>
           </a:bodyPr>
           <a:lstStyle/>
           <a:p>
@@ -15196,7 +14565,7 @@
         </p:spPr>
         <p:txBody>
           <a:bodyPr wrap="square" lIns="25400" tIns="25400" rIns="25400" bIns="25400" rtlCol="0" anchor="t">
-            <a:normAutofit/>
+            <a:normAutofit lnSpcReduction="10000"/>
           </a:bodyPr>
           <a:lstStyle/>
           <a:p>
@@ -15237,7 +14606,7 @@
         </p:spPr>
         <p:txBody>
           <a:bodyPr wrap="square" lIns="25400" tIns="25400" rIns="25400" bIns="25400" rtlCol="0" anchor="t">
-            <a:normAutofit/>
+            <a:normAutofit lnSpcReduction="10000"/>
           </a:bodyPr>
           <a:lstStyle/>
           <a:p>
@@ -15278,7 +14647,7 @@
         </p:spPr>
         <p:txBody>
           <a:bodyPr wrap="square" lIns="25400" tIns="25400" rIns="25400" bIns="25400" rtlCol="0" anchor="t">
-            <a:normAutofit/>
+            <a:normAutofit lnSpcReduction="10000"/>
           </a:bodyPr>
           <a:lstStyle/>
           <a:p>
@@ -15524,7 +14893,7 @@
         </p:spPr>
         <p:txBody>
           <a:bodyPr wrap="square" lIns="25400" tIns="25400" rIns="25400" bIns="25400" rtlCol="0" anchor="t">
-            <a:normAutofit/>
+            <a:normAutofit lnSpcReduction="10000"/>
           </a:bodyPr>
           <a:lstStyle/>
           <a:p>
@@ -15565,7 +14934,7 @@
         </p:spPr>
         <p:txBody>
           <a:bodyPr wrap="square" lIns="25400" tIns="25400" rIns="25400" bIns="25400" rtlCol="0" anchor="t">
-            <a:normAutofit/>
+            <a:normAutofit fontScale="92500" lnSpcReduction="20000"/>
           </a:bodyPr>
           <a:lstStyle/>
           <a:p>
@@ -15598,7 +14967,7 @@
         </p:nvSpPr>
         <p:spPr>
           <a:xfrm>
-            <a:off x="1143000" y="3190875"/>
+            <a:off x="1143000" y="2915571"/>
             <a:ext cx="7620000" cy="9525"/>
           </a:xfrm>
           <a:prstGeom prst="rect">
@@ -15625,7 +14994,7 @@
         </p:nvSpPr>
         <p:spPr>
           <a:xfrm>
-            <a:off x="1143000" y="2733675"/>
+            <a:off x="1143000" y="2458371"/>
             <a:ext cx="685800" cy="314325"/>
           </a:xfrm>
           <a:prstGeom prst="rect">
@@ -15666,7 +15035,7 @@
         </p:nvSpPr>
         <p:spPr>
           <a:xfrm>
-            <a:off x="1752600" y="2724150"/>
+            <a:off x="1752600" y="2448846"/>
             <a:ext cx="7220712" cy="333375"/>
           </a:xfrm>
           <a:prstGeom prst="rect">
@@ -15677,7 +15046,7 @@
         </p:spPr>
         <p:txBody>
           <a:bodyPr wrap="square" lIns="25400" tIns="25400" rIns="25400" bIns="25400" rtlCol="0" anchor="t">
-            <a:normAutofit/>
+            <a:normAutofit lnSpcReduction="10000"/>
           </a:bodyPr>
           <a:lstStyle/>
           <a:p>
@@ -15707,7 +15076,7 @@
         </p:nvSpPr>
         <p:spPr>
           <a:xfrm>
-            <a:off x="9525000" y="3190875"/>
+            <a:off x="9525000" y="2915571"/>
             <a:ext cx="7620000" cy="9525"/>
           </a:xfrm>
           <a:prstGeom prst="rect">
@@ -15734,7 +15103,7 @@
         </p:nvSpPr>
         <p:spPr>
           <a:xfrm>
-            <a:off x="9525000" y="2733675"/>
+            <a:off x="9525000" y="2458371"/>
             <a:ext cx="685800" cy="314325"/>
           </a:xfrm>
           <a:prstGeom prst="rect">
@@ -15775,7 +15144,7 @@
         </p:nvSpPr>
         <p:spPr>
           <a:xfrm>
-            <a:off x="10134600" y="2724150"/>
+            <a:off x="10134600" y="2448846"/>
             <a:ext cx="7220712" cy="333375"/>
           </a:xfrm>
           <a:prstGeom prst="rect">
@@ -15786,7 +15155,7 @@
         </p:spPr>
         <p:txBody>
           <a:bodyPr wrap="square" lIns="25400" tIns="25400" rIns="25400" bIns="25400" rtlCol="0" anchor="t">
-            <a:normAutofit/>
+            <a:normAutofit lnSpcReduction="10000"/>
           </a:bodyPr>
           <a:lstStyle/>
           <a:p>
@@ -15816,7 +15185,7 @@
         </p:nvSpPr>
         <p:spPr>
           <a:xfrm>
-            <a:off x="1143000" y="4010025"/>
+            <a:off x="1143000" y="3734721"/>
             <a:ext cx="7620000" cy="9525"/>
           </a:xfrm>
           <a:prstGeom prst="rect">
@@ -15843,7 +15212,7 @@
         </p:nvSpPr>
         <p:spPr>
           <a:xfrm>
-            <a:off x="1143000" y="3552825"/>
+            <a:off x="1143000" y="3277521"/>
             <a:ext cx="685800" cy="314325"/>
           </a:xfrm>
           <a:prstGeom prst="rect">
@@ -15884,7 +15253,7 @@
         </p:nvSpPr>
         <p:spPr>
           <a:xfrm>
-            <a:off x="1752600" y="3543300"/>
+            <a:off x="1752600" y="3267996"/>
             <a:ext cx="7220712" cy="333375"/>
           </a:xfrm>
           <a:prstGeom prst="rect">
@@ -15895,7 +15264,7 @@
         </p:spPr>
         <p:txBody>
           <a:bodyPr wrap="square" lIns="25400" tIns="25400" rIns="25400" bIns="25400" rtlCol="0" anchor="t">
-            <a:normAutofit/>
+            <a:normAutofit lnSpcReduction="10000"/>
           </a:bodyPr>
           <a:lstStyle/>
           <a:p>
@@ -15925,7 +15294,7 @@
         </p:nvSpPr>
         <p:spPr>
           <a:xfrm>
-            <a:off x="9525000" y="4010025"/>
+            <a:off x="9525000" y="3734721"/>
             <a:ext cx="7620000" cy="9525"/>
           </a:xfrm>
           <a:prstGeom prst="rect">
@@ -15952,7 +15321,7 @@
         </p:nvSpPr>
         <p:spPr>
           <a:xfrm>
-            <a:off x="9525000" y="3552825"/>
+            <a:off x="9525000" y="3277521"/>
             <a:ext cx="685800" cy="314325"/>
           </a:xfrm>
           <a:prstGeom prst="rect">
@@ -15993,7 +15362,7 @@
         </p:nvSpPr>
         <p:spPr>
           <a:xfrm>
-            <a:off x="10134600" y="3543300"/>
+            <a:off x="10134600" y="3267996"/>
             <a:ext cx="7220712" cy="333375"/>
           </a:xfrm>
           <a:prstGeom prst="rect">
@@ -16004,7 +15373,7 @@
         </p:spPr>
         <p:txBody>
           <a:bodyPr wrap="square" lIns="25400" tIns="25400" rIns="25400" bIns="25400" rtlCol="0" anchor="t">
-            <a:normAutofit/>
+            <a:normAutofit lnSpcReduction="10000"/>
           </a:bodyPr>
           <a:lstStyle/>
           <a:p>
@@ -16034,7 +15403,7 @@
         </p:nvSpPr>
         <p:spPr>
           <a:xfrm>
-            <a:off x="1143000" y="4829175"/>
+            <a:off x="1143000" y="4553871"/>
             <a:ext cx="7620000" cy="9525"/>
           </a:xfrm>
           <a:prstGeom prst="rect">
@@ -16061,7 +15430,7 @@
         </p:nvSpPr>
         <p:spPr>
           <a:xfrm>
-            <a:off x="1143000" y="4371975"/>
+            <a:off x="1143000" y="4096671"/>
             <a:ext cx="685800" cy="314325"/>
           </a:xfrm>
           <a:prstGeom prst="rect">
@@ -16102,7 +15471,7 @@
         </p:nvSpPr>
         <p:spPr>
           <a:xfrm>
-            <a:off x="1752600" y="4362450"/>
+            <a:off x="1752600" y="4087146"/>
             <a:ext cx="7220712" cy="333375"/>
           </a:xfrm>
           <a:prstGeom prst="rect">
@@ -16113,7 +15482,7 @@
         </p:spPr>
         <p:txBody>
           <a:bodyPr wrap="square" lIns="25400" tIns="25400" rIns="25400" bIns="25400" rtlCol="0" anchor="t">
-            <a:normAutofit/>
+            <a:normAutofit lnSpcReduction="10000"/>
           </a:bodyPr>
           <a:lstStyle/>
           <a:p>
@@ -16143,7 +15512,7 @@
         </p:nvSpPr>
         <p:spPr>
           <a:xfrm>
-            <a:off x="9525000" y="4829175"/>
+            <a:off x="9525000" y="4553871"/>
             <a:ext cx="7620000" cy="9525"/>
           </a:xfrm>
           <a:prstGeom prst="rect">
@@ -16170,7 +15539,7 @@
         </p:nvSpPr>
         <p:spPr>
           <a:xfrm>
-            <a:off x="9525000" y="4371975"/>
+            <a:off x="9525000" y="4096671"/>
             <a:ext cx="685800" cy="314325"/>
           </a:xfrm>
           <a:prstGeom prst="rect">
@@ -16211,7 +15580,7 @@
         </p:nvSpPr>
         <p:spPr>
           <a:xfrm>
-            <a:off x="10134600" y="4362450"/>
+            <a:off x="10134600" y="4087146"/>
             <a:ext cx="7220712" cy="333375"/>
           </a:xfrm>
           <a:prstGeom prst="rect">
@@ -16222,7 +15591,7 @@
         </p:spPr>
         <p:txBody>
           <a:bodyPr wrap="square" lIns="25400" tIns="25400" rIns="25400" bIns="25400" rtlCol="0" anchor="t">
-            <a:normAutofit/>
+            <a:normAutofit lnSpcReduction="10000"/>
           </a:bodyPr>
           <a:lstStyle/>
           <a:p>
@@ -16252,7 +15621,7 @@
         </p:nvSpPr>
         <p:spPr>
           <a:xfrm>
-            <a:off x="1143000" y="5648325"/>
+            <a:off x="1143000" y="5373021"/>
             <a:ext cx="7620000" cy="9525"/>
           </a:xfrm>
           <a:prstGeom prst="rect">
@@ -16279,7 +15648,7 @@
         </p:nvSpPr>
         <p:spPr>
           <a:xfrm>
-            <a:off x="1143000" y="5191125"/>
+            <a:off x="1143000" y="4915821"/>
             <a:ext cx="685800" cy="314325"/>
           </a:xfrm>
           <a:prstGeom prst="rect">
@@ -16320,7 +15689,7 @@
         </p:nvSpPr>
         <p:spPr>
           <a:xfrm>
-            <a:off x="1752600" y="5181600"/>
+            <a:off x="1752600" y="4906296"/>
             <a:ext cx="7220712" cy="333375"/>
           </a:xfrm>
           <a:prstGeom prst="rect">
@@ -16331,7 +15700,7 @@
         </p:spPr>
         <p:txBody>
           <a:bodyPr wrap="square" lIns="25400" tIns="25400" rIns="25400" bIns="25400" rtlCol="0" anchor="t">
-            <a:normAutofit/>
+            <a:normAutofit lnSpcReduction="10000"/>
           </a:bodyPr>
           <a:lstStyle/>
           <a:p>
@@ -16361,7 +15730,7 @@
         </p:nvSpPr>
         <p:spPr>
           <a:xfrm>
-            <a:off x="9525000" y="5648325"/>
+            <a:off x="9525000" y="5373021"/>
             <a:ext cx="7620000" cy="9525"/>
           </a:xfrm>
           <a:prstGeom prst="rect">
@@ -16388,7 +15757,7 @@
         </p:nvSpPr>
         <p:spPr>
           <a:xfrm>
-            <a:off x="9525000" y="5191125"/>
+            <a:off x="9525000" y="4915821"/>
             <a:ext cx="685800" cy="314325"/>
           </a:xfrm>
           <a:prstGeom prst="rect">
@@ -16429,7 +15798,7 @@
         </p:nvSpPr>
         <p:spPr>
           <a:xfrm>
-            <a:off x="10134600" y="5181600"/>
+            <a:off x="10134600" y="4906296"/>
             <a:ext cx="7220712" cy="333375"/>
           </a:xfrm>
           <a:prstGeom prst="rect">
@@ -16440,7 +15809,7 @@
         </p:spPr>
         <p:txBody>
           <a:bodyPr wrap="square" lIns="25400" tIns="25400" rIns="25400" bIns="25400" rtlCol="0" anchor="t">
-            <a:normAutofit/>
+            <a:normAutofit lnSpcReduction="10000"/>
           </a:bodyPr>
           <a:lstStyle/>
           <a:p>
@@ -16470,7 +15839,7 @@
         </p:nvSpPr>
         <p:spPr>
           <a:xfrm>
-            <a:off x="1143000" y="6467475"/>
+            <a:off x="1143000" y="6192171"/>
             <a:ext cx="7620000" cy="9525"/>
           </a:xfrm>
           <a:prstGeom prst="rect">
@@ -16497,7 +15866,7 @@
         </p:nvSpPr>
         <p:spPr>
           <a:xfrm>
-            <a:off x="1143000" y="6010275"/>
+            <a:off x="1143000" y="5734971"/>
             <a:ext cx="685800" cy="314325"/>
           </a:xfrm>
           <a:prstGeom prst="rect">
@@ -16538,7 +15907,7 @@
         </p:nvSpPr>
         <p:spPr>
           <a:xfrm>
-            <a:off x="1752600" y="6000750"/>
+            <a:off x="1752600" y="5725446"/>
             <a:ext cx="7220712" cy="333375"/>
           </a:xfrm>
           <a:prstGeom prst="rect">
@@ -16549,7 +15918,7 @@
         </p:spPr>
         <p:txBody>
           <a:bodyPr wrap="square" lIns="25400" tIns="25400" rIns="25400" bIns="25400" rtlCol="0" anchor="t">
-            <a:normAutofit/>
+            <a:normAutofit lnSpcReduction="10000"/>
           </a:bodyPr>
           <a:lstStyle/>
           <a:p>
@@ -16579,7 +15948,7 @@
         </p:nvSpPr>
         <p:spPr>
           <a:xfrm>
-            <a:off x="9525000" y="6467475"/>
+            <a:off x="9525000" y="6192171"/>
             <a:ext cx="7620000" cy="9525"/>
           </a:xfrm>
           <a:prstGeom prst="rect">
@@ -16606,7 +15975,7 @@
         </p:nvSpPr>
         <p:spPr>
           <a:xfrm>
-            <a:off x="9525000" y="6010275"/>
+            <a:off x="9525000" y="5734971"/>
             <a:ext cx="685800" cy="314325"/>
           </a:xfrm>
           <a:prstGeom prst="rect">
@@ -16647,7 +16016,7 @@
         </p:nvSpPr>
         <p:spPr>
           <a:xfrm>
-            <a:off x="10134600" y="6000750"/>
+            <a:off x="10134600" y="5725446"/>
             <a:ext cx="7220712" cy="333375"/>
           </a:xfrm>
           <a:prstGeom prst="rect">
@@ -16658,7 +16027,7 @@
         </p:spPr>
         <p:txBody>
           <a:bodyPr wrap="square" lIns="25400" tIns="25400" rIns="25400" bIns="25400" rtlCol="0" anchor="t">
-            <a:normAutofit/>
+            <a:normAutofit lnSpcReduction="10000"/>
           </a:bodyPr>
           <a:lstStyle/>
           <a:p>
@@ -16688,7 +16057,7 @@
         </p:nvSpPr>
         <p:spPr>
           <a:xfrm>
-            <a:off x="1143000" y="7286625"/>
+            <a:off x="1143000" y="7011321"/>
             <a:ext cx="7620000" cy="9525"/>
           </a:xfrm>
           <a:prstGeom prst="rect">
@@ -16715,7 +16084,7 @@
         </p:nvSpPr>
         <p:spPr>
           <a:xfrm>
-            <a:off x="1143000" y="6829425"/>
+            <a:off x="1143000" y="6554121"/>
             <a:ext cx="685800" cy="314325"/>
           </a:xfrm>
           <a:prstGeom prst="rect">
@@ -16756,7 +16125,7 @@
         </p:nvSpPr>
         <p:spPr>
           <a:xfrm>
-            <a:off x="1752600" y="6819900"/>
+            <a:off x="1752600" y="6544596"/>
             <a:ext cx="7220712" cy="333375"/>
           </a:xfrm>
           <a:prstGeom prst="rect">
@@ -16767,7 +16136,7 @@
         </p:spPr>
         <p:txBody>
           <a:bodyPr wrap="square" lIns="25400" tIns="25400" rIns="25400" bIns="25400" rtlCol="0" anchor="t">
-            <a:normAutofit/>
+            <a:normAutofit lnSpcReduction="10000"/>
           </a:bodyPr>
           <a:lstStyle/>
           <a:p>
@@ -16797,7 +16166,7 @@
         </p:nvSpPr>
         <p:spPr>
           <a:xfrm>
-            <a:off x="9525000" y="7286625"/>
+            <a:off x="9525000" y="7011321"/>
             <a:ext cx="7620000" cy="9525"/>
           </a:xfrm>
           <a:prstGeom prst="rect">
@@ -16824,7 +16193,7 @@
         </p:nvSpPr>
         <p:spPr>
           <a:xfrm>
-            <a:off x="9525000" y="6829425"/>
+            <a:off x="9525000" y="6554121"/>
             <a:ext cx="685800" cy="314325"/>
           </a:xfrm>
           <a:prstGeom prst="rect">
@@ -16865,7 +16234,7 @@
         </p:nvSpPr>
         <p:spPr>
           <a:xfrm>
-            <a:off x="10134600" y="6819900"/>
+            <a:off x="10134600" y="6544596"/>
             <a:ext cx="7220712" cy="333375"/>
           </a:xfrm>
           <a:prstGeom prst="rect">
@@ -16876,7 +16245,7 @@
         </p:spPr>
         <p:txBody>
           <a:bodyPr wrap="square" lIns="25400" tIns="25400" rIns="25400" bIns="25400" rtlCol="0" anchor="t">
-            <a:normAutofit/>
+            <a:normAutofit lnSpcReduction="10000"/>
           </a:bodyPr>
           <a:lstStyle/>
           <a:p>
@@ -16906,7 +16275,7 @@
         </p:nvSpPr>
         <p:spPr>
           <a:xfrm>
-            <a:off x="1143000" y="8105775"/>
+            <a:off x="1143000" y="7830471"/>
             <a:ext cx="7620000" cy="9525"/>
           </a:xfrm>
           <a:prstGeom prst="rect">
@@ -16933,7 +16302,7 @@
         </p:nvSpPr>
         <p:spPr>
           <a:xfrm>
-            <a:off x="1143000" y="7648575"/>
+            <a:off x="1143000" y="7373271"/>
             <a:ext cx="685800" cy="314325"/>
           </a:xfrm>
           <a:prstGeom prst="rect">
@@ -16974,7 +16343,7 @@
         </p:nvSpPr>
         <p:spPr>
           <a:xfrm>
-            <a:off x="1752600" y="7639050"/>
+            <a:off x="1752600" y="7363746"/>
             <a:ext cx="7220712" cy="333375"/>
           </a:xfrm>
           <a:prstGeom prst="rect">
@@ -16985,7 +16354,7 @@
         </p:spPr>
         <p:txBody>
           <a:bodyPr wrap="square" lIns="25400" tIns="25400" rIns="25400" bIns="25400" rtlCol="0" anchor="t">
-            <a:normAutofit/>
+            <a:normAutofit lnSpcReduction="10000"/>
           </a:bodyPr>
           <a:lstStyle/>
           <a:p>
@@ -17015,7 +16384,7 @@
         </p:nvSpPr>
         <p:spPr>
           <a:xfrm>
-            <a:off x="9525000" y="8105775"/>
+            <a:off x="9525000" y="7830471"/>
             <a:ext cx="7620000" cy="9525"/>
           </a:xfrm>
           <a:prstGeom prst="rect">
@@ -17042,7 +16411,7 @@
         </p:nvSpPr>
         <p:spPr>
           <a:xfrm>
-            <a:off x="9525000" y="7648575"/>
+            <a:off x="9525000" y="7373271"/>
             <a:ext cx="685800" cy="314325"/>
           </a:xfrm>
           <a:prstGeom prst="rect">
@@ -17083,7 +16452,7 @@
         </p:nvSpPr>
         <p:spPr>
           <a:xfrm>
-            <a:off x="10134600" y="7639050"/>
+            <a:off x="10134600" y="7363746"/>
             <a:ext cx="7220712" cy="333375"/>
           </a:xfrm>
           <a:prstGeom prst="rect">
@@ -17094,7 +16463,7 @@
         </p:spPr>
         <p:txBody>
           <a:bodyPr wrap="square" lIns="25400" tIns="25400" rIns="25400" bIns="25400" rtlCol="0" anchor="t">
-            <a:normAutofit/>
+            <a:normAutofit lnSpcReduction="10000"/>
           </a:bodyPr>
           <a:lstStyle/>
           <a:p>
@@ -17124,7 +16493,7 @@
         </p:nvSpPr>
         <p:spPr>
           <a:xfrm>
-            <a:off x="1143000" y="8924925"/>
+            <a:off x="1143000" y="8649621"/>
             <a:ext cx="7620000" cy="9525"/>
           </a:xfrm>
           <a:prstGeom prst="rect">
@@ -17151,7 +16520,7 @@
         </p:nvSpPr>
         <p:spPr>
           <a:xfrm>
-            <a:off x="1143000" y="8467725"/>
+            <a:off x="1143000" y="8192421"/>
             <a:ext cx="685800" cy="314325"/>
           </a:xfrm>
           <a:prstGeom prst="rect">
@@ -17192,7 +16561,7 @@
         </p:nvSpPr>
         <p:spPr>
           <a:xfrm>
-            <a:off x="1752600" y="8458200"/>
+            <a:off x="1752600" y="8182896"/>
             <a:ext cx="7220712" cy="333375"/>
           </a:xfrm>
           <a:prstGeom prst="rect">
@@ -17203,7 +16572,7 @@
         </p:spPr>
         <p:txBody>
           <a:bodyPr wrap="square" lIns="25400" tIns="25400" rIns="25400" bIns="25400" rtlCol="0" anchor="t">
-            <a:normAutofit/>
+            <a:normAutofit lnSpcReduction="10000"/>
           </a:bodyPr>
           <a:lstStyle/>
           <a:p>
@@ -17233,7 +16602,7 @@
         </p:nvSpPr>
         <p:spPr>
           <a:xfrm>
-            <a:off x="9525000" y="8924925"/>
+            <a:off x="9525000" y="8649621"/>
             <a:ext cx="7620000" cy="9525"/>
           </a:xfrm>
           <a:prstGeom prst="rect">
@@ -17260,7 +16629,7 @@
         </p:nvSpPr>
         <p:spPr>
           <a:xfrm>
-            <a:off x="9525000" y="8467725"/>
+            <a:off x="9525000" y="8192421"/>
             <a:ext cx="685800" cy="314325"/>
           </a:xfrm>
           <a:prstGeom prst="rect">
@@ -17301,7 +16670,7 @@
         </p:nvSpPr>
         <p:spPr>
           <a:xfrm>
-            <a:off x="10134600" y="8458200"/>
+            <a:off x="10134600" y="8182896"/>
             <a:ext cx="7220712" cy="333375"/>
           </a:xfrm>
           <a:prstGeom prst="rect">
@@ -17312,7 +16681,7 @@
         </p:spPr>
         <p:txBody>
           <a:bodyPr wrap="square" lIns="25400" tIns="25400" rIns="25400" bIns="25400" rtlCol="0" anchor="t">
-            <a:normAutofit/>
+            <a:normAutofit lnSpcReduction="10000"/>
           </a:bodyPr>
           <a:lstStyle/>
           <a:p>
@@ -17336,40 +16705,13 @@
       </p:sp>
       <p:sp>
         <p:nvSpPr>
-          <p:cNvPr id="52" name="Shape 50"/>
-          <p:cNvSpPr/>
-          <p:nvPr/>
-        </p:nvSpPr>
-        <p:spPr>
-          <a:xfrm>
-            <a:off x="1143000" y="9744075"/>
-            <a:ext cx="7620000" cy="9525"/>
-          </a:xfrm>
-          <a:prstGeom prst="rect">
-            <a:avLst/>
-          </a:prstGeom>
-          <a:solidFill>
-            <a:srgbClr val="E8DFCD"/>
-          </a:solidFill>
-          <a:ln/>
-        </p:spPr>
-        <p:txBody>
-          <a:bodyPr/>
-          <a:lstStyle/>
-          <a:p>
-            <a:endParaRPr lang="sv-SE"/>
-          </a:p>
-        </p:txBody>
-      </p:sp>
-      <p:sp>
-        <p:nvSpPr>
           <p:cNvPr id="53" name="Text 51"/>
           <p:cNvSpPr/>
           <p:nvPr/>
         </p:nvSpPr>
         <p:spPr>
           <a:xfrm>
-            <a:off x="1143000" y="9286875"/>
+            <a:off x="1143000" y="9011571"/>
             <a:ext cx="685800" cy="314325"/>
           </a:xfrm>
           <a:prstGeom prst="rect">
@@ -17410,7 +16752,7 @@
         </p:nvSpPr>
         <p:spPr>
           <a:xfrm>
-            <a:off x="1752600" y="9277350"/>
+            <a:off x="1752600" y="9002046"/>
             <a:ext cx="7220712" cy="333375"/>
           </a:xfrm>
           <a:prstGeom prst="rect">
@@ -17421,7 +16763,7 @@
         </p:spPr>
         <p:txBody>
           <a:bodyPr wrap="square" lIns="25400" tIns="25400" rIns="25400" bIns="25400" rtlCol="0" anchor="t">
-            <a:normAutofit/>
+            <a:normAutofit lnSpcReduction="10000"/>
           </a:bodyPr>
           <a:lstStyle/>
           <a:p>
@@ -17445,40 +16787,13 @@
       </p:sp>
       <p:sp>
         <p:nvSpPr>
-          <p:cNvPr id="55" name="Shape 53"/>
-          <p:cNvSpPr/>
-          <p:nvPr/>
-        </p:nvSpPr>
-        <p:spPr>
-          <a:xfrm>
-            <a:off x="9525000" y="9744075"/>
-            <a:ext cx="7620000" cy="9525"/>
-          </a:xfrm>
-          <a:prstGeom prst="rect">
-            <a:avLst/>
-          </a:prstGeom>
-          <a:solidFill>
-            <a:srgbClr val="E8DFCD"/>
-          </a:solidFill>
-          <a:ln/>
-        </p:spPr>
-        <p:txBody>
-          <a:bodyPr/>
-          <a:lstStyle/>
-          <a:p>
-            <a:endParaRPr lang="sv-SE"/>
-          </a:p>
-        </p:txBody>
-      </p:sp>
-      <p:sp>
-        <p:nvSpPr>
           <p:cNvPr id="56" name="Shape 54"/>
           <p:cNvSpPr/>
           <p:nvPr/>
         </p:nvSpPr>
         <p:spPr>
           <a:xfrm>
-            <a:off x="1143000" y="9486900"/>
+            <a:off x="1143000" y="9471996"/>
             <a:ext cx="16002000" cy="9525"/>
           </a:xfrm>
           <a:prstGeom prst="rect">
@@ -17653,7 +16968,7 @@
         </p:spPr>
         <p:txBody>
           <a:bodyPr wrap="square" lIns="25400" tIns="25400" rIns="25400" bIns="25400" rtlCol="0" anchor="t">
-            <a:normAutofit/>
+            <a:normAutofit lnSpcReduction="10000"/>
           </a:bodyPr>
           <a:lstStyle/>
           <a:p>
@@ -17694,7 +17009,7 @@
         </p:spPr>
         <p:txBody>
           <a:bodyPr wrap="square" lIns="25400" tIns="25400" rIns="25400" bIns="25400" rtlCol="0" anchor="t">
-            <a:normAutofit/>
+            <a:normAutofit fontScale="92500" lnSpcReduction="20000"/>
           </a:bodyPr>
           <a:lstStyle/>
           <a:p>
@@ -17800,41 +17115,14 @@
       </p:sp>
       <p:sp>
         <p:nvSpPr>
-          <p:cNvPr id="6" name="Shape 4"/>
-          <p:cNvSpPr/>
-          <p:nvPr/>
-        </p:nvSpPr>
-        <p:spPr>
-          <a:xfrm>
-            <a:off x="1143000" y="3878461"/>
-            <a:ext cx="7658100" cy="9525"/>
-          </a:xfrm>
-          <a:prstGeom prst="rect">
-            <a:avLst/>
-          </a:prstGeom>
-          <a:solidFill>
-            <a:srgbClr val="E8DFCD"/>
-          </a:solidFill>
-          <a:ln/>
-        </p:spPr>
-        <p:txBody>
-          <a:bodyPr/>
-          <a:lstStyle/>
-          <a:p>
-            <a:endParaRPr lang="sv-SE"/>
-          </a:p>
-        </p:txBody>
-      </p:sp>
-      <p:sp>
-        <p:nvSpPr>
-          <p:cNvPr id="7" name="Text 5"/>
+          <p:cNvPr id="8" name="Text 6"/>
           <p:cNvSpPr/>
           <p:nvPr/>
         </p:nvSpPr>
         <p:spPr>
           <a:xfrm>
             <a:off x="1143000" y="3086100"/>
-            <a:ext cx="1981200" cy="678061"/>
+            <a:ext cx="7887843" cy="6030445"/>
           </a:xfrm>
           <a:prstGeom prst="rect">
             <a:avLst/>
@@ -17855,30 +17143,57 @@
               <a:buNone/>
             </a:pPr>
             <a:r>
-              <a:rPr lang="en-US" sz="1800" dirty="0">
-                <a:solidFill>
-                  <a:srgbClr val="4A4A4A"/>
+              <a:rPr lang="en-US" sz="1950" dirty="0">
+                <a:solidFill>
+                  <a:srgbClr val="1A1A1A"/>
                 </a:solidFill>
                 <a:latin typeface="-apple-system" pitchFamily="34" charset="0"/>
                 <a:ea typeface="-apple-system" pitchFamily="34" charset="-122"/>
                 <a:cs typeface="-apple-system" pitchFamily="34" charset="-120"/>
               </a:rPr>
-              <a:t>Organisation</a:t>
-            </a:r>
-            <a:endParaRPr lang="en-US" sz="1800" dirty="0"/>
-          </a:p>
-        </p:txBody>
-      </p:sp>
-      <p:sp>
-        <p:nvSpPr>
-          <p:cNvPr id="8" name="Text 6"/>
-          <p:cNvSpPr/>
-          <p:nvPr/>
-        </p:nvSpPr>
-        <p:spPr>
-          <a:xfrm>
-            <a:off x="3238500" y="3086100"/>
-            <a:ext cx="5729478" cy="678061"/>
+              <a:t>{Nuläge}</a:t>
+            </a:r>
+            <a:endParaRPr lang="en-US" sz="1950" dirty="0"/>
+          </a:p>
+        </p:txBody>
+      </p:sp>
+      <p:sp>
+        <p:nvSpPr>
+          <p:cNvPr id="15" name="Shape 13"/>
+          <p:cNvSpPr/>
+          <p:nvPr/>
+        </p:nvSpPr>
+        <p:spPr>
+          <a:xfrm>
+            <a:off x="9486900" y="2867025"/>
+            <a:ext cx="7658100" cy="9525"/>
+          </a:xfrm>
+          <a:prstGeom prst="rect">
+            <a:avLst/>
+          </a:prstGeom>
+          <a:solidFill>
+            <a:srgbClr val="1A1A1A"/>
+          </a:solidFill>
+          <a:ln/>
+        </p:spPr>
+        <p:txBody>
+          <a:bodyPr/>
+          <a:lstStyle/>
+          <a:p>
+            <a:endParaRPr lang="sv-SE"/>
+          </a:p>
+        </p:txBody>
+      </p:sp>
+      <p:sp>
+        <p:nvSpPr>
+          <p:cNvPr id="16" name="Text 14"/>
+          <p:cNvSpPr/>
+          <p:nvPr/>
+        </p:nvSpPr>
+        <p:spPr>
+          <a:xfrm>
+            <a:off x="9486900" y="2514600"/>
+            <a:ext cx="7887843" cy="257175"/>
           </a:xfrm>
           <a:prstGeom prst="rect">
             <a:avLst/>
@@ -17893,13 +17208,66 @@
           <a:lstStyle/>
           <a:p>
             <a:pPr marL="0" indent="0" algn="l">
+              <a:buNone/>
+            </a:pPr>
+            <a:r>
+              <a:rPr lang="en-US" sz="1350" kern="0" spc="135" dirty="0">
+                <a:solidFill>
+                  <a:srgbClr val="2B5F5F"/>
+                </a:solidFill>
+                <a:latin typeface="IBM Plex Mono" pitchFamily="34" charset="0"/>
+                <a:ea typeface="IBM Plex Mono" pitchFamily="34" charset="-122"/>
+                <a:cs typeface="IBM Plex Mono" pitchFamily="34" charset="-120"/>
+              </a:rPr>
+              <a:t>B </a:t>
+            </a:r>
+            <a:r>
+              <a:rPr lang="en-US" sz="1350" kern="0" spc="135" dirty="0">
+                <a:solidFill>
+                  <a:srgbClr val="4A4A4A"/>
+                </a:solidFill>
+                <a:latin typeface="IBM Plex Mono" pitchFamily="34" charset="0"/>
+                <a:ea typeface="IBM Plex Mono" pitchFamily="34" charset="-122"/>
+                <a:cs typeface="IBM Plex Mono" pitchFamily="34" charset="-120"/>
+              </a:rPr>
+              <a:t>SMÄRTPUNKTER</a:t>
+            </a:r>
+            <a:endParaRPr lang="en-US" sz="1350" dirty="0"/>
+          </a:p>
+        </p:txBody>
+      </p:sp>
+      <p:sp>
+        <p:nvSpPr>
+          <p:cNvPr id="18" name="Text 16"/>
+          <p:cNvSpPr/>
+          <p:nvPr/>
+        </p:nvSpPr>
+        <p:spPr>
+          <a:xfrm>
+            <a:off x="9486900" y="3086100"/>
+            <a:ext cx="7887843" cy="6030445"/>
+          </a:xfrm>
+          <a:prstGeom prst="rect">
+            <a:avLst/>
+          </a:prstGeom>
+          <a:noFill/>
+          <a:ln/>
+        </p:spPr>
+        <p:txBody>
+          <a:bodyPr wrap="square" lIns="25400" tIns="25400" rIns="25400" bIns="25400" rtlCol="0" anchor="t">
+            <a:normAutofit/>
+          </a:bodyPr>
+          <a:lstStyle/>
+          <a:p>
+            <a:pPr marL="285750" indent="-285750" algn="l">
               <a:lnSpc>
                 <a:spcPct val="140000"/>
               </a:lnSpc>
-              <a:buNone/>
-            </a:pPr>
-            <a:r>
-              <a:rPr lang="en-US" sz="1800" dirty="0">
+              <a:buFont typeface="Arial" panose="020B0604020202020204" pitchFamily="34" charset="0"/>
+              <a:buChar char="—"/>
+            </a:pPr>
+            <a:r>
+              <a:rPr lang="en-US" sz="1950" dirty="0">
                 <a:solidFill>
                   <a:srgbClr val="1A1A1A"/>
                 </a:solidFill>
@@ -17907,600 +17275,7 @@
                 <a:ea typeface="-apple-system" pitchFamily="34" charset="-122"/>
                 <a:cs typeface="-apple-system" pitchFamily="34" charset="-120"/>
               </a:rPr>
-              <a:t>{Kundens nuläge — organisation: förvaltningar, antal anställda, geografi}</a:t>
-            </a:r>
-            <a:endParaRPr lang="en-US" sz="1800" dirty="0"/>
-          </a:p>
-        </p:txBody>
-      </p:sp>
-      <p:sp>
-        <p:nvSpPr>
-          <p:cNvPr id="9" name="Shape 7"/>
-          <p:cNvSpPr/>
-          <p:nvPr/>
-        </p:nvSpPr>
-        <p:spPr>
-          <a:xfrm>
-            <a:off x="1143000" y="4870847"/>
-            <a:ext cx="7658100" cy="9525"/>
-          </a:xfrm>
-          <a:prstGeom prst="rect">
-            <a:avLst/>
-          </a:prstGeom>
-          <a:solidFill>
-            <a:srgbClr val="E8DFCD"/>
-          </a:solidFill>
-          <a:ln/>
-        </p:spPr>
-        <p:txBody>
-          <a:bodyPr/>
-          <a:lstStyle/>
-          <a:p>
-            <a:endParaRPr lang="sv-SE"/>
-          </a:p>
-        </p:txBody>
-      </p:sp>
-      <p:sp>
-        <p:nvSpPr>
-          <p:cNvPr id="10" name="Text 8"/>
-          <p:cNvSpPr/>
-          <p:nvPr/>
-        </p:nvSpPr>
-        <p:spPr>
-          <a:xfrm>
-            <a:off x="1143000" y="4078486"/>
-            <a:ext cx="1981200" cy="678061"/>
-          </a:xfrm>
-          <a:prstGeom prst="rect">
-            <a:avLst/>
-          </a:prstGeom>
-          <a:noFill/>
-          <a:ln/>
-        </p:spPr>
-        <p:txBody>
-          <a:bodyPr wrap="square" lIns="25400" tIns="25400" rIns="25400" bIns="25400" rtlCol="0" anchor="t">
-            <a:normAutofit/>
-          </a:bodyPr>
-          <a:lstStyle/>
-          <a:p>
-            <a:pPr marL="0" indent="0" algn="l">
-              <a:lnSpc>
-                <a:spcPct val="140000"/>
-              </a:lnSpc>
-              <a:buNone/>
-            </a:pPr>
-            <a:r>
-              <a:rPr lang="en-US" sz="1800" dirty="0">
-                <a:solidFill>
-                  <a:srgbClr val="4A4A4A"/>
-                </a:solidFill>
-                <a:latin typeface="-apple-system" pitchFamily="34" charset="0"/>
-                <a:ea typeface="-apple-system" pitchFamily="34" charset="-122"/>
-                <a:cs typeface="-apple-system" pitchFamily="34" charset="-120"/>
-              </a:rPr>
-              <a:t>System</a:t>
-            </a:r>
-            <a:endParaRPr lang="en-US" sz="1800" dirty="0"/>
-          </a:p>
-        </p:txBody>
-      </p:sp>
-      <p:sp>
-        <p:nvSpPr>
-          <p:cNvPr id="11" name="Text 9"/>
-          <p:cNvSpPr/>
-          <p:nvPr/>
-        </p:nvSpPr>
-        <p:spPr>
-          <a:xfrm>
-            <a:off x="3238500" y="4078486"/>
-            <a:ext cx="5729478" cy="678061"/>
-          </a:xfrm>
-          <a:prstGeom prst="rect">
-            <a:avLst/>
-          </a:prstGeom>
-          <a:noFill/>
-          <a:ln/>
-        </p:spPr>
-        <p:txBody>
-          <a:bodyPr wrap="square" lIns="25400" tIns="25400" rIns="25400" bIns="25400" rtlCol="0" anchor="t">
-            <a:normAutofit/>
-          </a:bodyPr>
-          <a:lstStyle/>
-          <a:p>
-            <a:pPr marL="0" indent="0" algn="l">
-              <a:lnSpc>
-                <a:spcPct val="140000"/>
-              </a:lnSpc>
-              <a:buNone/>
-            </a:pPr>
-            <a:r>
-              <a:rPr lang="en-US" sz="1800" dirty="0">
-                <a:solidFill>
-                  <a:srgbClr val="1A1A1A"/>
-                </a:solidFill>
-                <a:latin typeface="-apple-system" pitchFamily="34" charset="0"/>
-                <a:ea typeface="-apple-system" pitchFamily="34" charset="-122"/>
-                <a:cs typeface="-apple-system" pitchFamily="34" charset="-120"/>
-              </a:rPr>
-              <a:t>{Kundens nuläge — system: nuvarande verksamhetssystem, integrationer, leverantörer}</a:t>
-            </a:r>
-            <a:endParaRPr lang="en-US" sz="1800" dirty="0"/>
-          </a:p>
-        </p:txBody>
-      </p:sp>
-      <p:sp>
-        <p:nvSpPr>
-          <p:cNvPr id="12" name="Shape 10"/>
-          <p:cNvSpPr/>
-          <p:nvPr/>
-        </p:nvSpPr>
-        <p:spPr>
-          <a:xfrm>
-            <a:off x="1143000" y="5863233"/>
-            <a:ext cx="7658100" cy="9525"/>
-          </a:xfrm>
-          <a:prstGeom prst="rect">
-            <a:avLst/>
-          </a:prstGeom>
-          <a:solidFill>
-            <a:srgbClr val="E8DFCD"/>
-          </a:solidFill>
-          <a:ln/>
-        </p:spPr>
-        <p:txBody>
-          <a:bodyPr/>
-          <a:lstStyle/>
-          <a:p>
-            <a:endParaRPr lang="sv-SE"/>
-          </a:p>
-        </p:txBody>
-      </p:sp>
-      <p:sp>
-        <p:nvSpPr>
-          <p:cNvPr id="13" name="Text 11"/>
-          <p:cNvSpPr/>
-          <p:nvPr/>
-        </p:nvSpPr>
-        <p:spPr>
-          <a:xfrm>
-            <a:off x="1143000" y="5070872"/>
-            <a:ext cx="1981200" cy="678061"/>
-          </a:xfrm>
-          <a:prstGeom prst="rect">
-            <a:avLst/>
-          </a:prstGeom>
-          <a:noFill/>
-          <a:ln/>
-        </p:spPr>
-        <p:txBody>
-          <a:bodyPr wrap="square" lIns="25400" tIns="25400" rIns="25400" bIns="25400" rtlCol="0" anchor="t">
-            <a:normAutofit/>
-          </a:bodyPr>
-          <a:lstStyle/>
-          <a:p>
-            <a:pPr marL="0" indent="0" algn="l">
-              <a:lnSpc>
-                <a:spcPct val="140000"/>
-              </a:lnSpc>
-              <a:buNone/>
-            </a:pPr>
-            <a:r>
-              <a:rPr lang="en-US" sz="1800" dirty="0">
-                <a:solidFill>
-                  <a:srgbClr val="4A4A4A"/>
-                </a:solidFill>
-                <a:latin typeface="-apple-system" pitchFamily="34" charset="0"/>
-                <a:ea typeface="-apple-system" pitchFamily="34" charset="-122"/>
-                <a:cs typeface="-apple-system" pitchFamily="34" charset="-120"/>
-              </a:rPr>
-              <a:t>Processer</a:t>
-            </a:r>
-            <a:endParaRPr lang="en-US" sz="1800" dirty="0"/>
-          </a:p>
-        </p:txBody>
-      </p:sp>
-      <p:sp>
-        <p:nvSpPr>
-          <p:cNvPr id="14" name="Text 12"/>
-          <p:cNvSpPr/>
-          <p:nvPr/>
-        </p:nvSpPr>
-        <p:spPr>
-          <a:xfrm>
-            <a:off x="3238500" y="5070872"/>
-            <a:ext cx="5729478" cy="678061"/>
-          </a:xfrm>
-          <a:prstGeom prst="rect">
-            <a:avLst/>
-          </a:prstGeom>
-          <a:noFill/>
-          <a:ln/>
-        </p:spPr>
-        <p:txBody>
-          <a:bodyPr wrap="square" lIns="25400" tIns="25400" rIns="25400" bIns="25400" rtlCol="0" anchor="t">
-            <a:normAutofit/>
-          </a:bodyPr>
-          <a:lstStyle/>
-          <a:p>
-            <a:pPr marL="0" indent="0" algn="l">
-              <a:lnSpc>
-                <a:spcPct val="140000"/>
-              </a:lnSpc>
-              <a:buNone/>
-            </a:pPr>
-            <a:r>
-              <a:rPr lang="en-US" sz="1800" dirty="0">
-                <a:solidFill>
-                  <a:srgbClr val="1A1A1A"/>
-                </a:solidFill>
-                <a:latin typeface="-apple-system" pitchFamily="34" charset="0"/>
-                <a:ea typeface="-apple-system" pitchFamily="34" charset="-122"/>
-                <a:cs typeface="-apple-system" pitchFamily="34" charset="-120"/>
-              </a:rPr>
-              <a:t>{Kundens nuläge — processer: arbetssätt, styrning, beslutsvägar}</a:t>
-            </a:r>
-            <a:endParaRPr lang="en-US" sz="1800" dirty="0"/>
-          </a:p>
-        </p:txBody>
-      </p:sp>
-      <p:sp>
-        <p:nvSpPr>
-          <p:cNvPr id="15" name="Shape 13"/>
-          <p:cNvSpPr/>
-          <p:nvPr/>
-        </p:nvSpPr>
-        <p:spPr>
-          <a:xfrm>
-            <a:off x="9486900" y="2867025"/>
-            <a:ext cx="7658100" cy="9525"/>
-          </a:xfrm>
-          <a:prstGeom prst="rect">
-            <a:avLst/>
-          </a:prstGeom>
-          <a:solidFill>
-            <a:srgbClr val="1A1A1A"/>
-          </a:solidFill>
-          <a:ln/>
-        </p:spPr>
-        <p:txBody>
-          <a:bodyPr/>
-          <a:lstStyle/>
-          <a:p>
-            <a:endParaRPr lang="sv-SE"/>
-          </a:p>
-        </p:txBody>
-      </p:sp>
-      <p:sp>
-        <p:nvSpPr>
-          <p:cNvPr id="16" name="Text 14"/>
-          <p:cNvSpPr/>
-          <p:nvPr/>
-        </p:nvSpPr>
-        <p:spPr>
-          <a:xfrm>
-            <a:off x="9486900" y="2514600"/>
-            <a:ext cx="7887843" cy="257175"/>
-          </a:xfrm>
-          <a:prstGeom prst="rect">
-            <a:avLst/>
-          </a:prstGeom>
-          <a:noFill/>
-          <a:ln/>
-        </p:spPr>
-        <p:txBody>
-          <a:bodyPr wrap="square" lIns="25400" tIns="25400" rIns="25400" bIns="25400" rtlCol="0" anchor="t">
-            <a:normAutofit/>
-          </a:bodyPr>
-          <a:lstStyle/>
-          <a:p>
-            <a:pPr marL="0" indent="0" algn="l">
-              <a:buNone/>
-            </a:pPr>
-            <a:r>
-              <a:rPr lang="en-US" sz="1350" kern="0" spc="135" dirty="0">
-                <a:solidFill>
-                  <a:srgbClr val="2B5F5F"/>
-                </a:solidFill>
-                <a:latin typeface="IBM Plex Mono" pitchFamily="34" charset="0"/>
-                <a:ea typeface="IBM Plex Mono" pitchFamily="34" charset="-122"/>
-                <a:cs typeface="IBM Plex Mono" pitchFamily="34" charset="-120"/>
-              </a:rPr>
-              <a:t>B </a:t>
-            </a:r>
-            <a:r>
-              <a:rPr lang="en-US" sz="1350" kern="0" spc="135" dirty="0">
-                <a:solidFill>
-                  <a:srgbClr val="4A4A4A"/>
-                </a:solidFill>
-                <a:latin typeface="IBM Plex Mono" pitchFamily="34" charset="0"/>
-                <a:ea typeface="IBM Plex Mono" pitchFamily="34" charset="-122"/>
-                <a:cs typeface="IBM Plex Mono" pitchFamily="34" charset="-120"/>
-              </a:rPr>
-              <a:t>SMÄRTPUNKTER</a:t>
-            </a:r>
-            <a:endParaRPr lang="en-US" sz="1350" dirty="0"/>
-          </a:p>
-        </p:txBody>
-      </p:sp>
-      <p:sp>
-        <p:nvSpPr>
-          <p:cNvPr id="17" name="Shape 15"/>
-          <p:cNvSpPr/>
-          <p:nvPr/>
-        </p:nvSpPr>
-        <p:spPr>
-          <a:xfrm>
-            <a:off x="9486900" y="3086100"/>
-            <a:ext cx="19050" cy="693241"/>
-          </a:xfrm>
-          <a:prstGeom prst="rect">
-            <a:avLst/>
-          </a:prstGeom>
-          <a:solidFill>
-            <a:srgbClr val="2B5F5F"/>
-          </a:solidFill>
-          <a:ln/>
-        </p:spPr>
-        <p:txBody>
-          <a:bodyPr/>
-          <a:lstStyle/>
-          <a:p>
-            <a:endParaRPr lang="sv-SE"/>
-          </a:p>
-        </p:txBody>
-      </p:sp>
-      <p:sp>
-        <p:nvSpPr>
-          <p:cNvPr id="18" name="Text 16"/>
-          <p:cNvSpPr/>
-          <p:nvPr/>
-        </p:nvSpPr>
-        <p:spPr>
-          <a:xfrm>
-            <a:off x="9734550" y="3086100"/>
-            <a:ext cx="7640193" cy="731341"/>
-          </a:xfrm>
-          <a:prstGeom prst="rect">
-            <a:avLst/>
-          </a:prstGeom>
-          <a:noFill/>
-          <a:ln/>
-        </p:spPr>
-        <p:txBody>
-          <a:bodyPr wrap="square" lIns="25400" tIns="25400" rIns="25400" bIns="25400" rtlCol="0" anchor="t">
-            <a:normAutofit/>
-          </a:bodyPr>
-          <a:lstStyle/>
-          <a:p>
-            <a:pPr marL="0" indent="0" algn="l">
-              <a:lnSpc>
-                <a:spcPct val="140000"/>
-              </a:lnSpc>
-              <a:buNone/>
-            </a:pPr>
-            <a:r>
-              <a:rPr lang="en-US" sz="1950" dirty="0">
-                <a:solidFill>
-                  <a:srgbClr val="4A4A4A"/>
-                </a:solidFill>
-                <a:latin typeface="-apple-system" pitchFamily="34" charset="0"/>
-                <a:ea typeface="-apple-system" pitchFamily="34" charset="-122"/>
-                <a:cs typeface="-apple-system" pitchFamily="34" charset="-120"/>
-              </a:rPr>
-              <a:t>{Smärtpunkt 1 — vad som inte fungerar idag och hur det påverkar verksamheten}</a:t>
-            </a:r>
-            <a:endParaRPr lang="en-US" sz="1950" dirty="0"/>
-          </a:p>
-        </p:txBody>
-      </p:sp>
-      <p:sp>
-        <p:nvSpPr>
-          <p:cNvPr id="19" name="Shape 17"/>
-          <p:cNvSpPr/>
-          <p:nvPr/>
-        </p:nvSpPr>
-        <p:spPr>
-          <a:xfrm>
-            <a:off x="9486900" y="3988891"/>
-            <a:ext cx="19050" cy="346621"/>
-          </a:xfrm>
-          <a:prstGeom prst="rect">
-            <a:avLst/>
-          </a:prstGeom>
-          <a:solidFill>
-            <a:srgbClr val="2B5F5F"/>
-          </a:solidFill>
-          <a:ln/>
-        </p:spPr>
-        <p:txBody>
-          <a:bodyPr/>
-          <a:lstStyle/>
-          <a:p>
-            <a:endParaRPr lang="sv-SE"/>
-          </a:p>
-        </p:txBody>
-      </p:sp>
-      <p:sp>
-        <p:nvSpPr>
-          <p:cNvPr id="20" name="Text 18"/>
-          <p:cNvSpPr/>
-          <p:nvPr/>
-        </p:nvSpPr>
-        <p:spPr>
-          <a:xfrm>
-            <a:off x="9734550" y="3988891"/>
-            <a:ext cx="7640193" cy="384721"/>
-          </a:xfrm>
-          <a:prstGeom prst="rect">
-            <a:avLst/>
-          </a:prstGeom>
-          <a:noFill/>
-          <a:ln/>
-        </p:spPr>
-        <p:txBody>
-          <a:bodyPr wrap="square" lIns="25400" tIns="25400" rIns="25400" bIns="25400" rtlCol="0" anchor="t">
-            <a:normAutofit/>
-          </a:bodyPr>
-          <a:lstStyle/>
-          <a:p>
-            <a:pPr marL="0" indent="0" algn="l">
-              <a:lnSpc>
-                <a:spcPct val="140000"/>
-              </a:lnSpc>
-              <a:buNone/>
-            </a:pPr>
-            <a:r>
-              <a:rPr lang="en-US" sz="1950" dirty="0">
-                <a:solidFill>
-                  <a:srgbClr val="4A4A4A"/>
-                </a:solidFill>
-                <a:latin typeface="-apple-system" pitchFamily="34" charset="0"/>
-                <a:ea typeface="-apple-system" pitchFamily="34" charset="-122"/>
-                <a:cs typeface="-apple-system" pitchFamily="34" charset="-120"/>
-              </a:rPr>
-              <a:t>{Smärtpunkt 2}</a:t>
-            </a:r>
-            <a:endParaRPr lang="en-US" sz="1950" dirty="0"/>
-          </a:p>
-        </p:txBody>
-      </p:sp>
-      <p:sp>
-        <p:nvSpPr>
-          <p:cNvPr id="21" name="Shape 19"/>
-          <p:cNvSpPr/>
-          <p:nvPr/>
-        </p:nvSpPr>
-        <p:spPr>
-          <a:xfrm>
-            <a:off x="9486900" y="4545062"/>
-            <a:ext cx="19050" cy="346621"/>
-          </a:xfrm>
-          <a:prstGeom prst="rect">
-            <a:avLst/>
-          </a:prstGeom>
-          <a:solidFill>
-            <a:srgbClr val="2B5F5F"/>
-          </a:solidFill>
-          <a:ln/>
-        </p:spPr>
-        <p:txBody>
-          <a:bodyPr/>
-          <a:lstStyle/>
-          <a:p>
-            <a:endParaRPr lang="sv-SE"/>
-          </a:p>
-        </p:txBody>
-      </p:sp>
-      <p:sp>
-        <p:nvSpPr>
-          <p:cNvPr id="22" name="Text 20"/>
-          <p:cNvSpPr/>
-          <p:nvPr/>
-        </p:nvSpPr>
-        <p:spPr>
-          <a:xfrm>
-            <a:off x="9734550" y="4545062"/>
-            <a:ext cx="7640193" cy="384721"/>
-          </a:xfrm>
-          <a:prstGeom prst="rect">
-            <a:avLst/>
-          </a:prstGeom>
-          <a:noFill/>
-          <a:ln/>
-        </p:spPr>
-        <p:txBody>
-          <a:bodyPr wrap="square" lIns="25400" tIns="25400" rIns="25400" bIns="25400" rtlCol="0" anchor="t">
-            <a:normAutofit/>
-          </a:bodyPr>
-          <a:lstStyle/>
-          <a:p>
-            <a:pPr marL="0" indent="0" algn="l">
-              <a:lnSpc>
-                <a:spcPct val="140000"/>
-              </a:lnSpc>
-              <a:buNone/>
-            </a:pPr>
-            <a:r>
-              <a:rPr lang="en-US" sz="1950" dirty="0">
-                <a:solidFill>
-                  <a:srgbClr val="4A4A4A"/>
-                </a:solidFill>
-                <a:latin typeface="-apple-system" pitchFamily="34" charset="0"/>
-                <a:ea typeface="-apple-system" pitchFamily="34" charset="-122"/>
-                <a:cs typeface="-apple-system" pitchFamily="34" charset="-120"/>
-              </a:rPr>
-              <a:t>{Smärtpunkt 3}</a:t>
-            </a:r>
-            <a:endParaRPr lang="en-US" sz="1950" dirty="0"/>
-          </a:p>
-        </p:txBody>
-      </p:sp>
-      <p:sp>
-        <p:nvSpPr>
-          <p:cNvPr id="23" name="Shape 21"/>
-          <p:cNvSpPr/>
-          <p:nvPr/>
-        </p:nvSpPr>
-        <p:spPr>
-          <a:xfrm>
-            <a:off x="9486900" y="5101233"/>
-            <a:ext cx="19050" cy="346621"/>
-          </a:xfrm>
-          <a:prstGeom prst="rect">
-            <a:avLst/>
-          </a:prstGeom>
-          <a:solidFill>
-            <a:srgbClr val="2B5F5F"/>
-          </a:solidFill>
-          <a:ln/>
-        </p:spPr>
-        <p:txBody>
-          <a:bodyPr/>
-          <a:lstStyle/>
-          <a:p>
-            <a:endParaRPr lang="sv-SE"/>
-          </a:p>
-        </p:txBody>
-      </p:sp>
-      <p:sp>
-        <p:nvSpPr>
-          <p:cNvPr id="24" name="Text 22"/>
-          <p:cNvSpPr/>
-          <p:nvPr/>
-        </p:nvSpPr>
-        <p:spPr>
-          <a:xfrm>
-            <a:off x="9734550" y="5101233"/>
-            <a:ext cx="7640193" cy="384721"/>
-          </a:xfrm>
-          <a:prstGeom prst="rect">
-            <a:avLst/>
-          </a:prstGeom>
-          <a:noFill/>
-          <a:ln/>
-        </p:spPr>
-        <p:txBody>
-          <a:bodyPr wrap="square" lIns="25400" tIns="25400" rIns="25400" bIns="25400" rtlCol="0" anchor="t">
-            <a:normAutofit/>
-          </a:bodyPr>
-          <a:lstStyle/>
-          <a:p>
-            <a:pPr marL="0" indent="0" algn="l">
-              <a:lnSpc>
-                <a:spcPct val="140000"/>
-              </a:lnSpc>
-              <a:buNone/>
-            </a:pPr>
-            <a:r>
-              <a:rPr lang="en-US" sz="1950" dirty="0">
-                <a:solidFill>
-                  <a:srgbClr val="4A4A4A"/>
-                </a:solidFill>
-                <a:latin typeface="-apple-system" pitchFamily="34" charset="0"/>
-                <a:ea typeface="-apple-system" pitchFamily="34" charset="-122"/>
-                <a:cs typeface="-apple-system" pitchFamily="34" charset="-120"/>
-              </a:rPr>
-              <a:t>{Smärtpunkt 4}</a:t>
+              <a:t>{Smärtpunkter}</a:t>
             </a:r>
             <a:endParaRPr lang="en-US" sz="1950" dirty="0"/>
           </a:p>
@@ -18689,7 +17464,7 @@
         </p:spPr>
         <p:txBody>
           <a:bodyPr wrap="square" lIns="25400" tIns="25400" rIns="25400" bIns="25400" rtlCol="0" anchor="t">
-            <a:normAutofit/>
+            <a:normAutofit lnSpcReduction="10000"/>
           </a:bodyPr>
           <a:lstStyle/>
           <a:p>
@@ -18730,7 +17505,7 @@
         </p:spPr>
         <p:txBody>
           <a:bodyPr wrap="square" lIns="25400" tIns="25400" rIns="25400" bIns="25400" rtlCol="0" anchor="t">
-            <a:normAutofit/>
+            <a:normAutofit fontScale="92500" lnSpcReduction="20000"/>
           </a:bodyPr>
           <a:lstStyle/>
           <a:p>
@@ -18774,7 +17549,7 @@
         </p:spPr>
         <p:txBody>
           <a:bodyPr wrap="square" lIns="25400" tIns="25400" rIns="25400" bIns="25400" rtlCol="0" anchor="t">
-            <a:normAutofit/>
+            <a:normAutofit fontScale="92500" lnSpcReduction="20000"/>
           </a:bodyPr>
           <a:lstStyle/>
           <a:p>
@@ -18807,8 +17582,8 @@
         </p:nvSpPr>
         <p:spPr>
           <a:xfrm>
-            <a:off x="1143000" y="3067050"/>
-            <a:ext cx="14716125" cy="838200"/>
+            <a:off x="1143000" y="3067049"/>
+            <a:ext cx="16002000" cy="6067425"/>
           </a:xfrm>
           <a:prstGeom prst="rect">
             <a:avLst/>
@@ -18822,24 +17597,23 @@
           </a:bodyPr>
           <a:lstStyle/>
           <a:p>
-            <a:pPr marL="0" indent="0" algn="l">
+            <a:pPr>
               <a:lnSpc>
                 <a:spcPct val="150000"/>
               </a:lnSpc>
-              <a:buNone/>
-            </a:pPr>
-            <a:r>
-              <a:rPr lang="en-US" sz="2100" dirty="0">
-                <a:solidFill>
-                  <a:srgbClr val="4A4A4A"/>
-                </a:solidFill>
-                <a:latin typeface="-apple-system" pitchFamily="34" charset="0"/>
-                <a:ea typeface="-apple-system" pitchFamily="34" charset="-122"/>
-                <a:cs typeface="-apple-system" pitchFamily="34" charset="-120"/>
-              </a:rPr>
-              <a:t>{Uppdraget parafraserat med våra ord — stycke 1. Visa att vi har läst kravspecifikationen noggrant genom att beskriva syftet, målet och huvudsakliga leveranser med egna ord.}</a:t>
-            </a:r>
-            <a:endParaRPr lang="en-US" sz="2100" dirty="0"/>
+            </a:pPr>
+            <a:r>
+              <a:rPr lang="en-US" sz="2100" dirty="0"/>
+              <a:t>{</a:t>
+            </a:r>
+            <a:r>
+              <a:rPr lang="en-US" sz="2100" dirty="0" err="1"/>
+              <a:t>Stycken</a:t>
+            </a:r>
+            <a:r>
+              <a:rPr lang="en-US" sz="2100" dirty="0"/>
+              <a:t>}</a:t>
+            </a:r>
           </a:p>
         </p:txBody>
       </p:sp>
@@ -18872,17 +17646,6 @@
               </a:lnSpc>
               <a:buNone/>
             </a:pPr>
-            <a:r>
-              <a:rPr lang="en-US" sz="2100" dirty="0">
-                <a:solidFill>
-                  <a:srgbClr val="4A4A4A"/>
-                </a:solidFill>
-                <a:latin typeface="-apple-system" pitchFamily="34" charset="0"/>
-                <a:ea typeface="-apple-system" pitchFamily="34" charset="-122"/>
-                <a:cs typeface="-apple-system" pitchFamily="34" charset="-120"/>
-              </a:rPr>
-              <a:t>{Uppdraget parafraserat med våra ord — stycke 2. Beskriv omfattning, avgränsningar och förväntat utfall så att upphandlaren ser att vi har förstått uppdraget korrekt.}</a:t>
-            </a:r>
             <a:endParaRPr lang="en-US" sz="2100" dirty="0"/>
           </a:p>
         </p:txBody>
@@ -18916,17 +17679,6 @@
               </a:lnSpc>
               <a:buNone/>
             </a:pPr>
-            <a:r>
-              <a:rPr lang="en-US" sz="2100" dirty="0">
-                <a:solidFill>
-                  <a:srgbClr val="4A4A4A"/>
-                </a:solidFill>
-                <a:latin typeface="-apple-system" pitchFamily="34" charset="0"/>
-                <a:ea typeface="-apple-system" pitchFamily="34" charset="-122"/>
-                <a:cs typeface="-apple-system" pitchFamily="34" charset="-120"/>
-              </a:rPr>
-              <a:t>{Uppdraget parafraserat med våra ord — stycke 3. Tydliggör vilka intressenter som berörs och hur uppdraget knyter an till kundens övergripande mål.}</a:t>
-            </a:r>
             <a:endParaRPr lang="en-US" sz="2100" dirty="0"/>
           </a:p>
         </p:txBody>
@@ -19114,7 +17866,7 @@
         </p:spPr>
         <p:txBody>
           <a:bodyPr wrap="square" lIns="25400" tIns="25400" rIns="25400" bIns="25400" rtlCol="0" anchor="t">
-            <a:normAutofit/>
+            <a:normAutofit lnSpcReduction="10000"/>
           </a:bodyPr>
           <a:lstStyle/>
           <a:p>
@@ -19155,7 +17907,7 @@
         </p:spPr>
         <p:txBody>
           <a:bodyPr wrap="square" lIns="25400" tIns="25400" rIns="25400" bIns="25400" rtlCol="0" anchor="t">
-            <a:normAutofit/>
+            <a:normAutofit fontScale="92500" lnSpcReduction="20000"/>
           </a:bodyPr>
           <a:lstStyle/>
           <a:p>
@@ -19267,8 +18019,8 @@
         </p:nvSpPr>
         <p:spPr>
           <a:xfrm>
-            <a:off x="1143000" y="3086100"/>
-            <a:ext cx="19050" cy="693241"/>
+            <a:off x="1143000" y="3086099"/>
+            <a:ext cx="19050" cy="6228000"/>
           </a:xfrm>
           <a:prstGeom prst="rect">
             <a:avLst/>
@@ -19294,8 +18046,8 @@
         </p:nvSpPr>
         <p:spPr>
           <a:xfrm>
-            <a:off x="1390650" y="3086100"/>
-            <a:ext cx="7640193" cy="731341"/>
+            <a:off x="1390650" y="3086099"/>
+            <a:ext cx="7640193" cy="6227999"/>
           </a:xfrm>
           <a:prstGeom prst="rect">
             <a:avLst/>
@@ -19309,11 +18061,10 @@
           </a:bodyPr>
           <a:lstStyle/>
           <a:p>
-            <a:pPr marL="0" indent="0" algn="l">
+            <a:pPr>
               <a:lnSpc>
                 <a:spcPct val="140000"/>
               </a:lnSpc>
-              <a:buNone/>
             </a:pPr>
             <a:r>
               <a:rPr lang="en-US" sz="1950" dirty="0">
@@ -19324,7 +18075,29 @@
                 <a:ea typeface="-apple-system" pitchFamily="34" charset="-122"/>
                 <a:cs typeface="-apple-system" pitchFamily="34" charset="-120"/>
               </a:rPr>
-              <a:t>{Utmaning 1 — en konkret utmaning vi ser i uppdraget och varför den är viktig att hantera}</a:t>
+              <a:t>{</a:t>
+            </a:r>
+            <a:r>
+              <a:rPr lang="en-US" sz="1950" dirty="0" err="1">
+                <a:solidFill>
+                  <a:srgbClr val="4A4A4A"/>
+                </a:solidFill>
+                <a:latin typeface="-apple-system" pitchFamily="34" charset="0"/>
+                <a:ea typeface="-apple-system" pitchFamily="34" charset="-122"/>
+                <a:cs typeface="-apple-system" pitchFamily="34" charset="-120"/>
+              </a:rPr>
+              <a:t>Utmaningar</a:t>
+            </a:r>
+            <a:r>
+              <a:rPr lang="en-US" sz="1950" dirty="0">
+                <a:solidFill>
+                  <a:srgbClr val="4A4A4A"/>
+                </a:solidFill>
+                <a:latin typeface="-apple-system" pitchFamily="34" charset="0"/>
+                <a:ea typeface="-apple-system" pitchFamily="34" charset="-122"/>
+                <a:cs typeface="-apple-system" pitchFamily="34" charset="-120"/>
+              </a:rPr>
+              <a:t>}</a:t>
             </a:r>
             <a:endParaRPr lang="en-US" sz="1950" dirty="0"/>
           </a:p>
@@ -19332,14 +18105,328 @@
       </p:sp>
       <p:sp>
         <p:nvSpPr>
-          <p:cNvPr id="8" name="Shape 6"/>
-          <p:cNvSpPr/>
-          <p:nvPr/>
-        </p:nvSpPr>
-        <p:spPr>
-          <a:xfrm>
-            <a:off x="1143000" y="3988891"/>
-            <a:ext cx="19050" cy="346621"/>
+          <p:cNvPr id="14" name="Shape 12"/>
+          <p:cNvSpPr/>
+          <p:nvPr/>
+        </p:nvSpPr>
+        <p:spPr>
+          <a:xfrm>
+            <a:off x="9486900" y="2867025"/>
+            <a:ext cx="7658100" cy="9525"/>
+          </a:xfrm>
+          <a:prstGeom prst="rect">
+            <a:avLst/>
+          </a:prstGeom>
+          <a:solidFill>
+            <a:srgbClr val="1A1A1A"/>
+          </a:solidFill>
+          <a:ln/>
+        </p:spPr>
+        <p:txBody>
+          <a:bodyPr/>
+          <a:lstStyle/>
+          <a:p>
+            <a:endParaRPr lang="sv-SE"/>
+          </a:p>
+        </p:txBody>
+      </p:sp>
+      <p:sp>
+        <p:nvSpPr>
+          <p:cNvPr id="15" name="Text 13"/>
+          <p:cNvSpPr/>
+          <p:nvPr/>
+        </p:nvSpPr>
+        <p:spPr>
+          <a:xfrm>
+            <a:off x="9486900" y="2514600"/>
+            <a:ext cx="7887843" cy="257175"/>
+          </a:xfrm>
+          <a:prstGeom prst="rect">
+            <a:avLst/>
+          </a:prstGeom>
+          <a:noFill/>
+          <a:ln/>
+        </p:spPr>
+        <p:txBody>
+          <a:bodyPr wrap="square" lIns="25400" tIns="25400" rIns="25400" bIns="25400" rtlCol="0" anchor="t">
+            <a:normAutofit/>
+          </a:bodyPr>
+          <a:lstStyle/>
+          <a:p>
+            <a:pPr marL="0" indent="0" algn="l">
+              <a:buNone/>
+            </a:pPr>
+            <a:r>
+              <a:rPr lang="en-US" sz="1350" kern="0" spc="135" dirty="0">
+                <a:solidFill>
+                  <a:srgbClr val="2B5F5F"/>
+                </a:solidFill>
+                <a:latin typeface="IBM Plex Mono" pitchFamily="34" charset="0"/>
+                <a:ea typeface="IBM Plex Mono" pitchFamily="34" charset="-122"/>
+                <a:cs typeface="IBM Plex Mono" pitchFamily="34" charset="-120"/>
+              </a:rPr>
+              <a:t>B </a:t>
+            </a:r>
+            <a:r>
+              <a:rPr lang="en-US" sz="1350" kern="0" spc="135" dirty="0">
+                <a:solidFill>
+                  <a:srgbClr val="4A4A4A"/>
+                </a:solidFill>
+                <a:latin typeface="IBM Plex Mono" pitchFamily="34" charset="0"/>
+                <a:ea typeface="IBM Plex Mono" pitchFamily="34" charset="-122"/>
+                <a:cs typeface="IBM Plex Mono" pitchFamily="34" charset="-120"/>
+              </a:rPr>
+              <a:t>VÄRDE UTÖVER SKA-KRAVEN</a:t>
+            </a:r>
+            <a:endParaRPr lang="en-US" sz="1350" dirty="0"/>
+          </a:p>
+        </p:txBody>
+      </p:sp>
+      <p:sp>
+        <p:nvSpPr>
+          <p:cNvPr id="17" name="Text 15"/>
+          <p:cNvSpPr/>
+          <p:nvPr/>
+        </p:nvSpPr>
+        <p:spPr>
+          <a:xfrm>
+            <a:off x="9734550" y="3086100"/>
+            <a:ext cx="7640193" cy="6228000"/>
+          </a:xfrm>
+          <a:prstGeom prst="rect">
+            <a:avLst/>
+          </a:prstGeom>
+          <a:noFill/>
+          <a:ln/>
+        </p:spPr>
+        <p:txBody>
+          <a:bodyPr wrap="square" lIns="25400" tIns="25400" rIns="25400" bIns="25400" rtlCol="0" anchor="t">
+            <a:normAutofit/>
+          </a:bodyPr>
+          <a:lstStyle/>
+          <a:p>
+            <a:pPr>
+              <a:lnSpc>
+                <a:spcPct val="140000"/>
+              </a:lnSpc>
+            </a:pPr>
+            <a:r>
+              <a:rPr lang="en-US" sz="1950" dirty="0">
+                <a:solidFill>
+                  <a:srgbClr val="4A4A4A"/>
+                </a:solidFill>
+                <a:latin typeface="-apple-system" pitchFamily="34" charset="0"/>
+                <a:ea typeface="-apple-system" pitchFamily="34" charset="-122"/>
+                <a:cs typeface="-apple-system" pitchFamily="34" charset="-120"/>
+              </a:rPr>
+              <a:t>{</a:t>
+            </a:r>
+            <a:r>
+              <a:rPr lang="en-US" sz="1950" dirty="0" err="1">
+                <a:solidFill>
+                  <a:srgbClr val="4A4A4A"/>
+                </a:solidFill>
+                <a:latin typeface="-apple-system" pitchFamily="34" charset="0"/>
+                <a:ea typeface="-apple-system" pitchFamily="34" charset="-122"/>
+                <a:cs typeface="-apple-system" pitchFamily="34" charset="-120"/>
+              </a:rPr>
+              <a:t>Värden</a:t>
+            </a:r>
+            <a:r>
+              <a:rPr lang="en-US" sz="1950" dirty="0">
+                <a:solidFill>
+                  <a:srgbClr val="4A4A4A"/>
+                </a:solidFill>
+                <a:latin typeface="-apple-system" pitchFamily="34" charset="0"/>
+                <a:ea typeface="-apple-system" pitchFamily="34" charset="-122"/>
+                <a:cs typeface="-apple-system" pitchFamily="34" charset="-120"/>
+              </a:rPr>
+              <a:t>}</a:t>
+            </a:r>
+            <a:endParaRPr lang="en-US" sz="1950" dirty="0"/>
+          </a:p>
+        </p:txBody>
+      </p:sp>
+      <p:sp>
+        <p:nvSpPr>
+          <p:cNvPr id="19" name="Text 17"/>
+          <p:cNvSpPr/>
+          <p:nvPr/>
+        </p:nvSpPr>
+        <p:spPr>
+          <a:xfrm>
+            <a:off x="9734550" y="3988891"/>
+            <a:ext cx="7640193" cy="384721"/>
+          </a:xfrm>
+          <a:prstGeom prst="rect">
+            <a:avLst/>
+          </a:prstGeom>
+          <a:noFill/>
+          <a:ln/>
+        </p:spPr>
+        <p:txBody>
+          <a:bodyPr wrap="square" lIns="25400" tIns="25400" rIns="25400" bIns="25400" rtlCol="0" anchor="t">
+            <a:normAutofit fontScale="92500" lnSpcReduction="10000"/>
+          </a:bodyPr>
+          <a:lstStyle/>
+          <a:p>
+            <a:pPr marL="0" indent="0" algn="l">
+              <a:lnSpc>
+                <a:spcPct val="140000"/>
+              </a:lnSpc>
+              <a:buNone/>
+            </a:pPr>
+            <a:endParaRPr lang="en-US" sz="1950" dirty="0"/>
+          </a:p>
+        </p:txBody>
+      </p:sp>
+      <p:sp>
+        <p:nvSpPr>
+          <p:cNvPr id="24" name="Shape 22"/>
+          <p:cNvSpPr/>
+          <p:nvPr/>
+        </p:nvSpPr>
+        <p:spPr>
+          <a:xfrm>
+            <a:off x="1143000" y="9486900"/>
+            <a:ext cx="16002000" cy="9525"/>
+          </a:xfrm>
+          <a:prstGeom prst="rect">
+            <a:avLst/>
+          </a:prstGeom>
+          <a:solidFill>
+            <a:srgbClr val="E8DFCD"/>
+          </a:solidFill>
+          <a:ln/>
+        </p:spPr>
+        <p:txBody>
+          <a:bodyPr/>
+          <a:lstStyle/>
+          <a:p>
+            <a:endParaRPr lang="sv-SE"/>
+          </a:p>
+        </p:txBody>
+      </p:sp>
+      <p:sp>
+        <p:nvSpPr>
+          <p:cNvPr id="25" name="Text 23"/>
+          <p:cNvSpPr/>
+          <p:nvPr/>
+        </p:nvSpPr>
+        <p:spPr>
+          <a:xfrm>
+            <a:off x="1143000" y="9686925"/>
+            <a:ext cx="3231109" cy="257175"/>
+          </a:xfrm>
+          <a:prstGeom prst="rect">
+            <a:avLst/>
+          </a:prstGeom>
+          <a:noFill/>
+          <a:ln/>
+        </p:spPr>
+        <p:txBody>
+          <a:bodyPr wrap="square" lIns="25400" tIns="25400" rIns="25400" bIns="25400" rtlCol="0" anchor="t">
+            <a:normAutofit/>
+          </a:bodyPr>
+          <a:lstStyle/>
+          <a:p>
+            <a:pPr marL="0" indent="0" algn="l">
+              <a:buNone/>
+            </a:pPr>
+            <a:r>
+              <a:rPr lang="en-US" sz="1350" kern="0" spc="27" dirty="0">
+                <a:solidFill>
+                  <a:srgbClr val="4A4A4A"/>
+                </a:solidFill>
+                <a:latin typeface="IBM Plex Mono" pitchFamily="34" charset="0"/>
+                <a:ea typeface="IBM Plex Mono" pitchFamily="34" charset="-122"/>
+                <a:cs typeface="IBM Plex Mono" pitchFamily="34" charset="-120"/>
+              </a:rPr>
+              <a:t>{Bolagsnamn} </a:t>
+            </a:r>
+            <a:r>
+              <a:rPr lang="en-US" sz="1350" kern="0" spc="27" dirty="0">
+                <a:solidFill>
+                  <a:srgbClr val="8A8A8A"/>
+                </a:solidFill>
+                <a:latin typeface="IBM Plex Mono" pitchFamily="34" charset="0"/>
+                <a:ea typeface="IBM Plex Mono" pitchFamily="34" charset="-122"/>
+                <a:cs typeface="IBM Plex Mono" pitchFamily="34" charset="-120"/>
+              </a:rPr>
+              <a:t>| </a:t>
+            </a:r>
+            <a:r>
+              <a:rPr lang="en-US" sz="1350" kern="0" spc="27" dirty="0">
+                <a:solidFill>
+                  <a:srgbClr val="4A4A4A"/>
+                </a:solidFill>
+                <a:latin typeface="IBM Plex Mono" pitchFamily="34" charset="0"/>
+                <a:ea typeface="IBM Plex Mono" pitchFamily="34" charset="-122"/>
+                <a:cs typeface="IBM Plex Mono" pitchFamily="34" charset="-120"/>
+              </a:rPr>
+              <a:t>{Diarienummer}</a:t>
+            </a:r>
+            <a:endParaRPr lang="en-US" sz="1350" dirty="0"/>
+          </a:p>
+        </p:txBody>
+      </p:sp>
+      <p:sp>
+        <p:nvSpPr>
+          <p:cNvPr id="26" name="Text 24"/>
+          <p:cNvSpPr/>
+          <p:nvPr/>
+        </p:nvSpPr>
+        <p:spPr>
+          <a:xfrm>
+            <a:off x="16400859" y="9686925"/>
+            <a:ext cx="820341" cy="257175"/>
+          </a:xfrm>
+          <a:prstGeom prst="rect">
+            <a:avLst/>
+          </a:prstGeom>
+          <a:noFill/>
+          <a:ln/>
+        </p:spPr>
+        <p:txBody>
+          <a:bodyPr wrap="square" lIns="25400" tIns="25400" rIns="25400" bIns="25400" rtlCol="0" anchor="t">
+            <a:normAutofit/>
+          </a:bodyPr>
+          <a:lstStyle/>
+          <a:p>
+            <a:pPr marL="0" indent="0" algn="l">
+              <a:buNone/>
+            </a:pPr>
+            <a:r>
+              <a:rPr lang="en-US" sz="1350" kern="0" spc="27" dirty="0">
+                <a:solidFill>
+                  <a:srgbClr val="4A4A4A"/>
+                </a:solidFill>
+                <a:latin typeface="IBM Plex Mono" pitchFamily="34" charset="0"/>
+                <a:ea typeface="IBM Plex Mono" pitchFamily="34" charset="-122"/>
+                <a:cs typeface="IBM Plex Mono" pitchFamily="34" charset="-120"/>
+              </a:rPr>
+              <a:t>05 / 17</a:t>
+            </a:r>
+            <a:endParaRPr lang="en-US" sz="1350" dirty="0"/>
+          </a:p>
+        </p:txBody>
+      </p:sp>
+      <p:sp>
+        <p:nvSpPr>
+          <p:cNvPr id="27" name="Shape 4">
+            <a:extLst>
+              <a:ext uri="{FF2B5EF4-FFF2-40B4-BE49-F238E27FC236}">
+                <a16:creationId xmlns:a16="http://schemas.microsoft.com/office/drawing/2014/main" id="{C3780692-53D5-B853-90B3-1805539B51B9}"/>
+              </a:ext>
+            </a:extLst>
+          </p:cNvPr>
+          <p:cNvSpPr/>
+          <p:nvPr/>
+        </p:nvSpPr>
+        <p:spPr>
+          <a:xfrm>
+            <a:off x="9486900" y="3086100"/>
+            <a:ext cx="19050" cy="6228000"/>
           </a:xfrm>
           <a:prstGeom prst="rect">
             <a:avLst/>
@@ -19354,686 +18441,6 @@
           <a:lstStyle/>
           <a:p>
             <a:endParaRPr lang="sv-SE"/>
-          </a:p>
-        </p:txBody>
-      </p:sp>
-      <p:sp>
-        <p:nvSpPr>
-          <p:cNvPr id="9" name="Text 7"/>
-          <p:cNvSpPr/>
-          <p:nvPr/>
-        </p:nvSpPr>
-        <p:spPr>
-          <a:xfrm>
-            <a:off x="1390650" y="3988891"/>
-            <a:ext cx="7640193" cy="384721"/>
-          </a:xfrm>
-          <a:prstGeom prst="rect">
-            <a:avLst/>
-          </a:prstGeom>
-          <a:noFill/>
-          <a:ln/>
-        </p:spPr>
-        <p:txBody>
-          <a:bodyPr wrap="square" lIns="25400" tIns="25400" rIns="25400" bIns="25400" rtlCol="0" anchor="t">
-            <a:normAutofit/>
-          </a:bodyPr>
-          <a:lstStyle/>
-          <a:p>
-            <a:pPr marL="0" indent="0" algn="l">
-              <a:lnSpc>
-                <a:spcPct val="140000"/>
-              </a:lnSpc>
-              <a:buNone/>
-            </a:pPr>
-            <a:r>
-              <a:rPr lang="en-US" sz="1950" dirty="0">
-                <a:solidFill>
-                  <a:srgbClr val="4A4A4A"/>
-                </a:solidFill>
-                <a:latin typeface="-apple-system" pitchFamily="34" charset="0"/>
-                <a:ea typeface="-apple-system" pitchFamily="34" charset="-122"/>
-                <a:cs typeface="-apple-system" pitchFamily="34" charset="-120"/>
-              </a:rPr>
-              <a:t>{Utmaning 2}</a:t>
-            </a:r>
-            <a:endParaRPr lang="en-US" sz="1950" dirty="0"/>
-          </a:p>
-        </p:txBody>
-      </p:sp>
-      <p:sp>
-        <p:nvSpPr>
-          <p:cNvPr id="10" name="Shape 8"/>
-          <p:cNvSpPr/>
-          <p:nvPr/>
-        </p:nvSpPr>
-        <p:spPr>
-          <a:xfrm>
-            <a:off x="1143000" y="4545062"/>
-            <a:ext cx="19050" cy="346621"/>
-          </a:xfrm>
-          <a:prstGeom prst="rect">
-            <a:avLst/>
-          </a:prstGeom>
-          <a:solidFill>
-            <a:srgbClr val="2B5F5F"/>
-          </a:solidFill>
-          <a:ln/>
-        </p:spPr>
-        <p:txBody>
-          <a:bodyPr/>
-          <a:lstStyle/>
-          <a:p>
-            <a:endParaRPr lang="sv-SE"/>
-          </a:p>
-        </p:txBody>
-      </p:sp>
-      <p:sp>
-        <p:nvSpPr>
-          <p:cNvPr id="11" name="Text 9"/>
-          <p:cNvSpPr/>
-          <p:nvPr/>
-        </p:nvSpPr>
-        <p:spPr>
-          <a:xfrm>
-            <a:off x="1390650" y="4545062"/>
-            <a:ext cx="7640193" cy="384721"/>
-          </a:xfrm>
-          <a:prstGeom prst="rect">
-            <a:avLst/>
-          </a:prstGeom>
-          <a:noFill/>
-          <a:ln/>
-        </p:spPr>
-        <p:txBody>
-          <a:bodyPr wrap="square" lIns="25400" tIns="25400" rIns="25400" bIns="25400" rtlCol="0" anchor="t">
-            <a:normAutofit/>
-          </a:bodyPr>
-          <a:lstStyle/>
-          <a:p>
-            <a:pPr marL="0" indent="0" algn="l">
-              <a:lnSpc>
-                <a:spcPct val="140000"/>
-              </a:lnSpc>
-              <a:buNone/>
-            </a:pPr>
-            <a:r>
-              <a:rPr lang="en-US" sz="1950" dirty="0">
-                <a:solidFill>
-                  <a:srgbClr val="4A4A4A"/>
-                </a:solidFill>
-                <a:latin typeface="-apple-system" pitchFamily="34" charset="0"/>
-                <a:ea typeface="-apple-system" pitchFamily="34" charset="-122"/>
-                <a:cs typeface="-apple-system" pitchFamily="34" charset="-120"/>
-              </a:rPr>
-              <a:t>{Utmaning 3}</a:t>
-            </a:r>
-            <a:endParaRPr lang="en-US" sz="1950" dirty="0"/>
-          </a:p>
-        </p:txBody>
-      </p:sp>
-      <p:sp>
-        <p:nvSpPr>
-          <p:cNvPr id="12" name="Shape 10"/>
-          <p:cNvSpPr/>
-          <p:nvPr/>
-        </p:nvSpPr>
-        <p:spPr>
-          <a:xfrm>
-            <a:off x="1143000" y="5101233"/>
-            <a:ext cx="19050" cy="346621"/>
-          </a:xfrm>
-          <a:prstGeom prst="rect">
-            <a:avLst/>
-          </a:prstGeom>
-          <a:solidFill>
-            <a:srgbClr val="2B5F5F"/>
-          </a:solidFill>
-          <a:ln/>
-        </p:spPr>
-        <p:txBody>
-          <a:bodyPr/>
-          <a:lstStyle/>
-          <a:p>
-            <a:endParaRPr lang="sv-SE"/>
-          </a:p>
-        </p:txBody>
-      </p:sp>
-      <p:sp>
-        <p:nvSpPr>
-          <p:cNvPr id="13" name="Text 11"/>
-          <p:cNvSpPr/>
-          <p:nvPr/>
-        </p:nvSpPr>
-        <p:spPr>
-          <a:xfrm>
-            <a:off x="1390650" y="5101233"/>
-            <a:ext cx="7640193" cy="384721"/>
-          </a:xfrm>
-          <a:prstGeom prst="rect">
-            <a:avLst/>
-          </a:prstGeom>
-          <a:noFill/>
-          <a:ln/>
-        </p:spPr>
-        <p:txBody>
-          <a:bodyPr wrap="square" lIns="25400" tIns="25400" rIns="25400" bIns="25400" rtlCol="0" anchor="t">
-            <a:normAutofit/>
-          </a:bodyPr>
-          <a:lstStyle/>
-          <a:p>
-            <a:pPr marL="0" indent="0" algn="l">
-              <a:lnSpc>
-                <a:spcPct val="140000"/>
-              </a:lnSpc>
-              <a:buNone/>
-            </a:pPr>
-            <a:r>
-              <a:rPr lang="en-US" sz="1950" dirty="0">
-                <a:solidFill>
-                  <a:srgbClr val="4A4A4A"/>
-                </a:solidFill>
-                <a:latin typeface="-apple-system" pitchFamily="34" charset="0"/>
-                <a:ea typeface="-apple-system" pitchFamily="34" charset="-122"/>
-                <a:cs typeface="-apple-system" pitchFamily="34" charset="-120"/>
-              </a:rPr>
-              <a:t>{Utmaning 4}</a:t>
-            </a:r>
-            <a:endParaRPr lang="en-US" sz="1950" dirty="0"/>
-          </a:p>
-        </p:txBody>
-      </p:sp>
-      <p:sp>
-        <p:nvSpPr>
-          <p:cNvPr id="14" name="Shape 12"/>
-          <p:cNvSpPr/>
-          <p:nvPr/>
-        </p:nvSpPr>
-        <p:spPr>
-          <a:xfrm>
-            <a:off x="9486900" y="2867025"/>
-            <a:ext cx="7658100" cy="9525"/>
-          </a:xfrm>
-          <a:prstGeom prst="rect">
-            <a:avLst/>
-          </a:prstGeom>
-          <a:solidFill>
-            <a:srgbClr val="1A1A1A"/>
-          </a:solidFill>
-          <a:ln/>
-        </p:spPr>
-        <p:txBody>
-          <a:bodyPr/>
-          <a:lstStyle/>
-          <a:p>
-            <a:endParaRPr lang="sv-SE"/>
-          </a:p>
-        </p:txBody>
-      </p:sp>
-      <p:sp>
-        <p:nvSpPr>
-          <p:cNvPr id="15" name="Text 13"/>
-          <p:cNvSpPr/>
-          <p:nvPr/>
-        </p:nvSpPr>
-        <p:spPr>
-          <a:xfrm>
-            <a:off x="9486900" y="2514600"/>
-            <a:ext cx="7887843" cy="257175"/>
-          </a:xfrm>
-          <a:prstGeom prst="rect">
-            <a:avLst/>
-          </a:prstGeom>
-          <a:noFill/>
-          <a:ln/>
-        </p:spPr>
-        <p:txBody>
-          <a:bodyPr wrap="square" lIns="25400" tIns="25400" rIns="25400" bIns="25400" rtlCol="0" anchor="t">
-            <a:normAutofit/>
-          </a:bodyPr>
-          <a:lstStyle/>
-          <a:p>
-            <a:pPr marL="0" indent="0" algn="l">
-              <a:buNone/>
-            </a:pPr>
-            <a:r>
-              <a:rPr lang="en-US" sz="1350" kern="0" spc="135" dirty="0">
-                <a:solidFill>
-                  <a:srgbClr val="2B5F5F"/>
-                </a:solidFill>
-                <a:latin typeface="IBM Plex Mono" pitchFamily="34" charset="0"/>
-                <a:ea typeface="IBM Plex Mono" pitchFamily="34" charset="-122"/>
-                <a:cs typeface="IBM Plex Mono" pitchFamily="34" charset="-120"/>
-              </a:rPr>
-              <a:t>B </a:t>
-            </a:r>
-            <a:r>
-              <a:rPr lang="en-US" sz="1350" kern="0" spc="135" dirty="0">
-                <a:solidFill>
-                  <a:srgbClr val="4A4A4A"/>
-                </a:solidFill>
-                <a:latin typeface="IBM Plex Mono" pitchFamily="34" charset="0"/>
-                <a:ea typeface="IBM Plex Mono" pitchFamily="34" charset="-122"/>
-                <a:cs typeface="IBM Plex Mono" pitchFamily="34" charset="-120"/>
-              </a:rPr>
-              <a:t>VÄRDE UTÖVER SKA-KRAVEN</a:t>
-            </a:r>
-            <a:endParaRPr lang="en-US" sz="1350" dirty="0"/>
-          </a:p>
-        </p:txBody>
-      </p:sp>
-      <p:sp>
-        <p:nvSpPr>
-          <p:cNvPr id="16" name="Shape 14"/>
-          <p:cNvSpPr/>
-          <p:nvPr/>
-        </p:nvSpPr>
-        <p:spPr>
-          <a:xfrm>
-            <a:off x="9486900" y="3086100"/>
-            <a:ext cx="19050" cy="693241"/>
-          </a:xfrm>
-          <a:prstGeom prst="rect">
-            <a:avLst/>
-          </a:prstGeom>
-          <a:solidFill>
-            <a:srgbClr val="2B5F5F"/>
-          </a:solidFill>
-          <a:ln/>
-        </p:spPr>
-        <p:txBody>
-          <a:bodyPr/>
-          <a:lstStyle/>
-          <a:p>
-            <a:endParaRPr lang="sv-SE"/>
-          </a:p>
-        </p:txBody>
-      </p:sp>
-      <p:sp>
-        <p:nvSpPr>
-          <p:cNvPr id="17" name="Text 15"/>
-          <p:cNvSpPr/>
-          <p:nvPr/>
-        </p:nvSpPr>
-        <p:spPr>
-          <a:xfrm>
-            <a:off x="9734550" y="3086100"/>
-            <a:ext cx="7640193" cy="731341"/>
-          </a:xfrm>
-          <a:prstGeom prst="rect">
-            <a:avLst/>
-          </a:prstGeom>
-          <a:noFill/>
-          <a:ln/>
-        </p:spPr>
-        <p:txBody>
-          <a:bodyPr wrap="square" lIns="25400" tIns="25400" rIns="25400" bIns="25400" rtlCol="0" anchor="t">
-            <a:normAutofit/>
-          </a:bodyPr>
-          <a:lstStyle/>
-          <a:p>
-            <a:pPr marL="0" indent="0" algn="l">
-              <a:lnSpc>
-                <a:spcPct val="140000"/>
-              </a:lnSpc>
-              <a:buNone/>
-            </a:pPr>
-            <a:r>
-              <a:rPr lang="en-US" sz="1950" dirty="0">
-                <a:solidFill>
-                  <a:srgbClr val="4A4A4A"/>
-                </a:solidFill>
-                <a:latin typeface="-apple-system" pitchFamily="34" charset="0"/>
-                <a:ea typeface="-apple-system" pitchFamily="34" charset="-122"/>
-                <a:cs typeface="-apple-system" pitchFamily="34" charset="-120"/>
-              </a:rPr>
-              <a:t>{Värde 1 — mervärde vi kan synliggöra som går utöver ska-kraven, konkret och mätbart}</a:t>
-            </a:r>
-            <a:endParaRPr lang="en-US" sz="1950" dirty="0"/>
-          </a:p>
-        </p:txBody>
-      </p:sp>
-      <p:sp>
-        <p:nvSpPr>
-          <p:cNvPr id="18" name="Shape 16"/>
-          <p:cNvSpPr/>
-          <p:nvPr/>
-        </p:nvSpPr>
-        <p:spPr>
-          <a:xfrm>
-            <a:off x="9486900" y="3988891"/>
-            <a:ext cx="19050" cy="346621"/>
-          </a:xfrm>
-          <a:prstGeom prst="rect">
-            <a:avLst/>
-          </a:prstGeom>
-          <a:solidFill>
-            <a:srgbClr val="2B5F5F"/>
-          </a:solidFill>
-          <a:ln/>
-        </p:spPr>
-        <p:txBody>
-          <a:bodyPr/>
-          <a:lstStyle/>
-          <a:p>
-            <a:endParaRPr lang="sv-SE"/>
-          </a:p>
-        </p:txBody>
-      </p:sp>
-      <p:sp>
-        <p:nvSpPr>
-          <p:cNvPr id="19" name="Text 17"/>
-          <p:cNvSpPr/>
-          <p:nvPr/>
-        </p:nvSpPr>
-        <p:spPr>
-          <a:xfrm>
-            <a:off x="9734550" y="3988891"/>
-            <a:ext cx="7640193" cy="384721"/>
-          </a:xfrm>
-          <a:prstGeom prst="rect">
-            <a:avLst/>
-          </a:prstGeom>
-          <a:noFill/>
-          <a:ln/>
-        </p:spPr>
-        <p:txBody>
-          <a:bodyPr wrap="square" lIns="25400" tIns="25400" rIns="25400" bIns="25400" rtlCol="0" anchor="t">
-            <a:normAutofit/>
-          </a:bodyPr>
-          <a:lstStyle/>
-          <a:p>
-            <a:pPr marL="0" indent="0" algn="l">
-              <a:lnSpc>
-                <a:spcPct val="140000"/>
-              </a:lnSpc>
-              <a:buNone/>
-            </a:pPr>
-            <a:r>
-              <a:rPr lang="en-US" sz="1950" dirty="0">
-                <a:solidFill>
-                  <a:srgbClr val="4A4A4A"/>
-                </a:solidFill>
-                <a:latin typeface="-apple-system" pitchFamily="34" charset="0"/>
-                <a:ea typeface="-apple-system" pitchFamily="34" charset="-122"/>
-                <a:cs typeface="-apple-system" pitchFamily="34" charset="-120"/>
-              </a:rPr>
-              <a:t>{Värde 2}</a:t>
-            </a:r>
-            <a:endParaRPr lang="en-US" sz="1950" dirty="0"/>
-          </a:p>
-        </p:txBody>
-      </p:sp>
-      <p:sp>
-        <p:nvSpPr>
-          <p:cNvPr id="20" name="Shape 18"/>
-          <p:cNvSpPr/>
-          <p:nvPr/>
-        </p:nvSpPr>
-        <p:spPr>
-          <a:xfrm>
-            <a:off x="9486900" y="4545062"/>
-            <a:ext cx="19050" cy="346621"/>
-          </a:xfrm>
-          <a:prstGeom prst="rect">
-            <a:avLst/>
-          </a:prstGeom>
-          <a:solidFill>
-            <a:srgbClr val="2B5F5F"/>
-          </a:solidFill>
-          <a:ln/>
-        </p:spPr>
-        <p:txBody>
-          <a:bodyPr/>
-          <a:lstStyle/>
-          <a:p>
-            <a:endParaRPr lang="sv-SE"/>
-          </a:p>
-        </p:txBody>
-      </p:sp>
-      <p:sp>
-        <p:nvSpPr>
-          <p:cNvPr id="21" name="Text 19"/>
-          <p:cNvSpPr/>
-          <p:nvPr/>
-        </p:nvSpPr>
-        <p:spPr>
-          <a:xfrm>
-            <a:off x="9734550" y="4545062"/>
-            <a:ext cx="7640193" cy="384721"/>
-          </a:xfrm>
-          <a:prstGeom prst="rect">
-            <a:avLst/>
-          </a:prstGeom>
-          <a:noFill/>
-          <a:ln/>
-        </p:spPr>
-        <p:txBody>
-          <a:bodyPr wrap="square" lIns="25400" tIns="25400" rIns="25400" bIns="25400" rtlCol="0" anchor="t">
-            <a:normAutofit/>
-          </a:bodyPr>
-          <a:lstStyle/>
-          <a:p>
-            <a:pPr marL="0" indent="0" algn="l">
-              <a:lnSpc>
-                <a:spcPct val="140000"/>
-              </a:lnSpc>
-              <a:buNone/>
-            </a:pPr>
-            <a:r>
-              <a:rPr lang="en-US" sz="1950" dirty="0">
-                <a:solidFill>
-                  <a:srgbClr val="4A4A4A"/>
-                </a:solidFill>
-                <a:latin typeface="-apple-system" pitchFamily="34" charset="0"/>
-                <a:ea typeface="-apple-system" pitchFamily="34" charset="-122"/>
-                <a:cs typeface="-apple-system" pitchFamily="34" charset="-120"/>
-              </a:rPr>
-              <a:t>{Värde 3}</a:t>
-            </a:r>
-            <a:endParaRPr lang="en-US" sz="1950" dirty="0"/>
-          </a:p>
-        </p:txBody>
-      </p:sp>
-      <p:sp>
-        <p:nvSpPr>
-          <p:cNvPr id="22" name="Shape 20"/>
-          <p:cNvSpPr/>
-          <p:nvPr/>
-        </p:nvSpPr>
-        <p:spPr>
-          <a:xfrm>
-            <a:off x="9486900" y="5101233"/>
-            <a:ext cx="19050" cy="346621"/>
-          </a:xfrm>
-          <a:prstGeom prst="rect">
-            <a:avLst/>
-          </a:prstGeom>
-          <a:solidFill>
-            <a:srgbClr val="2B5F5F"/>
-          </a:solidFill>
-          <a:ln/>
-        </p:spPr>
-        <p:txBody>
-          <a:bodyPr/>
-          <a:lstStyle/>
-          <a:p>
-            <a:endParaRPr lang="sv-SE"/>
-          </a:p>
-        </p:txBody>
-      </p:sp>
-      <p:sp>
-        <p:nvSpPr>
-          <p:cNvPr id="23" name="Text 21"/>
-          <p:cNvSpPr/>
-          <p:nvPr/>
-        </p:nvSpPr>
-        <p:spPr>
-          <a:xfrm>
-            <a:off x="9734550" y="5101233"/>
-            <a:ext cx="7640193" cy="384721"/>
-          </a:xfrm>
-          <a:prstGeom prst="rect">
-            <a:avLst/>
-          </a:prstGeom>
-          <a:noFill/>
-          <a:ln/>
-        </p:spPr>
-        <p:txBody>
-          <a:bodyPr wrap="square" lIns="25400" tIns="25400" rIns="25400" bIns="25400" rtlCol="0" anchor="t">
-            <a:normAutofit/>
-          </a:bodyPr>
-          <a:lstStyle/>
-          <a:p>
-            <a:pPr marL="0" indent="0" algn="l">
-              <a:lnSpc>
-                <a:spcPct val="140000"/>
-              </a:lnSpc>
-              <a:buNone/>
-            </a:pPr>
-            <a:r>
-              <a:rPr lang="en-US" sz="1950" dirty="0">
-                <a:solidFill>
-                  <a:srgbClr val="4A4A4A"/>
-                </a:solidFill>
-                <a:latin typeface="-apple-system" pitchFamily="34" charset="0"/>
-                <a:ea typeface="-apple-system" pitchFamily="34" charset="-122"/>
-                <a:cs typeface="-apple-system" pitchFamily="34" charset="-120"/>
-              </a:rPr>
-              <a:t>{Värde 4}</a:t>
-            </a:r>
-            <a:endParaRPr lang="en-US" sz="1950" dirty="0"/>
-          </a:p>
-        </p:txBody>
-      </p:sp>
-      <p:sp>
-        <p:nvSpPr>
-          <p:cNvPr id="24" name="Shape 22"/>
-          <p:cNvSpPr/>
-          <p:nvPr/>
-        </p:nvSpPr>
-        <p:spPr>
-          <a:xfrm>
-            <a:off x="1143000" y="9486900"/>
-            <a:ext cx="16002000" cy="9525"/>
-          </a:xfrm>
-          <a:prstGeom prst="rect">
-            <a:avLst/>
-          </a:prstGeom>
-          <a:solidFill>
-            <a:srgbClr val="E8DFCD"/>
-          </a:solidFill>
-          <a:ln/>
-        </p:spPr>
-        <p:txBody>
-          <a:bodyPr/>
-          <a:lstStyle/>
-          <a:p>
-            <a:endParaRPr lang="sv-SE"/>
-          </a:p>
-        </p:txBody>
-      </p:sp>
-      <p:sp>
-        <p:nvSpPr>
-          <p:cNvPr id="25" name="Text 23"/>
-          <p:cNvSpPr/>
-          <p:nvPr/>
-        </p:nvSpPr>
-        <p:spPr>
-          <a:xfrm>
-            <a:off x="1143000" y="9686925"/>
-            <a:ext cx="3231109" cy="257175"/>
-          </a:xfrm>
-          <a:prstGeom prst="rect">
-            <a:avLst/>
-          </a:prstGeom>
-          <a:noFill/>
-          <a:ln/>
-        </p:spPr>
-        <p:txBody>
-          <a:bodyPr wrap="square" lIns="25400" tIns="25400" rIns="25400" bIns="25400" rtlCol="0" anchor="t">
-            <a:normAutofit/>
-          </a:bodyPr>
-          <a:lstStyle/>
-          <a:p>
-            <a:pPr marL="0" indent="0" algn="l">
-              <a:buNone/>
-            </a:pPr>
-            <a:r>
-              <a:rPr lang="en-US" sz="1350" kern="0" spc="27" dirty="0">
-                <a:solidFill>
-                  <a:srgbClr val="4A4A4A"/>
-                </a:solidFill>
-                <a:latin typeface="IBM Plex Mono" pitchFamily="34" charset="0"/>
-                <a:ea typeface="IBM Plex Mono" pitchFamily="34" charset="-122"/>
-                <a:cs typeface="IBM Plex Mono" pitchFamily="34" charset="-120"/>
-              </a:rPr>
-              <a:t>{Bolagsnamn} </a:t>
-            </a:r>
-            <a:r>
-              <a:rPr lang="en-US" sz="1350" kern="0" spc="27" dirty="0">
-                <a:solidFill>
-                  <a:srgbClr val="8A8A8A"/>
-                </a:solidFill>
-                <a:latin typeface="IBM Plex Mono" pitchFamily="34" charset="0"/>
-                <a:ea typeface="IBM Plex Mono" pitchFamily="34" charset="-122"/>
-                <a:cs typeface="IBM Plex Mono" pitchFamily="34" charset="-120"/>
-              </a:rPr>
-              <a:t>| </a:t>
-            </a:r>
-            <a:r>
-              <a:rPr lang="en-US" sz="1350" kern="0" spc="27" dirty="0">
-                <a:solidFill>
-                  <a:srgbClr val="4A4A4A"/>
-                </a:solidFill>
-                <a:latin typeface="IBM Plex Mono" pitchFamily="34" charset="0"/>
-                <a:ea typeface="IBM Plex Mono" pitchFamily="34" charset="-122"/>
-                <a:cs typeface="IBM Plex Mono" pitchFamily="34" charset="-120"/>
-              </a:rPr>
-              <a:t>{Diarienummer}</a:t>
-            </a:r>
-            <a:endParaRPr lang="en-US" sz="1350" dirty="0"/>
-          </a:p>
-        </p:txBody>
-      </p:sp>
-      <p:sp>
-        <p:nvSpPr>
-          <p:cNvPr id="26" name="Text 24"/>
-          <p:cNvSpPr/>
-          <p:nvPr/>
-        </p:nvSpPr>
-        <p:spPr>
-          <a:xfrm>
-            <a:off x="16400859" y="9686925"/>
-            <a:ext cx="820341" cy="257175"/>
-          </a:xfrm>
-          <a:prstGeom prst="rect">
-            <a:avLst/>
-          </a:prstGeom>
-          <a:noFill/>
-          <a:ln/>
-        </p:spPr>
-        <p:txBody>
-          <a:bodyPr wrap="square" lIns="25400" tIns="25400" rIns="25400" bIns="25400" rtlCol="0" anchor="t">
-            <a:normAutofit/>
-          </a:bodyPr>
-          <a:lstStyle/>
-          <a:p>
-            <a:pPr marL="0" indent="0" algn="l">
-              <a:buNone/>
-            </a:pPr>
-            <a:r>
-              <a:rPr lang="en-US" sz="1350" kern="0" spc="27" dirty="0">
-                <a:solidFill>
-                  <a:srgbClr val="4A4A4A"/>
-                </a:solidFill>
-                <a:latin typeface="IBM Plex Mono" pitchFamily="34" charset="0"/>
-                <a:ea typeface="IBM Plex Mono" pitchFamily="34" charset="-122"/>
-                <a:cs typeface="IBM Plex Mono" pitchFamily="34" charset="-120"/>
-              </a:rPr>
-              <a:t>05 / 17</a:t>
-            </a:r>
-            <a:endParaRPr lang="en-US" sz="1350" dirty="0"/>
           </a:p>
         </p:txBody>
       </p:sp>
@@ -20089,7 +18496,7 @@
         </p:spPr>
         <p:txBody>
           <a:bodyPr wrap="square" lIns="25400" tIns="25400" rIns="25400" bIns="25400" rtlCol="0" anchor="t">
-            <a:normAutofit/>
+            <a:normAutofit lnSpcReduction="10000"/>
           </a:bodyPr>
           <a:lstStyle/>
           <a:p>
@@ -20130,7 +18537,7 @@
         </p:spPr>
         <p:txBody>
           <a:bodyPr wrap="square" lIns="25400" tIns="25400" rIns="25400" bIns="25400" rtlCol="0" anchor="t">
-            <a:normAutofit/>
+            <a:normAutofit fontScale="92500" lnSpcReduction="20000"/>
           </a:bodyPr>
           <a:lstStyle/>
           <a:p>
@@ -20201,7 +18608,7 @@
         </p:spPr>
         <p:txBody>
           <a:bodyPr wrap="square" lIns="25400" tIns="25400" rIns="25400" bIns="25400" rtlCol="0" anchor="t">
-            <a:normAutofit/>
+            <a:normAutofit lnSpcReduction="10000"/>
           </a:bodyPr>
           <a:lstStyle/>
           <a:p>
@@ -20242,7 +18649,7 @@
         </p:spPr>
         <p:txBody>
           <a:bodyPr wrap="square" lIns="25400" tIns="25400" rIns="25400" bIns="25400" rtlCol="0" anchor="t">
-            <a:normAutofit/>
+            <a:normAutofit lnSpcReduction="10000"/>
           </a:bodyPr>
           <a:lstStyle/>
           <a:p>
@@ -20354,7 +18761,7 @@
         </p:spPr>
         <p:txBody>
           <a:bodyPr wrap="square" lIns="25400" tIns="25400" rIns="25400" bIns="25400" rtlCol="0" anchor="t">
-            <a:normAutofit/>
+            <a:normAutofit lnSpcReduction="10000"/>
           </a:bodyPr>
           <a:lstStyle/>
           <a:p>
@@ -20395,7 +18802,7 @@
         </p:spPr>
         <p:txBody>
           <a:bodyPr wrap="square" lIns="25400" tIns="25400" rIns="25400" bIns="25400" rtlCol="0" anchor="t">
-            <a:normAutofit/>
+            <a:normAutofit lnSpcReduction="10000"/>
           </a:bodyPr>
           <a:lstStyle/>
           <a:p>
@@ -20436,7 +18843,7 @@
         </p:spPr>
         <p:txBody>
           <a:bodyPr wrap="square" lIns="25400" tIns="25400" rIns="25400" bIns="25400" rtlCol="0" anchor="t">
-            <a:normAutofit/>
+            <a:normAutofit fontScale="92500" lnSpcReduction="10000"/>
           </a:bodyPr>
           <a:lstStyle/>
           <a:p>
@@ -20507,7 +18914,7 @@
         </p:spPr>
         <p:txBody>
           <a:bodyPr wrap="square" lIns="25400" tIns="25400" rIns="25400" bIns="25400" rtlCol="0" anchor="t">
-            <a:normAutofit/>
+            <a:normAutofit lnSpcReduction="10000"/>
           </a:bodyPr>
           <a:lstStyle/>
           <a:p>
@@ -20548,7 +18955,7 @@
         </p:spPr>
         <p:txBody>
           <a:bodyPr wrap="square" lIns="25400" tIns="25400" rIns="25400" bIns="25400" rtlCol="0" anchor="t">
-            <a:normAutofit/>
+            <a:normAutofit lnSpcReduction="10000"/>
           </a:bodyPr>
           <a:lstStyle/>
           <a:p>
@@ -20589,7 +18996,7 @@
         </p:spPr>
         <p:txBody>
           <a:bodyPr wrap="square" lIns="25400" tIns="25400" rIns="25400" bIns="25400" rtlCol="0" anchor="t">
-            <a:normAutofit/>
+            <a:normAutofit fontScale="92500" lnSpcReduction="10000"/>
           </a:bodyPr>
           <a:lstStyle/>
           <a:p>
@@ -20660,7 +19067,7 @@
         </p:spPr>
         <p:txBody>
           <a:bodyPr wrap="square" lIns="25400" tIns="25400" rIns="25400" bIns="25400" rtlCol="0" anchor="t">
-            <a:normAutofit/>
+            <a:normAutofit lnSpcReduction="10000"/>
           </a:bodyPr>
           <a:lstStyle/>
           <a:p>
@@ -20701,7 +19108,7 @@
         </p:spPr>
         <p:txBody>
           <a:bodyPr wrap="square" lIns="25400" tIns="25400" rIns="25400" bIns="25400" rtlCol="0" anchor="t">
-            <a:normAutofit/>
+            <a:normAutofit lnSpcReduction="10000"/>
           </a:bodyPr>
           <a:lstStyle/>
           <a:p>
@@ -20742,7 +19149,7 @@
         </p:spPr>
         <p:txBody>
           <a:bodyPr wrap="square" lIns="25400" tIns="25400" rIns="25400" bIns="25400" rtlCol="0" anchor="t">
-            <a:normAutofit/>
+            <a:normAutofit fontScale="92500" lnSpcReduction="10000"/>
           </a:bodyPr>
           <a:lstStyle/>
           <a:p>
@@ -21751,7 +20158,7 @@
         </p:spPr>
         <p:txBody>
           <a:bodyPr wrap="square" lIns="25400" tIns="25400" rIns="25400" bIns="25400" rtlCol="0" anchor="t">
-            <a:normAutofit/>
+            <a:normAutofit fontScale="92500" lnSpcReduction="10000"/>
           </a:bodyPr>
           <a:lstStyle/>
           <a:p>
@@ -21795,7 +20202,7 @@
         </p:spPr>
         <p:txBody>
           <a:bodyPr wrap="square" lIns="25400" tIns="25400" rIns="25400" bIns="25400" rtlCol="0" anchor="t">
-            <a:normAutofit/>
+            <a:normAutofit fontScale="92500" lnSpcReduction="10000"/>
           </a:bodyPr>
           <a:lstStyle/>
           <a:p>
@@ -21963,7 +20370,7 @@
         </p:spPr>
         <p:txBody>
           <a:bodyPr wrap="square" lIns="25400" tIns="25400" rIns="25400" bIns="25400" rtlCol="0" anchor="t">
-            <a:normAutofit/>
+            <a:normAutofit fontScale="92500" lnSpcReduction="10000"/>
           </a:bodyPr>
           <a:lstStyle/>
           <a:p>
@@ -22007,7 +20414,7 @@
         </p:spPr>
         <p:txBody>
           <a:bodyPr wrap="square" lIns="25400" tIns="25400" rIns="25400" bIns="25400" rtlCol="0" anchor="t">
-            <a:normAutofit/>
+            <a:normAutofit fontScale="92500" lnSpcReduction="10000"/>
           </a:bodyPr>
           <a:lstStyle/>
           <a:p>
@@ -22175,7 +20582,7 @@
         </p:spPr>
         <p:txBody>
           <a:bodyPr wrap="square" lIns="25400" tIns="25400" rIns="25400" bIns="25400" rtlCol="0" anchor="t">
-            <a:normAutofit/>
+            <a:normAutofit fontScale="92500" lnSpcReduction="10000"/>
           </a:bodyPr>
           <a:lstStyle/>
           <a:p>
@@ -22219,7 +20626,7 @@
         </p:spPr>
         <p:txBody>
           <a:bodyPr wrap="square" lIns="25400" tIns="25400" rIns="25400" bIns="25400" rtlCol="0" anchor="t">
-            <a:normAutofit/>
+            <a:normAutofit fontScale="92500" lnSpcReduction="10000"/>
           </a:bodyPr>
           <a:lstStyle/>
           <a:p>
@@ -22387,7 +20794,7 @@
         </p:spPr>
         <p:txBody>
           <a:bodyPr wrap="square" lIns="25400" tIns="25400" rIns="25400" bIns="25400" rtlCol="0" anchor="t">
-            <a:normAutofit/>
+            <a:normAutofit fontScale="92500" lnSpcReduction="10000"/>
           </a:bodyPr>
           <a:lstStyle/>
           <a:p>
@@ -22431,7 +20838,7 @@
         </p:spPr>
         <p:txBody>
           <a:bodyPr wrap="square" lIns="25400" tIns="25400" rIns="25400" bIns="25400" rtlCol="0" anchor="t">
-            <a:normAutofit/>
+            <a:normAutofit fontScale="92500" lnSpcReduction="10000"/>
           </a:bodyPr>
           <a:lstStyle/>
           <a:p>
@@ -22736,7 +21143,7 @@
         </p:spPr>
         <p:txBody>
           <a:bodyPr wrap="square" lIns="25400" tIns="25400" rIns="25400" bIns="25400" rtlCol="0" anchor="t">
-            <a:normAutofit/>
+            <a:normAutofit lnSpcReduction="10000"/>
           </a:bodyPr>
           <a:lstStyle/>
           <a:p>
@@ -22804,7 +21211,7 @@
         </p:spPr>
         <p:txBody>
           <a:bodyPr wrap="square" lIns="25400" tIns="25400" rIns="25400" bIns="25400" rtlCol="0" anchor="t">
-            <a:normAutofit/>
+            <a:normAutofit fontScale="92500" lnSpcReduction="20000"/>
           </a:bodyPr>
           <a:lstStyle/>
           <a:p>
@@ -22889,7 +21296,7 @@
         </p:spPr>
         <p:txBody>
           <a:bodyPr wrap="square" lIns="25400" tIns="25400" rIns="25400" bIns="25400" rtlCol="0" anchor="t">
-            <a:normAutofit/>
+            <a:normAutofit fontScale="92500" lnSpcReduction="20000"/>
           </a:bodyPr>
           <a:lstStyle/>
           <a:p>
@@ -23043,17 +21450,17 @@
         <p:spPr>
           <a:xfrm>
             <a:off x="1333500" y="4200525"/>
-            <a:ext cx="4989576" cy="331440"/>
-          </a:xfrm>
-          <a:prstGeom prst="rect">
-            <a:avLst/>
-          </a:prstGeom>
-          <a:noFill/>
-          <a:ln/>
-        </p:spPr>
-        <p:txBody>
-          <a:bodyPr wrap="square" lIns="25400" tIns="25400" rIns="25400" bIns="25400" rtlCol="0" anchor="t">
-            <a:normAutofit/>
+            <a:ext cx="4989576" cy="4500000"/>
+          </a:xfrm>
+          <a:prstGeom prst="rect">
+            <a:avLst/>
+          </a:prstGeom>
+          <a:noFill/>
+          <a:ln/>
+        </p:spPr>
+        <p:txBody>
+          <a:bodyPr wrap="square" lIns="25400" tIns="25400" rIns="25400" bIns="25400" rtlCol="0" anchor="t">
+            <a:normAutofit fontScale="92500" lnSpcReduction="10000"/>
           </a:bodyPr>
           <a:lstStyle/>
           <a:p>
@@ -23072,7 +21479,7 @@
                 <a:ea typeface="-apple-system" pitchFamily="34" charset="-122"/>
                 <a:cs typeface="-apple-system" pitchFamily="34" charset="-120"/>
               </a:rPr>
-              <a:t>{Aktivitet 1 — vad som görs, av vem, hur}</a:t>
+              <a:t>{Aktiviteter}</a:t>
             </a:r>
             <a:endParaRPr lang="en-US" sz="1650" dirty="0"/>
           </a:p>
@@ -23080,14 +21487,41 @@
       </p:sp>
       <p:sp>
         <p:nvSpPr>
-          <p:cNvPr id="11" name="Text 9"/>
-          <p:cNvSpPr/>
-          <p:nvPr/>
-        </p:nvSpPr>
-        <p:spPr>
-          <a:xfrm>
-            <a:off x="1333500" y="4665315"/>
-            <a:ext cx="4989576" cy="331440"/>
+          <p:cNvPr id="14" name="Shape 12"/>
+          <p:cNvSpPr/>
+          <p:nvPr/>
+        </p:nvSpPr>
+        <p:spPr>
+          <a:xfrm>
+            <a:off x="6629400" y="3457575"/>
+            <a:ext cx="5029200" cy="9525"/>
+          </a:xfrm>
+          <a:prstGeom prst="rect">
+            <a:avLst/>
+          </a:prstGeom>
+          <a:solidFill>
+            <a:srgbClr val="2B5F5F"/>
+          </a:solidFill>
+          <a:ln/>
+        </p:spPr>
+        <p:txBody>
+          <a:bodyPr/>
+          <a:lstStyle/>
+          <a:p>
+            <a:endParaRPr lang="sv-SE"/>
+          </a:p>
+        </p:txBody>
+      </p:sp>
+      <p:sp>
+        <p:nvSpPr>
+          <p:cNvPr id="15" name="Text 13"/>
+          <p:cNvSpPr/>
+          <p:nvPr/>
+        </p:nvSpPr>
+        <p:spPr>
+          <a:xfrm>
+            <a:off x="6629400" y="3600450"/>
+            <a:ext cx="5180076" cy="257175"/>
           </a:xfrm>
           <a:prstGeom prst="rect">
             <a:avLst/>
@@ -23098,6 +21532,58 @@
         <p:txBody>
           <a:bodyPr wrap="square" lIns="25400" tIns="25400" rIns="25400" bIns="25400" rtlCol="0" anchor="t">
             <a:normAutofit/>
+          </a:bodyPr>
+          <a:lstStyle/>
+          <a:p>
+            <a:pPr marL="0" indent="0" algn="l">
+              <a:buNone/>
+            </a:pPr>
+            <a:r>
+              <a:rPr lang="en-US" sz="1350" kern="0" spc="135" dirty="0">
+                <a:solidFill>
+                  <a:srgbClr val="2B5F5F"/>
+                </a:solidFill>
+                <a:latin typeface="IBM Plex Mono" pitchFamily="34" charset="0"/>
+                <a:ea typeface="IBM Plex Mono" pitchFamily="34" charset="-122"/>
+                <a:cs typeface="IBM Plex Mono" pitchFamily="34" charset="-120"/>
+              </a:rPr>
+              <a:t>B </a:t>
+            </a:r>
+            <a:r>
+              <a:rPr lang="en-US" sz="1350" kern="0" spc="135" dirty="0">
+                <a:solidFill>
+                  <a:srgbClr val="4A4A4A"/>
+                </a:solidFill>
+                <a:latin typeface="IBM Plex Mono" pitchFamily="34" charset="0"/>
+                <a:ea typeface="IBM Plex Mono" pitchFamily="34" charset="-122"/>
+                <a:cs typeface="IBM Plex Mono" pitchFamily="34" charset="-120"/>
+              </a:rPr>
+              <a:t>LEVERANSER</a:t>
+            </a:r>
+            <a:endParaRPr lang="en-US" sz="1350" dirty="0"/>
+          </a:p>
+        </p:txBody>
+      </p:sp>
+      <p:sp>
+        <p:nvSpPr>
+          <p:cNvPr id="16" name="Text 14"/>
+          <p:cNvSpPr/>
+          <p:nvPr/>
+        </p:nvSpPr>
+        <p:spPr>
+          <a:xfrm>
+            <a:off x="6819900" y="4200525"/>
+            <a:ext cx="4989576" cy="4500000"/>
+          </a:xfrm>
+          <a:prstGeom prst="rect">
+            <a:avLst/>
+          </a:prstGeom>
+          <a:noFill/>
+          <a:ln/>
+        </p:spPr>
+        <p:txBody>
+          <a:bodyPr wrap="square" lIns="25400" tIns="25400" rIns="25400" bIns="25400" rtlCol="0" anchor="t">
+            <a:normAutofit fontScale="92500" lnSpcReduction="10000"/>
           </a:bodyPr>
           <a:lstStyle/>
           <a:p>
@@ -23116,7 +21602,7 @@
                 <a:ea typeface="-apple-system" pitchFamily="34" charset="-122"/>
                 <a:cs typeface="-apple-system" pitchFamily="34" charset="-120"/>
               </a:rPr>
-              <a:t>{Aktivitet 2}</a:t>
+              <a:t>{Leveranser}</a:t>
             </a:r>
             <a:endParaRPr lang="en-US" sz="1650" dirty="0"/>
           </a:p>
@@ -23124,14 +21610,68 @@
       </p:sp>
       <p:sp>
         <p:nvSpPr>
-          <p:cNvPr id="12" name="Text 10"/>
-          <p:cNvSpPr/>
-          <p:nvPr/>
-        </p:nvSpPr>
-        <p:spPr>
-          <a:xfrm>
-            <a:off x="1333500" y="5130105"/>
-            <a:ext cx="4989576" cy="331440"/>
+          <p:cNvPr id="19" name="Shape 17"/>
+          <p:cNvSpPr/>
+          <p:nvPr/>
+        </p:nvSpPr>
+        <p:spPr>
+          <a:xfrm>
+            <a:off x="12115800" y="3324225"/>
+            <a:ext cx="5029200" cy="5334000"/>
+          </a:xfrm>
+          <a:prstGeom prst="rect">
+            <a:avLst/>
+          </a:prstGeom>
+          <a:solidFill>
+            <a:srgbClr val="E8DCC8"/>
+          </a:solidFill>
+          <a:ln/>
+        </p:spPr>
+        <p:txBody>
+          <a:bodyPr/>
+          <a:lstStyle/>
+          <a:p>
+            <a:endParaRPr lang="sv-SE"/>
+          </a:p>
+        </p:txBody>
+      </p:sp>
+      <p:sp>
+        <p:nvSpPr>
+          <p:cNvPr id="20" name="Shape 18"/>
+          <p:cNvSpPr/>
+          <p:nvPr/>
+        </p:nvSpPr>
+        <p:spPr>
+          <a:xfrm>
+            <a:off x="12344400" y="3457575"/>
+            <a:ext cx="4572000" cy="9525"/>
+          </a:xfrm>
+          <a:prstGeom prst="rect">
+            <a:avLst/>
+          </a:prstGeom>
+          <a:solidFill>
+            <a:srgbClr val="2B5F5F"/>
+          </a:solidFill>
+          <a:ln/>
+        </p:spPr>
+        <p:txBody>
+          <a:bodyPr/>
+          <a:lstStyle/>
+          <a:p>
+            <a:endParaRPr lang="sv-SE"/>
+          </a:p>
+        </p:txBody>
+      </p:sp>
+      <p:sp>
+        <p:nvSpPr>
+          <p:cNvPr id="21" name="Text 19"/>
+          <p:cNvSpPr/>
+          <p:nvPr/>
+        </p:nvSpPr>
+        <p:spPr>
+          <a:xfrm>
+            <a:off x="12344400" y="3600450"/>
+            <a:ext cx="4709160" cy="257175"/>
           </a:xfrm>
           <a:prstGeom prst="rect">
             <a:avLst/>
@@ -23142,6 +21682,58 @@
         <p:txBody>
           <a:bodyPr wrap="square" lIns="25400" tIns="25400" rIns="25400" bIns="25400" rtlCol="0" anchor="t">
             <a:normAutofit/>
+          </a:bodyPr>
+          <a:lstStyle/>
+          <a:p>
+            <a:pPr marL="0" indent="0" algn="l">
+              <a:buNone/>
+            </a:pPr>
+            <a:r>
+              <a:rPr lang="en-US" sz="1350" kern="0" spc="135" dirty="0">
+                <a:solidFill>
+                  <a:srgbClr val="2B5F5F"/>
+                </a:solidFill>
+                <a:latin typeface="IBM Plex Mono" pitchFamily="34" charset="0"/>
+                <a:ea typeface="IBM Plex Mono" pitchFamily="34" charset="-122"/>
+                <a:cs typeface="IBM Plex Mono" pitchFamily="34" charset="-120"/>
+              </a:rPr>
+              <a:t>C </a:t>
+            </a:r>
+            <a:r>
+              <a:rPr lang="en-US" sz="1350" kern="0" spc="135" dirty="0">
+                <a:solidFill>
+                  <a:srgbClr val="4A4A4A"/>
+                </a:solidFill>
+                <a:latin typeface="IBM Plex Mono" pitchFamily="34" charset="0"/>
+                <a:ea typeface="IBM Plex Mono" pitchFamily="34" charset="-122"/>
+                <a:cs typeface="IBM Plex Mono" pitchFamily="34" charset="-120"/>
+              </a:rPr>
+              <a:t>BESLUT I STYRGRUPP</a:t>
+            </a:r>
+            <a:endParaRPr lang="en-US" sz="1350" dirty="0"/>
+          </a:p>
+        </p:txBody>
+      </p:sp>
+      <p:sp>
+        <p:nvSpPr>
+          <p:cNvPr id="22" name="Text 20"/>
+          <p:cNvSpPr/>
+          <p:nvPr/>
+        </p:nvSpPr>
+        <p:spPr>
+          <a:xfrm>
+            <a:off x="12534900" y="4200525"/>
+            <a:ext cx="4518660" cy="4500000"/>
+          </a:xfrm>
+          <a:prstGeom prst="rect">
+            <a:avLst/>
+          </a:prstGeom>
+          <a:noFill/>
+          <a:ln/>
+        </p:spPr>
+        <p:txBody>
+          <a:bodyPr wrap="square" lIns="25400" tIns="25400" rIns="25400" bIns="25400" rtlCol="0" anchor="t">
+            <a:normAutofit fontScale="92500"/>
           </a:bodyPr>
           <a:lstStyle/>
           <a:p>
@@ -23160,7 +21752,7 @@
                 <a:ea typeface="-apple-system" pitchFamily="34" charset="-122"/>
                 <a:cs typeface="-apple-system" pitchFamily="34" charset="-120"/>
               </a:rPr>
-              <a:t>{Aktivitet 3}</a:t>
+              <a:t>{Beslut}</a:t>
             </a:r>
             <a:endParaRPr lang="en-US" sz="1650" dirty="0"/>
           </a:p>
@@ -23168,58 +21760,109 @@
       </p:sp>
       <p:sp>
         <p:nvSpPr>
-          <p:cNvPr id="13" name="Text 11"/>
-          <p:cNvSpPr/>
-          <p:nvPr/>
-        </p:nvSpPr>
-        <p:spPr>
-          <a:xfrm>
-            <a:off x="1333500" y="5594896"/>
-            <a:ext cx="4989576" cy="331440"/>
-          </a:xfrm>
-          <a:prstGeom prst="rect">
-            <a:avLst/>
-          </a:prstGeom>
-          <a:noFill/>
-          <a:ln/>
-        </p:spPr>
-        <p:txBody>
-          <a:bodyPr wrap="square" lIns="25400" tIns="25400" rIns="25400" bIns="25400" rtlCol="0" anchor="t">
-            <a:normAutofit/>
-          </a:bodyPr>
-          <a:lstStyle/>
-          <a:p>
-            <a:pPr marL="0" indent="0" algn="l">
-              <a:lnSpc>
-                <a:spcPct val="140000"/>
-              </a:lnSpc>
-              <a:buNone/>
-            </a:pPr>
-            <a:r>
-              <a:rPr lang="en-US" sz="1650" dirty="0">
-                <a:solidFill>
-                  <a:srgbClr val="1A1A1A"/>
-                </a:solidFill>
-                <a:latin typeface="-apple-system" pitchFamily="34" charset="0"/>
-                <a:ea typeface="-apple-system" pitchFamily="34" charset="-122"/>
-                <a:cs typeface="-apple-system" pitchFamily="34" charset="-120"/>
-              </a:rPr>
-              <a:t>{Aktivitet 4}</a:t>
-            </a:r>
-            <a:endParaRPr lang="en-US" sz="1650" dirty="0"/>
-          </a:p>
-        </p:txBody>
-      </p:sp>
-      <p:sp>
-        <p:nvSpPr>
-          <p:cNvPr id="14" name="Shape 12"/>
-          <p:cNvSpPr/>
-          <p:nvPr/>
-        </p:nvSpPr>
-        <p:spPr>
-          <a:xfrm>
-            <a:off x="6629400" y="3457575"/>
-            <a:ext cx="5029200" cy="9525"/>
+          <p:cNvPr id="25" name="Shape 23"/>
+          <p:cNvSpPr/>
+          <p:nvPr/>
+        </p:nvSpPr>
+        <p:spPr>
+          <a:xfrm>
+            <a:off x="1143000" y="9001125"/>
+            <a:ext cx="16002000" cy="9525"/>
+          </a:xfrm>
+          <a:prstGeom prst="rect">
+            <a:avLst/>
+          </a:prstGeom>
+          <a:solidFill>
+            <a:srgbClr val="E8DFCD"/>
+          </a:solidFill>
+          <a:ln/>
+        </p:spPr>
+        <p:txBody>
+          <a:bodyPr/>
+          <a:lstStyle/>
+          <a:p>
+            <a:endParaRPr lang="sv-SE"/>
+          </a:p>
+        </p:txBody>
+      </p:sp>
+      <p:sp>
+        <p:nvSpPr>
+          <p:cNvPr id="26" name="Text 24"/>
+          <p:cNvSpPr/>
+          <p:nvPr/>
+        </p:nvSpPr>
+        <p:spPr>
+          <a:xfrm>
+            <a:off x="1143000" y="9277350"/>
+            <a:ext cx="2171700" cy="209550"/>
+          </a:xfrm>
+          <a:prstGeom prst="rect">
+            <a:avLst/>
+          </a:prstGeom>
+          <a:noFill/>
+          <a:ln/>
+        </p:spPr>
+        <p:txBody>
+          <a:bodyPr wrap="square" lIns="25400" tIns="25400" rIns="25400" bIns="25400" rtlCol="0" anchor="t">
+            <a:normAutofit lnSpcReduction="10000"/>
+          </a:bodyPr>
+          <a:lstStyle/>
+          <a:p>
+            <a:pPr marL="0" indent="0" algn="l">
+              <a:buNone/>
+            </a:pPr>
+            <a:r>
+              <a:rPr lang="en-US" sz="1050" kern="0" spc="105" dirty="0">
+                <a:solidFill>
+                  <a:srgbClr val="4A4A4A"/>
+                </a:solidFill>
+                <a:latin typeface="IBM Plex Mono" pitchFamily="34" charset="0"/>
+                <a:ea typeface="IBM Plex Mono" pitchFamily="34" charset="-122"/>
+                <a:cs typeface="IBM Plex Mono" pitchFamily="34" charset="-120"/>
+              </a:rPr>
+              <a:t>TIDSLINJE · FAS 1</a:t>
+            </a:r>
+            <a:endParaRPr lang="en-US" sz="1050" dirty="0"/>
+          </a:p>
+        </p:txBody>
+      </p:sp>
+      <p:sp>
+        <p:nvSpPr>
+          <p:cNvPr id="27" name="Shape 25"/>
+          <p:cNvSpPr/>
+          <p:nvPr/>
+        </p:nvSpPr>
+        <p:spPr>
+          <a:xfrm>
+            <a:off x="3467100" y="9201150"/>
+            <a:ext cx="13677900" cy="133350"/>
+          </a:xfrm>
+          <a:prstGeom prst="rect">
+            <a:avLst/>
+          </a:prstGeom>
+          <a:solidFill>
+            <a:srgbClr val="E8DFCD"/>
+          </a:solidFill>
+          <a:ln/>
+        </p:spPr>
+        <p:txBody>
+          <a:bodyPr/>
+          <a:lstStyle/>
+          <a:p>
+            <a:endParaRPr lang="sv-SE"/>
+          </a:p>
+        </p:txBody>
+      </p:sp>
+      <p:sp>
+        <p:nvSpPr>
+          <p:cNvPr id="28" name="Shape 26"/>
+          <p:cNvSpPr/>
+          <p:nvPr/>
+        </p:nvSpPr>
+        <p:spPr>
+          <a:xfrm>
+            <a:off x="3467100" y="9201150"/>
+            <a:ext cx="2279600" cy="133350"/>
           </a:xfrm>
           <a:prstGeom prst="rect">
             <a:avLst/>
@@ -23239,550 +21882,6 @@
       </p:sp>
       <p:sp>
         <p:nvSpPr>
-          <p:cNvPr id="15" name="Text 13"/>
-          <p:cNvSpPr/>
-          <p:nvPr/>
-        </p:nvSpPr>
-        <p:spPr>
-          <a:xfrm>
-            <a:off x="6629400" y="3600450"/>
-            <a:ext cx="5180076" cy="257175"/>
-          </a:xfrm>
-          <a:prstGeom prst="rect">
-            <a:avLst/>
-          </a:prstGeom>
-          <a:noFill/>
-          <a:ln/>
-        </p:spPr>
-        <p:txBody>
-          <a:bodyPr wrap="square" lIns="25400" tIns="25400" rIns="25400" bIns="25400" rtlCol="0" anchor="t">
-            <a:normAutofit/>
-          </a:bodyPr>
-          <a:lstStyle/>
-          <a:p>
-            <a:pPr marL="0" indent="0" algn="l">
-              <a:buNone/>
-            </a:pPr>
-            <a:r>
-              <a:rPr lang="en-US" sz="1350" kern="0" spc="135" dirty="0">
-                <a:solidFill>
-                  <a:srgbClr val="2B5F5F"/>
-                </a:solidFill>
-                <a:latin typeface="IBM Plex Mono" pitchFamily="34" charset="0"/>
-                <a:ea typeface="IBM Plex Mono" pitchFamily="34" charset="-122"/>
-                <a:cs typeface="IBM Plex Mono" pitchFamily="34" charset="-120"/>
-              </a:rPr>
-              <a:t>B </a:t>
-            </a:r>
-            <a:r>
-              <a:rPr lang="en-US" sz="1350" kern="0" spc="135" dirty="0">
-                <a:solidFill>
-                  <a:srgbClr val="4A4A4A"/>
-                </a:solidFill>
-                <a:latin typeface="IBM Plex Mono" pitchFamily="34" charset="0"/>
-                <a:ea typeface="IBM Plex Mono" pitchFamily="34" charset="-122"/>
-                <a:cs typeface="IBM Plex Mono" pitchFamily="34" charset="-120"/>
-              </a:rPr>
-              <a:t>LEVERANSER</a:t>
-            </a:r>
-            <a:endParaRPr lang="en-US" sz="1350" dirty="0"/>
-          </a:p>
-        </p:txBody>
-      </p:sp>
-      <p:sp>
-        <p:nvSpPr>
-          <p:cNvPr id="16" name="Text 14"/>
-          <p:cNvSpPr/>
-          <p:nvPr/>
-        </p:nvSpPr>
-        <p:spPr>
-          <a:xfrm>
-            <a:off x="6819900" y="4200525"/>
-            <a:ext cx="4989576" cy="331440"/>
-          </a:xfrm>
-          <a:prstGeom prst="rect">
-            <a:avLst/>
-          </a:prstGeom>
-          <a:noFill/>
-          <a:ln/>
-        </p:spPr>
-        <p:txBody>
-          <a:bodyPr wrap="square" lIns="25400" tIns="25400" rIns="25400" bIns="25400" rtlCol="0" anchor="t">
-            <a:normAutofit/>
-          </a:bodyPr>
-          <a:lstStyle/>
-          <a:p>
-            <a:pPr marL="0" indent="0" algn="l">
-              <a:lnSpc>
-                <a:spcPct val="140000"/>
-              </a:lnSpc>
-              <a:buNone/>
-            </a:pPr>
-            <a:r>
-              <a:rPr lang="en-US" sz="1650" dirty="0">
-                <a:solidFill>
-                  <a:srgbClr val="1A1A1A"/>
-                </a:solidFill>
-                <a:latin typeface="-apple-system" pitchFamily="34" charset="0"/>
-                <a:ea typeface="-apple-system" pitchFamily="34" charset="-122"/>
-                <a:cs typeface="-apple-system" pitchFamily="34" charset="-120"/>
-              </a:rPr>
-              <a:t>{Leverans 1 — konkret artefakt, format, mottagare}</a:t>
-            </a:r>
-            <a:endParaRPr lang="en-US" sz="1650" dirty="0"/>
-          </a:p>
-        </p:txBody>
-      </p:sp>
-      <p:sp>
-        <p:nvSpPr>
-          <p:cNvPr id="17" name="Text 15"/>
-          <p:cNvSpPr/>
-          <p:nvPr/>
-        </p:nvSpPr>
-        <p:spPr>
-          <a:xfrm>
-            <a:off x="6819900" y="4665315"/>
-            <a:ext cx="4989576" cy="331440"/>
-          </a:xfrm>
-          <a:prstGeom prst="rect">
-            <a:avLst/>
-          </a:prstGeom>
-          <a:noFill/>
-          <a:ln/>
-        </p:spPr>
-        <p:txBody>
-          <a:bodyPr wrap="square" lIns="25400" tIns="25400" rIns="25400" bIns="25400" rtlCol="0" anchor="t">
-            <a:normAutofit/>
-          </a:bodyPr>
-          <a:lstStyle/>
-          <a:p>
-            <a:pPr marL="0" indent="0" algn="l">
-              <a:lnSpc>
-                <a:spcPct val="140000"/>
-              </a:lnSpc>
-              <a:buNone/>
-            </a:pPr>
-            <a:r>
-              <a:rPr lang="en-US" sz="1650" dirty="0">
-                <a:solidFill>
-                  <a:srgbClr val="1A1A1A"/>
-                </a:solidFill>
-                <a:latin typeface="-apple-system" pitchFamily="34" charset="0"/>
-                <a:ea typeface="-apple-system" pitchFamily="34" charset="-122"/>
-                <a:cs typeface="-apple-system" pitchFamily="34" charset="-120"/>
-              </a:rPr>
-              <a:t>{Leverans 2}</a:t>
-            </a:r>
-            <a:endParaRPr lang="en-US" sz="1650" dirty="0"/>
-          </a:p>
-        </p:txBody>
-      </p:sp>
-      <p:sp>
-        <p:nvSpPr>
-          <p:cNvPr id="18" name="Text 16"/>
-          <p:cNvSpPr/>
-          <p:nvPr/>
-        </p:nvSpPr>
-        <p:spPr>
-          <a:xfrm>
-            <a:off x="6819900" y="5130105"/>
-            <a:ext cx="4989576" cy="331440"/>
-          </a:xfrm>
-          <a:prstGeom prst="rect">
-            <a:avLst/>
-          </a:prstGeom>
-          <a:noFill/>
-          <a:ln/>
-        </p:spPr>
-        <p:txBody>
-          <a:bodyPr wrap="square" lIns="25400" tIns="25400" rIns="25400" bIns="25400" rtlCol="0" anchor="t">
-            <a:normAutofit/>
-          </a:bodyPr>
-          <a:lstStyle/>
-          <a:p>
-            <a:pPr marL="0" indent="0" algn="l">
-              <a:lnSpc>
-                <a:spcPct val="140000"/>
-              </a:lnSpc>
-              <a:buNone/>
-            </a:pPr>
-            <a:r>
-              <a:rPr lang="en-US" sz="1650" dirty="0">
-                <a:solidFill>
-                  <a:srgbClr val="1A1A1A"/>
-                </a:solidFill>
-                <a:latin typeface="-apple-system" pitchFamily="34" charset="0"/>
-                <a:ea typeface="-apple-system" pitchFamily="34" charset="-122"/>
-                <a:cs typeface="-apple-system" pitchFamily="34" charset="-120"/>
-              </a:rPr>
-              <a:t>{Leverans 3}</a:t>
-            </a:r>
-            <a:endParaRPr lang="en-US" sz="1650" dirty="0"/>
-          </a:p>
-        </p:txBody>
-      </p:sp>
-      <p:sp>
-        <p:nvSpPr>
-          <p:cNvPr id="19" name="Shape 17"/>
-          <p:cNvSpPr/>
-          <p:nvPr/>
-        </p:nvSpPr>
-        <p:spPr>
-          <a:xfrm>
-            <a:off x="12115800" y="3324225"/>
-            <a:ext cx="5029200" cy="5334000"/>
-          </a:xfrm>
-          <a:prstGeom prst="rect">
-            <a:avLst/>
-          </a:prstGeom>
-          <a:solidFill>
-            <a:srgbClr val="E8DCC8"/>
-          </a:solidFill>
-          <a:ln/>
-        </p:spPr>
-        <p:txBody>
-          <a:bodyPr/>
-          <a:lstStyle/>
-          <a:p>
-            <a:endParaRPr lang="sv-SE"/>
-          </a:p>
-        </p:txBody>
-      </p:sp>
-      <p:sp>
-        <p:nvSpPr>
-          <p:cNvPr id="20" name="Shape 18"/>
-          <p:cNvSpPr/>
-          <p:nvPr/>
-        </p:nvSpPr>
-        <p:spPr>
-          <a:xfrm>
-            <a:off x="12344400" y="3457575"/>
-            <a:ext cx="4572000" cy="9525"/>
-          </a:xfrm>
-          <a:prstGeom prst="rect">
-            <a:avLst/>
-          </a:prstGeom>
-          <a:solidFill>
-            <a:srgbClr val="2B5F5F"/>
-          </a:solidFill>
-          <a:ln/>
-        </p:spPr>
-        <p:txBody>
-          <a:bodyPr/>
-          <a:lstStyle/>
-          <a:p>
-            <a:endParaRPr lang="sv-SE"/>
-          </a:p>
-        </p:txBody>
-      </p:sp>
-      <p:sp>
-        <p:nvSpPr>
-          <p:cNvPr id="21" name="Text 19"/>
-          <p:cNvSpPr/>
-          <p:nvPr/>
-        </p:nvSpPr>
-        <p:spPr>
-          <a:xfrm>
-            <a:off x="12344400" y="3600450"/>
-            <a:ext cx="4709160" cy="257175"/>
-          </a:xfrm>
-          <a:prstGeom prst="rect">
-            <a:avLst/>
-          </a:prstGeom>
-          <a:noFill/>
-          <a:ln/>
-        </p:spPr>
-        <p:txBody>
-          <a:bodyPr wrap="square" lIns="25400" tIns="25400" rIns="25400" bIns="25400" rtlCol="0" anchor="t">
-            <a:normAutofit/>
-          </a:bodyPr>
-          <a:lstStyle/>
-          <a:p>
-            <a:pPr marL="0" indent="0" algn="l">
-              <a:buNone/>
-            </a:pPr>
-            <a:r>
-              <a:rPr lang="en-US" sz="1350" kern="0" spc="135" dirty="0">
-                <a:solidFill>
-                  <a:srgbClr val="2B5F5F"/>
-                </a:solidFill>
-                <a:latin typeface="IBM Plex Mono" pitchFamily="34" charset="0"/>
-                <a:ea typeface="IBM Plex Mono" pitchFamily="34" charset="-122"/>
-                <a:cs typeface="IBM Plex Mono" pitchFamily="34" charset="-120"/>
-              </a:rPr>
-              <a:t>C </a:t>
-            </a:r>
-            <a:r>
-              <a:rPr lang="en-US" sz="1350" kern="0" spc="135" dirty="0">
-                <a:solidFill>
-                  <a:srgbClr val="4A4A4A"/>
-                </a:solidFill>
-                <a:latin typeface="IBM Plex Mono" pitchFamily="34" charset="0"/>
-                <a:ea typeface="IBM Plex Mono" pitchFamily="34" charset="-122"/>
-                <a:cs typeface="IBM Plex Mono" pitchFamily="34" charset="-120"/>
-              </a:rPr>
-              <a:t>BESLUT I STYRGRUPP</a:t>
-            </a:r>
-            <a:endParaRPr lang="en-US" sz="1350" dirty="0"/>
-          </a:p>
-        </p:txBody>
-      </p:sp>
-      <p:sp>
-        <p:nvSpPr>
-          <p:cNvPr id="22" name="Text 20"/>
-          <p:cNvSpPr/>
-          <p:nvPr/>
-        </p:nvSpPr>
-        <p:spPr>
-          <a:xfrm>
-            <a:off x="12534900" y="4200525"/>
-            <a:ext cx="4518660" cy="624780"/>
-          </a:xfrm>
-          <a:prstGeom prst="rect">
-            <a:avLst/>
-          </a:prstGeom>
-          <a:noFill/>
-          <a:ln/>
-        </p:spPr>
-        <p:txBody>
-          <a:bodyPr wrap="square" lIns="25400" tIns="25400" rIns="25400" bIns="25400" rtlCol="0" anchor="t">
-            <a:normAutofit/>
-          </a:bodyPr>
-          <a:lstStyle/>
-          <a:p>
-            <a:pPr marL="0" indent="0" algn="l">
-              <a:lnSpc>
-                <a:spcPct val="140000"/>
-              </a:lnSpc>
-              <a:buNone/>
-            </a:pPr>
-            <a:r>
-              <a:rPr lang="en-US" sz="1650" dirty="0">
-                <a:solidFill>
-                  <a:srgbClr val="1A1A1A"/>
-                </a:solidFill>
-                <a:latin typeface="-apple-system" pitchFamily="34" charset="0"/>
-                <a:ea typeface="-apple-system" pitchFamily="34" charset="-122"/>
-                <a:cs typeface="-apple-system" pitchFamily="34" charset="-120"/>
-              </a:rPr>
-              <a:t>{Beslut 1 — vad styrgruppen ska ta ställning till vid faslut}</a:t>
-            </a:r>
-            <a:endParaRPr lang="en-US" sz="1650" dirty="0"/>
-          </a:p>
-        </p:txBody>
-      </p:sp>
-      <p:sp>
-        <p:nvSpPr>
-          <p:cNvPr id="23" name="Text 21"/>
-          <p:cNvSpPr/>
-          <p:nvPr/>
-        </p:nvSpPr>
-        <p:spPr>
-          <a:xfrm>
-            <a:off x="12534900" y="4958655"/>
-            <a:ext cx="4518660" cy="331440"/>
-          </a:xfrm>
-          <a:prstGeom prst="rect">
-            <a:avLst/>
-          </a:prstGeom>
-          <a:noFill/>
-          <a:ln/>
-        </p:spPr>
-        <p:txBody>
-          <a:bodyPr wrap="square" lIns="25400" tIns="25400" rIns="25400" bIns="25400" rtlCol="0" anchor="t">
-            <a:normAutofit/>
-          </a:bodyPr>
-          <a:lstStyle/>
-          <a:p>
-            <a:pPr marL="0" indent="0" algn="l">
-              <a:lnSpc>
-                <a:spcPct val="140000"/>
-              </a:lnSpc>
-              <a:buNone/>
-            </a:pPr>
-            <a:r>
-              <a:rPr lang="en-US" sz="1650" dirty="0">
-                <a:solidFill>
-                  <a:srgbClr val="1A1A1A"/>
-                </a:solidFill>
-                <a:latin typeface="-apple-system" pitchFamily="34" charset="0"/>
-                <a:ea typeface="-apple-system" pitchFamily="34" charset="-122"/>
-                <a:cs typeface="-apple-system" pitchFamily="34" charset="-120"/>
-              </a:rPr>
-              <a:t>{Beslut 2}</a:t>
-            </a:r>
-            <a:endParaRPr lang="en-US" sz="1650" dirty="0"/>
-          </a:p>
-        </p:txBody>
-      </p:sp>
-      <p:sp>
-        <p:nvSpPr>
-          <p:cNvPr id="24" name="Text 22"/>
-          <p:cNvSpPr/>
-          <p:nvPr/>
-        </p:nvSpPr>
-        <p:spPr>
-          <a:xfrm>
-            <a:off x="12534900" y="5423446"/>
-            <a:ext cx="4518660" cy="331440"/>
-          </a:xfrm>
-          <a:prstGeom prst="rect">
-            <a:avLst/>
-          </a:prstGeom>
-          <a:noFill/>
-          <a:ln/>
-        </p:spPr>
-        <p:txBody>
-          <a:bodyPr wrap="square" lIns="25400" tIns="25400" rIns="25400" bIns="25400" rtlCol="0" anchor="t">
-            <a:normAutofit/>
-          </a:bodyPr>
-          <a:lstStyle/>
-          <a:p>
-            <a:pPr marL="0" indent="0" algn="l">
-              <a:lnSpc>
-                <a:spcPct val="140000"/>
-              </a:lnSpc>
-              <a:buNone/>
-            </a:pPr>
-            <a:r>
-              <a:rPr lang="en-US" sz="1650" dirty="0">
-                <a:solidFill>
-                  <a:srgbClr val="1A1A1A"/>
-                </a:solidFill>
-                <a:latin typeface="-apple-system" pitchFamily="34" charset="0"/>
-                <a:ea typeface="-apple-system" pitchFamily="34" charset="-122"/>
-                <a:cs typeface="-apple-system" pitchFamily="34" charset="-120"/>
-              </a:rPr>
-              <a:t>{Go/no-go till nästa fas}</a:t>
-            </a:r>
-            <a:endParaRPr lang="en-US" sz="1650" dirty="0"/>
-          </a:p>
-        </p:txBody>
-      </p:sp>
-      <p:sp>
-        <p:nvSpPr>
-          <p:cNvPr id="25" name="Shape 23"/>
-          <p:cNvSpPr/>
-          <p:nvPr/>
-        </p:nvSpPr>
-        <p:spPr>
-          <a:xfrm>
-            <a:off x="1143000" y="9001125"/>
-            <a:ext cx="16002000" cy="9525"/>
-          </a:xfrm>
-          <a:prstGeom prst="rect">
-            <a:avLst/>
-          </a:prstGeom>
-          <a:solidFill>
-            <a:srgbClr val="E8DFCD"/>
-          </a:solidFill>
-          <a:ln/>
-        </p:spPr>
-        <p:txBody>
-          <a:bodyPr/>
-          <a:lstStyle/>
-          <a:p>
-            <a:endParaRPr lang="sv-SE"/>
-          </a:p>
-        </p:txBody>
-      </p:sp>
-      <p:sp>
-        <p:nvSpPr>
-          <p:cNvPr id="26" name="Text 24"/>
-          <p:cNvSpPr/>
-          <p:nvPr/>
-        </p:nvSpPr>
-        <p:spPr>
-          <a:xfrm>
-            <a:off x="1143000" y="9277350"/>
-            <a:ext cx="2171700" cy="209550"/>
-          </a:xfrm>
-          <a:prstGeom prst="rect">
-            <a:avLst/>
-          </a:prstGeom>
-          <a:noFill/>
-          <a:ln/>
-        </p:spPr>
-        <p:txBody>
-          <a:bodyPr wrap="square" lIns="25400" tIns="25400" rIns="25400" bIns="25400" rtlCol="0" anchor="t">
-            <a:normAutofit/>
-          </a:bodyPr>
-          <a:lstStyle/>
-          <a:p>
-            <a:pPr marL="0" indent="0" algn="l">
-              <a:buNone/>
-            </a:pPr>
-            <a:r>
-              <a:rPr lang="en-US" sz="1050" kern="0" spc="105" dirty="0">
-                <a:solidFill>
-                  <a:srgbClr val="4A4A4A"/>
-                </a:solidFill>
-                <a:latin typeface="IBM Plex Mono" pitchFamily="34" charset="0"/>
-                <a:ea typeface="IBM Plex Mono" pitchFamily="34" charset="-122"/>
-                <a:cs typeface="IBM Plex Mono" pitchFamily="34" charset="-120"/>
-              </a:rPr>
-              <a:t>TIDSLINJE · FAS 1</a:t>
-            </a:r>
-            <a:endParaRPr lang="en-US" sz="1050" dirty="0"/>
-          </a:p>
-        </p:txBody>
-      </p:sp>
-      <p:sp>
-        <p:nvSpPr>
-          <p:cNvPr id="27" name="Shape 25"/>
-          <p:cNvSpPr/>
-          <p:nvPr/>
-        </p:nvSpPr>
-        <p:spPr>
-          <a:xfrm>
-            <a:off x="3467100" y="9201150"/>
-            <a:ext cx="13677900" cy="133350"/>
-          </a:xfrm>
-          <a:prstGeom prst="rect">
-            <a:avLst/>
-          </a:prstGeom>
-          <a:solidFill>
-            <a:srgbClr val="E8DFCD"/>
-          </a:solidFill>
-          <a:ln/>
-        </p:spPr>
-        <p:txBody>
-          <a:bodyPr/>
-          <a:lstStyle/>
-          <a:p>
-            <a:endParaRPr lang="sv-SE"/>
-          </a:p>
-        </p:txBody>
-      </p:sp>
-      <p:sp>
-        <p:nvSpPr>
-          <p:cNvPr id="28" name="Shape 26"/>
-          <p:cNvSpPr/>
-          <p:nvPr/>
-        </p:nvSpPr>
-        <p:spPr>
-          <a:xfrm>
-            <a:off x="3467100" y="9201150"/>
-            <a:ext cx="2279600" cy="133350"/>
-          </a:xfrm>
-          <a:prstGeom prst="rect">
-            <a:avLst/>
-          </a:prstGeom>
-          <a:solidFill>
-            <a:srgbClr val="2B5F5F"/>
-          </a:solidFill>
-          <a:ln/>
-        </p:spPr>
-        <p:txBody>
-          <a:bodyPr/>
-          <a:lstStyle/>
-          <a:p>
-            <a:endParaRPr lang="sv-SE"/>
-          </a:p>
-        </p:txBody>
-      </p:sp>
-      <p:sp>
-        <p:nvSpPr>
           <p:cNvPr id="29" name="Shape 27"/>
           <p:cNvSpPr/>
           <p:nvPr/>
@@ -23827,7 +21926,7 @@
         </p:spPr>
         <p:txBody>
           <a:bodyPr wrap="square" lIns="25400" tIns="25400" rIns="25400" bIns="25400" rtlCol="0" anchor="t">
-            <a:normAutofit/>
+            <a:normAutofit lnSpcReduction="10000"/>
           </a:bodyPr>
           <a:lstStyle/>
           <a:p>
@@ -23895,7 +21994,7 @@
         </p:spPr>
         <p:txBody>
           <a:bodyPr wrap="square" lIns="25400" tIns="25400" rIns="25400" bIns="25400" rtlCol="0" anchor="t">
-            <a:normAutofit/>
+            <a:normAutofit lnSpcReduction="10000"/>
           </a:bodyPr>
           <a:lstStyle/>
           <a:p>
@@ -23963,7 +22062,7 @@
         </p:spPr>
         <p:txBody>
           <a:bodyPr wrap="square" lIns="25400" tIns="25400" rIns="25400" bIns="25400" rtlCol="0" anchor="t">
-            <a:normAutofit/>
+            <a:normAutofit lnSpcReduction="10000"/>
           </a:bodyPr>
           <a:lstStyle/>
           <a:p>
@@ -24031,7 +22130,7 @@
         </p:spPr>
         <p:txBody>
           <a:bodyPr wrap="square" lIns="25400" tIns="25400" rIns="25400" bIns="25400" rtlCol="0" anchor="t">
-            <a:normAutofit/>
+            <a:normAutofit lnSpcReduction="10000"/>
           </a:bodyPr>
           <a:lstStyle/>
           <a:p>
@@ -24099,7 +22198,7 @@
         </p:spPr>
         <p:txBody>
           <a:bodyPr wrap="square" lIns="25400" tIns="25400" rIns="25400" bIns="25400" rtlCol="0" anchor="t">
-            <a:normAutofit/>
+            <a:normAutofit lnSpcReduction="10000"/>
           </a:bodyPr>
           <a:lstStyle/>
           <a:p>
@@ -24167,7 +22266,7 @@
         </p:spPr>
         <p:txBody>
           <a:bodyPr wrap="square" lIns="25400" tIns="25400" rIns="25400" bIns="25400" rtlCol="0" anchor="t">
-            <a:normAutofit/>
+            <a:normAutofit lnSpcReduction="10000"/>
           </a:bodyPr>
           <a:lstStyle/>
           <a:p>
@@ -24235,7 +22334,7 @@
         </p:spPr>
         <p:txBody>
           <a:bodyPr wrap="square" lIns="25400" tIns="25400" rIns="25400" bIns="25400" rtlCol="0" anchor="t">
-            <a:normAutofit/>
+            <a:normAutofit lnSpcReduction="10000"/>
           </a:bodyPr>
           <a:lstStyle/>
           <a:p>
@@ -24303,7 +22402,7 @@
         </p:spPr>
         <p:txBody>
           <a:bodyPr wrap="square" lIns="25400" tIns="25400" rIns="25400" bIns="25400" rtlCol="0" anchor="t">
-            <a:normAutofit/>
+            <a:normAutofit lnSpcReduction="10000"/>
           </a:bodyPr>
           <a:lstStyle/>
           <a:p>
@@ -24371,7 +22470,7 @@
         </p:spPr>
         <p:txBody>
           <a:bodyPr wrap="square" lIns="25400" tIns="25400" rIns="25400" bIns="25400" rtlCol="0" anchor="t">
-            <a:normAutofit/>
+            <a:normAutofit lnSpcReduction="10000"/>
           </a:bodyPr>
           <a:lstStyle/>
           <a:p>
@@ -24439,7 +22538,7 @@
         </p:spPr>
         <p:txBody>
           <a:bodyPr wrap="square" lIns="25400" tIns="25400" rIns="25400" bIns="25400" rtlCol="0" anchor="t">
-            <a:normAutofit/>
+            <a:normAutofit lnSpcReduction="10000"/>
           </a:bodyPr>
           <a:lstStyle/>
           <a:p>
@@ -24507,7 +22606,7 @@
         </p:spPr>
         <p:txBody>
           <a:bodyPr wrap="square" lIns="25400" tIns="25400" rIns="25400" bIns="25400" rtlCol="0" anchor="t">
-            <a:normAutofit/>
+            <a:normAutofit lnSpcReduction="10000"/>
           </a:bodyPr>
           <a:lstStyle/>
           <a:p>
@@ -24575,7 +22674,7 @@
         </p:spPr>
         <p:txBody>
           <a:bodyPr wrap="square" lIns="25400" tIns="25400" rIns="25400" bIns="25400" rtlCol="0" anchor="t">
-            <a:normAutofit/>
+            <a:normAutofit lnSpcReduction="10000"/>
           </a:bodyPr>
           <a:lstStyle/>
           <a:p>
@@ -24780,7 +22879,7 @@
         </p:spPr>
         <p:txBody>
           <a:bodyPr wrap="square" lIns="25400" tIns="25400" rIns="25400" bIns="25400" rtlCol="0" anchor="t">
-            <a:normAutofit/>
+            <a:normAutofit lnSpcReduction="10000"/>
           </a:bodyPr>
           <a:lstStyle/>
           <a:p>
@@ -24848,7 +22947,7 @@
         </p:spPr>
         <p:txBody>
           <a:bodyPr wrap="square" lIns="25400" tIns="25400" rIns="25400" bIns="25400" rtlCol="0" anchor="t">
-            <a:normAutofit/>
+            <a:normAutofit fontScale="92500" lnSpcReduction="20000"/>
           </a:bodyPr>
           <a:lstStyle/>
           <a:p>
@@ -24933,7 +23032,7 @@
         </p:spPr>
         <p:txBody>
           <a:bodyPr wrap="square" lIns="25400" tIns="25400" rIns="25400" bIns="25400" rtlCol="0" anchor="t">
-            <a:normAutofit/>
+            <a:normAutofit fontScale="92500" lnSpcReduction="20000"/>
           </a:bodyPr>
           <a:lstStyle/>
           <a:p>
@@ -25097,7 +23196,7 @@
         </p:spPr>
         <p:txBody>
           <a:bodyPr wrap="square" lIns="25400" tIns="25400" rIns="25400" bIns="25400" rtlCol="0" anchor="t">
-            <a:normAutofit/>
+            <a:normAutofit fontScale="92500" lnSpcReduction="10000"/>
           </a:bodyPr>
           <a:lstStyle/>
           <a:p>
@@ -25141,7 +23240,7 @@
         </p:spPr>
         <p:txBody>
           <a:bodyPr wrap="square" lIns="25400" tIns="25400" rIns="25400" bIns="25400" rtlCol="0" anchor="t">
-            <a:normAutofit/>
+            <a:normAutofit fontScale="92500" lnSpcReduction="10000"/>
           </a:bodyPr>
           <a:lstStyle/>
           <a:p>
@@ -25185,7 +23284,7 @@
         </p:spPr>
         <p:txBody>
           <a:bodyPr wrap="square" lIns="25400" tIns="25400" rIns="25400" bIns="25400" rtlCol="0" anchor="t">
-            <a:normAutofit/>
+            <a:normAutofit fontScale="92500" lnSpcReduction="10000"/>
           </a:bodyPr>
           <a:lstStyle/>
           <a:p>
@@ -25229,7 +23328,7 @@
         </p:spPr>
         <p:txBody>
           <a:bodyPr wrap="square" lIns="25400" tIns="25400" rIns="25400" bIns="25400" rtlCol="0" anchor="t">
-            <a:normAutofit/>
+            <a:normAutofit fontScale="92500" lnSpcReduction="10000"/>
           </a:bodyPr>
           <a:lstStyle/>
           <a:p>
@@ -25352,7 +23451,7 @@
         </p:spPr>
         <p:txBody>
           <a:bodyPr wrap="square" lIns="25400" tIns="25400" rIns="25400" bIns="25400" rtlCol="0" anchor="t">
-            <a:normAutofit/>
+            <a:normAutofit fontScale="92500" lnSpcReduction="10000"/>
           </a:bodyPr>
           <a:lstStyle/>
           <a:p>
@@ -25396,7 +23495,7 @@
         </p:spPr>
         <p:txBody>
           <a:bodyPr wrap="square" lIns="25400" tIns="25400" rIns="25400" bIns="25400" rtlCol="0" anchor="t">
-            <a:normAutofit/>
+            <a:normAutofit fontScale="92500" lnSpcReduction="10000"/>
           </a:bodyPr>
           <a:lstStyle/>
           <a:p>
@@ -25440,7 +23539,7 @@
         </p:spPr>
         <p:txBody>
           <a:bodyPr wrap="square" lIns="25400" tIns="25400" rIns="25400" bIns="25400" rtlCol="0" anchor="t">
-            <a:normAutofit/>
+            <a:normAutofit fontScale="92500" lnSpcReduction="10000"/>
           </a:bodyPr>
           <a:lstStyle/>
           <a:p>
@@ -25590,7 +23689,7 @@
         </p:spPr>
         <p:txBody>
           <a:bodyPr wrap="square" lIns="25400" tIns="25400" rIns="25400" bIns="25400" rtlCol="0" anchor="t">
-            <a:normAutofit/>
+            <a:normAutofit fontScale="92500" lnSpcReduction="10000"/>
           </a:bodyPr>
           <a:lstStyle/>
           <a:p>
@@ -25634,7 +23733,7 @@
         </p:spPr>
         <p:txBody>
           <a:bodyPr wrap="square" lIns="25400" tIns="25400" rIns="25400" bIns="25400" rtlCol="0" anchor="t">
-            <a:normAutofit/>
+            <a:normAutofit fontScale="92500" lnSpcReduction="10000"/>
           </a:bodyPr>
           <a:lstStyle/>
           <a:p>
@@ -25678,7 +23777,7 @@
         </p:spPr>
         <p:txBody>
           <a:bodyPr wrap="square" lIns="25400" tIns="25400" rIns="25400" bIns="25400" rtlCol="0" anchor="t">
-            <a:normAutofit/>
+            <a:normAutofit fontScale="92500" lnSpcReduction="10000"/>
           </a:bodyPr>
           <a:lstStyle/>
           <a:p>
@@ -25749,7 +23848,7 @@
         </p:spPr>
         <p:txBody>
           <a:bodyPr wrap="square" lIns="25400" tIns="25400" rIns="25400" bIns="25400" rtlCol="0" anchor="t">
-            <a:normAutofit/>
+            <a:normAutofit lnSpcReduction="10000"/>
           </a:bodyPr>
           <a:lstStyle/>
           <a:p>
@@ -25871,7 +23970,7 @@
         </p:spPr>
         <p:txBody>
           <a:bodyPr wrap="square" lIns="25400" tIns="25400" rIns="25400" bIns="25400" rtlCol="0" anchor="t">
-            <a:normAutofit/>
+            <a:normAutofit lnSpcReduction="10000"/>
           </a:bodyPr>
           <a:lstStyle/>
           <a:p>
@@ -25939,7 +24038,7 @@
         </p:spPr>
         <p:txBody>
           <a:bodyPr wrap="square" lIns="25400" tIns="25400" rIns="25400" bIns="25400" rtlCol="0" anchor="t">
-            <a:normAutofit/>
+            <a:normAutofit lnSpcReduction="10000"/>
           </a:bodyPr>
           <a:lstStyle/>
           <a:p>
@@ -26007,7 +24106,7 @@
         </p:spPr>
         <p:txBody>
           <a:bodyPr wrap="square" lIns="25400" tIns="25400" rIns="25400" bIns="25400" rtlCol="0" anchor="t">
-            <a:normAutofit/>
+            <a:normAutofit lnSpcReduction="10000"/>
           </a:bodyPr>
           <a:lstStyle/>
           <a:p>
@@ -26075,7 +24174,7 @@
         </p:spPr>
         <p:txBody>
           <a:bodyPr wrap="square" lIns="25400" tIns="25400" rIns="25400" bIns="25400" rtlCol="0" anchor="t">
-            <a:normAutofit/>
+            <a:normAutofit lnSpcReduction="10000"/>
           </a:bodyPr>
           <a:lstStyle/>
           <a:p>
@@ -26143,7 +24242,7 @@
         </p:spPr>
         <p:txBody>
           <a:bodyPr wrap="square" lIns="25400" tIns="25400" rIns="25400" bIns="25400" rtlCol="0" anchor="t">
-            <a:normAutofit/>
+            <a:normAutofit lnSpcReduction="10000"/>
           </a:bodyPr>
           <a:lstStyle/>
           <a:p>
@@ -26211,7 +24310,7 @@
         </p:spPr>
         <p:txBody>
           <a:bodyPr wrap="square" lIns="25400" tIns="25400" rIns="25400" bIns="25400" rtlCol="0" anchor="t">
-            <a:normAutofit/>
+            <a:normAutofit lnSpcReduction="10000"/>
           </a:bodyPr>
           <a:lstStyle/>
           <a:p>
@@ -26279,7 +24378,7 @@
         </p:spPr>
         <p:txBody>
           <a:bodyPr wrap="square" lIns="25400" tIns="25400" rIns="25400" bIns="25400" rtlCol="0" anchor="t">
-            <a:normAutofit/>
+            <a:normAutofit lnSpcReduction="10000"/>
           </a:bodyPr>
           <a:lstStyle/>
           <a:p>
@@ -26347,7 +24446,7 @@
         </p:spPr>
         <p:txBody>
           <a:bodyPr wrap="square" lIns="25400" tIns="25400" rIns="25400" bIns="25400" rtlCol="0" anchor="t">
-            <a:normAutofit/>
+            <a:normAutofit lnSpcReduction="10000"/>
           </a:bodyPr>
           <a:lstStyle/>
           <a:p>
@@ -26415,7 +24514,7 @@
         </p:spPr>
         <p:txBody>
           <a:bodyPr wrap="square" lIns="25400" tIns="25400" rIns="25400" bIns="25400" rtlCol="0" anchor="t">
-            <a:normAutofit/>
+            <a:normAutofit lnSpcReduction="10000"/>
           </a:bodyPr>
           <a:lstStyle/>
           <a:p>
@@ -26483,7 +24582,7 @@
         </p:spPr>
         <p:txBody>
           <a:bodyPr wrap="square" lIns="25400" tIns="25400" rIns="25400" bIns="25400" rtlCol="0" anchor="t">
-            <a:normAutofit/>
+            <a:normAutofit lnSpcReduction="10000"/>
           </a:bodyPr>
           <a:lstStyle/>
           <a:p>
@@ -26551,7 +24650,7 @@
         </p:spPr>
         <p:txBody>
           <a:bodyPr wrap="square" lIns="25400" tIns="25400" rIns="25400" bIns="25400" rtlCol="0" anchor="t">
-            <a:normAutofit/>
+            <a:normAutofit lnSpcReduction="10000"/>
           </a:bodyPr>
           <a:lstStyle/>
           <a:p>
@@ -26619,7 +24718,7 @@
         </p:spPr>
         <p:txBody>
           <a:bodyPr wrap="square" lIns="25400" tIns="25400" rIns="25400" bIns="25400" rtlCol="0" anchor="t">
-            <a:normAutofit/>
+            <a:normAutofit lnSpcReduction="10000"/>
           </a:bodyPr>
           <a:lstStyle/>
           <a:p>
@@ -26824,7 +24923,7 @@
         </p:spPr>
         <p:txBody>
           <a:bodyPr wrap="square" lIns="25400" tIns="25400" rIns="25400" bIns="25400" rtlCol="0" anchor="t">
-            <a:normAutofit/>
+            <a:normAutofit lnSpcReduction="10000"/>
           </a:bodyPr>
           <a:lstStyle/>
           <a:p>
@@ -26892,7 +24991,7 @@
         </p:spPr>
         <p:txBody>
           <a:bodyPr wrap="square" lIns="25400" tIns="25400" rIns="25400" bIns="25400" rtlCol="0" anchor="t">
-            <a:normAutofit/>
+            <a:normAutofit fontScale="92500" lnSpcReduction="20000"/>
           </a:bodyPr>
           <a:lstStyle/>
           <a:p>
@@ -26977,7 +25076,7 @@
         </p:spPr>
         <p:txBody>
           <a:bodyPr wrap="square" lIns="25400" tIns="25400" rIns="25400" bIns="25400" rtlCol="0" anchor="t">
-            <a:normAutofit/>
+            <a:normAutofit fontScale="92500" lnSpcReduction="20000"/>
           </a:bodyPr>
           <a:lstStyle/>
           <a:p>
@@ -27141,7 +25240,7 @@
         </p:spPr>
         <p:txBody>
           <a:bodyPr wrap="square" lIns="25400" tIns="25400" rIns="25400" bIns="25400" rtlCol="0" anchor="t">
-            <a:normAutofit/>
+            <a:normAutofit fontScale="92500" lnSpcReduction="10000"/>
           </a:bodyPr>
           <a:lstStyle/>
           <a:p>
@@ -27185,7 +25284,7 @@
         </p:spPr>
         <p:txBody>
           <a:bodyPr wrap="square" lIns="25400" tIns="25400" rIns="25400" bIns="25400" rtlCol="0" anchor="t">
-            <a:normAutofit/>
+            <a:normAutofit fontScale="92500" lnSpcReduction="10000"/>
           </a:bodyPr>
           <a:lstStyle/>
           <a:p>
@@ -27229,7 +25328,7 @@
         </p:spPr>
         <p:txBody>
           <a:bodyPr wrap="square" lIns="25400" tIns="25400" rIns="25400" bIns="25400" rtlCol="0" anchor="t">
-            <a:normAutofit/>
+            <a:normAutofit fontScale="92500" lnSpcReduction="10000"/>
           </a:bodyPr>
           <a:lstStyle/>
           <a:p>
@@ -27273,7 +25372,7 @@
         </p:spPr>
         <p:txBody>
           <a:bodyPr wrap="square" lIns="25400" tIns="25400" rIns="25400" bIns="25400" rtlCol="0" anchor="t">
-            <a:normAutofit/>
+            <a:normAutofit fontScale="92500" lnSpcReduction="10000"/>
           </a:bodyPr>
           <a:lstStyle/>
           <a:p>
@@ -27396,7 +25495,7 @@
         </p:spPr>
         <p:txBody>
           <a:bodyPr wrap="square" lIns="25400" tIns="25400" rIns="25400" bIns="25400" rtlCol="0" anchor="t">
-            <a:normAutofit/>
+            <a:normAutofit fontScale="92500" lnSpcReduction="10000"/>
           </a:bodyPr>
           <a:lstStyle/>
           <a:p>
@@ -27440,7 +25539,7 @@
         </p:spPr>
         <p:txBody>
           <a:bodyPr wrap="square" lIns="25400" tIns="25400" rIns="25400" bIns="25400" rtlCol="0" anchor="t">
-            <a:normAutofit/>
+            <a:normAutofit fontScale="92500" lnSpcReduction="10000"/>
           </a:bodyPr>
           <a:lstStyle/>
           <a:p>
@@ -27484,7 +25583,7 @@
         </p:spPr>
         <p:txBody>
           <a:bodyPr wrap="square" lIns="25400" tIns="25400" rIns="25400" bIns="25400" rtlCol="0" anchor="t">
-            <a:normAutofit/>
+            <a:normAutofit fontScale="92500" lnSpcReduction="10000"/>
           </a:bodyPr>
           <a:lstStyle/>
           <a:p>
@@ -27634,7 +25733,7 @@
         </p:spPr>
         <p:txBody>
           <a:bodyPr wrap="square" lIns="25400" tIns="25400" rIns="25400" bIns="25400" rtlCol="0" anchor="t">
-            <a:normAutofit/>
+            <a:normAutofit fontScale="92500" lnSpcReduction="10000"/>
           </a:bodyPr>
           <a:lstStyle/>
           <a:p>
@@ -27678,7 +25777,7 @@
         </p:spPr>
         <p:txBody>
           <a:bodyPr wrap="square" lIns="25400" tIns="25400" rIns="25400" bIns="25400" rtlCol="0" anchor="t">
-            <a:normAutofit/>
+            <a:normAutofit fontScale="92500" lnSpcReduction="10000"/>
           </a:bodyPr>
           <a:lstStyle/>
           <a:p>
@@ -27722,7 +25821,7 @@
         </p:spPr>
         <p:txBody>
           <a:bodyPr wrap="square" lIns="25400" tIns="25400" rIns="25400" bIns="25400" rtlCol="0" anchor="t">
-            <a:normAutofit/>
+            <a:normAutofit fontScale="92500" lnSpcReduction="10000"/>
           </a:bodyPr>
           <a:lstStyle/>
           <a:p>
@@ -27793,7 +25892,7 @@
         </p:spPr>
         <p:txBody>
           <a:bodyPr wrap="square" lIns="25400" tIns="25400" rIns="25400" bIns="25400" rtlCol="0" anchor="t">
-            <a:normAutofit/>
+            <a:normAutofit lnSpcReduction="10000"/>
           </a:bodyPr>
           <a:lstStyle/>
           <a:p>
@@ -27915,7 +26014,7 @@
         </p:spPr>
         <p:txBody>
           <a:bodyPr wrap="square" lIns="25400" tIns="25400" rIns="25400" bIns="25400" rtlCol="0" anchor="t">
-            <a:normAutofit/>
+            <a:normAutofit lnSpcReduction="10000"/>
           </a:bodyPr>
           <a:lstStyle/>
           <a:p>
@@ -27983,7 +26082,7 @@
         </p:spPr>
         <p:txBody>
           <a:bodyPr wrap="square" lIns="25400" tIns="25400" rIns="25400" bIns="25400" rtlCol="0" anchor="t">
-            <a:normAutofit/>
+            <a:normAutofit lnSpcReduction="10000"/>
           </a:bodyPr>
           <a:lstStyle/>
           <a:p>
@@ -28051,7 +26150,7 @@
         </p:spPr>
         <p:txBody>
           <a:bodyPr wrap="square" lIns="25400" tIns="25400" rIns="25400" bIns="25400" rtlCol="0" anchor="t">
-            <a:normAutofit/>
+            <a:normAutofit lnSpcReduction="10000"/>
           </a:bodyPr>
           <a:lstStyle/>
           <a:p>
@@ -28119,7 +26218,7 @@
         </p:spPr>
         <p:txBody>
           <a:bodyPr wrap="square" lIns="25400" tIns="25400" rIns="25400" bIns="25400" rtlCol="0" anchor="t">
-            <a:normAutofit/>
+            <a:normAutofit lnSpcReduction="10000"/>
           </a:bodyPr>
           <a:lstStyle/>
           <a:p>
@@ -28187,7 +26286,7 @@
         </p:spPr>
         <p:txBody>
           <a:bodyPr wrap="square" lIns="25400" tIns="25400" rIns="25400" bIns="25400" rtlCol="0" anchor="t">
-            <a:normAutofit/>
+            <a:normAutofit lnSpcReduction="10000"/>
           </a:bodyPr>
           <a:lstStyle/>
           <a:p>
@@ -28255,7 +26354,7 @@
         </p:spPr>
         <p:txBody>
           <a:bodyPr wrap="square" lIns="25400" tIns="25400" rIns="25400" bIns="25400" rtlCol="0" anchor="t">
-            <a:normAutofit/>
+            <a:normAutofit lnSpcReduction="10000"/>
           </a:bodyPr>
           <a:lstStyle/>
           <a:p>
@@ -28323,7 +26422,7 @@
         </p:spPr>
         <p:txBody>
           <a:bodyPr wrap="square" lIns="25400" tIns="25400" rIns="25400" bIns="25400" rtlCol="0" anchor="t">
-            <a:normAutofit/>
+            <a:normAutofit lnSpcReduction="10000"/>
           </a:bodyPr>
           <a:lstStyle/>
           <a:p>
@@ -28391,7 +26490,7 @@
         </p:spPr>
         <p:txBody>
           <a:bodyPr wrap="square" lIns="25400" tIns="25400" rIns="25400" bIns="25400" rtlCol="0" anchor="t">
-            <a:normAutofit/>
+            <a:normAutofit lnSpcReduction="10000"/>
           </a:bodyPr>
           <a:lstStyle/>
           <a:p>
@@ -28459,7 +26558,7 @@
         </p:spPr>
         <p:txBody>
           <a:bodyPr wrap="square" lIns="25400" tIns="25400" rIns="25400" bIns="25400" rtlCol="0" anchor="t">
-            <a:normAutofit/>
+            <a:normAutofit lnSpcReduction="10000"/>
           </a:bodyPr>
           <a:lstStyle/>
           <a:p>
@@ -28527,7 +26626,7 @@
         </p:spPr>
         <p:txBody>
           <a:bodyPr wrap="square" lIns="25400" tIns="25400" rIns="25400" bIns="25400" rtlCol="0" anchor="t">
-            <a:normAutofit/>
+            <a:normAutofit lnSpcReduction="10000"/>
           </a:bodyPr>
           <a:lstStyle/>
           <a:p>
@@ -28595,7 +26694,7 @@
         </p:spPr>
         <p:txBody>
           <a:bodyPr wrap="square" lIns="25400" tIns="25400" rIns="25400" bIns="25400" rtlCol="0" anchor="t">
-            <a:normAutofit/>
+            <a:normAutofit lnSpcReduction="10000"/>
           </a:bodyPr>
           <a:lstStyle/>
           <a:p>
@@ -28663,7 +26762,7 @@
         </p:spPr>
         <p:txBody>
           <a:bodyPr wrap="square" lIns="25400" tIns="25400" rIns="25400" bIns="25400" rtlCol="0" anchor="t">
-            <a:normAutofit/>
+            <a:normAutofit lnSpcReduction="10000"/>
           </a:bodyPr>
           <a:lstStyle/>
           <a:p>

--- a/templates/anbudsmall-v2.pptx
+++ b/templates/anbudsmall-v2.pptx
@@ -6990,7 +6990,7 @@
         </p:spPr>
         <p:txBody>
           <a:bodyPr wrap="square" lIns="25400" tIns="25400" rIns="25400" bIns="25400" rtlCol="0" anchor="t">
-            <a:normAutofit fontScale="92500" lnSpcReduction="10000"/>
+            <a:normAutofit fontScale="92500"/>
           </a:bodyPr>
           <a:lstStyle/>
           <a:p>
@@ -9309,7 +9309,7 @@
         </p:spPr>
         <p:txBody>
           <a:bodyPr wrap="square" lIns="25400" tIns="25400" rIns="25400" bIns="25400" rtlCol="0" anchor="t">
-            <a:normAutofit/>
+            <a:normAutofit fontScale="92500"/>
           </a:bodyPr>
           <a:lstStyle/>
           <a:p>
@@ -13928,7 +13928,7 @@
         </p:spPr>
         <p:txBody>
           <a:bodyPr wrap="square" lIns="25400" tIns="25400" rIns="25400" bIns="25400" rtlCol="0" anchor="t">
-            <a:normAutofit fontScale="92500" lnSpcReduction="20000"/>
+            <a:normAutofit fontScale="92500" lnSpcReduction="10000"/>
           </a:bodyPr>
           <a:lstStyle/>
           <a:p>
@@ -21244,8 +21244,8 @@
         </p:nvSpPr>
         <p:spPr>
           <a:xfrm>
-            <a:off x="3695700" y="1440210"/>
-            <a:ext cx="13852779" cy="257175"/>
+            <a:off x="3695701" y="1440210"/>
+            <a:ext cx="3124200" cy="257175"/>
           </a:xfrm>
           <a:prstGeom prst="rect">
             <a:avLst/>
@@ -21285,8 +21285,8 @@
         </p:nvSpPr>
         <p:spPr>
           <a:xfrm>
-            <a:off x="3695700" y="1792635"/>
-            <a:ext cx="13852779" cy="598140"/>
+            <a:off x="3695701" y="1792635"/>
+            <a:ext cx="8420100" cy="598140"/>
           </a:xfrm>
           <a:prstGeom prst="rect">
             <a:avLst/>
@@ -21450,17 +21450,19 @@
         <p:spPr>
           <a:xfrm>
             <a:off x="1333500" y="4200525"/>
-            <a:ext cx="4989576" cy="4500000"/>
-          </a:xfrm>
-          <a:prstGeom prst="rect">
-            <a:avLst/>
-          </a:prstGeom>
-          <a:noFill/>
-          <a:ln/>
-        </p:spPr>
-        <p:txBody>
-          <a:bodyPr wrap="square" lIns="25400" tIns="25400" rIns="25400" bIns="25400" rtlCol="0" anchor="t">
-            <a:normAutofit fontScale="92500" lnSpcReduction="10000"/>
+            <a:ext cx="4989576" cy="3497610"/>
+          </a:xfrm>
+          <a:prstGeom prst="rect">
+            <a:avLst/>
+          </a:prstGeom>
+          <a:noFill/>
+          <a:ln>
+            <a:noFill/>
+          </a:ln>
+        </p:spPr>
+        <p:txBody>
+          <a:bodyPr wrap="square" lIns="25400" tIns="25400" rIns="25400" bIns="25400" rtlCol="0" anchor="t">
+            <a:normAutofit/>
           </a:bodyPr>
           <a:lstStyle/>
           <a:p>
@@ -21573,17 +21575,19 @@
         <p:spPr>
           <a:xfrm>
             <a:off x="6819900" y="4200525"/>
-            <a:ext cx="4989576" cy="4500000"/>
-          </a:xfrm>
-          <a:prstGeom prst="rect">
-            <a:avLst/>
-          </a:prstGeom>
-          <a:noFill/>
-          <a:ln/>
-        </p:spPr>
-        <p:txBody>
-          <a:bodyPr wrap="square" lIns="25400" tIns="25400" rIns="25400" bIns="25400" rtlCol="0" anchor="t">
-            <a:normAutofit fontScale="92500" lnSpcReduction="10000"/>
+            <a:ext cx="4989576" cy="3497610"/>
+          </a:xfrm>
+          <a:prstGeom prst="rect">
+            <a:avLst/>
+          </a:prstGeom>
+          <a:noFill/>
+          <a:ln>
+            <a:noFill/>
+          </a:ln>
+        </p:spPr>
+        <p:txBody>
+          <a:bodyPr wrap="square" lIns="25400" tIns="25400" rIns="25400" bIns="25400" rtlCol="0" anchor="t">
+            <a:normAutofit/>
           </a:bodyPr>
           <a:lstStyle/>
           <a:p>
@@ -21733,7 +21737,7 @@
         </p:spPr>
         <p:txBody>
           <a:bodyPr wrap="square" lIns="25400" tIns="25400" rIns="25400" bIns="25400" rtlCol="0" anchor="t">
-            <a:normAutofit fontScale="92500"/>
+            <a:normAutofit/>
           </a:bodyPr>
           <a:lstStyle/>
           <a:p>
@@ -22824,6 +22828,129 @@
               <a:t>07 / 17</a:t>
             </a:r>
             <a:endParaRPr lang="en-US" sz="1350" dirty="0"/>
+          </a:p>
+        </p:txBody>
+      </p:sp>
+      <p:sp>
+        <p:nvSpPr>
+          <p:cNvPr id="11" name="Shape 17">
+            <a:extLst>
+              <a:ext uri="{FF2B5EF4-FFF2-40B4-BE49-F238E27FC236}">
+                <a16:creationId xmlns:a16="http://schemas.microsoft.com/office/drawing/2014/main" id="{0B4BFD28-7CC4-7EB4-5C0E-924A9AC7BA44}"/>
+              </a:ext>
+            </a:extLst>
+          </p:cNvPr>
+          <p:cNvSpPr/>
+          <p:nvPr/>
+        </p:nvSpPr>
+        <p:spPr>
+          <a:xfrm>
+            <a:off x="12115801" y="280988"/>
+            <a:ext cx="5097779" cy="871537"/>
+          </a:xfrm>
+          <a:prstGeom prst="rect">
+            <a:avLst/>
+          </a:prstGeom>
+          <a:noFill/>
+          <a:ln>
+            <a:solidFill>
+              <a:schemeClr val="tx1"/>
+            </a:solidFill>
+          </a:ln>
+        </p:spPr>
+        <p:txBody>
+          <a:bodyPr/>
+          <a:lstStyle/>
+          <a:p>
+            <a:r>
+              <a:rPr lang="sv-SE" dirty="0"/>
+              <a:t>{Mål}</a:t>
+            </a:r>
+          </a:p>
+        </p:txBody>
+      </p:sp>
+      <p:sp>
+        <p:nvSpPr>
+          <p:cNvPr id="12" name="Text 14">
+            <a:extLst>
+              <a:ext uri="{FF2B5EF4-FFF2-40B4-BE49-F238E27FC236}">
+                <a16:creationId xmlns:a16="http://schemas.microsoft.com/office/drawing/2014/main" id="{5CDACDC8-417D-B9E3-4861-E7CEE7BFA914}"/>
+              </a:ext>
+            </a:extLst>
+          </p:cNvPr>
+          <p:cNvSpPr/>
+          <p:nvPr/>
+        </p:nvSpPr>
+        <p:spPr>
+          <a:xfrm>
+            <a:off x="1333500" y="7839075"/>
+            <a:ext cx="10475976" cy="800100"/>
+          </a:xfrm>
+          <a:prstGeom prst="rect">
+            <a:avLst/>
+          </a:prstGeom>
+          <a:noFill/>
+          <a:ln>
+            <a:noFill/>
+          </a:ln>
+        </p:spPr>
+        <p:txBody>
+          <a:bodyPr wrap="square" lIns="25400" tIns="25400" rIns="25400" bIns="25400" rtlCol="0" anchor="t">
+            <a:normAutofit/>
+          </a:bodyPr>
+          <a:lstStyle/>
+          <a:p>
+            <a:pPr marL="0" indent="0" algn="l">
+              <a:lnSpc>
+                <a:spcPct val="140000"/>
+              </a:lnSpc>
+              <a:buNone/>
+            </a:pPr>
+            <a:r>
+              <a:rPr lang="en-US" sz="1650" dirty="0">
+                <a:solidFill>
+                  <a:srgbClr val="1A1A1A"/>
+                </a:solidFill>
+                <a:latin typeface="-apple-system" pitchFamily="34" charset="0"/>
+                <a:ea typeface="-apple-system" pitchFamily="34" charset="-122"/>
+                <a:cs typeface="-apple-system" pitchFamily="34" charset="-120"/>
+              </a:rPr>
+              <a:t>{Risker}</a:t>
+            </a:r>
+            <a:endParaRPr lang="en-US" sz="1650" dirty="0"/>
+          </a:p>
+        </p:txBody>
+      </p:sp>
+      <p:sp>
+        <p:nvSpPr>
+          <p:cNvPr id="13" name="Shape 12">
+            <a:extLst>
+              <a:ext uri="{FF2B5EF4-FFF2-40B4-BE49-F238E27FC236}">
+                <a16:creationId xmlns:a16="http://schemas.microsoft.com/office/drawing/2014/main" id="{BCDE78B3-D30A-46C7-CF5F-6E897FE65AB8}"/>
+              </a:ext>
+            </a:extLst>
+          </p:cNvPr>
+          <p:cNvSpPr/>
+          <p:nvPr/>
+        </p:nvSpPr>
+        <p:spPr>
+          <a:xfrm>
+            <a:off x="12150090" y="1322548"/>
+            <a:ext cx="5029200" cy="9525"/>
+          </a:xfrm>
+          <a:prstGeom prst="rect">
+            <a:avLst/>
+          </a:prstGeom>
+          <a:solidFill>
+            <a:srgbClr val="2B5F5F"/>
+          </a:solidFill>
+          <a:ln/>
+        </p:spPr>
+        <p:txBody>
+          <a:bodyPr/>
+          <a:lstStyle/>
+          <a:p>
+            <a:endParaRPr lang="sv-SE"/>
           </a:p>
         </p:txBody>
       </p:sp>

--- a/templates/anbudsmall-v2.pptx
+++ b/templates/anbudsmall-v2.pptx
@@ -2216,9 +2216,9 @@
                 <a:solidFill>
                   <a:srgbClr val="1A1A1A"/>
                 </a:solidFill>
-                <a:latin typeface="-apple-system" pitchFamily="34" charset="0"/>
-                <a:ea typeface="-apple-system" pitchFamily="34" charset="-122"/>
-                <a:cs typeface="-apple-system" pitchFamily="34" charset="-120"/>
+                <a:latin typeface="Aptos" pitchFamily="34" charset="0"/>
+                <a:ea typeface="Aptos" pitchFamily="34" charset="-122"/>
+                <a:cs typeface="Aptos" pitchFamily="34" charset="-120"/>
               </a:rPr>
               <a:t>{Kundnamn}</a:t>
             </a:r>
@@ -2260,9 +2260,9 @@
                 <a:solidFill>
                   <a:srgbClr val="2B2B2B"/>
                 </a:solidFill>
-                <a:latin typeface="-apple-system" pitchFamily="34" charset="0"/>
-                <a:ea typeface="-apple-system" pitchFamily="34" charset="-122"/>
-                <a:cs typeface="-apple-system" pitchFamily="34" charset="-120"/>
+                <a:latin typeface="Aptos" pitchFamily="34" charset="0"/>
+                <a:ea typeface="Aptos" pitchFamily="34" charset="-122"/>
+                <a:cs typeface="Aptos" pitchFamily="34" charset="-120"/>
               </a:rPr>
               <a:t>{Upphandlingens namn}</a:t>
             </a:r>
@@ -2607,9 +2607,9 @@
                 <a:solidFill>
                   <a:srgbClr val="4A4A4A"/>
                 </a:solidFill>
-                <a:latin typeface="-apple-system" pitchFamily="34" charset="0"/>
-                <a:ea typeface="-apple-system" pitchFamily="34" charset="-122"/>
-                <a:cs typeface="-apple-system" pitchFamily="34" charset="-120"/>
+                <a:latin typeface="Aptos" pitchFamily="34" charset="0"/>
+                <a:ea typeface="Aptos" pitchFamily="34" charset="-122"/>
+                <a:cs typeface="Aptos" pitchFamily="34" charset="-120"/>
               </a:rPr>
               <a:t>10 · GENOMFÖRANDE — FAS 4 AV 4</a:t>
             </a:r>
@@ -2678,9 +2678,9 @@
                 <a:solidFill>
                   <a:srgbClr val="2B5F5F"/>
                 </a:solidFill>
-                <a:latin typeface="-apple-system" pitchFamily="34" charset="0"/>
-                <a:ea typeface="-apple-system" pitchFamily="34" charset="-122"/>
-                <a:cs typeface="-apple-system" pitchFamily="34" charset="-120"/>
+                <a:latin typeface="Aptos" pitchFamily="34" charset="0"/>
+                <a:ea typeface="Aptos" pitchFamily="34" charset="-122"/>
+                <a:cs typeface="Aptos" pitchFamily="34" charset="-120"/>
               </a:rPr>
               <a:t>04</a:t>
             </a:r>
@@ -2763,9 +2763,9 @@
                 <a:solidFill>
                   <a:srgbClr val="1A1A1A"/>
                 </a:solidFill>
-                <a:latin typeface="-apple-system" pitchFamily="34" charset="0"/>
-                <a:ea typeface="-apple-system" pitchFamily="34" charset="-122"/>
-                <a:cs typeface="-apple-system" pitchFamily="34" charset="-120"/>
+                <a:latin typeface="Aptos" pitchFamily="34" charset="0"/>
+                <a:ea typeface="Aptos" pitchFamily="34" charset="-122"/>
+                <a:cs typeface="Aptos" pitchFamily="34" charset="-120"/>
               </a:rPr>
               <a:t>{Fas 4 — namn}</a:t>
             </a:r>
@@ -2927,9 +2927,9 @@
                 <a:solidFill>
                   <a:srgbClr val="1A1A1A"/>
                 </a:solidFill>
-                <a:latin typeface="-apple-system" pitchFamily="34" charset="0"/>
-                <a:ea typeface="-apple-system" pitchFamily="34" charset="-122"/>
-                <a:cs typeface="-apple-system" pitchFamily="34" charset="-120"/>
+                <a:latin typeface="Aptos" pitchFamily="34" charset="0"/>
+                <a:ea typeface="Aptos" pitchFamily="34" charset="-122"/>
+                <a:cs typeface="Aptos" pitchFamily="34" charset="-120"/>
               </a:rPr>
               <a:t>{Aktivitet 1}</a:t>
             </a:r>
@@ -2971,9 +2971,9 @@
                 <a:solidFill>
                   <a:srgbClr val="1A1A1A"/>
                 </a:solidFill>
-                <a:latin typeface="-apple-system" pitchFamily="34" charset="0"/>
-                <a:ea typeface="-apple-system" pitchFamily="34" charset="-122"/>
-                <a:cs typeface="-apple-system" pitchFamily="34" charset="-120"/>
+                <a:latin typeface="Aptos" pitchFamily="34" charset="0"/>
+                <a:ea typeface="Aptos" pitchFamily="34" charset="-122"/>
+                <a:cs typeface="Aptos" pitchFamily="34" charset="-120"/>
               </a:rPr>
               <a:t>{Aktivitet 2}</a:t>
             </a:r>
@@ -3015,9 +3015,9 @@
                 <a:solidFill>
                   <a:srgbClr val="1A1A1A"/>
                 </a:solidFill>
-                <a:latin typeface="-apple-system" pitchFamily="34" charset="0"/>
-                <a:ea typeface="-apple-system" pitchFamily="34" charset="-122"/>
-                <a:cs typeface="-apple-system" pitchFamily="34" charset="-120"/>
+                <a:latin typeface="Aptos" pitchFamily="34" charset="0"/>
+                <a:ea typeface="Aptos" pitchFamily="34" charset="-122"/>
+                <a:cs typeface="Aptos" pitchFamily="34" charset="-120"/>
               </a:rPr>
               <a:t>{Aktivitet 3}</a:t>
             </a:r>
@@ -3059,9 +3059,9 @@
                 <a:solidFill>
                   <a:srgbClr val="1A1A1A"/>
                 </a:solidFill>
-                <a:latin typeface="-apple-system" pitchFamily="34" charset="0"/>
-                <a:ea typeface="-apple-system" pitchFamily="34" charset="-122"/>
-                <a:cs typeface="-apple-system" pitchFamily="34" charset="-120"/>
+                <a:latin typeface="Aptos" pitchFamily="34" charset="0"/>
+                <a:ea typeface="Aptos" pitchFamily="34" charset="-122"/>
+                <a:cs typeface="Aptos" pitchFamily="34" charset="-120"/>
               </a:rPr>
               <a:t>{Aktivitet 4}</a:t>
             </a:r>
@@ -3182,9 +3182,9 @@
                 <a:solidFill>
                   <a:srgbClr val="1A1A1A"/>
                 </a:solidFill>
-                <a:latin typeface="-apple-system" pitchFamily="34" charset="0"/>
-                <a:ea typeface="-apple-system" pitchFamily="34" charset="-122"/>
-                <a:cs typeface="-apple-system" pitchFamily="34" charset="-120"/>
+                <a:latin typeface="Aptos" pitchFamily="34" charset="0"/>
+                <a:ea typeface="Aptos" pitchFamily="34" charset="-122"/>
+                <a:cs typeface="Aptos" pitchFamily="34" charset="-120"/>
               </a:rPr>
               <a:t>{Leverans 1 — slutleverans}</a:t>
             </a:r>
@@ -3226,9 +3226,9 @@
                 <a:solidFill>
                   <a:srgbClr val="1A1A1A"/>
                 </a:solidFill>
-                <a:latin typeface="-apple-system" pitchFamily="34" charset="0"/>
-                <a:ea typeface="-apple-system" pitchFamily="34" charset="-122"/>
-                <a:cs typeface="-apple-system" pitchFamily="34" charset="-120"/>
+                <a:latin typeface="Aptos" pitchFamily="34" charset="0"/>
+                <a:ea typeface="Aptos" pitchFamily="34" charset="-122"/>
+                <a:cs typeface="Aptos" pitchFamily="34" charset="-120"/>
               </a:rPr>
               <a:t>{Leverans 2 — överlämning}</a:t>
             </a:r>
@@ -3270,9 +3270,9 @@
                 <a:solidFill>
                   <a:srgbClr val="1A1A1A"/>
                 </a:solidFill>
-                <a:latin typeface="-apple-system" pitchFamily="34" charset="0"/>
-                <a:ea typeface="-apple-system" pitchFamily="34" charset="-122"/>
-                <a:cs typeface="-apple-system" pitchFamily="34" charset="-120"/>
+                <a:latin typeface="Aptos" pitchFamily="34" charset="0"/>
+                <a:ea typeface="Aptos" pitchFamily="34" charset="-122"/>
+                <a:cs typeface="Aptos" pitchFamily="34" charset="-120"/>
               </a:rPr>
               <a:t>{Leverans 3 — slutrapport}</a:t>
             </a:r>
@@ -3420,9 +3420,9 @@
                 <a:solidFill>
                   <a:srgbClr val="1A1A1A"/>
                 </a:solidFill>
-                <a:latin typeface="-apple-system" pitchFamily="34" charset="0"/>
-                <a:ea typeface="-apple-system" pitchFamily="34" charset="-122"/>
-                <a:cs typeface="-apple-system" pitchFamily="34" charset="-120"/>
+                <a:latin typeface="Aptos" pitchFamily="34" charset="0"/>
+                <a:ea typeface="Aptos" pitchFamily="34" charset="-122"/>
+                <a:cs typeface="Aptos" pitchFamily="34" charset="-120"/>
               </a:rPr>
               <a:t>{Beslut 1 — godkännande av slutleverans}</a:t>
             </a:r>
@@ -3464,9 +3464,9 @@
                 <a:solidFill>
                   <a:srgbClr val="1A1A1A"/>
                 </a:solidFill>
-                <a:latin typeface="-apple-system" pitchFamily="34" charset="0"/>
-                <a:ea typeface="-apple-system" pitchFamily="34" charset="-122"/>
-                <a:cs typeface="-apple-system" pitchFamily="34" charset="-120"/>
+                <a:latin typeface="Aptos" pitchFamily="34" charset="0"/>
+                <a:ea typeface="Aptos" pitchFamily="34" charset="-122"/>
+                <a:cs typeface="Aptos" pitchFamily="34" charset="-120"/>
               </a:rPr>
               <a:t>{Beslut 2 — förvaltningsöverlämning}</a:t>
             </a:r>
@@ -3508,9 +3508,9 @@
                 <a:solidFill>
                   <a:srgbClr val="1A1A1A"/>
                 </a:solidFill>
-                <a:latin typeface="-apple-system" pitchFamily="34" charset="0"/>
-                <a:ea typeface="-apple-system" pitchFamily="34" charset="-122"/>
-                <a:cs typeface="-apple-system" pitchFamily="34" charset="-120"/>
+                <a:latin typeface="Aptos" pitchFamily="34" charset="0"/>
+                <a:ea typeface="Aptos" pitchFamily="34" charset="-122"/>
+                <a:cs typeface="Aptos" pitchFamily="34" charset="-120"/>
               </a:rPr>
               <a:t>{Avslut av uppdrag}</a:t>
             </a:r>
@@ -4651,9 +4651,9 @@
                 <a:solidFill>
                   <a:srgbClr val="4A4A4A"/>
                 </a:solidFill>
-                <a:latin typeface="-apple-system" pitchFamily="34" charset="0"/>
-                <a:ea typeface="-apple-system" pitchFamily="34" charset="-122"/>
-                <a:cs typeface="-apple-system" pitchFamily="34" charset="-120"/>
+                <a:latin typeface="Aptos" pitchFamily="34" charset="0"/>
+                <a:ea typeface="Aptos" pitchFamily="34" charset="-122"/>
+                <a:cs typeface="Aptos" pitchFamily="34" charset="-120"/>
               </a:rPr>
               <a:t>11 · KVALITETSSÄKRING</a:t>
             </a:r>
@@ -4695,9 +4695,9 @@
                 <a:solidFill>
                   <a:srgbClr val="1A1A1A"/>
                 </a:solidFill>
-                <a:latin typeface="-apple-system" pitchFamily="34" charset="0"/>
-                <a:ea typeface="-apple-system" pitchFamily="34" charset="-122"/>
-                <a:cs typeface="-apple-system" pitchFamily="34" charset="-120"/>
+                <a:latin typeface="Aptos" pitchFamily="34" charset="0"/>
+                <a:ea typeface="Aptos" pitchFamily="34" charset="-122"/>
+                <a:cs typeface="Aptos" pitchFamily="34" charset="-120"/>
               </a:rPr>
               <a:t>Kvalitetssäkring</a:t>
             </a:r>
@@ -4818,9 +4818,9 @@
                 <a:solidFill>
                   <a:srgbClr val="4A4A4A"/>
                 </a:solidFill>
-                <a:latin typeface="-apple-system" pitchFamily="34" charset="0"/>
-                <a:ea typeface="-apple-system" pitchFamily="34" charset="-122"/>
-                <a:cs typeface="-apple-system" pitchFamily="34" charset="-120"/>
+                <a:latin typeface="Aptos" pitchFamily="34" charset="0"/>
+                <a:ea typeface="Aptos" pitchFamily="34" charset="-122"/>
+                <a:cs typeface="Aptos" pitchFamily="34" charset="-120"/>
               </a:rPr>
               <a:t>{QA-process}</a:t>
             </a:r>
@@ -4941,9 +4941,9 @@
                 <a:solidFill>
                   <a:srgbClr val="4A4A4A"/>
                 </a:solidFill>
-                <a:latin typeface="-apple-system" pitchFamily="34" charset="0"/>
-                <a:ea typeface="-apple-system" pitchFamily="34" charset="-122"/>
-                <a:cs typeface="-apple-system" pitchFamily="34" charset="-120"/>
+                <a:latin typeface="Aptos" pitchFamily="34" charset="0"/>
+                <a:ea typeface="Aptos" pitchFamily="34" charset="-122"/>
+                <a:cs typeface="Aptos" pitchFamily="34" charset="-120"/>
               </a:rPr>
               <a:t>{Kvalitetsledare}</a:t>
             </a:r>
@@ -5064,9 +5064,9 @@
                 <a:solidFill>
                   <a:srgbClr val="4A4A4A"/>
                 </a:solidFill>
-                <a:latin typeface="-apple-system" pitchFamily="34" charset="0"/>
-                <a:ea typeface="-apple-system" pitchFamily="34" charset="-122"/>
-                <a:cs typeface="-apple-system" pitchFamily="34" charset="-120"/>
+                <a:latin typeface="Aptos" pitchFamily="34" charset="0"/>
+                <a:ea typeface="Aptos" pitchFamily="34" charset="-122"/>
+                <a:cs typeface="Aptos" pitchFamily="34" charset="-120"/>
               </a:rPr>
               <a:t>{Eskalering}</a:t>
             </a:r>
@@ -5249,9 +5249,9 @@
                 <a:solidFill>
                   <a:srgbClr val="4A4A4A"/>
                 </a:solidFill>
-                <a:latin typeface="-apple-system" pitchFamily="34" charset="0"/>
-                <a:ea typeface="-apple-system" pitchFamily="34" charset="-122"/>
-                <a:cs typeface="-apple-system" pitchFamily="34" charset="-120"/>
+                <a:latin typeface="Aptos" pitchFamily="34" charset="0"/>
+                <a:ea typeface="Aptos" pitchFamily="34" charset="-122"/>
+                <a:cs typeface="Aptos" pitchFamily="34" charset="-120"/>
               </a:rPr>
               <a:t>{Avstämning 1 — tidpunkt och innehåll}</a:t>
             </a:r>
@@ -5366,9 +5366,9 @@
                 <a:solidFill>
                   <a:srgbClr val="4A4A4A"/>
                 </a:solidFill>
-                <a:latin typeface="-apple-system" pitchFamily="34" charset="0"/>
-                <a:ea typeface="-apple-system" pitchFamily="34" charset="-122"/>
-                <a:cs typeface="-apple-system" pitchFamily="34" charset="-120"/>
+                <a:latin typeface="Aptos" pitchFamily="34" charset="0"/>
+                <a:ea typeface="Aptos" pitchFamily="34" charset="-122"/>
+                <a:cs typeface="Aptos" pitchFamily="34" charset="-120"/>
               </a:rPr>
               <a:t>{Avstämning 2}</a:t>
             </a:r>
@@ -5483,9 +5483,9 @@
                 <a:solidFill>
                   <a:srgbClr val="4A4A4A"/>
                 </a:solidFill>
-                <a:latin typeface="-apple-system" pitchFamily="34" charset="0"/>
-                <a:ea typeface="-apple-system" pitchFamily="34" charset="-122"/>
-                <a:cs typeface="-apple-system" pitchFamily="34" charset="-120"/>
+                <a:latin typeface="Aptos" pitchFamily="34" charset="0"/>
+                <a:ea typeface="Aptos" pitchFamily="34" charset="-122"/>
+                <a:cs typeface="Aptos" pitchFamily="34" charset="-120"/>
               </a:rPr>
               <a:t>{Avstämning 3}</a:t>
             </a:r>
@@ -5600,9 +5600,9 @@
                 <a:solidFill>
                   <a:srgbClr val="4A4A4A"/>
                 </a:solidFill>
-                <a:latin typeface="-apple-system" pitchFamily="34" charset="0"/>
-                <a:ea typeface="-apple-system" pitchFamily="34" charset="-122"/>
-                <a:cs typeface="-apple-system" pitchFamily="34" charset="-120"/>
+                <a:latin typeface="Aptos" pitchFamily="34" charset="0"/>
+                <a:ea typeface="Aptos" pitchFamily="34" charset="-122"/>
+                <a:cs typeface="Aptos" pitchFamily="34" charset="-120"/>
               </a:rPr>
               <a:t>{Avstämning 4}</a:t>
             </a:r>
@@ -5805,9 +5805,9 @@
                 <a:solidFill>
                   <a:srgbClr val="4A4A4A"/>
                 </a:solidFill>
-                <a:latin typeface="-apple-system" pitchFamily="34" charset="0"/>
-                <a:ea typeface="-apple-system" pitchFamily="34" charset="-122"/>
-                <a:cs typeface="-apple-system" pitchFamily="34" charset="-120"/>
+                <a:latin typeface="Aptos" pitchFamily="34" charset="0"/>
+                <a:ea typeface="Aptos" pitchFamily="34" charset="-122"/>
+                <a:cs typeface="Aptos" pitchFamily="34" charset="-120"/>
               </a:rPr>
               <a:t>12 · TEAM, OMFATTNING OCH PRIS</a:t>
             </a:r>
@@ -5849,9 +5849,9 @@
                 <a:solidFill>
                   <a:srgbClr val="1A1A1A"/>
                 </a:solidFill>
-                <a:latin typeface="-apple-system" pitchFamily="34" charset="0"/>
-                <a:ea typeface="-apple-system" pitchFamily="34" charset="-122"/>
-                <a:cs typeface="-apple-system" pitchFamily="34" charset="-120"/>
+                <a:latin typeface="Aptos" pitchFamily="34" charset="0"/>
+                <a:ea typeface="Aptos" pitchFamily="34" charset="-122"/>
+                <a:cs typeface="Aptos" pitchFamily="34" charset="-120"/>
               </a:rPr>
               <a:t>Team, omfattning och pris</a:t>
             </a:r>
@@ -6670,9 +6670,9 @@
                 <a:solidFill>
                   <a:srgbClr val="1A1A1A"/>
                 </a:solidFill>
-                <a:latin typeface="-apple-system" pitchFamily="34" charset="0"/>
-                <a:ea typeface="-apple-system" pitchFamily="34" charset="-122"/>
-                <a:cs typeface="-apple-system" pitchFamily="34" charset="-120"/>
+                <a:latin typeface="Aptos" pitchFamily="34" charset="0"/>
+                <a:ea typeface="Aptos" pitchFamily="34" charset="-122"/>
+                <a:cs typeface="Aptos" pitchFamily="34" charset="-120"/>
               </a:rPr>
               <a:t>{Konsult 1 — namn}</a:t>
             </a:r>
@@ -6714,9 +6714,9 @@
                 <a:solidFill>
                   <a:srgbClr val="4A4A4A"/>
                 </a:solidFill>
-                <a:latin typeface="-apple-system" pitchFamily="34" charset="0"/>
-                <a:ea typeface="-apple-system" pitchFamily="34" charset="-122"/>
-                <a:cs typeface="-apple-system" pitchFamily="34" charset="-120"/>
+                <a:latin typeface="Aptos" pitchFamily="34" charset="0"/>
+                <a:ea typeface="Aptos" pitchFamily="34" charset="-122"/>
+                <a:cs typeface="Aptos" pitchFamily="34" charset="-120"/>
               </a:rPr>
               <a:t>{Roll 1}</a:t>
             </a:r>
@@ -6961,9 +6961,9 @@
                 <a:solidFill>
                   <a:srgbClr val="1A1A1A"/>
                 </a:solidFill>
-                <a:latin typeface="-apple-system" pitchFamily="34" charset="0"/>
-                <a:ea typeface="-apple-system" pitchFamily="34" charset="-122"/>
-                <a:cs typeface="-apple-system" pitchFamily="34" charset="-120"/>
+                <a:latin typeface="Aptos" pitchFamily="34" charset="0"/>
+                <a:ea typeface="Aptos" pitchFamily="34" charset="-122"/>
+                <a:cs typeface="Aptos" pitchFamily="34" charset="-120"/>
               </a:rPr>
               <a:t>{Konsult 2 — namn}</a:t>
             </a:r>
@@ -7005,9 +7005,9 @@
                 <a:solidFill>
                   <a:srgbClr val="4A4A4A"/>
                 </a:solidFill>
-                <a:latin typeface="-apple-system" pitchFamily="34" charset="0"/>
-                <a:ea typeface="-apple-system" pitchFamily="34" charset="-122"/>
-                <a:cs typeface="-apple-system" pitchFamily="34" charset="-120"/>
+                <a:latin typeface="Aptos" pitchFamily="34" charset="0"/>
+                <a:ea typeface="Aptos" pitchFamily="34" charset="-122"/>
+                <a:cs typeface="Aptos" pitchFamily="34" charset="-120"/>
               </a:rPr>
               <a:t>{Roll 2}</a:t>
             </a:r>
@@ -7252,9 +7252,9 @@
                 <a:solidFill>
                   <a:srgbClr val="1A1A1A"/>
                 </a:solidFill>
-                <a:latin typeface="-apple-system" pitchFamily="34" charset="0"/>
-                <a:ea typeface="-apple-system" pitchFamily="34" charset="-122"/>
-                <a:cs typeface="-apple-system" pitchFamily="34" charset="-120"/>
+                <a:latin typeface="Aptos" pitchFamily="34" charset="0"/>
+                <a:ea typeface="Aptos" pitchFamily="34" charset="-122"/>
+                <a:cs typeface="Aptos" pitchFamily="34" charset="-120"/>
               </a:rPr>
               <a:t>{Konsult 3 — namn}</a:t>
             </a:r>
@@ -7296,9 +7296,9 @@
                 <a:solidFill>
                   <a:srgbClr val="4A4A4A"/>
                 </a:solidFill>
-                <a:latin typeface="-apple-system" pitchFamily="34" charset="0"/>
-                <a:ea typeface="-apple-system" pitchFamily="34" charset="-122"/>
-                <a:cs typeface="-apple-system" pitchFamily="34" charset="-120"/>
+                <a:latin typeface="Aptos" pitchFamily="34" charset="0"/>
+                <a:ea typeface="Aptos" pitchFamily="34" charset="-122"/>
+                <a:cs typeface="Aptos" pitchFamily="34" charset="-120"/>
               </a:rPr>
               <a:t>{Roll 3}</a:t>
             </a:r>
@@ -7543,9 +7543,9 @@
                 <a:solidFill>
                   <a:srgbClr val="1A1A1A"/>
                 </a:solidFill>
-                <a:latin typeface="-apple-system" pitchFamily="34" charset="0"/>
-                <a:ea typeface="-apple-system" pitchFamily="34" charset="-122"/>
-                <a:cs typeface="-apple-system" pitchFamily="34" charset="-120"/>
+                <a:latin typeface="Aptos" pitchFamily="34" charset="0"/>
+                <a:ea typeface="Aptos" pitchFamily="34" charset="-122"/>
+                <a:cs typeface="Aptos" pitchFamily="34" charset="-120"/>
               </a:rPr>
               <a:t>{Konsult 4 — namn}</a:t>
             </a:r>
@@ -7587,9 +7587,9 @@
                 <a:solidFill>
                   <a:srgbClr val="4A4A4A"/>
                 </a:solidFill>
-                <a:latin typeface="-apple-system" pitchFamily="34" charset="0"/>
-                <a:ea typeface="-apple-system" pitchFamily="34" charset="-122"/>
-                <a:cs typeface="-apple-system" pitchFamily="34" charset="-120"/>
+                <a:latin typeface="Aptos" pitchFamily="34" charset="0"/>
+                <a:ea typeface="Aptos" pitchFamily="34" charset="-122"/>
+                <a:cs typeface="Aptos" pitchFamily="34" charset="-120"/>
               </a:rPr>
               <a:t>{Roll 4}</a:t>
             </a:r>
@@ -7834,9 +7834,9 @@
                 <a:solidFill>
                   <a:srgbClr val="1A1A1A"/>
                 </a:solidFill>
-                <a:latin typeface="-apple-system" pitchFamily="34" charset="0"/>
-                <a:ea typeface="-apple-system" pitchFamily="34" charset="-122"/>
-                <a:cs typeface="-apple-system" pitchFamily="34" charset="-120"/>
+                <a:latin typeface="Aptos" pitchFamily="34" charset="0"/>
+                <a:ea typeface="Aptos" pitchFamily="34" charset="-122"/>
+                <a:cs typeface="Aptos" pitchFamily="34" charset="-120"/>
               </a:rPr>
               <a:t>{Konsult 5 — namn}</a:t>
             </a:r>
@@ -7878,9 +7878,9 @@
                 <a:solidFill>
                   <a:srgbClr val="4A4A4A"/>
                 </a:solidFill>
-                <a:latin typeface="-apple-system" pitchFamily="34" charset="0"/>
-                <a:ea typeface="-apple-system" pitchFamily="34" charset="-122"/>
-                <a:cs typeface="-apple-system" pitchFamily="34" charset="-120"/>
+                <a:latin typeface="Aptos" pitchFamily="34" charset="0"/>
+                <a:ea typeface="Aptos" pitchFamily="34" charset="-122"/>
+                <a:cs typeface="Aptos" pitchFamily="34" charset="-120"/>
               </a:rPr>
               <a:t>{Roll 5}</a:t>
             </a:r>
@@ -8152,9 +8152,9 @@
                 <a:solidFill>
                   <a:srgbClr val="1A1A1A"/>
                 </a:solidFill>
-                <a:latin typeface="-apple-system" pitchFamily="34" charset="0"/>
-                <a:ea typeface="-apple-system" pitchFamily="34" charset="-122"/>
-                <a:cs typeface="-apple-system" pitchFamily="34" charset="-120"/>
+                <a:latin typeface="Aptos" pitchFamily="34" charset="0"/>
+                <a:ea typeface="Aptos" pitchFamily="34" charset="-122"/>
+                <a:cs typeface="Aptos" pitchFamily="34" charset="-120"/>
               </a:rPr>
               <a:t>Summa — anbudspris exkl. moms</a:t>
             </a:r>
@@ -8540,9 +8540,9 @@
                 <a:solidFill>
                   <a:srgbClr val="4A4A4A"/>
                 </a:solidFill>
-                <a:latin typeface="-apple-system" pitchFamily="34" charset="0"/>
-                <a:ea typeface="-apple-system" pitchFamily="34" charset="-122"/>
-                <a:cs typeface="-apple-system" pitchFamily="34" charset="-120"/>
+                <a:latin typeface="Aptos" pitchFamily="34" charset="0"/>
+                <a:ea typeface="Aptos" pitchFamily="34" charset="-122"/>
+                <a:cs typeface="Aptos" pitchFamily="34" charset="-120"/>
               </a:rPr>
               <a:t>13 · UPPFYLLELSE</a:t>
             </a:r>
@@ -8584,9 +8584,9 @@
                 <a:solidFill>
                   <a:srgbClr val="1A1A1A"/>
                 </a:solidFill>
-                <a:latin typeface="-apple-system" pitchFamily="34" charset="0"/>
-                <a:ea typeface="-apple-system" pitchFamily="34" charset="-122"/>
-                <a:cs typeface="-apple-system" pitchFamily="34" charset="-120"/>
+                <a:latin typeface="Aptos" pitchFamily="34" charset="0"/>
+                <a:ea typeface="Aptos" pitchFamily="34" charset="-122"/>
+                <a:cs typeface="Aptos" pitchFamily="34" charset="-120"/>
               </a:rPr>
               <a:t>Uppfyllelse av ska-krav</a:t>
             </a:r>
@@ -9324,9 +9324,9 @@
                 <a:solidFill>
                   <a:srgbClr val="4A4A4A"/>
                 </a:solidFill>
-                <a:latin typeface="-apple-system" pitchFamily="34" charset="0"/>
-                <a:ea typeface="-apple-system" pitchFamily="34" charset="-122"/>
-                <a:cs typeface="-apple-system" pitchFamily="34" charset="-120"/>
+                <a:latin typeface="Aptos" pitchFamily="34" charset="0"/>
+                <a:ea typeface="Aptos" pitchFamily="34" charset="-122"/>
+                <a:cs typeface="Aptos" pitchFamily="34" charset="-120"/>
               </a:rPr>
               <a:t>{Ska-krav 1 — formulering enligt upphandlingsunderlag}</a:t>
             </a:r>
@@ -9441,9 +9441,9 @@
                 <a:solidFill>
                   <a:srgbClr val="4A4A4A"/>
                 </a:solidFill>
-                <a:latin typeface="-apple-system" pitchFamily="34" charset="0"/>
-                <a:ea typeface="-apple-system" pitchFamily="34" charset="-122"/>
-                <a:cs typeface="-apple-system" pitchFamily="34" charset="-120"/>
+                <a:latin typeface="Aptos" pitchFamily="34" charset="0"/>
+                <a:ea typeface="Aptos" pitchFamily="34" charset="-122"/>
+                <a:cs typeface="Aptos" pitchFamily="34" charset="-120"/>
               </a:rPr>
               <a:t>{Hur krav 1 uppfylls — konkret beskrivning}</a:t>
             </a:r>
@@ -9485,9 +9485,9 @@
                 <a:solidFill>
                   <a:srgbClr val="4A4A4A"/>
                 </a:solidFill>
-                <a:latin typeface="-apple-system" pitchFamily="34" charset="0"/>
-                <a:ea typeface="-apple-system" pitchFamily="34" charset="-122"/>
-                <a:cs typeface="-apple-system" pitchFamily="34" charset="-120"/>
+                <a:latin typeface="Aptos" pitchFamily="34" charset="0"/>
+                <a:ea typeface="Aptos" pitchFamily="34" charset="-122"/>
+                <a:cs typeface="Aptos" pitchFamily="34" charset="-120"/>
               </a:rPr>
               <a:t>{CV/ref 1}</a:t>
             </a:r>
@@ -9600,9 +9600,9 @@
                 <a:solidFill>
                   <a:srgbClr val="4A4A4A"/>
                 </a:solidFill>
-                <a:latin typeface="-apple-system" pitchFamily="34" charset="0"/>
-                <a:ea typeface="-apple-system" pitchFamily="34" charset="-122"/>
-                <a:cs typeface="-apple-system" pitchFamily="34" charset="-120"/>
+                <a:latin typeface="Aptos" pitchFamily="34" charset="0"/>
+                <a:ea typeface="Aptos" pitchFamily="34" charset="-122"/>
+                <a:cs typeface="Aptos" pitchFamily="34" charset="-120"/>
               </a:rPr>
               <a:t>{Ska-krav 2}</a:t>
             </a:r>
@@ -9717,9 +9717,9 @@
                 <a:solidFill>
                   <a:srgbClr val="4A4A4A"/>
                 </a:solidFill>
-                <a:latin typeface="-apple-system" pitchFamily="34" charset="0"/>
-                <a:ea typeface="-apple-system" pitchFamily="34" charset="-122"/>
-                <a:cs typeface="-apple-system" pitchFamily="34" charset="-120"/>
+                <a:latin typeface="Aptos" pitchFamily="34" charset="0"/>
+                <a:ea typeface="Aptos" pitchFamily="34" charset="-122"/>
+                <a:cs typeface="Aptos" pitchFamily="34" charset="-120"/>
               </a:rPr>
               <a:t>{Hur krav 2 uppfylls}</a:t>
             </a:r>
@@ -9761,9 +9761,9 @@
                 <a:solidFill>
                   <a:srgbClr val="4A4A4A"/>
                 </a:solidFill>
-                <a:latin typeface="-apple-system" pitchFamily="34" charset="0"/>
-                <a:ea typeface="-apple-system" pitchFamily="34" charset="-122"/>
-                <a:cs typeface="-apple-system" pitchFamily="34" charset="-120"/>
+                <a:latin typeface="Aptos" pitchFamily="34" charset="0"/>
+                <a:ea typeface="Aptos" pitchFamily="34" charset="-122"/>
+                <a:cs typeface="Aptos" pitchFamily="34" charset="-120"/>
               </a:rPr>
               <a:t>{CV/ref 2}</a:t>
             </a:r>
@@ -9876,9 +9876,9 @@
                 <a:solidFill>
                   <a:srgbClr val="4A4A4A"/>
                 </a:solidFill>
-                <a:latin typeface="-apple-system" pitchFamily="34" charset="0"/>
-                <a:ea typeface="-apple-system" pitchFamily="34" charset="-122"/>
-                <a:cs typeface="-apple-system" pitchFamily="34" charset="-120"/>
+                <a:latin typeface="Aptos" pitchFamily="34" charset="0"/>
+                <a:ea typeface="Aptos" pitchFamily="34" charset="-122"/>
+                <a:cs typeface="Aptos" pitchFamily="34" charset="-120"/>
               </a:rPr>
               <a:t>{Ska-krav 3}</a:t>
             </a:r>
@@ -9993,9 +9993,9 @@
                 <a:solidFill>
                   <a:srgbClr val="4A4A4A"/>
                 </a:solidFill>
-                <a:latin typeface="-apple-system" pitchFamily="34" charset="0"/>
-                <a:ea typeface="-apple-system" pitchFamily="34" charset="-122"/>
-                <a:cs typeface="-apple-system" pitchFamily="34" charset="-120"/>
+                <a:latin typeface="Aptos" pitchFamily="34" charset="0"/>
+                <a:ea typeface="Aptos" pitchFamily="34" charset="-122"/>
+                <a:cs typeface="Aptos" pitchFamily="34" charset="-120"/>
               </a:rPr>
               <a:t>{Hur krav 3 uppfylls}</a:t>
             </a:r>
@@ -10037,9 +10037,9 @@
                 <a:solidFill>
                   <a:srgbClr val="4A4A4A"/>
                 </a:solidFill>
-                <a:latin typeface="-apple-system" pitchFamily="34" charset="0"/>
-                <a:ea typeface="-apple-system" pitchFamily="34" charset="-122"/>
-                <a:cs typeface="-apple-system" pitchFamily="34" charset="-120"/>
+                <a:latin typeface="Aptos" pitchFamily="34" charset="0"/>
+                <a:ea typeface="Aptos" pitchFamily="34" charset="-122"/>
+                <a:cs typeface="Aptos" pitchFamily="34" charset="-120"/>
               </a:rPr>
               <a:t>{CV/ref 3}</a:t>
             </a:r>
@@ -10152,9 +10152,9 @@
                 <a:solidFill>
                   <a:srgbClr val="4A4A4A"/>
                 </a:solidFill>
-                <a:latin typeface="-apple-system" pitchFamily="34" charset="0"/>
-                <a:ea typeface="-apple-system" pitchFamily="34" charset="-122"/>
-                <a:cs typeface="-apple-system" pitchFamily="34" charset="-120"/>
+                <a:latin typeface="Aptos" pitchFamily="34" charset="0"/>
+                <a:ea typeface="Aptos" pitchFamily="34" charset="-122"/>
+                <a:cs typeface="Aptos" pitchFamily="34" charset="-120"/>
               </a:rPr>
               <a:t>{Ska-krav 4}</a:t>
             </a:r>
@@ -10269,9 +10269,9 @@
                 <a:solidFill>
                   <a:srgbClr val="4A4A4A"/>
                 </a:solidFill>
-                <a:latin typeface="-apple-system" pitchFamily="34" charset="0"/>
-                <a:ea typeface="-apple-system" pitchFamily="34" charset="-122"/>
-                <a:cs typeface="-apple-system" pitchFamily="34" charset="-120"/>
+                <a:latin typeface="Aptos" pitchFamily="34" charset="0"/>
+                <a:ea typeface="Aptos" pitchFamily="34" charset="-122"/>
+                <a:cs typeface="Aptos" pitchFamily="34" charset="-120"/>
               </a:rPr>
               <a:t>{Hur krav 4 uppfylls}</a:t>
             </a:r>
@@ -10313,9 +10313,9 @@
                 <a:solidFill>
                   <a:srgbClr val="4A4A4A"/>
                 </a:solidFill>
-                <a:latin typeface="-apple-system" pitchFamily="34" charset="0"/>
-                <a:ea typeface="-apple-system" pitchFamily="34" charset="-122"/>
-                <a:cs typeface="-apple-system" pitchFamily="34" charset="-120"/>
+                <a:latin typeface="Aptos" pitchFamily="34" charset="0"/>
+                <a:ea typeface="Aptos" pitchFamily="34" charset="-122"/>
+                <a:cs typeface="Aptos" pitchFamily="34" charset="-120"/>
               </a:rPr>
               <a:t>{CV/ref 4}</a:t>
             </a:r>
@@ -10428,9 +10428,9 @@
                 <a:solidFill>
                   <a:srgbClr val="4A4A4A"/>
                 </a:solidFill>
-                <a:latin typeface="-apple-system" pitchFamily="34" charset="0"/>
-                <a:ea typeface="-apple-system" pitchFamily="34" charset="-122"/>
-                <a:cs typeface="-apple-system" pitchFamily="34" charset="-120"/>
+                <a:latin typeface="Aptos" pitchFamily="34" charset="0"/>
+                <a:ea typeface="Aptos" pitchFamily="34" charset="-122"/>
+                <a:cs typeface="Aptos" pitchFamily="34" charset="-120"/>
               </a:rPr>
               <a:t>{Ska-krav 5}</a:t>
             </a:r>
@@ -10545,9 +10545,9 @@
                 <a:solidFill>
                   <a:srgbClr val="4A4A4A"/>
                 </a:solidFill>
-                <a:latin typeface="-apple-system" pitchFamily="34" charset="0"/>
-                <a:ea typeface="-apple-system" pitchFamily="34" charset="-122"/>
-                <a:cs typeface="-apple-system" pitchFamily="34" charset="-120"/>
+                <a:latin typeface="Aptos" pitchFamily="34" charset="0"/>
+                <a:ea typeface="Aptos" pitchFamily="34" charset="-122"/>
+                <a:cs typeface="Aptos" pitchFamily="34" charset="-120"/>
               </a:rPr>
               <a:t>{Hur krav 5 uppfylls}</a:t>
             </a:r>
@@ -10589,9 +10589,9 @@
                 <a:solidFill>
                   <a:srgbClr val="4A4A4A"/>
                 </a:solidFill>
-                <a:latin typeface="-apple-system" pitchFamily="34" charset="0"/>
-                <a:ea typeface="-apple-system" pitchFamily="34" charset="-122"/>
-                <a:cs typeface="-apple-system" pitchFamily="34" charset="-120"/>
+                <a:latin typeface="Aptos" pitchFamily="34" charset="0"/>
+                <a:ea typeface="Aptos" pitchFamily="34" charset="-122"/>
+                <a:cs typeface="Aptos" pitchFamily="34" charset="-120"/>
               </a:rPr>
               <a:t>{CV/ref 5}</a:t>
             </a:r>
@@ -10704,9 +10704,9 @@
                 <a:solidFill>
                   <a:srgbClr val="4A4A4A"/>
                 </a:solidFill>
-                <a:latin typeface="-apple-system" pitchFamily="34" charset="0"/>
-                <a:ea typeface="-apple-system" pitchFamily="34" charset="-122"/>
-                <a:cs typeface="-apple-system" pitchFamily="34" charset="-120"/>
+                <a:latin typeface="Aptos" pitchFamily="34" charset="0"/>
+                <a:ea typeface="Aptos" pitchFamily="34" charset="-122"/>
+                <a:cs typeface="Aptos" pitchFamily="34" charset="-120"/>
               </a:rPr>
               <a:t>{Ska-krav 6}</a:t>
             </a:r>
@@ -10821,9 +10821,9 @@
                 <a:solidFill>
                   <a:srgbClr val="4A4A4A"/>
                 </a:solidFill>
-                <a:latin typeface="-apple-system" pitchFamily="34" charset="0"/>
-                <a:ea typeface="-apple-system" pitchFamily="34" charset="-122"/>
-                <a:cs typeface="-apple-system" pitchFamily="34" charset="-120"/>
+                <a:latin typeface="Aptos" pitchFamily="34" charset="0"/>
+                <a:ea typeface="Aptos" pitchFamily="34" charset="-122"/>
+                <a:cs typeface="Aptos" pitchFamily="34" charset="-120"/>
               </a:rPr>
               <a:t>{Hur krav 6 uppfylls}</a:t>
             </a:r>
@@ -10865,9 +10865,9 @@
                 <a:solidFill>
                   <a:srgbClr val="4A4A4A"/>
                 </a:solidFill>
-                <a:latin typeface="-apple-system" pitchFamily="34" charset="0"/>
-                <a:ea typeface="-apple-system" pitchFamily="34" charset="-122"/>
-                <a:cs typeface="-apple-system" pitchFamily="34" charset="-120"/>
+                <a:latin typeface="Aptos" pitchFamily="34" charset="0"/>
+                <a:ea typeface="Aptos" pitchFamily="34" charset="-122"/>
+                <a:cs typeface="Aptos" pitchFamily="34" charset="-120"/>
               </a:rPr>
               <a:t>{CV/ref 6}</a:t>
             </a:r>
@@ -11070,9 +11070,9 @@
                 <a:solidFill>
                   <a:srgbClr val="4A4A4A"/>
                 </a:solidFill>
-                <a:latin typeface="-apple-system" pitchFamily="34" charset="0"/>
-                <a:ea typeface="-apple-system" pitchFamily="34" charset="-122"/>
-                <a:cs typeface="-apple-system" pitchFamily="34" charset="-120"/>
+                <a:latin typeface="Aptos" pitchFamily="34" charset="0"/>
+                <a:ea typeface="Aptos" pitchFamily="34" charset="-122"/>
+                <a:cs typeface="Aptos" pitchFamily="34" charset="-120"/>
               </a:rPr>
               <a:t>14 · REFERENS 01</a:t>
             </a:r>
@@ -11114,9 +11114,9 @@
                 <a:solidFill>
                   <a:srgbClr val="4A4A4A"/>
                 </a:solidFill>
-                <a:latin typeface="-apple-system" pitchFamily="34" charset="0"/>
-                <a:ea typeface="-apple-system" pitchFamily="34" charset="-122"/>
-                <a:cs typeface="-apple-system" pitchFamily="34" charset="-120"/>
+                <a:latin typeface="Aptos" pitchFamily="34" charset="0"/>
+                <a:ea typeface="Aptos" pitchFamily="34" charset="-122"/>
+                <a:cs typeface="Aptos" pitchFamily="34" charset="-120"/>
               </a:rPr>
               <a:t>{Referens 1 — kundnamn}</a:t>
             </a:r>
@@ -11158,9 +11158,9 @@
                 <a:solidFill>
                   <a:srgbClr val="4A4A4A"/>
                 </a:solidFill>
-                <a:latin typeface="-apple-system" pitchFamily="34" charset="0"/>
-                <a:ea typeface="-apple-system" pitchFamily="34" charset="-122"/>
-                <a:cs typeface="-apple-system" pitchFamily="34" charset="-120"/>
+                <a:latin typeface="Aptos" pitchFamily="34" charset="0"/>
+                <a:ea typeface="Aptos" pitchFamily="34" charset="-122"/>
+                <a:cs typeface="Aptos" pitchFamily="34" charset="-120"/>
               </a:rPr>
               <a:t>{Referens 1 — kort kontextrad, t.ex. ”Digitalisering av ärendehantering”}</a:t>
             </a:r>
@@ -11229,9 +11229,9 @@
                 <a:solidFill>
                   <a:srgbClr val="1A1A1A"/>
                 </a:solidFill>
-                <a:latin typeface="-apple-system" pitchFamily="34" charset="0"/>
-                <a:ea typeface="-apple-system" pitchFamily="34" charset="-122"/>
-                <a:cs typeface="-apple-system" pitchFamily="34" charset="-120"/>
+                <a:latin typeface="Aptos" pitchFamily="34" charset="0"/>
+                <a:ea typeface="Aptos" pitchFamily="34" charset="-122"/>
+                <a:cs typeface="Aptos" pitchFamily="34" charset="-120"/>
               </a:rPr>
               <a:t>{Vänster}</a:t>
             </a:r>
@@ -11273,9 +11273,9 @@
                 <a:solidFill>
                   <a:srgbClr val="1A1A1A"/>
                 </a:solidFill>
-                <a:latin typeface="-apple-system" pitchFamily="34" charset="0"/>
-                <a:ea typeface="-apple-system" pitchFamily="34" charset="-122"/>
-                <a:cs typeface="-apple-system" pitchFamily="34" charset="-120"/>
+                <a:latin typeface="Aptos" pitchFamily="34" charset="0"/>
+                <a:ea typeface="Aptos" pitchFamily="34" charset="-122"/>
+                <a:cs typeface="Aptos" pitchFamily="34" charset="-120"/>
               </a:rPr>
               <a:t>{Höger}</a:t>
             </a:r>
@@ -11478,9 +11478,9 @@
                 <a:solidFill>
                   <a:srgbClr val="4A4A4A"/>
                 </a:solidFill>
-                <a:latin typeface="-apple-system" pitchFamily="34" charset="0"/>
-                <a:ea typeface="-apple-system" pitchFamily="34" charset="-122"/>
-                <a:cs typeface="-apple-system" pitchFamily="34" charset="-120"/>
+                <a:latin typeface="Aptos" pitchFamily="34" charset="0"/>
+                <a:ea typeface="Aptos" pitchFamily="34" charset="-122"/>
+                <a:cs typeface="Aptos" pitchFamily="34" charset="-120"/>
               </a:rPr>
               <a:t>15 · REFERENS 02</a:t>
             </a:r>
@@ -11522,9 +11522,9 @@
                 <a:solidFill>
                   <a:srgbClr val="4A4A4A"/>
                 </a:solidFill>
-                <a:latin typeface="-apple-system" pitchFamily="34" charset="0"/>
-                <a:ea typeface="-apple-system" pitchFamily="34" charset="-122"/>
-                <a:cs typeface="-apple-system" pitchFamily="34" charset="-120"/>
+                <a:latin typeface="Aptos" pitchFamily="34" charset="0"/>
+                <a:ea typeface="Aptos" pitchFamily="34" charset="-122"/>
+                <a:cs typeface="Aptos" pitchFamily="34" charset="-120"/>
               </a:rPr>
               <a:t>{Referens 2 — kundnamn}</a:t>
             </a:r>
@@ -11566,9 +11566,9 @@
                 <a:solidFill>
                   <a:srgbClr val="4A4A4A"/>
                 </a:solidFill>
-                <a:latin typeface="-apple-system" pitchFamily="34" charset="0"/>
-                <a:ea typeface="-apple-system" pitchFamily="34" charset="-122"/>
-                <a:cs typeface="-apple-system" pitchFamily="34" charset="-120"/>
+                <a:latin typeface="Aptos" pitchFamily="34" charset="0"/>
+                <a:ea typeface="Aptos" pitchFamily="34" charset="-122"/>
+                <a:cs typeface="Aptos" pitchFamily="34" charset="-120"/>
               </a:rPr>
               <a:t>{Referens 2 — kort kontextrad}</a:t>
             </a:r>
@@ -11678,9 +11678,9 @@
                 <a:solidFill>
                   <a:srgbClr val="1A1A1A"/>
                 </a:solidFill>
-                <a:latin typeface="-apple-system" pitchFamily="34" charset="0"/>
-                <a:ea typeface="-apple-system" pitchFamily="34" charset="-122"/>
-                <a:cs typeface="-apple-system" pitchFamily="34" charset="-120"/>
+                <a:latin typeface="Aptos" pitchFamily="34" charset="0"/>
+                <a:ea typeface="Aptos" pitchFamily="34" charset="-122"/>
+                <a:cs typeface="Aptos" pitchFamily="34" charset="-120"/>
               </a:rPr>
               <a:t>{Kund — organisation}</a:t>
             </a:r>
@@ -11848,9 +11848,9 @@
                 <a:solidFill>
                   <a:srgbClr val="1A1A1A"/>
                 </a:solidFill>
-                <a:latin typeface="-apple-system" pitchFamily="34" charset="0"/>
-                <a:ea typeface="-apple-system" pitchFamily="34" charset="-122"/>
-                <a:cs typeface="-apple-system" pitchFamily="34" charset="-120"/>
+                <a:latin typeface="Aptos" pitchFamily="34" charset="0"/>
+                <a:ea typeface="Aptos" pitchFamily="34" charset="-122"/>
+                <a:cs typeface="Aptos" pitchFamily="34" charset="-120"/>
               </a:rPr>
               <a:t>{Omfattning — antal timmar, konsulter och total volym}</a:t>
             </a:r>
@@ -11933,9 +11933,9 @@
                 <a:solidFill>
                   <a:srgbClr val="1A1A1A"/>
                 </a:solidFill>
-                <a:latin typeface="-apple-system" pitchFamily="34" charset="0"/>
-                <a:ea typeface="-apple-system" pitchFamily="34" charset="-122"/>
-                <a:cs typeface="-apple-system" pitchFamily="34" charset="-120"/>
+                <a:latin typeface="Aptos" pitchFamily="34" charset="0"/>
+                <a:ea typeface="Aptos" pitchFamily="34" charset="-122"/>
+                <a:cs typeface="Aptos" pitchFamily="34" charset="-120"/>
               </a:rPr>
               <a:t>{Namn} </a:t>
             </a:r>
@@ -12029,9 +12029,9 @@
                 <a:solidFill>
                   <a:srgbClr val="1A1A1A"/>
                 </a:solidFill>
-                <a:latin typeface="-apple-system" pitchFamily="34" charset="0"/>
-                <a:ea typeface="-apple-system" pitchFamily="34" charset="-122"/>
-                <a:cs typeface="-apple-system" pitchFamily="34" charset="-120"/>
+                <a:latin typeface="Aptos" pitchFamily="34" charset="0"/>
+                <a:ea typeface="Aptos" pitchFamily="34" charset="-122"/>
+                <a:cs typeface="Aptos" pitchFamily="34" charset="-120"/>
               </a:rPr>
               <a:t>{Roll/leverans}</a:t>
             </a:r>
@@ -12114,9 +12114,9 @@
                 <a:solidFill>
                   <a:srgbClr val="1A1A1A"/>
                 </a:solidFill>
-                <a:latin typeface="-apple-system" pitchFamily="34" charset="0"/>
-                <a:ea typeface="-apple-system" pitchFamily="34" charset="-122"/>
-                <a:cs typeface="-apple-system" pitchFamily="34" charset="-120"/>
+                <a:latin typeface="Aptos" pitchFamily="34" charset="0"/>
+                <a:ea typeface="Aptos" pitchFamily="34" charset="-122"/>
+                <a:cs typeface="Aptos" pitchFamily="34" charset="-120"/>
               </a:rPr>
               <a:t>{Resultat}</a:t>
             </a:r>
@@ -12319,9 +12319,9 @@
                 <a:solidFill>
                   <a:srgbClr val="4A4A4A"/>
                 </a:solidFill>
-                <a:latin typeface="-apple-system" pitchFamily="34" charset="0"/>
-                <a:ea typeface="-apple-system" pitchFamily="34" charset="-122"/>
-                <a:cs typeface="-apple-system" pitchFamily="34" charset="-120"/>
+                <a:latin typeface="Aptos" pitchFamily="34" charset="0"/>
+                <a:ea typeface="Aptos" pitchFamily="34" charset="-122"/>
+                <a:cs typeface="Aptos" pitchFamily="34" charset="-120"/>
               </a:rPr>
               <a:t>16 · ANBUDSSEKRETESS</a:t>
             </a:r>
@@ -12363,9 +12363,9 @@
                 <a:solidFill>
                   <a:srgbClr val="1A1A1A"/>
                 </a:solidFill>
-                <a:latin typeface="-apple-system" pitchFamily="34" charset="0"/>
-                <a:ea typeface="-apple-system" pitchFamily="34" charset="-122"/>
-                <a:cs typeface="-apple-system" pitchFamily="34" charset="-120"/>
+                <a:latin typeface="Aptos" pitchFamily="34" charset="0"/>
+                <a:ea typeface="Aptos" pitchFamily="34" charset="-122"/>
+                <a:cs typeface="Aptos" pitchFamily="34" charset="-120"/>
               </a:rPr>
               <a:t>Anbudssekretess</a:t>
             </a:r>
@@ -12407,9 +12407,9 @@
                 <a:solidFill>
                   <a:srgbClr val="4A4A4A"/>
                 </a:solidFill>
-                <a:latin typeface="-apple-system" pitchFamily="34" charset="0"/>
-                <a:ea typeface="-apple-system" pitchFamily="34" charset="-122"/>
-                <a:cs typeface="-apple-system" pitchFamily="34" charset="-120"/>
+                <a:latin typeface="Aptos" pitchFamily="34" charset="0"/>
+                <a:ea typeface="Aptos" pitchFamily="34" charset="-122"/>
+                <a:cs typeface="Aptos" pitchFamily="34" charset="-120"/>
               </a:rPr>
               <a:t>Begäran om sekretess enligt offentlighets- och sekretesslagen</a:t>
             </a:r>
@@ -12451,9 +12451,9 @@
                 <a:solidFill>
                   <a:srgbClr val="4A4A4A"/>
                 </a:solidFill>
-                <a:latin typeface="-apple-system" pitchFamily="34" charset="0"/>
-                <a:ea typeface="-apple-system" pitchFamily="34" charset="-122"/>
-                <a:cs typeface="-apple-system" pitchFamily="34" charset="-120"/>
+                <a:latin typeface="Aptos" pitchFamily="34" charset="0"/>
+                <a:ea typeface="Aptos" pitchFamily="34" charset="-122"/>
+                <a:cs typeface="Aptos" pitchFamily="34" charset="-120"/>
               </a:rPr>
               <a:t>{Bolagsnamn} </a:t>
             </a:r>
@@ -12462,9 +12462,9 @@
                 <a:solidFill>
                   <a:srgbClr val="1A1A1A"/>
                 </a:solidFill>
-                <a:latin typeface="-apple-system" pitchFamily="34" charset="0"/>
-                <a:ea typeface="-apple-system" pitchFamily="34" charset="-122"/>
-                <a:cs typeface="-apple-system" pitchFamily="34" charset="-120"/>
+                <a:latin typeface="Aptos" pitchFamily="34" charset="0"/>
+                <a:ea typeface="Aptos" pitchFamily="34" charset="-122"/>
+                <a:cs typeface="Aptos" pitchFamily="34" charset="-120"/>
               </a:rPr>
               <a:t>begär härmed att följande uppgifter i anbudet omfattas av sekretess enligt </a:t>
             </a:r>
@@ -12473,9 +12473,9 @@
                 <a:solidFill>
                   <a:srgbClr val="4A4A4A"/>
                 </a:solidFill>
-                <a:latin typeface="-apple-system" pitchFamily="34" charset="0"/>
-                <a:ea typeface="-apple-system" pitchFamily="34" charset="-122"/>
-                <a:cs typeface="-apple-system" pitchFamily="34" charset="-120"/>
+                <a:latin typeface="Aptos" pitchFamily="34" charset="0"/>
+                <a:ea typeface="Aptos" pitchFamily="34" charset="-122"/>
+                <a:cs typeface="Aptos" pitchFamily="34" charset="-120"/>
               </a:rPr>
               <a:t>{OSL kap X §Y} </a:t>
             </a:r>
@@ -12484,9 +12484,9 @@
                 <a:solidFill>
                   <a:srgbClr val="1A1A1A"/>
                 </a:solidFill>
-                <a:latin typeface="-apple-system" pitchFamily="34" charset="0"/>
-                <a:ea typeface="-apple-system" pitchFamily="34" charset="-122"/>
-                <a:cs typeface="-apple-system" pitchFamily="34" charset="-120"/>
+                <a:latin typeface="Aptos" pitchFamily="34" charset="0"/>
+                <a:ea typeface="Aptos" pitchFamily="34" charset="-122"/>
+                <a:cs typeface="Aptos" pitchFamily="34" charset="-120"/>
               </a:rPr>
               <a:t>. Ett offentliggörande av nedanstående uppgifter bedöms medföra sådan skada att uppgifterna inte bör lämnas ut.</a:t>
             </a:r>
@@ -12785,9 +12785,9 @@
                 <a:solidFill>
                   <a:srgbClr val="4A4A4A"/>
                 </a:solidFill>
-                <a:latin typeface="-apple-system" pitchFamily="34" charset="0"/>
-                <a:ea typeface="-apple-system" pitchFamily="34" charset="-122"/>
-                <a:cs typeface="-apple-system" pitchFamily="34" charset="-120"/>
+                <a:latin typeface="Aptos" pitchFamily="34" charset="0"/>
+                <a:ea typeface="Aptos" pitchFamily="34" charset="-122"/>
+                <a:cs typeface="Aptos" pitchFamily="34" charset="-120"/>
               </a:rPr>
               <a:t>{Uppgift som omfattas av sekretess}</a:t>
             </a:r>
@@ -12829,9 +12829,9 @@
                 <a:solidFill>
                   <a:srgbClr val="4A4A4A"/>
                 </a:solidFill>
-                <a:latin typeface="-apple-system" pitchFamily="34" charset="0"/>
-                <a:ea typeface="-apple-system" pitchFamily="34" charset="-122"/>
-                <a:cs typeface="-apple-system" pitchFamily="34" charset="-120"/>
+                <a:latin typeface="Aptos" pitchFamily="34" charset="0"/>
+                <a:ea typeface="Aptos" pitchFamily="34" charset="-122"/>
+                <a:cs typeface="Aptos" pitchFamily="34" charset="-120"/>
               </a:rPr>
               <a:t>{Varför — skadan som uppstår vid utlämnande}</a:t>
             </a:r>
@@ -12944,9 +12944,9 @@
                 <a:solidFill>
                   <a:srgbClr val="4A4A4A"/>
                 </a:solidFill>
-                <a:latin typeface="-apple-system" pitchFamily="34" charset="0"/>
-                <a:ea typeface="-apple-system" pitchFamily="34" charset="-122"/>
-                <a:cs typeface="-apple-system" pitchFamily="34" charset="-120"/>
+                <a:latin typeface="Aptos" pitchFamily="34" charset="0"/>
+                <a:ea typeface="Aptos" pitchFamily="34" charset="-122"/>
+                <a:cs typeface="Aptos" pitchFamily="34" charset="-120"/>
               </a:rPr>
               <a:t>{Uppgift som omfattas}</a:t>
             </a:r>
@@ -12988,9 +12988,9 @@
                 <a:solidFill>
                   <a:srgbClr val="4A4A4A"/>
                 </a:solidFill>
-                <a:latin typeface="-apple-system" pitchFamily="34" charset="0"/>
-                <a:ea typeface="-apple-system" pitchFamily="34" charset="-122"/>
-                <a:cs typeface="-apple-system" pitchFamily="34" charset="-120"/>
+                <a:latin typeface="Aptos" pitchFamily="34" charset="0"/>
+                <a:ea typeface="Aptos" pitchFamily="34" charset="-122"/>
+                <a:cs typeface="Aptos" pitchFamily="34" charset="-120"/>
               </a:rPr>
               <a:t>{Motivering}</a:t>
             </a:r>
@@ -13103,9 +13103,9 @@
                 <a:solidFill>
                   <a:srgbClr val="4A4A4A"/>
                 </a:solidFill>
-                <a:latin typeface="-apple-system" pitchFamily="34" charset="0"/>
-                <a:ea typeface="-apple-system" pitchFamily="34" charset="-122"/>
-                <a:cs typeface="-apple-system" pitchFamily="34" charset="-120"/>
+                <a:latin typeface="Aptos" pitchFamily="34" charset="0"/>
+                <a:ea typeface="Aptos" pitchFamily="34" charset="-122"/>
+                <a:cs typeface="Aptos" pitchFamily="34" charset="-120"/>
               </a:rPr>
               <a:t>{Uppgift som omfattas}</a:t>
             </a:r>
@@ -13147,9 +13147,9 @@
                 <a:solidFill>
                   <a:srgbClr val="4A4A4A"/>
                 </a:solidFill>
-                <a:latin typeface="-apple-system" pitchFamily="34" charset="0"/>
-                <a:ea typeface="-apple-system" pitchFamily="34" charset="-122"/>
-                <a:cs typeface="-apple-system" pitchFamily="34" charset="-120"/>
+                <a:latin typeface="Aptos" pitchFamily="34" charset="0"/>
+                <a:ea typeface="Aptos" pitchFamily="34" charset="-122"/>
+                <a:cs typeface="Aptos" pitchFamily="34" charset="-120"/>
               </a:rPr>
               <a:t>{Motivering}</a:t>
             </a:r>
@@ -13262,9 +13262,9 @@
                 <a:solidFill>
                   <a:srgbClr val="4A4A4A"/>
                 </a:solidFill>
-                <a:latin typeface="-apple-system" pitchFamily="34" charset="0"/>
-                <a:ea typeface="-apple-system" pitchFamily="34" charset="-122"/>
-                <a:cs typeface="-apple-system" pitchFamily="34" charset="-120"/>
+                <a:latin typeface="Aptos" pitchFamily="34" charset="0"/>
+                <a:ea typeface="Aptos" pitchFamily="34" charset="-122"/>
+                <a:cs typeface="Aptos" pitchFamily="34" charset="-120"/>
               </a:rPr>
               <a:t>{Uppgift som omfattas}</a:t>
             </a:r>
@@ -13306,9 +13306,9 @@
                 <a:solidFill>
                   <a:srgbClr val="4A4A4A"/>
                 </a:solidFill>
-                <a:latin typeface="-apple-system" pitchFamily="34" charset="0"/>
-                <a:ea typeface="-apple-system" pitchFamily="34" charset="-122"/>
-                <a:cs typeface="-apple-system" pitchFamily="34" charset="-120"/>
+                <a:latin typeface="Aptos" pitchFamily="34" charset="0"/>
+                <a:ea typeface="Aptos" pitchFamily="34" charset="-122"/>
+                <a:cs typeface="Aptos" pitchFamily="34" charset="-120"/>
               </a:rPr>
               <a:t>{Motivering}</a:t>
             </a:r>
@@ -13511,9 +13511,9 @@
                 <a:solidFill>
                   <a:srgbClr val="4A4A4A"/>
                 </a:solidFill>
-                <a:latin typeface="-apple-system" pitchFamily="34" charset="0"/>
-                <a:ea typeface="-apple-system" pitchFamily="34" charset="-122"/>
-                <a:cs typeface="-apple-system" pitchFamily="34" charset="-120"/>
+                <a:latin typeface="Aptos" pitchFamily="34" charset="0"/>
+                <a:ea typeface="Aptos" pitchFamily="34" charset="-122"/>
+                <a:cs typeface="Aptos" pitchFamily="34" charset="-120"/>
               </a:rPr>
               <a:t>17 · CERTIFIERINGAR</a:t>
             </a:r>
@@ -13555,9 +13555,9 @@
                 <a:solidFill>
                   <a:srgbClr val="1A1A1A"/>
                 </a:solidFill>
-                <a:latin typeface="-apple-system" pitchFamily="34" charset="0"/>
-                <a:ea typeface="-apple-system" pitchFamily="34" charset="-122"/>
-                <a:cs typeface="-apple-system" pitchFamily="34" charset="-120"/>
+                <a:latin typeface="Aptos" pitchFamily="34" charset="0"/>
+                <a:ea typeface="Aptos" pitchFamily="34" charset="-122"/>
+                <a:cs typeface="Aptos" pitchFamily="34" charset="-120"/>
               </a:rPr>
               <a:t>Certifieringar och kvalitetsmärkningar</a:t>
             </a:r>
@@ -13623,9 +13623,9 @@
                 <a:solidFill>
                   <a:srgbClr val="1A1A1A"/>
                 </a:solidFill>
-                <a:latin typeface="-apple-system" pitchFamily="34" charset="0"/>
-                <a:ea typeface="-apple-system" pitchFamily="34" charset="-122"/>
-                <a:cs typeface="-apple-system" pitchFamily="34" charset="-120"/>
+                <a:latin typeface="Aptos" pitchFamily="34" charset="0"/>
+                <a:ea typeface="Aptos" pitchFamily="34" charset="-122"/>
+                <a:cs typeface="Aptos" pitchFamily="34" charset="-120"/>
               </a:rPr>
               <a:t>ISO 9001</a:t>
             </a:r>
@@ -13667,9 +13667,9 @@
                 <a:solidFill>
                   <a:srgbClr val="4A4A4A"/>
                 </a:solidFill>
-                <a:latin typeface="-apple-system" pitchFamily="34" charset="0"/>
-                <a:ea typeface="-apple-system" pitchFamily="34" charset="-122"/>
-                <a:cs typeface="-apple-system" pitchFamily="34" charset="-120"/>
+                <a:latin typeface="Aptos" pitchFamily="34" charset="0"/>
+                <a:ea typeface="Aptos" pitchFamily="34" charset="-122"/>
+                <a:cs typeface="Aptos" pitchFamily="34" charset="-120"/>
               </a:rPr>
               <a:t>Kvalitetsledningssystem</a:t>
             </a:r>
@@ -13899,9 +13899,9 @@
                 <a:solidFill>
                   <a:srgbClr val="1A1A1A"/>
                 </a:solidFill>
-                <a:latin typeface="-apple-system" pitchFamily="34" charset="0"/>
-                <a:ea typeface="-apple-system" pitchFamily="34" charset="-122"/>
-                <a:cs typeface="-apple-system" pitchFamily="34" charset="-120"/>
+                <a:latin typeface="Aptos" pitchFamily="34" charset="0"/>
+                <a:ea typeface="Aptos" pitchFamily="34" charset="-122"/>
+                <a:cs typeface="Aptos" pitchFamily="34" charset="-120"/>
               </a:rPr>
               <a:t>ISO 27001</a:t>
             </a:r>
@@ -13943,9 +13943,9 @@
                 <a:solidFill>
                   <a:srgbClr val="4A4A4A"/>
                 </a:solidFill>
-                <a:latin typeface="-apple-system" pitchFamily="34" charset="0"/>
-                <a:ea typeface="-apple-system" pitchFamily="34" charset="-122"/>
-                <a:cs typeface="-apple-system" pitchFamily="34" charset="-120"/>
+                <a:latin typeface="Aptos" pitchFamily="34" charset="0"/>
+                <a:ea typeface="Aptos" pitchFamily="34" charset="-122"/>
+                <a:cs typeface="Aptos" pitchFamily="34" charset="-120"/>
               </a:rPr>
               <a:t>Ledningssystem för informationssäkerhet</a:t>
             </a:r>
@@ -14175,9 +14175,9 @@
                 <a:solidFill>
                   <a:srgbClr val="1A1A1A"/>
                 </a:solidFill>
-                <a:latin typeface="-apple-system" pitchFamily="34" charset="0"/>
-                <a:ea typeface="-apple-system" pitchFamily="34" charset="-122"/>
-                <a:cs typeface="-apple-system" pitchFamily="34" charset="-120"/>
+                <a:latin typeface="Aptos" pitchFamily="34" charset="0"/>
+                <a:ea typeface="Aptos" pitchFamily="34" charset="-122"/>
+                <a:cs typeface="Aptos" pitchFamily="34" charset="-120"/>
               </a:rPr>
               <a:t>ISO 14001</a:t>
             </a:r>
@@ -14219,9 +14219,9 @@
                 <a:solidFill>
                   <a:srgbClr val="4A4A4A"/>
                 </a:solidFill>
-                <a:latin typeface="-apple-system" pitchFamily="34" charset="0"/>
-                <a:ea typeface="-apple-system" pitchFamily="34" charset="-122"/>
-                <a:cs typeface="-apple-system" pitchFamily="34" charset="-120"/>
+                <a:latin typeface="Aptos" pitchFamily="34" charset="0"/>
+                <a:ea typeface="Aptos" pitchFamily="34" charset="-122"/>
+                <a:cs typeface="Aptos" pitchFamily="34" charset="-120"/>
               </a:rPr>
               <a:t>Miljöledningssystem</a:t>
             </a:r>
@@ -14451,9 +14451,9 @@
                 <a:solidFill>
                   <a:srgbClr val="1A1A1A"/>
                 </a:solidFill>
-                <a:latin typeface="-apple-system" pitchFamily="34" charset="0"/>
-                <a:ea typeface="-apple-system" pitchFamily="34" charset="-122"/>
-                <a:cs typeface="-apple-system" pitchFamily="34" charset="-120"/>
+                <a:latin typeface="Aptos" pitchFamily="34" charset="0"/>
+                <a:ea typeface="Aptos" pitchFamily="34" charset="-122"/>
+                <a:cs typeface="Aptos" pitchFamily="34" charset="-120"/>
               </a:rPr>
               <a:t>{Övrig relevant certifiering}</a:t>
             </a:r>
@@ -14495,9 +14495,9 @@
                 <a:solidFill>
                   <a:srgbClr val="4A4A4A"/>
                 </a:solidFill>
-                <a:latin typeface="-apple-system" pitchFamily="34" charset="0"/>
-                <a:ea typeface="-apple-system" pitchFamily="34" charset="-122"/>
-                <a:cs typeface="-apple-system" pitchFamily="34" charset="-120"/>
+                <a:latin typeface="Aptos" pitchFamily="34" charset="0"/>
+                <a:ea typeface="Aptos" pitchFamily="34" charset="-122"/>
+                <a:cs typeface="Aptos" pitchFamily="34" charset="-120"/>
               </a:rPr>
               <a:t>{Beskrivning}</a:t>
             </a:r>
@@ -14905,9 +14905,9 @@
                 <a:solidFill>
                   <a:srgbClr val="4A4A4A"/>
                 </a:solidFill>
-                <a:latin typeface="-apple-system" pitchFamily="34" charset="0"/>
-                <a:ea typeface="-apple-system" pitchFamily="34" charset="-122"/>
-                <a:cs typeface="-apple-system" pitchFamily="34" charset="-120"/>
+                <a:latin typeface="Aptos" pitchFamily="34" charset="0"/>
+                <a:ea typeface="Aptos" pitchFamily="34" charset="-122"/>
+                <a:cs typeface="Aptos" pitchFamily="34" charset="-120"/>
               </a:rPr>
               <a:t>02 · INNEHÅLL</a:t>
             </a:r>
@@ -14949,9 +14949,9 @@
                 <a:solidFill>
                   <a:srgbClr val="1A1A1A"/>
                 </a:solidFill>
-                <a:latin typeface="-apple-system" pitchFamily="34" charset="0"/>
-                <a:ea typeface="-apple-system" pitchFamily="34" charset="-122"/>
-                <a:cs typeface="-apple-system" pitchFamily="34" charset="-120"/>
+                <a:latin typeface="Aptos" pitchFamily="34" charset="0"/>
+                <a:ea typeface="Aptos" pitchFamily="34" charset="-122"/>
+                <a:cs typeface="Aptos" pitchFamily="34" charset="-120"/>
               </a:rPr>
               <a:t>Innehållsförteckning</a:t>
             </a:r>
@@ -15058,9 +15058,9 @@
                 <a:solidFill>
                   <a:srgbClr val="1A1A1A"/>
                 </a:solidFill>
-                <a:latin typeface="-apple-system" pitchFamily="34" charset="0"/>
-                <a:ea typeface="-apple-system" pitchFamily="34" charset="-122"/>
-                <a:cs typeface="-apple-system" pitchFamily="34" charset="-120"/>
+                <a:latin typeface="Aptos" pitchFamily="34" charset="0"/>
+                <a:ea typeface="Aptos" pitchFamily="34" charset="-122"/>
+                <a:cs typeface="Aptos" pitchFamily="34" charset="-120"/>
               </a:rPr>
               <a:t>Försättssida</a:t>
             </a:r>
@@ -15167,9 +15167,9 @@
                 <a:solidFill>
                   <a:srgbClr val="1A1A1A"/>
                 </a:solidFill>
-                <a:latin typeface="-apple-system" pitchFamily="34" charset="0"/>
-                <a:ea typeface="-apple-system" pitchFamily="34" charset="-122"/>
-                <a:cs typeface="-apple-system" pitchFamily="34" charset="-120"/>
+                <a:latin typeface="Aptos" pitchFamily="34" charset="0"/>
+                <a:ea typeface="Aptos" pitchFamily="34" charset="-122"/>
+                <a:cs typeface="Aptos" pitchFamily="34" charset="-120"/>
               </a:rPr>
               <a:t>Fas 4 — detalj</a:t>
             </a:r>
@@ -15276,9 +15276,9 @@
                 <a:solidFill>
                   <a:srgbClr val="1A1A1A"/>
                 </a:solidFill>
-                <a:latin typeface="-apple-system" pitchFamily="34" charset="0"/>
-                <a:ea typeface="-apple-system" pitchFamily="34" charset="-122"/>
-                <a:cs typeface="-apple-system" pitchFamily="34" charset="-120"/>
+                <a:latin typeface="Aptos" pitchFamily="34" charset="0"/>
+                <a:ea typeface="Aptos" pitchFamily="34" charset="-122"/>
+                <a:cs typeface="Aptos" pitchFamily="34" charset="-120"/>
               </a:rPr>
               <a:t>Innehåll</a:t>
             </a:r>
@@ -15385,9 +15385,9 @@
                 <a:solidFill>
                   <a:srgbClr val="1A1A1A"/>
                 </a:solidFill>
-                <a:latin typeface="-apple-system" pitchFamily="34" charset="0"/>
-                <a:ea typeface="-apple-system" pitchFamily="34" charset="-122"/>
-                <a:cs typeface="-apple-system" pitchFamily="34" charset="-120"/>
+                <a:latin typeface="Aptos" pitchFamily="34" charset="0"/>
+                <a:ea typeface="Aptos" pitchFamily="34" charset="-122"/>
+                <a:cs typeface="Aptos" pitchFamily="34" charset="-120"/>
               </a:rPr>
               <a:t>Kvalitetssäkring</a:t>
             </a:r>
@@ -15494,9 +15494,9 @@
                 <a:solidFill>
                   <a:srgbClr val="1A1A1A"/>
                 </a:solidFill>
-                <a:latin typeface="-apple-system" pitchFamily="34" charset="0"/>
-                <a:ea typeface="-apple-system" pitchFamily="34" charset="-122"/>
-                <a:cs typeface="-apple-system" pitchFamily="34" charset="-120"/>
+                <a:latin typeface="Aptos" pitchFamily="34" charset="0"/>
+                <a:ea typeface="Aptos" pitchFamily="34" charset="-122"/>
+                <a:cs typeface="Aptos" pitchFamily="34" charset="-120"/>
               </a:rPr>
               <a:t>Vår förståelse — Kunden idag</a:t>
             </a:r>
@@ -15603,9 +15603,9 @@
                 <a:solidFill>
                   <a:srgbClr val="1A1A1A"/>
                 </a:solidFill>
-                <a:latin typeface="-apple-system" pitchFamily="34" charset="0"/>
-                <a:ea typeface="-apple-system" pitchFamily="34" charset="-122"/>
-                <a:cs typeface="-apple-system" pitchFamily="34" charset="-120"/>
+                <a:latin typeface="Aptos" pitchFamily="34" charset="0"/>
+                <a:ea typeface="Aptos" pitchFamily="34" charset="-122"/>
+                <a:cs typeface="Aptos" pitchFamily="34" charset="-120"/>
               </a:rPr>
               <a:t>Team, omfattning och pris</a:t>
             </a:r>
@@ -15712,9 +15712,9 @@
                 <a:solidFill>
                   <a:srgbClr val="1A1A1A"/>
                 </a:solidFill>
-                <a:latin typeface="-apple-system" pitchFamily="34" charset="0"/>
-                <a:ea typeface="-apple-system" pitchFamily="34" charset="-122"/>
-                <a:cs typeface="-apple-system" pitchFamily="34" charset="-120"/>
+                <a:latin typeface="Aptos" pitchFamily="34" charset="0"/>
+                <a:ea typeface="Aptos" pitchFamily="34" charset="-122"/>
+                <a:cs typeface="Aptos" pitchFamily="34" charset="-120"/>
               </a:rPr>
               <a:t>Vår förståelse — Uppdraget</a:t>
             </a:r>
@@ -15821,9 +15821,9 @@
                 <a:solidFill>
                   <a:srgbClr val="1A1A1A"/>
                 </a:solidFill>
-                <a:latin typeface="-apple-system" pitchFamily="34" charset="0"/>
-                <a:ea typeface="-apple-system" pitchFamily="34" charset="-122"/>
-                <a:cs typeface="-apple-system" pitchFamily="34" charset="-120"/>
+                <a:latin typeface="Aptos" pitchFamily="34" charset="0"/>
+                <a:ea typeface="Aptos" pitchFamily="34" charset="-122"/>
+                <a:cs typeface="Aptos" pitchFamily="34" charset="-120"/>
               </a:rPr>
               <a:t>Uppfyllelse av ska-krav</a:t>
             </a:r>
@@ -15930,9 +15930,9 @@
                 <a:solidFill>
                   <a:srgbClr val="1A1A1A"/>
                 </a:solidFill>
-                <a:latin typeface="-apple-system" pitchFamily="34" charset="0"/>
-                <a:ea typeface="-apple-system" pitchFamily="34" charset="-122"/>
-                <a:cs typeface="-apple-system" pitchFamily="34" charset="-120"/>
+                <a:latin typeface="Aptos" pitchFamily="34" charset="0"/>
+                <a:ea typeface="Aptos" pitchFamily="34" charset="-122"/>
+                <a:cs typeface="Aptos" pitchFamily="34" charset="-120"/>
               </a:rPr>
               <a:t>Vår förståelse — Utmaningar och värde</a:t>
             </a:r>
@@ -16039,9 +16039,9 @@
                 <a:solidFill>
                   <a:srgbClr val="1A1A1A"/>
                 </a:solidFill>
-                <a:latin typeface="-apple-system" pitchFamily="34" charset="0"/>
-                <a:ea typeface="-apple-system" pitchFamily="34" charset="-122"/>
-                <a:cs typeface="-apple-system" pitchFamily="34" charset="-120"/>
+                <a:latin typeface="Aptos" pitchFamily="34" charset="0"/>
+                <a:ea typeface="Aptos" pitchFamily="34" charset="-122"/>
+                <a:cs typeface="Aptos" pitchFamily="34" charset="-120"/>
               </a:rPr>
               <a:t>Referensuppdrag 1</a:t>
             </a:r>
@@ -16148,9 +16148,9 @@
                 <a:solidFill>
                   <a:srgbClr val="1A1A1A"/>
                 </a:solidFill>
-                <a:latin typeface="-apple-system" pitchFamily="34" charset="0"/>
-                <a:ea typeface="-apple-system" pitchFamily="34" charset="-122"/>
-                <a:cs typeface="-apple-system" pitchFamily="34" charset="-120"/>
+                <a:latin typeface="Aptos" pitchFamily="34" charset="0"/>
+                <a:ea typeface="Aptos" pitchFamily="34" charset="-122"/>
+                <a:cs typeface="Aptos" pitchFamily="34" charset="-120"/>
               </a:rPr>
               <a:t>Genomförande — översikt</a:t>
             </a:r>
@@ -16257,9 +16257,9 @@
                 <a:solidFill>
                   <a:srgbClr val="1A1A1A"/>
                 </a:solidFill>
-                <a:latin typeface="-apple-system" pitchFamily="34" charset="0"/>
-                <a:ea typeface="-apple-system" pitchFamily="34" charset="-122"/>
-                <a:cs typeface="-apple-system" pitchFamily="34" charset="-120"/>
+                <a:latin typeface="Aptos" pitchFamily="34" charset="0"/>
+                <a:ea typeface="Aptos" pitchFamily="34" charset="-122"/>
+                <a:cs typeface="Aptos" pitchFamily="34" charset="-120"/>
               </a:rPr>
               <a:t>Referensuppdrag 2</a:t>
             </a:r>
@@ -16366,9 +16366,9 @@
                 <a:solidFill>
                   <a:srgbClr val="1A1A1A"/>
                 </a:solidFill>
-                <a:latin typeface="-apple-system" pitchFamily="34" charset="0"/>
-                <a:ea typeface="-apple-system" pitchFamily="34" charset="-122"/>
-                <a:cs typeface="-apple-system" pitchFamily="34" charset="-120"/>
+                <a:latin typeface="Aptos" pitchFamily="34" charset="0"/>
+                <a:ea typeface="Aptos" pitchFamily="34" charset="-122"/>
+                <a:cs typeface="Aptos" pitchFamily="34" charset="-120"/>
               </a:rPr>
               <a:t>Fas 1 — detalj</a:t>
             </a:r>
@@ -16475,9 +16475,9 @@
                 <a:solidFill>
                   <a:srgbClr val="1A1A1A"/>
                 </a:solidFill>
-                <a:latin typeface="-apple-system" pitchFamily="34" charset="0"/>
-                <a:ea typeface="-apple-system" pitchFamily="34" charset="-122"/>
-                <a:cs typeface="-apple-system" pitchFamily="34" charset="-120"/>
+                <a:latin typeface="Aptos" pitchFamily="34" charset="0"/>
+                <a:ea typeface="Aptos" pitchFamily="34" charset="-122"/>
+                <a:cs typeface="Aptos" pitchFamily="34" charset="-120"/>
               </a:rPr>
               <a:t>Anbudssekretess</a:t>
             </a:r>
@@ -16584,9 +16584,9 @@
                 <a:solidFill>
                   <a:srgbClr val="1A1A1A"/>
                 </a:solidFill>
-                <a:latin typeface="-apple-system" pitchFamily="34" charset="0"/>
-                <a:ea typeface="-apple-system" pitchFamily="34" charset="-122"/>
-                <a:cs typeface="-apple-system" pitchFamily="34" charset="-120"/>
+                <a:latin typeface="Aptos" pitchFamily="34" charset="0"/>
+                <a:ea typeface="Aptos" pitchFamily="34" charset="-122"/>
+                <a:cs typeface="Aptos" pitchFamily="34" charset="-120"/>
               </a:rPr>
               <a:t>Fas 2 — detalj</a:t>
             </a:r>
@@ -16693,9 +16693,9 @@
                 <a:solidFill>
                   <a:srgbClr val="1A1A1A"/>
                 </a:solidFill>
-                <a:latin typeface="-apple-system" pitchFamily="34" charset="0"/>
-                <a:ea typeface="-apple-system" pitchFamily="34" charset="-122"/>
-                <a:cs typeface="-apple-system" pitchFamily="34" charset="-120"/>
+                <a:latin typeface="Aptos" pitchFamily="34" charset="0"/>
+                <a:ea typeface="Aptos" pitchFamily="34" charset="-122"/>
+                <a:cs typeface="Aptos" pitchFamily="34" charset="-120"/>
               </a:rPr>
               <a:t>Certifieringar</a:t>
             </a:r>
@@ -16775,9 +16775,9 @@
                 <a:solidFill>
                   <a:srgbClr val="1A1A1A"/>
                 </a:solidFill>
-                <a:latin typeface="-apple-system" pitchFamily="34" charset="0"/>
-                <a:ea typeface="-apple-system" pitchFamily="34" charset="-122"/>
-                <a:cs typeface="-apple-system" pitchFamily="34" charset="-120"/>
+                <a:latin typeface="Aptos" pitchFamily="34" charset="0"/>
+                <a:ea typeface="Aptos" pitchFamily="34" charset="-122"/>
+                <a:cs typeface="Aptos" pitchFamily="34" charset="-120"/>
               </a:rPr>
               <a:t>Fas 3 — detalj</a:t>
             </a:r>
@@ -16980,9 +16980,9 @@
                 <a:solidFill>
                   <a:srgbClr val="4A4A4A"/>
                 </a:solidFill>
-                <a:latin typeface="-apple-system" pitchFamily="34" charset="0"/>
-                <a:ea typeface="-apple-system" pitchFamily="34" charset="-122"/>
-                <a:cs typeface="-apple-system" pitchFamily="34" charset="-120"/>
+                <a:latin typeface="Aptos" pitchFamily="34" charset="0"/>
+                <a:ea typeface="Aptos" pitchFamily="34" charset="-122"/>
+                <a:cs typeface="Aptos" pitchFamily="34" charset="-120"/>
               </a:rPr>
               <a:t>03 · VÅR FÖRSTÅELSE AV UPPDRAGET</a:t>
             </a:r>
@@ -17024,9 +17024,9 @@
                 <a:solidFill>
                   <a:srgbClr val="1A1A1A"/>
                 </a:solidFill>
-                <a:latin typeface="-apple-system" pitchFamily="34" charset="0"/>
-                <a:ea typeface="-apple-system" pitchFamily="34" charset="-122"/>
-                <a:cs typeface="-apple-system" pitchFamily="34" charset="-120"/>
+                <a:latin typeface="Aptos" pitchFamily="34" charset="0"/>
+                <a:ea typeface="Aptos" pitchFamily="34" charset="-122"/>
+                <a:cs typeface="Aptos" pitchFamily="34" charset="-120"/>
               </a:rPr>
               <a:t>Kunden idag</a:t>
             </a:r>
@@ -17147,9 +17147,9 @@
                 <a:solidFill>
                   <a:srgbClr val="1A1A1A"/>
                 </a:solidFill>
-                <a:latin typeface="-apple-system" pitchFamily="34" charset="0"/>
-                <a:ea typeface="-apple-system" pitchFamily="34" charset="-122"/>
-                <a:cs typeface="-apple-system" pitchFamily="34" charset="-120"/>
+                <a:latin typeface="Aptos" pitchFamily="34" charset="0"/>
+                <a:ea typeface="Aptos" pitchFamily="34" charset="-122"/>
+                <a:cs typeface="Aptos" pitchFamily="34" charset="-120"/>
               </a:rPr>
               <a:t>{Nuläge}</a:t>
             </a:r>
@@ -17271,9 +17271,9 @@
                 <a:solidFill>
                   <a:srgbClr val="1A1A1A"/>
                 </a:solidFill>
-                <a:latin typeface="-apple-system" pitchFamily="34" charset="0"/>
-                <a:ea typeface="-apple-system" pitchFamily="34" charset="-122"/>
-                <a:cs typeface="-apple-system" pitchFamily="34" charset="-120"/>
+                <a:latin typeface="Aptos" pitchFamily="34" charset="0"/>
+                <a:ea typeface="Aptos" pitchFamily="34" charset="-122"/>
+                <a:cs typeface="Aptos" pitchFamily="34" charset="-120"/>
               </a:rPr>
               <a:t>{Smärtpunkter}</a:t>
             </a:r>
@@ -17476,9 +17476,9 @@
                 <a:solidFill>
                   <a:srgbClr val="4A4A4A"/>
                 </a:solidFill>
-                <a:latin typeface="-apple-system" pitchFamily="34" charset="0"/>
-                <a:ea typeface="-apple-system" pitchFamily="34" charset="-122"/>
-                <a:cs typeface="-apple-system" pitchFamily="34" charset="-120"/>
+                <a:latin typeface="Aptos" pitchFamily="34" charset="0"/>
+                <a:ea typeface="Aptos" pitchFamily="34" charset="-122"/>
+                <a:cs typeface="Aptos" pitchFamily="34" charset="-120"/>
               </a:rPr>
               <a:t>04 · VÅR FÖRSTÅELSE AV UPPDRAGET</a:t>
             </a:r>
@@ -17520,9 +17520,9 @@
                 <a:solidFill>
                   <a:srgbClr val="1A1A1A"/>
                 </a:solidFill>
-                <a:latin typeface="-apple-system" pitchFamily="34" charset="0"/>
-                <a:ea typeface="-apple-system" pitchFamily="34" charset="-122"/>
-                <a:cs typeface="-apple-system" pitchFamily="34" charset="-120"/>
+                <a:latin typeface="Aptos" pitchFamily="34" charset="0"/>
+                <a:ea typeface="Aptos" pitchFamily="34" charset="-122"/>
+                <a:cs typeface="Aptos" pitchFamily="34" charset="-120"/>
               </a:rPr>
               <a:t>Uppdragsbeskrivning</a:t>
             </a:r>
@@ -17564,9 +17564,9 @@
                 <a:solidFill>
                   <a:srgbClr val="4A4A4A"/>
                 </a:solidFill>
-                <a:latin typeface="-apple-system" pitchFamily="34" charset="0"/>
-                <a:ea typeface="-apple-system" pitchFamily="34" charset="-122"/>
-                <a:cs typeface="-apple-system" pitchFamily="34" charset="-120"/>
+                <a:latin typeface="Aptos" pitchFamily="34" charset="0"/>
+                <a:ea typeface="Aptos" pitchFamily="34" charset="-122"/>
+                <a:cs typeface="Aptos" pitchFamily="34" charset="-120"/>
               </a:rPr>
               <a:t>Uppdraget parafraserat — så läser vi RFP:n</a:t>
             </a:r>
@@ -17878,9 +17878,9 @@
                 <a:solidFill>
                   <a:srgbClr val="4A4A4A"/>
                 </a:solidFill>
-                <a:latin typeface="-apple-system" pitchFamily="34" charset="0"/>
-                <a:ea typeface="-apple-system" pitchFamily="34" charset="-122"/>
-                <a:cs typeface="-apple-system" pitchFamily="34" charset="-120"/>
+                <a:latin typeface="Aptos" pitchFamily="34" charset="0"/>
+                <a:ea typeface="Aptos" pitchFamily="34" charset="-122"/>
+                <a:cs typeface="Aptos" pitchFamily="34" charset="-120"/>
               </a:rPr>
               <a:t>05 · VÅR FÖRSTÅELSE AV UPPDRAGET</a:t>
             </a:r>
@@ -17922,9 +17922,9 @@
                 <a:solidFill>
                   <a:srgbClr val="1A1A1A"/>
                 </a:solidFill>
-                <a:latin typeface="-apple-system" pitchFamily="34" charset="0"/>
-                <a:ea typeface="-apple-system" pitchFamily="34" charset="-122"/>
-                <a:cs typeface="-apple-system" pitchFamily="34" charset="-120"/>
+                <a:latin typeface="Aptos" pitchFamily="34" charset="0"/>
+                <a:ea typeface="Aptos" pitchFamily="34" charset="-122"/>
+                <a:cs typeface="Aptos" pitchFamily="34" charset="-120"/>
               </a:rPr>
               <a:t>Vad vi ser</a:t>
             </a:r>
@@ -18071,9 +18071,9 @@
                 <a:solidFill>
                   <a:srgbClr val="4A4A4A"/>
                 </a:solidFill>
-                <a:latin typeface="-apple-system" pitchFamily="34" charset="0"/>
-                <a:ea typeface="-apple-system" pitchFamily="34" charset="-122"/>
-                <a:cs typeface="-apple-system" pitchFamily="34" charset="-120"/>
+                <a:latin typeface="Aptos" pitchFamily="34" charset="0"/>
+                <a:ea typeface="Aptos" pitchFamily="34" charset="-122"/>
+                <a:cs typeface="Aptos" pitchFamily="34" charset="-120"/>
               </a:rPr>
               <a:t>{</a:t>
             </a:r>
@@ -18082,9 +18082,9 @@
                 <a:solidFill>
                   <a:srgbClr val="4A4A4A"/>
                 </a:solidFill>
-                <a:latin typeface="-apple-system" pitchFamily="34" charset="0"/>
-                <a:ea typeface="-apple-system" pitchFamily="34" charset="-122"/>
-                <a:cs typeface="-apple-system" pitchFamily="34" charset="-120"/>
+                <a:latin typeface="Aptos" pitchFamily="34" charset="0"/>
+                <a:ea typeface="Aptos" pitchFamily="34" charset="-122"/>
+                <a:cs typeface="Aptos" pitchFamily="34" charset="-120"/>
               </a:rPr>
               <a:t>Utmaningar</a:t>
             </a:r>
@@ -18093,9 +18093,9 @@
                 <a:solidFill>
                   <a:srgbClr val="4A4A4A"/>
                 </a:solidFill>
-                <a:latin typeface="-apple-system" pitchFamily="34" charset="0"/>
-                <a:ea typeface="-apple-system" pitchFamily="34" charset="-122"/>
-                <a:cs typeface="-apple-system" pitchFamily="34" charset="-120"/>
+                <a:latin typeface="Aptos" pitchFamily="34" charset="0"/>
+                <a:ea typeface="Aptos" pitchFamily="34" charset="-122"/>
+                <a:cs typeface="Aptos" pitchFamily="34" charset="-120"/>
               </a:rPr>
               <a:t>}</a:t>
             </a:r>
@@ -18215,9 +18215,9 @@
                 <a:solidFill>
                   <a:srgbClr val="4A4A4A"/>
                 </a:solidFill>
-                <a:latin typeface="-apple-system" pitchFamily="34" charset="0"/>
-                <a:ea typeface="-apple-system" pitchFamily="34" charset="-122"/>
-                <a:cs typeface="-apple-system" pitchFamily="34" charset="-120"/>
+                <a:latin typeface="Aptos" pitchFamily="34" charset="0"/>
+                <a:ea typeface="Aptos" pitchFamily="34" charset="-122"/>
+                <a:cs typeface="Aptos" pitchFamily="34" charset="-120"/>
               </a:rPr>
               <a:t>{</a:t>
             </a:r>
@@ -18226,9 +18226,9 @@
                 <a:solidFill>
                   <a:srgbClr val="4A4A4A"/>
                 </a:solidFill>
-                <a:latin typeface="-apple-system" pitchFamily="34" charset="0"/>
-                <a:ea typeface="-apple-system" pitchFamily="34" charset="-122"/>
-                <a:cs typeface="-apple-system" pitchFamily="34" charset="-120"/>
+                <a:latin typeface="Aptos" pitchFamily="34" charset="0"/>
+                <a:ea typeface="Aptos" pitchFamily="34" charset="-122"/>
+                <a:cs typeface="Aptos" pitchFamily="34" charset="-120"/>
               </a:rPr>
               <a:t>Värden</a:t>
             </a:r>
@@ -18237,9 +18237,9 @@
                 <a:solidFill>
                   <a:srgbClr val="4A4A4A"/>
                 </a:solidFill>
-                <a:latin typeface="-apple-system" pitchFamily="34" charset="0"/>
-                <a:ea typeface="-apple-system" pitchFamily="34" charset="-122"/>
-                <a:cs typeface="-apple-system" pitchFamily="34" charset="-120"/>
+                <a:latin typeface="Aptos" pitchFamily="34" charset="0"/>
+                <a:ea typeface="Aptos" pitchFamily="34" charset="-122"/>
+                <a:cs typeface="Aptos" pitchFamily="34" charset="-120"/>
               </a:rPr>
               <a:t>}</a:t>
             </a:r>
@@ -18508,9 +18508,9 @@
                 <a:solidFill>
                   <a:srgbClr val="4A4A4A"/>
                 </a:solidFill>
-                <a:latin typeface="-apple-system" pitchFamily="34" charset="0"/>
-                <a:ea typeface="-apple-system" pitchFamily="34" charset="-122"/>
-                <a:cs typeface="-apple-system" pitchFamily="34" charset="-120"/>
+                <a:latin typeface="Aptos" pitchFamily="34" charset="0"/>
+                <a:ea typeface="Aptos" pitchFamily="34" charset="-122"/>
+                <a:cs typeface="Aptos" pitchFamily="34" charset="-120"/>
               </a:rPr>
               <a:t>06 · GENOMFÖRANDE</a:t>
             </a:r>
@@ -18552,9 +18552,9 @@
                 <a:solidFill>
                   <a:srgbClr val="1A1A1A"/>
                 </a:solidFill>
-                <a:latin typeface="-apple-system" pitchFamily="34" charset="0"/>
-                <a:ea typeface="-apple-system" pitchFamily="34" charset="-122"/>
-                <a:cs typeface="-apple-system" pitchFamily="34" charset="-120"/>
+                <a:latin typeface="Aptos" pitchFamily="34" charset="0"/>
+                <a:ea typeface="Aptos" pitchFamily="34" charset="-122"/>
+                <a:cs typeface="Aptos" pitchFamily="34" charset="-120"/>
               </a:rPr>
               <a:t>Genomförande — översikt</a:t>
             </a:r>
@@ -18661,9 +18661,9 @@
                 <a:solidFill>
                   <a:srgbClr val="1A1A1A"/>
                 </a:solidFill>
-                <a:latin typeface="-apple-system" pitchFamily="34" charset="0"/>
-                <a:ea typeface="-apple-system" pitchFamily="34" charset="-122"/>
-                <a:cs typeface="-apple-system" pitchFamily="34" charset="-120"/>
+                <a:latin typeface="Aptos" pitchFamily="34" charset="0"/>
+                <a:ea typeface="Aptos" pitchFamily="34" charset="-122"/>
+                <a:cs typeface="Aptos" pitchFamily="34" charset="-120"/>
               </a:rPr>
               <a:t>{Fas 1 — namn}</a:t>
             </a:r>
@@ -18705,9 +18705,9 @@
                 <a:solidFill>
                   <a:srgbClr val="4A4A4A"/>
                 </a:solidFill>
-                <a:latin typeface="-apple-system" pitchFamily="34" charset="0"/>
-                <a:ea typeface="-apple-system" pitchFamily="34" charset="-122"/>
-                <a:cs typeface="-apple-system" pitchFamily="34" charset="-120"/>
+                <a:latin typeface="Aptos" pitchFamily="34" charset="0"/>
+                <a:ea typeface="Aptos" pitchFamily="34" charset="-122"/>
+                <a:cs typeface="Aptos" pitchFamily="34" charset="-120"/>
               </a:rPr>
               <a:t>{Fas 1 — kort beskrivning. Detaljer på nästa slide.}</a:t>
             </a:r>
@@ -18814,9 +18814,9 @@
                 <a:solidFill>
                   <a:srgbClr val="1A1A1A"/>
                 </a:solidFill>
-                <a:latin typeface="-apple-system" pitchFamily="34" charset="0"/>
-                <a:ea typeface="-apple-system" pitchFamily="34" charset="-122"/>
-                <a:cs typeface="-apple-system" pitchFamily="34" charset="-120"/>
+                <a:latin typeface="Aptos" pitchFamily="34" charset="0"/>
+                <a:ea typeface="Aptos" pitchFamily="34" charset="-122"/>
+                <a:cs typeface="Aptos" pitchFamily="34" charset="-120"/>
               </a:rPr>
               <a:t>{Fas 2 — namn}</a:t>
             </a:r>
@@ -18858,9 +18858,9 @@
                 <a:solidFill>
                   <a:srgbClr val="4A4A4A"/>
                 </a:solidFill>
-                <a:latin typeface="-apple-system" pitchFamily="34" charset="0"/>
-                <a:ea typeface="-apple-system" pitchFamily="34" charset="-122"/>
-                <a:cs typeface="-apple-system" pitchFamily="34" charset="-120"/>
+                <a:latin typeface="Aptos" pitchFamily="34" charset="0"/>
+                <a:ea typeface="Aptos" pitchFamily="34" charset="-122"/>
+                <a:cs typeface="Aptos" pitchFamily="34" charset="-120"/>
               </a:rPr>
               <a:t>{Fas 2 — beskrivning}</a:t>
             </a:r>
@@ -18967,9 +18967,9 @@
                 <a:solidFill>
                   <a:srgbClr val="1A1A1A"/>
                 </a:solidFill>
-                <a:latin typeface="-apple-system" pitchFamily="34" charset="0"/>
-                <a:ea typeface="-apple-system" pitchFamily="34" charset="-122"/>
-                <a:cs typeface="-apple-system" pitchFamily="34" charset="-120"/>
+                <a:latin typeface="Aptos" pitchFamily="34" charset="0"/>
+                <a:ea typeface="Aptos" pitchFamily="34" charset="-122"/>
+                <a:cs typeface="Aptos" pitchFamily="34" charset="-120"/>
               </a:rPr>
               <a:t>{Fas 3 — namn}</a:t>
             </a:r>
@@ -19011,9 +19011,9 @@
                 <a:solidFill>
                   <a:srgbClr val="4A4A4A"/>
                 </a:solidFill>
-                <a:latin typeface="-apple-system" pitchFamily="34" charset="0"/>
-                <a:ea typeface="-apple-system" pitchFamily="34" charset="-122"/>
-                <a:cs typeface="-apple-system" pitchFamily="34" charset="-120"/>
+                <a:latin typeface="Aptos" pitchFamily="34" charset="0"/>
+                <a:ea typeface="Aptos" pitchFamily="34" charset="-122"/>
+                <a:cs typeface="Aptos" pitchFamily="34" charset="-120"/>
               </a:rPr>
               <a:t>{Fas 3 — beskrivning}</a:t>
             </a:r>
@@ -19120,9 +19120,9 @@
                 <a:solidFill>
                   <a:srgbClr val="1A1A1A"/>
                 </a:solidFill>
-                <a:latin typeface="-apple-system" pitchFamily="34" charset="0"/>
-                <a:ea typeface="-apple-system" pitchFamily="34" charset="-122"/>
-                <a:cs typeface="-apple-system" pitchFamily="34" charset="-120"/>
+                <a:latin typeface="Aptos" pitchFamily="34" charset="0"/>
+                <a:ea typeface="Aptos" pitchFamily="34" charset="-122"/>
+                <a:cs typeface="Aptos" pitchFamily="34" charset="-120"/>
               </a:rPr>
               <a:t>{Fas 4 — namn}</a:t>
             </a:r>
@@ -19164,9 +19164,9 @@
                 <a:solidFill>
                   <a:srgbClr val="4A4A4A"/>
                 </a:solidFill>
-                <a:latin typeface="-apple-system" pitchFamily="34" charset="0"/>
-                <a:ea typeface="-apple-system" pitchFamily="34" charset="-122"/>
-                <a:cs typeface="-apple-system" pitchFamily="34" charset="-120"/>
+                <a:latin typeface="Aptos" pitchFamily="34" charset="0"/>
+                <a:ea typeface="Aptos" pitchFamily="34" charset="-122"/>
+                <a:cs typeface="Aptos" pitchFamily="34" charset="-120"/>
               </a:rPr>
               <a:t>{Fas 4 — beskrivning}</a:t>
             </a:r>
@@ -20173,9 +20173,9 @@
                 <a:solidFill>
                   <a:srgbClr val="1A1A1A"/>
                 </a:solidFill>
-                <a:latin typeface="-apple-system" pitchFamily="34" charset="0"/>
-                <a:ea typeface="-apple-system" pitchFamily="34" charset="-122"/>
-                <a:cs typeface="-apple-system" pitchFamily="34" charset="-120"/>
+                <a:latin typeface="Aptos" pitchFamily="34" charset="0"/>
+                <a:ea typeface="Aptos" pitchFamily="34" charset="-122"/>
+                <a:cs typeface="Aptos" pitchFamily="34" charset="-120"/>
               </a:rPr>
               <a:t>{Fas 1 — namn}</a:t>
             </a:r>
@@ -20217,9 +20217,9 @@
                 <a:solidFill>
                   <a:srgbClr val="4A4A4A"/>
                 </a:solidFill>
-                <a:latin typeface="-apple-system" pitchFamily="34" charset="0"/>
-                <a:ea typeface="-apple-system" pitchFamily="34" charset="-122"/>
-                <a:cs typeface="-apple-system" pitchFamily="34" charset="-120"/>
+                <a:latin typeface="Aptos" pitchFamily="34" charset="0"/>
+                <a:ea typeface="Aptos" pitchFamily="34" charset="-122"/>
+                <a:cs typeface="Aptos" pitchFamily="34" charset="-120"/>
               </a:rPr>
               <a:t>{M1–M2}</a:t>
             </a:r>
@@ -20385,9 +20385,9 @@
                 <a:solidFill>
                   <a:srgbClr val="1A1A1A"/>
                 </a:solidFill>
-                <a:latin typeface="-apple-system" pitchFamily="34" charset="0"/>
-                <a:ea typeface="-apple-system" pitchFamily="34" charset="-122"/>
-                <a:cs typeface="-apple-system" pitchFamily="34" charset="-120"/>
+                <a:latin typeface="Aptos" pitchFamily="34" charset="0"/>
+                <a:ea typeface="Aptos" pitchFamily="34" charset="-122"/>
+                <a:cs typeface="Aptos" pitchFamily="34" charset="-120"/>
               </a:rPr>
               <a:t>{Fas 2 — namn}</a:t>
             </a:r>
@@ -20429,9 +20429,9 @@
                 <a:solidFill>
                   <a:srgbClr val="4A4A4A"/>
                 </a:solidFill>
-                <a:latin typeface="-apple-system" pitchFamily="34" charset="0"/>
-                <a:ea typeface="-apple-system" pitchFamily="34" charset="-122"/>
-                <a:cs typeface="-apple-system" pitchFamily="34" charset="-120"/>
+                <a:latin typeface="Aptos" pitchFamily="34" charset="0"/>
+                <a:ea typeface="Aptos" pitchFamily="34" charset="-122"/>
+                <a:cs typeface="Aptos" pitchFamily="34" charset="-120"/>
               </a:rPr>
               <a:t>{M2–M5}</a:t>
             </a:r>
@@ -20597,9 +20597,9 @@
                 <a:solidFill>
                   <a:srgbClr val="1A1A1A"/>
                 </a:solidFill>
-                <a:latin typeface="-apple-system" pitchFamily="34" charset="0"/>
-                <a:ea typeface="-apple-system" pitchFamily="34" charset="-122"/>
-                <a:cs typeface="-apple-system" pitchFamily="34" charset="-120"/>
+                <a:latin typeface="Aptos" pitchFamily="34" charset="0"/>
+                <a:ea typeface="Aptos" pitchFamily="34" charset="-122"/>
+                <a:cs typeface="Aptos" pitchFamily="34" charset="-120"/>
               </a:rPr>
               <a:t>{Fas 3 — namn}</a:t>
             </a:r>
@@ -20641,9 +20641,9 @@
                 <a:solidFill>
                   <a:srgbClr val="4A4A4A"/>
                 </a:solidFill>
-                <a:latin typeface="-apple-system" pitchFamily="34" charset="0"/>
-                <a:ea typeface="-apple-system" pitchFamily="34" charset="-122"/>
-                <a:cs typeface="-apple-system" pitchFamily="34" charset="-120"/>
+                <a:latin typeface="Aptos" pitchFamily="34" charset="0"/>
+                <a:ea typeface="Aptos" pitchFamily="34" charset="-122"/>
+                <a:cs typeface="Aptos" pitchFamily="34" charset="-120"/>
               </a:rPr>
               <a:t>{M5–M9}</a:t>
             </a:r>
@@ -20809,9 +20809,9 @@
                 <a:solidFill>
                   <a:srgbClr val="1A1A1A"/>
                 </a:solidFill>
-                <a:latin typeface="-apple-system" pitchFamily="34" charset="0"/>
-                <a:ea typeface="-apple-system" pitchFamily="34" charset="-122"/>
-                <a:cs typeface="-apple-system" pitchFamily="34" charset="-120"/>
+                <a:latin typeface="Aptos" pitchFamily="34" charset="0"/>
+                <a:ea typeface="Aptos" pitchFamily="34" charset="-122"/>
+                <a:cs typeface="Aptos" pitchFamily="34" charset="-120"/>
               </a:rPr>
               <a:t>{Fas 4 — namn}</a:t>
             </a:r>
@@ -20853,9 +20853,9 @@
                 <a:solidFill>
                   <a:srgbClr val="4A4A4A"/>
                 </a:solidFill>
-                <a:latin typeface="-apple-system" pitchFamily="34" charset="0"/>
-                <a:ea typeface="-apple-system" pitchFamily="34" charset="-122"/>
-                <a:cs typeface="-apple-system" pitchFamily="34" charset="-120"/>
+                <a:latin typeface="Aptos" pitchFamily="34" charset="0"/>
+                <a:ea typeface="Aptos" pitchFamily="34" charset="-122"/>
+                <a:cs typeface="Aptos" pitchFamily="34" charset="-120"/>
               </a:rPr>
               <a:t>{M9–M12}</a:t>
             </a:r>
@@ -21155,9 +21155,9 @@
                 <a:solidFill>
                   <a:srgbClr val="4A4A4A"/>
                 </a:solidFill>
-                <a:latin typeface="-apple-system" pitchFamily="34" charset="0"/>
-                <a:ea typeface="-apple-system" pitchFamily="34" charset="-122"/>
-                <a:cs typeface="-apple-system" pitchFamily="34" charset="-120"/>
+                <a:latin typeface="Aptos" pitchFamily="34" charset="0"/>
+                <a:ea typeface="Aptos" pitchFamily="34" charset="-122"/>
+                <a:cs typeface="Aptos" pitchFamily="34" charset="-120"/>
               </a:rPr>
               <a:t>07 · GENOMFÖRANDE — FAS 1 AV 4</a:t>
             </a:r>
@@ -21226,9 +21226,9 @@
                 <a:solidFill>
                   <a:srgbClr val="2B5F5F"/>
                 </a:solidFill>
-                <a:latin typeface="-apple-system" pitchFamily="34" charset="0"/>
-                <a:ea typeface="-apple-system" pitchFamily="34" charset="-122"/>
-                <a:cs typeface="-apple-system" pitchFamily="34" charset="-120"/>
+                <a:latin typeface="Aptos" pitchFamily="34" charset="0"/>
+                <a:ea typeface="Aptos" pitchFamily="34" charset="-122"/>
+                <a:cs typeface="Aptos" pitchFamily="34" charset="-120"/>
               </a:rPr>
               <a:t>01</a:t>
             </a:r>
@@ -21311,9 +21311,9 @@
                 <a:solidFill>
                   <a:srgbClr val="1A1A1A"/>
                 </a:solidFill>
-                <a:latin typeface="-apple-system" pitchFamily="34" charset="0"/>
-                <a:ea typeface="-apple-system" pitchFamily="34" charset="-122"/>
-                <a:cs typeface="-apple-system" pitchFamily="34" charset="-120"/>
+                <a:latin typeface="Aptos" pitchFamily="34" charset="0"/>
+                <a:ea typeface="Aptos" pitchFamily="34" charset="-122"/>
+                <a:cs typeface="Aptos" pitchFamily="34" charset="-120"/>
               </a:rPr>
               <a:t>{Fas 1 — namn}</a:t>
             </a:r>
@@ -21477,9 +21477,9 @@
                 <a:solidFill>
                   <a:srgbClr val="1A1A1A"/>
                 </a:solidFill>
-                <a:latin typeface="-apple-system" pitchFamily="34" charset="0"/>
-                <a:ea typeface="-apple-system" pitchFamily="34" charset="-122"/>
-                <a:cs typeface="-apple-system" pitchFamily="34" charset="-120"/>
+                <a:latin typeface="Aptos" pitchFamily="34" charset="0"/>
+                <a:ea typeface="Aptos" pitchFamily="34" charset="-122"/>
+                <a:cs typeface="Aptos" pitchFamily="34" charset="-120"/>
               </a:rPr>
               <a:t>{Aktiviteter}</a:t>
             </a:r>
@@ -21602,9 +21602,9 @@
                 <a:solidFill>
                   <a:srgbClr val="1A1A1A"/>
                 </a:solidFill>
-                <a:latin typeface="-apple-system" pitchFamily="34" charset="0"/>
-                <a:ea typeface="-apple-system" pitchFamily="34" charset="-122"/>
-                <a:cs typeface="-apple-system" pitchFamily="34" charset="-120"/>
+                <a:latin typeface="Aptos" pitchFamily="34" charset="0"/>
+                <a:ea typeface="Aptos" pitchFamily="34" charset="-122"/>
+                <a:cs typeface="Aptos" pitchFamily="34" charset="-120"/>
               </a:rPr>
               <a:t>{Leveranser}</a:t>
             </a:r>
@@ -21752,9 +21752,9 @@
                 <a:solidFill>
                   <a:srgbClr val="1A1A1A"/>
                 </a:solidFill>
-                <a:latin typeface="-apple-system" pitchFamily="34" charset="0"/>
-                <a:ea typeface="-apple-system" pitchFamily="34" charset="-122"/>
-                <a:cs typeface="-apple-system" pitchFamily="34" charset="-120"/>
+                <a:latin typeface="Aptos" pitchFamily="34" charset="0"/>
+                <a:ea typeface="Aptos" pitchFamily="34" charset="-122"/>
+                <a:cs typeface="Aptos" pitchFamily="34" charset="-120"/>
               </a:rPr>
               <a:t>{Beslut}</a:t>
             </a:r>
@@ -22911,9 +22911,9 @@
                 <a:solidFill>
                   <a:srgbClr val="1A1A1A"/>
                 </a:solidFill>
-                <a:latin typeface="-apple-system" pitchFamily="34" charset="0"/>
-                <a:ea typeface="-apple-system" pitchFamily="34" charset="-122"/>
-                <a:cs typeface="-apple-system" pitchFamily="34" charset="-120"/>
+                <a:latin typeface="Aptos" pitchFamily="34" charset="0"/>
+                <a:ea typeface="Aptos" pitchFamily="34" charset="-122"/>
+                <a:cs typeface="Aptos" pitchFamily="34" charset="-120"/>
               </a:rPr>
               <a:t>{Risker}</a:t>
             </a:r>
@@ -23018,9 +23018,9 @@
                 <a:solidFill>
                   <a:srgbClr val="4A4A4A"/>
                 </a:solidFill>
-                <a:latin typeface="-apple-system" pitchFamily="34" charset="0"/>
-                <a:ea typeface="-apple-system" pitchFamily="34" charset="-122"/>
-                <a:cs typeface="-apple-system" pitchFamily="34" charset="-120"/>
+                <a:latin typeface="Aptos" pitchFamily="34" charset="0"/>
+                <a:ea typeface="Aptos" pitchFamily="34" charset="-122"/>
+                <a:cs typeface="Aptos" pitchFamily="34" charset="-120"/>
               </a:rPr>
               <a:t>08 · GENOMFÖRANDE — FAS 2 AV 4</a:t>
             </a:r>
@@ -23089,9 +23089,9 @@
                 <a:solidFill>
                   <a:srgbClr val="2B5F5F"/>
                 </a:solidFill>
-                <a:latin typeface="-apple-system" pitchFamily="34" charset="0"/>
-                <a:ea typeface="-apple-system" pitchFamily="34" charset="-122"/>
-                <a:cs typeface="-apple-system" pitchFamily="34" charset="-120"/>
+                <a:latin typeface="Aptos" pitchFamily="34" charset="0"/>
+                <a:ea typeface="Aptos" pitchFamily="34" charset="-122"/>
+                <a:cs typeface="Aptos" pitchFamily="34" charset="-120"/>
               </a:rPr>
               <a:t>02</a:t>
             </a:r>
@@ -23174,9 +23174,9 @@
                 <a:solidFill>
                   <a:srgbClr val="1A1A1A"/>
                 </a:solidFill>
-                <a:latin typeface="-apple-system" pitchFamily="34" charset="0"/>
-                <a:ea typeface="-apple-system" pitchFamily="34" charset="-122"/>
-                <a:cs typeface="-apple-system" pitchFamily="34" charset="-120"/>
+                <a:latin typeface="Aptos" pitchFamily="34" charset="0"/>
+                <a:ea typeface="Aptos" pitchFamily="34" charset="-122"/>
+                <a:cs typeface="Aptos" pitchFamily="34" charset="-120"/>
               </a:rPr>
               <a:t>{Fas 2 — namn}</a:t>
             </a:r>
@@ -23338,9 +23338,9 @@
                 <a:solidFill>
                   <a:srgbClr val="1A1A1A"/>
                 </a:solidFill>
-                <a:latin typeface="-apple-system" pitchFamily="34" charset="0"/>
-                <a:ea typeface="-apple-system" pitchFamily="34" charset="-122"/>
-                <a:cs typeface="-apple-system" pitchFamily="34" charset="-120"/>
+                <a:latin typeface="Aptos" pitchFamily="34" charset="0"/>
+                <a:ea typeface="Aptos" pitchFamily="34" charset="-122"/>
+                <a:cs typeface="Aptos" pitchFamily="34" charset="-120"/>
               </a:rPr>
               <a:t>{Aktivitet 1}</a:t>
             </a:r>
@@ -23382,9 +23382,9 @@
                 <a:solidFill>
                   <a:srgbClr val="1A1A1A"/>
                 </a:solidFill>
-                <a:latin typeface="-apple-system" pitchFamily="34" charset="0"/>
-                <a:ea typeface="-apple-system" pitchFamily="34" charset="-122"/>
-                <a:cs typeface="-apple-system" pitchFamily="34" charset="-120"/>
+                <a:latin typeface="Aptos" pitchFamily="34" charset="0"/>
+                <a:ea typeface="Aptos" pitchFamily="34" charset="-122"/>
+                <a:cs typeface="Aptos" pitchFamily="34" charset="-120"/>
               </a:rPr>
               <a:t>{Aktivitet 2}</a:t>
             </a:r>
@@ -23426,9 +23426,9 @@
                 <a:solidFill>
                   <a:srgbClr val="1A1A1A"/>
                 </a:solidFill>
-                <a:latin typeface="-apple-system" pitchFamily="34" charset="0"/>
-                <a:ea typeface="-apple-system" pitchFamily="34" charset="-122"/>
-                <a:cs typeface="-apple-system" pitchFamily="34" charset="-120"/>
+                <a:latin typeface="Aptos" pitchFamily="34" charset="0"/>
+                <a:ea typeface="Aptos" pitchFamily="34" charset="-122"/>
+                <a:cs typeface="Aptos" pitchFamily="34" charset="-120"/>
               </a:rPr>
               <a:t>{Aktivitet 3}</a:t>
             </a:r>
@@ -23470,9 +23470,9 @@
                 <a:solidFill>
                   <a:srgbClr val="1A1A1A"/>
                 </a:solidFill>
-                <a:latin typeface="-apple-system" pitchFamily="34" charset="0"/>
-                <a:ea typeface="-apple-system" pitchFamily="34" charset="-122"/>
-                <a:cs typeface="-apple-system" pitchFamily="34" charset="-120"/>
+                <a:latin typeface="Aptos" pitchFamily="34" charset="0"/>
+                <a:ea typeface="Aptos" pitchFamily="34" charset="-122"/>
+                <a:cs typeface="Aptos" pitchFamily="34" charset="-120"/>
               </a:rPr>
               <a:t>{Aktivitet 4}</a:t>
             </a:r>
@@ -23593,9 +23593,9 @@
                 <a:solidFill>
                   <a:srgbClr val="1A1A1A"/>
                 </a:solidFill>
-                <a:latin typeface="-apple-system" pitchFamily="34" charset="0"/>
-                <a:ea typeface="-apple-system" pitchFamily="34" charset="-122"/>
-                <a:cs typeface="-apple-system" pitchFamily="34" charset="-120"/>
+                <a:latin typeface="Aptos" pitchFamily="34" charset="0"/>
+                <a:ea typeface="Aptos" pitchFamily="34" charset="-122"/>
+                <a:cs typeface="Aptos" pitchFamily="34" charset="-120"/>
               </a:rPr>
               <a:t>{Leverans 1}</a:t>
             </a:r>
@@ -23637,9 +23637,9 @@
                 <a:solidFill>
                   <a:srgbClr val="1A1A1A"/>
                 </a:solidFill>
-                <a:latin typeface="-apple-system" pitchFamily="34" charset="0"/>
-                <a:ea typeface="-apple-system" pitchFamily="34" charset="-122"/>
-                <a:cs typeface="-apple-system" pitchFamily="34" charset="-120"/>
+                <a:latin typeface="Aptos" pitchFamily="34" charset="0"/>
+                <a:ea typeface="Aptos" pitchFamily="34" charset="-122"/>
+                <a:cs typeface="Aptos" pitchFamily="34" charset="-120"/>
               </a:rPr>
               <a:t>{Leverans 2}</a:t>
             </a:r>
@@ -23681,9 +23681,9 @@
                 <a:solidFill>
                   <a:srgbClr val="1A1A1A"/>
                 </a:solidFill>
-                <a:latin typeface="-apple-system" pitchFamily="34" charset="0"/>
-                <a:ea typeface="-apple-system" pitchFamily="34" charset="-122"/>
-                <a:cs typeface="-apple-system" pitchFamily="34" charset="-120"/>
+                <a:latin typeface="Aptos" pitchFamily="34" charset="0"/>
+                <a:ea typeface="Aptos" pitchFamily="34" charset="-122"/>
+                <a:cs typeface="Aptos" pitchFamily="34" charset="-120"/>
               </a:rPr>
               <a:t>{Leverans 3}</a:t>
             </a:r>
@@ -23831,9 +23831,9 @@
                 <a:solidFill>
                   <a:srgbClr val="1A1A1A"/>
                 </a:solidFill>
-                <a:latin typeface="-apple-system" pitchFamily="34" charset="0"/>
-                <a:ea typeface="-apple-system" pitchFamily="34" charset="-122"/>
-                <a:cs typeface="-apple-system" pitchFamily="34" charset="-120"/>
+                <a:latin typeface="Aptos" pitchFamily="34" charset="0"/>
+                <a:ea typeface="Aptos" pitchFamily="34" charset="-122"/>
+                <a:cs typeface="Aptos" pitchFamily="34" charset="-120"/>
               </a:rPr>
               <a:t>{Beslut 1}</a:t>
             </a:r>
@@ -23875,9 +23875,9 @@
                 <a:solidFill>
                   <a:srgbClr val="1A1A1A"/>
                 </a:solidFill>
-                <a:latin typeface="-apple-system" pitchFamily="34" charset="0"/>
-                <a:ea typeface="-apple-system" pitchFamily="34" charset="-122"/>
-                <a:cs typeface="-apple-system" pitchFamily="34" charset="-120"/>
+                <a:latin typeface="Aptos" pitchFamily="34" charset="0"/>
+                <a:ea typeface="Aptos" pitchFamily="34" charset="-122"/>
+                <a:cs typeface="Aptos" pitchFamily="34" charset="-120"/>
               </a:rPr>
               <a:t>{Beslut 2}</a:t>
             </a:r>
@@ -23919,9 +23919,9 @@
                 <a:solidFill>
                   <a:srgbClr val="1A1A1A"/>
                 </a:solidFill>
-                <a:latin typeface="-apple-system" pitchFamily="34" charset="0"/>
-                <a:ea typeface="-apple-system" pitchFamily="34" charset="-122"/>
-                <a:cs typeface="-apple-system" pitchFamily="34" charset="-120"/>
+                <a:latin typeface="Aptos" pitchFamily="34" charset="0"/>
+                <a:ea typeface="Aptos" pitchFamily="34" charset="-122"/>
+                <a:cs typeface="Aptos" pitchFamily="34" charset="-120"/>
               </a:rPr>
               <a:t>{Go/no-go till nästa fas}</a:t>
             </a:r>
@@ -25062,9 +25062,9 @@
                 <a:solidFill>
                   <a:srgbClr val="4A4A4A"/>
                 </a:solidFill>
-                <a:latin typeface="-apple-system" pitchFamily="34" charset="0"/>
-                <a:ea typeface="-apple-system" pitchFamily="34" charset="-122"/>
-                <a:cs typeface="-apple-system" pitchFamily="34" charset="-120"/>
+                <a:latin typeface="Aptos" pitchFamily="34" charset="0"/>
+                <a:ea typeface="Aptos" pitchFamily="34" charset="-122"/>
+                <a:cs typeface="Aptos" pitchFamily="34" charset="-120"/>
               </a:rPr>
               <a:t>09 · GENOMFÖRANDE — FAS 3 AV 4</a:t>
             </a:r>
@@ -25133,9 +25133,9 @@
                 <a:solidFill>
                   <a:srgbClr val="2B5F5F"/>
                 </a:solidFill>
-                <a:latin typeface="-apple-system" pitchFamily="34" charset="0"/>
-                <a:ea typeface="-apple-system" pitchFamily="34" charset="-122"/>
-                <a:cs typeface="-apple-system" pitchFamily="34" charset="-120"/>
+                <a:latin typeface="Aptos" pitchFamily="34" charset="0"/>
+                <a:ea typeface="Aptos" pitchFamily="34" charset="-122"/>
+                <a:cs typeface="Aptos" pitchFamily="34" charset="-120"/>
               </a:rPr>
               <a:t>03</a:t>
             </a:r>
@@ -25218,9 +25218,9 @@
                 <a:solidFill>
                   <a:srgbClr val="1A1A1A"/>
                 </a:solidFill>
-                <a:latin typeface="-apple-system" pitchFamily="34" charset="0"/>
-                <a:ea typeface="-apple-system" pitchFamily="34" charset="-122"/>
-                <a:cs typeface="-apple-system" pitchFamily="34" charset="-120"/>
+                <a:latin typeface="Aptos" pitchFamily="34" charset="0"/>
+                <a:ea typeface="Aptos" pitchFamily="34" charset="-122"/>
+                <a:cs typeface="Aptos" pitchFamily="34" charset="-120"/>
               </a:rPr>
               <a:t>{Fas 3 — namn}</a:t>
             </a:r>
@@ -25382,9 +25382,9 @@
                 <a:solidFill>
                   <a:srgbClr val="1A1A1A"/>
                 </a:solidFill>
-                <a:latin typeface="-apple-system" pitchFamily="34" charset="0"/>
-                <a:ea typeface="-apple-system" pitchFamily="34" charset="-122"/>
-                <a:cs typeface="-apple-system" pitchFamily="34" charset="-120"/>
+                <a:latin typeface="Aptos" pitchFamily="34" charset="0"/>
+                <a:ea typeface="Aptos" pitchFamily="34" charset="-122"/>
+                <a:cs typeface="Aptos" pitchFamily="34" charset="-120"/>
               </a:rPr>
               <a:t>{Aktivitet 1}</a:t>
             </a:r>
@@ -25426,9 +25426,9 @@
                 <a:solidFill>
                   <a:srgbClr val="1A1A1A"/>
                 </a:solidFill>
-                <a:latin typeface="-apple-system" pitchFamily="34" charset="0"/>
-                <a:ea typeface="-apple-system" pitchFamily="34" charset="-122"/>
-                <a:cs typeface="-apple-system" pitchFamily="34" charset="-120"/>
+                <a:latin typeface="Aptos" pitchFamily="34" charset="0"/>
+                <a:ea typeface="Aptos" pitchFamily="34" charset="-122"/>
+                <a:cs typeface="Aptos" pitchFamily="34" charset="-120"/>
               </a:rPr>
               <a:t>{Aktivitet 2}</a:t>
             </a:r>
@@ -25470,9 +25470,9 @@
                 <a:solidFill>
                   <a:srgbClr val="1A1A1A"/>
                 </a:solidFill>
-                <a:latin typeface="-apple-system" pitchFamily="34" charset="0"/>
-                <a:ea typeface="-apple-system" pitchFamily="34" charset="-122"/>
-                <a:cs typeface="-apple-system" pitchFamily="34" charset="-120"/>
+                <a:latin typeface="Aptos" pitchFamily="34" charset="0"/>
+                <a:ea typeface="Aptos" pitchFamily="34" charset="-122"/>
+                <a:cs typeface="Aptos" pitchFamily="34" charset="-120"/>
               </a:rPr>
               <a:t>{Aktivitet 3}</a:t>
             </a:r>
@@ -25514,9 +25514,9 @@
                 <a:solidFill>
                   <a:srgbClr val="1A1A1A"/>
                 </a:solidFill>
-                <a:latin typeface="-apple-system" pitchFamily="34" charset="0"/>
-                <a:ea typeface="-apple-system" pitchFamily="34" charset="-122"/>
-                <a:cs typeface="-apple-system" pitchFamily="34" charset="-120"/>
+                <a:latin typeface="Aptos" pitchFamily="34" charset="0"/>
+                <a:ea typeface="Aptos" pitchFamily="34" charset="-122"/>
+                <a:cs typeface="Aptos" pitchFamily="34" charset="-120"/>
               </a:rPr>
               <a:t>{Aktivitet 4}</a:t>
             </a:r>
@@ -25637,9 +25637,9 @@
                 <a:solidFill>
                   <a:srgbClr val="1A1A1A"/>
                 </a:solidFill>
-                <a:latin typeface="-apple-system" pitchFamily="34" charset="0"/>
-                <a:ea typeface="-apple-system" pitchFamily="34" charset="-122"/>
-                <a:cs typeface="-apple-system" pitchFamily="34" charset="-120"/>
+                <a:latin typeface="Aptos" pitchFamily="34" charset="0"/>
+                <a:ea typeface="Aptos" pitchFamily="34" charset="-122"/>
+                <a:cs typeface="Aptos" pitchFamily="34" charset="-120"/>
               </a:rPr>
               <a:t>{Leverans 1}</a:t>
             </a:r>
@@ -25681,9 +25681,9 @@
                 <a:solidFill>
                   <a:srgbClr val="1A1A1A"/>
                 </a:solidFill>
-                <a:latin typeface="-apple-system" pitchFamily="34" charset="0"/>
-                <a:ea typeface="-apple-system" pitchFamily="34" charset="-122"/>
-                <a:cs typeface="-apple-system" pitchFamily="34" charset="-120"/>
+                <a:latin typeface="Aptos" pitchFamily="34" charset="0"/>
+                <a:ea typeface="Aptos" pitchFamily="34" charset="-122"/>
+                <a:cs typeface="Aptos" pitchFamily="34" charset="-120"/>
               </a:rPr>
               <a:t>{Leverans 2}</a:t>
             </a:r>
@@ -25725,9 +25725,9 @@
                 <a:solidFill>
                   <a:srgbClr val="1A1A1A"/>
                 </a:solidFill>
-                <a:latin typeface="-apple-system" pitchFamily="34" charset="0"/>
-                <a:ea typeface="-apple-system" pitchFamily="34" charset="-122"/>
-                <a:cs typeface="-apple-system" pitchFamily="34" charset="-120"/>
+                <a:latin typeface="Aptos" pitchFamily="34" charset="0"/>
+                <a:ea typeface="Aptos" pitchFamily="34" charset="-122"/>
+                <a:cs typeface="Aptos" pitchFamily="34" charset="-120"/>
               </a:rPr>
               <a:t>{Leverans 3}</a:t>
             </a:r>
@@ -25875,9 +25875,9 @@
                 <a:solidFill>
                   <a:srgbClr val="1A1A1A"/>
                 </a:solidFill>
-                <a:latin typeface="-apple-system" pitchFamily="34" charset="0"/>
-                <a:ea typeface="-apple-system" pitchFamily="34" charset="-122"/>
-                <a:cs typeface="-apple-system" pitchFamily="34" charset="-120"/>
+                <a:latin typeface="Aptos" pitchFamily="34" charset="0"/>
+                <a:ea typeface="Aptos" pitchFamily="34" charset="-122"/>
+                <a:cs typeface="Aptos" pitchFamily="34" charset="-120"/>
               </a:rPr>
               <a:t>{Beslut 1}</a:t>
             </a:r>
@@ -25919,9 +25919,9 @@
                 <a:solidFill>
                   <a:srgbClr val="1A1A1A"/>
                 </a:solidFill>
-                <a:latin typeface="-apple-system" pitchFamily="34" charset="0"/>
-                <a:ea typeface="-apple-system" pitchFamily="34" charset="-122"/>
-                <a:cs typeface="-apple-system" pitchFamily="34" charset="-120"/>
+                <a:latin typeface="Aptos" pitchFamily="34" charset="0"/>
+                <a:ea typeface="Aptos" pitchFamily="34" charset="-122"/>
+                <a:cs typeface="Aptos" pitchFamily="34" charset="-120"/>
               </a:rPr>
               <a:t>{Beslut 2}</a:t>
             </a:r>
@@ -25963,9 +25963,9 @@
                 <a:solidFill>
                   <a:srgbClr val="1A1A1A"/>
                 </a:solidFill>
-                <a:latin typeface="-apple-system" pitchFamily="34" charset="0"/>
-                <a:ea typeface="-apple-system" pitchFamily="34" charset="-122"/>
-                <a:cs typeface="-apple-system" pitchFamily="34" charset="-120"/>
+                <a:latin typeface="Aptos" pitchFamily="34" charset="0"/>
+                <a:ea typeface="Aptos" pitchFamily="34" charset="-122"/>
+                <a:cs typeface="Aptos" pitchFamily="34" charset="-120"/>
               </a:rPr>
               <a:t>{Go/no-go till nästa fas}</a:t>
             </a:r>
